--- a/docs/reports/presentation.pptx
+++ b/docs/reports/presentation.pptx
@@ -3102,162 +3102,58 @@
       <p:grpSpPr/>
       <p:sp>
         <p:nvSpPr>
-          <p:cNvPr id="2" name="TextBox 1"/>
-          <p:cNvSpPr txBox="1"/>
+          <p:cNvPr id="2" name="Title 1"/>
+          <p:cNvSpPr>
+            <a:spLocks noGrp="1"/>
+          </p:cNvSpPr>
+          <p:nvPr>
+            <p:ph type="ctrTitle"/>
+          </p:nvPr>
+        </p:nvSpPr>
+        <p:spPr/>
+        <p:txBody>
+          <a:bodyPr/>
+          <a:lstStyle/>
+          <a:p/>
+        </p:txBody>
+      </p:sp>
+      <p:sp>
+        <p:nvSpPr>
+          <p:cNvPr id="3" name="Subtitle 2"/>
+          <p:cNvSpPr>
+            <a:spLocks noGrp="1"/>
+          </p:cNvSpPr>
+          <p:nvPr>
+            <p:ph type="subTitle" idx="1"/>
+          </p:nvPr>
+        </p:nvSpPr>
+        <p:spPr/>
+        <p:txBody>
+          <a:bodyPr/>
+          <a:lstStyle/>
+          <a:p/>
+        </p:txBody>
+      </p:sp>
+      <p:sp>
+        <p:nvSpPr>
+          <p:cNvPr id="4" name="Rectangle 3"/>
+          <p:cNvSpPr/>
           <p:nvPr/>
         </p:nvSpPr>
         <p:spPr>
           <a:xfrm>
-            <a:off x="914400" y="2011680"/>
-            <a:ext cx="10362895" cy="2743200"/>
-          </a:xfrm>
-          <a:prstGeom prst="rect">
-            <a:avLst/>
-          </a:prstGeom>
-          <a:noFill/>
-        </p:spPr>
-        <p:txBody>
-          <a:bodyPr wrap="square">
-            <a:spAutoFit/>
-          </a:bodyPr>
-          <a:lstStyle/>
-          <a:p>
-            <a:pPr>
-              <a:defRPr sz="1200" b="1">
-                <a:solidFill>
-                  <a:srgbClr val="646464"/>
-                </a:solidFill>
-              </a:defRPr>
-            </a:pPr>
-            <a:r>
-              <a:t>IMAGE DEHAZING FOR OBJECT DETECTION</a:t>
-            </a:r>
-          </a:p>
-          <a:p>
-            <a:pPr>
-              <a:spcBef>
-                <a:spcPts val="800"/>
-              </a:spcBef>
-              <a:defRPr sz="3200" b="1">
-                <a:solidFill>
-                  <a:srgbClr val="141414"/>
-                </a:solidFill>
-              </a:defRPr>
-            </a:pPr>
-            <a:r>
-              <a:t>Comparative Analysis on Real-World Fog</a:t>
-            </a:r>
-          </a:p>
-          <a:p>
-            <a:pPr>
-              <a:spcBef>
-                <a:spcPts val="1600"/>
-              </a:spcBef>
-              <a:defRPr sz="1600">
-                <a:solidFill>
-                  <a:srgbClr val="646464"/>
-                </a:solidFill>
-              </a:defRPr>
-            </a:pPr>
-            <a:r>
-              <a:t>Raw Hazy Baseline  |  Reference Paper  |  Classical DCP  |  Our Method</a:t>
-            </a:r>
-          </a:p>
-        </p:txBody>
-      </p:sp>
-    </p:spTree>
-  </p:cSld>
-  <p:clrMapOvr>
-    <a:masterClrMapping/>
-  </p:clrMapOvr>
-</p:sld>
-</file>
-
-<file path=ppt/slides/slide2.xml><?xml version="1.0" encoding="utf-8"?>
-<p:sld xmlns:a="http://schemas.openxmlformats.org/drawingml/2006/main" xmlns:p="http://schemas.openxmlformats.org/presentationml/2006/main" xmlns:r="http://schemas.openxmlformats.org/officeDocument/2006/relationships">
-  <p:cSld>
-    <p:bg>
-      <p:bgPr>
-        <a:solidFill>
-          <a:srgbClr val="FFFFFF"/>
-        </a:solidFill>
-        <a:effectLst/>
-      </p:bgPr>
-    </p:bg>
-    <p:spTree>
-      <p:nvGrpSpPr>
-        <p:cNvPr id="1" name=""/>
-        <p:cNvGrpSpPr/>
-        <p:nvPr/>
-      </p:nvGrpSpPr>
-      <p:grpSpPr/>
-      <p:sp>
-        <p:nvSpPr>
-          <p:cNvPr id="2" name="TextBox 1"/>
-          <p:cNvSpPr txBox="1"/>
-          <p:nvPr/>
-        </p:nvSpPr>
-        <p:spPr>
-          <a:xfrm>
-            <a:off x="731520" y="457200"/>
-            <a:ext cx="10728655" cy="914400"/>
-          </a:xfrm>
-          <a:prstGeom prst="rect">
-            <a:avLst/>
-          </a:prstGeom>
-          <a:noFill/>
-        </p:spPr>
-        <p:txBody>
-          <a:bodyPr wrap="square" lIns="0" tIns="0" rIns="0" bIns="0">
-            <a:spAutoFit/>
-          </a:bodyPr>
-          <a:lstStyle/>
-          <a:p>
-            <a:pPr>
-              <a:defRPr sz="1000" b="1">
-                <a:solidFill>
-                  <a:srgbClr val="646464"/>
-                </a:solidFill>
-              </a:defRPr>
-            </a:pPr>
-            <a:r>
-              <a:t>ARCHITECTURE &amp; PRINCIPLES</a:t>
-            </a:r>
-          </a:p>
-          <a:p>
-            <a:pPr>
-              <a:defRPr sz="2400" b="1">
-                <a:solidFill>
-                  <a:srgbClr val="141414"/>
-                </a:solidFill>
-              </a:defRPr>
-            </a:pPr>
-            <a:r>
-              <a:t>Method Overview</a:t>
-            </a:r>
-          </a:p>
-        </p:txBody>
-      </p:sp>
-      <p:sp>
-        <p:nvSpPr>
-          <p:cNvPr id="3" name="Rectangle 2"/>
-          <p:cNvSpPr/>
-          <p:nvPr/>
-        </p:nvSpPr>
-        <p:spPr>
-          <a:xfrm>
-            <a:off x="731520" y="1645920"/>
-            <a:ext cx="2514600" cy="4389120"/>
+            <a:off x="731520" y="2011680"/>
+            <a:ext cx="109728" cy="2560320"/>
           </a:xfrm>
           <a:prstGeom prst="rect">
             <a:avLst/>
           </a:prstGeom>
           <a:solidFill>
-            <a:srgbClr val="FFFFFF"/>
+            <a:srgbClr val="1F4E78"/>
           </a:solidFill>
-          <a:ln w="12700">
+          <a:ln>
             <a:solidFill>
-              <a:srgbClr val="DCDCDC"/>
+              <a:srgbClr val="1F4E78"/>
             </a:solidFill>
           </a:ln>
         </p:spPr>
@@ -3276,67 +3172,215 @@
           </a:fontRef>
         </p:style>
         <p:txBody>
-          <a:bodyPr rtlCol="0" anchor="ctr" wrap="square" lIns="164592" rIns="164592" tIns="182880"/>
-          <a:lstStyle/>
-          <a:p>
-            <a:pPr algn="ctr">
-              <a:defRPr sz="1300" b="1">
-                <a:solidFill>
-                  <a:srgbClr val="141414"/>
-                </a:solidFill>
+          <a:bodyPr rtlCol="0" anchor="ctr"/>
+          <a:lstStyle/>
+          <a:p>
+            <a:pPr algn="ctr"/>
+          </a:p>
+        </p:txBody>
+      </p:sp>
+      <p:sp>
+        <p:nvSpPr>
+          <p:cNvPr id="5" name="TextBox 4"/>
+          <p:cNvSpPr txBox="1"/>
+          <p:nvPr/>
+        </p:nvSpPr>
+        <p:spPr>
+          <a:xfrm>
+            <a:off x="1097280" y="1828800"/>
+            <a:ext cx="10058400" cy="2926080"/>
+          </a:xfrm>
+          <a:prstGeom prst="rect">
+            <a:avLst/>
+          </a:prstGeom>
+          <a:noFill/>
+        </p:spPr>
+        <p:txBody>
+          <a:bodyPr wrap="square">
+            <a:spAutoFit/>
+          </a:bodyPr>
+          <a:lstStyle/>
+          <a:p>
+            <a:pPr>
+              <a:defRPr sz="1200" b="1">
+                <a:solidFill>
+                  <a:srgbClr val="1F4E78"/>
+                </a:solidFill>
+                <a:latin typeface="Calibri"/>
               </a:defRPr>
             </a:pPr>
             <a:r>
-              <a:t>Raw Hazy Baseline</a:t>
+              <a:t>IMAGE RESTORATION &amp; OBJECT DETECTION</a:t>
             </a:r>
           </a:p>
           <a:p>
             <a:pPr>
               <a:spcBef>
-                <a:spcPts val="1000"/>
+                <a:spcPts val="800"/>
               </a:spcBef>
-              <a:defRPr sz="1050">
-                <a:solidFill>
-                  <a:srgbClr val="646464"/>
-                </a:solidFill>
+              <a:defRPr sz="3600" b="1">
+                <a:solidFill>
+                  <a:srgbClr val="262626"/>
+                </a:solidFill>
+                <a:latin typeface="Calibri"/>
               </a:defRPr>
             </a:pPr>
             <a:r>
-              <a:t>• Input: Original degraded camera capture.</a:t>
+              <a:t>Real-World Image Dehazing for Object Detection</a:t>
+            </a:r>
+          </a:p>
+          <a:p>
+            <a:pPr>
+              <a:spcBef>
+                <a:spcPts val="1400"/>
+              </a:spcBef>
+              <a:defRPr sz="1600">
+                <a:solidFill>
+                  <a:srgbClr val="595959"/>
+                </a:solidFill>
+                <a:latin typeface="Calibri"/>
+              </a:defRPr>
+            </a:pPr>
+            <a:r>
+              <a:t>Comparative Benchmark: Baseline vs. Reference Paper vs. Classical DCP vs. Our Method</a:t>
+            </a:r>
+          </a:p>
+        </p:txBody>
+      </p:sp>
+      <p:sp>
+        <p:nvSpPr>
+          <p:cNvPr id="6" name="TextBox 5"/>
+          <p:cNvSpPr txBox="1"/>
+          <p:nvPr/>
+        </p:nvSpPr>
+        <p:spPr>
+          <a:xfrm>
+            <a:off x="1097280" y="5120640"/>
+            <a:ext cx="10058400" cy="914400"/>
+          </a:xfrm>
+          <a:prstGeom prst="rect">
+            <a:avLst/>
+          </a:prstGeom>
+          <a:noFill/>
+        </p:spPr>
+        <p:txBody>
+          <a:bodyPr wrap="none">
+            <a:spAutoFit/>
+          </a:bodyPr>
+          <a:lstStyle/>
+          <a:p>
+            <a:pPr>
+              <a:defRPr sz="1100">
+                <a:solidFill>
+                  <a:srgbClr val="595959"/>
+                </a:solidFill>
+                <a:latin typeface="Calibri"/>
+              </a:defRPr>
+            </a:pPr>
+            <a:r>
+              <a:t>Dataset: Real-world hazy photography (RTTS Valid, 865 images)</a:t>
             </a:r>
             <a:br/>
+            <a:r>
+              <a:t>Detector: Off-the-shelf YOLOv8n (COCO weights, 100% frozen)</a:t>
+            </a:r>
             <a:br/>
             <a:r>
-              <a:t>• Mechanism: Direct detection without preprocessing.</a:t>
-            </a:r>
-            <a:br/>
-            <a:br/>
-            <a:r>
-              <a:t>• Limitation: Severe contrast loss, veiled object contours, and high miss rate on distant objects.</a:t>
-            </a:r>
-          </a:p>
-        </p:txBody>
-      </p:sp>
-      <p:sp>
-        <p:nvSpPr>
-          <p:cNvPr id="4" name="Rectangle 3"/>
+              <a:t>Metrics: VOC AP@0.50, Strict AP@0.75, COCO mAP@[0.50:0.95], Model Footprint</a:t>
+            </a:r>
+          </a:p>
+        </p:txBody>
+      </p:sp>
+    </p:spTree>
+  </p:cSld>
+  <p:clrMapOvr>
+    <a:masterClrMapping/>
+  </p:clrMapOvr>
+</p:sld>
+</file>
+
+<file path=ppt/slides/slide2.xml><?xml version="1.0" encoding="utf-8"?>
+<p:sld xmlns:a="http://schemas.openxmlformats.org/drawingml/2006/main" xmlns:p="http://schemas.openxmlformats.org/presentationml/2006/main" xmlns:r="http://schemas.openxmlformats.org/officeDocument/2006/relationships">
+  <p:cSld>
+    <p:spTree>
+      <p:nvGrpSpPr>
+        <p:cNvPr id="1" name=""/>
+        <p:cNvGrpSpPr/>
+        <p:nvPr/>
+      </p:nvGrpSpPr>
+      <p:grpSpPr/>
+      <p:sp>
+        <p:nvSpPr>
+          <p:cNvPr id="2" name="TextBox 1"/>
+          <p:cNvSpPr txBox="1"/>
+          <p:nvPr/>
+        </p:nvSpPr>
+        <p:spPr>
+          <a:xfrm>
+            <a:off x="731520" y="411480"/>
+            <a:ext cx="10728655" cy="1005840"/>
+          </a:xfrm>
+          <a:prstGeom prst="rect">
+            <a:avLst/>
+          </a:prstGeom>
+          <a:noFill/>
+        </p:spPr>
+        <p:txBody>
+          <a:bodyPr wrap="square" lIns="0" tIns="0" rIns="0" bIns="0">
+            <a:spAutoFit/>
+          </a:bodyPr>
+          <a:lstStyle/>
+          <a:p>
+            <a:pPr>
+              <a:defRPr sz="1000" b="1">
+                <a:solidFill>
+                  <a:srgbClr val="1F4E78"/>
+                </a:solidFill>
+                <a:latin typeface="Calibri"/>
+              </a:defRPr>
+            </a:pPr>
+            <a:r>
+              <a:t>SYSTEM ARCHITECTURES</a:t>
+            </a:r>
+          </a:p>
+          <a:p>
+            <a:pPr>
+              <a:spcBef>
+                <a:spcPts val="300"/>
+              </a:spcBef>
+              <a:defRPr sz="2400" b="1">
+                <a:solidFill>
+                  <a:srgbClr val="262626"/>
+                </a:solidFill>
+                <a:latin typeface="Calibri"/>
+              </a:defRPr>
+            </a:pPr>
+            <a:r>
+              <a:t>Method Overview: Core Architectures &amp; Principles</a:t>
+            </a:r>
+          </a:p>
+        </p:txBody>
+      </p:sp>
+      <p:sp>
+        <p:nvSpPr>
+          <p:cNvPr id="3" name="Rectangle 2"/>
           <p:cNvSpPr/>
           <p:nvPr/>
         </p:nvSpPr>
         <p:spPr>
           <a:xfrm>
-            <a:off x="3465576" y="1645920"/>
-            <a:ext cx="2514600" cy="4389120"/>
+            <a:off x="731520" y="1371600"/>
+            <a:ext cx="10728655" cy="18288"/>
           </a:xfrm>
           <a:prstGeom prst="rect">
             <a:avLst/>
           </a:prstGeom>
           <a:solidFill>
-            <a:srgbClr val="FFFFFF"/>
+            <a:srgbClr val="D2D7DE"/>
           </a:solidFill>
-          <a:ln w="12700">
+          <a:ln>
             <a:solidFill>
-              <a:srgbClr val="DCDCDC"/>
+              <a:srgbClr val="D2D7DE"/>
             </a:solidFill>
           </a:ln>
         </p:spPr>
@@ -3355,59 +3399,61 @@
           </a:fontRef>
         </p:style>
         <p:txBody>
-          <a:bodyPr rtlCol="0" anchor="ctr" wrap="square" lIns="164592" rIns="164592" tIns="182880"/>
-          <a:lstStyle/>
-          <a:p>
-            <a:pPr algn="ctr">
-              <a:defRPr sz="1300" b="1">
-                <a:solidFill>
-                  <a:srgbClr val="141414"/>
-                </a:solidFill>
+          <a:bodyPr rtlCol="0" anchor="ctr"/>
+          <a:lstStyle/>
+          <a:p>
+            <a:pPr algn="ctr"/>
+          </a:p>
+        </p:txBody>
+      </p:sp>
+      <p:sp>
+        <p:nvSpPr>
+          <p:cNvPr id="4" name="TextBox 3"/>
+          <p:cNvSpPr txBox="1"/>
+          <p:nvPr/>
+        </p:nvSpPr>
+        <p:spPr>
+          <a:xfrm>
+            <a:off x="731520" y="6400800"/>
+            <a:ext cx="10728655" cy="320040"/>
+          </a:xfrm>
+          <a:prstGeom prst="rect">
+            <a:avLst/>
+          </a:prstGeom>
+          <a:noFill/>
+        </p:spPr>
+        <p:txBody>
+          <a:bodyPr wrap="none" lIns="0" tIns="0" rIns="0" bIns="0">
+            <a:spAutoFit/>
+          </a:bodyPr>
+          <a:lstStyle/>
+          <a:p>
+            <a:pPr>
+              <a:defRPr sz="900">
+                <a:solidFill>
+                  <a:srgbClr val="A0A0A0"/>
+                </a:solidFill>
+                <a:latin typeface="Calibri"/>
               </a:defRPr>
             </a:pPr>
             <a:r>
-              <a:t>Reference Paper</a:t>
-            </a:r>
-          </a:p>
-          <a:p>
-            <a:pPr>
-              <a:spcBef>
-                <a:spcPts val="1000"/>
-              </a:spcBef>
-              <a:defRPr sz="1050">
-                <a:solidFill>
-                  <a:srgbClr val="646464"/>
-                </a:solidFill>
-              </a:defRPr>
-            </a:pPr>
-            <a:r>
-              <a:t>• Input: Hazy image classified into light, medium, or heavy fog.</a:t>
-            </a:r>
-            <a:br/>
-            <a:br/>
-            <a:r>
-              <a:t>• Mechanism: Image routed to 1 of 3 separate U-Net branches.</a:t>
-            </a:r>
-            <a:br/>
-            <a:br/>
-            <a:r>
-              <a:t>• Limitation: Uniform fog assumption across depth breaks on perspective scenes; partitions training data into 3 smaller subsets.</a:t>
-            </a:r>
-          </a:p>
-        </p:txBody>
-      </p:sp>
-      <p:sp>
-        <p:nvSpPr>
-          <p:cNvPr id="5" name="Rectangle 4"/>
+              <a:t>Real-World Dehazing Evaluation | Frozen COCO YOLOv8n | RTTS Validation Benchmark</a:t>
+            </a:r>
+          </a:p>
+        </p:txBody>
+      </p:sp>
+      <p:sp>
+        <p:nvSpPr>
+          <p:cNvPr id="5" name="Rounded Rectangle 4"/>
           <p:cNvSpPr/>
           <p:nvPr/>
         </p:nvSpPr>
         <p:spPr>
           <a:xfrm>
-            <a:off x="6199632" y="1645920"/>
-            <a:ext cx="2514600" cy="4389120"/>
+            <a:off x="731520" y="1600200"/>
+            <a:ext cx="2542032" cy="4480560"/>
           </a:xfrm>
-          <a:prstGeom prst="rect">
+          <a:prstGeom prst="roundRect">
             <a:avLst/>
           </a:prstGeom>
           <a:solidFill>
@@ -3415,7 +3461,7 @@
           </a:solidFill>
           <a:ln w="12700">
             <a:solidFill>
-              <a:srgbClr val="DCDCDC"/>
+              <a:srgbClr val="D2D7DE"/>
             </a:solidFill>
           </a:ln>
         </p:spPr>
@@ -3434,44 +3480,10 @@
           </a:fontRef>
         </p:style>
         <p:txBody>
-          <a:bodyPr rtlCol="0" anchor="ctr" wrap="square" lIns="164592" rIns="164592" tIns="182880"/>
-          <a:lstStyle/>
-          <a:p>
-            <a:pPr algn="ctr">
-              <a:defRPr sz="1300" b="1">
-                <a:solidFill>
-                  <a:srgbClr val="141414"/>
-                </a:solidFill>
-              </a:defRPr>
-            </a:pPr>
-            <a:r>
-              <a:t>Classical DCP (He et al., 2009)</a:t>
-            </a:r>
-          </a:p>
-          <a:p>
-            <a:pPr>
-              <a:spcBef>
-                <a:spcPts val="1000"/>
-              </a:spcBef>
-              <a:defRPr sz="1050">
-                <a:solidFill>
-                  <a:srgbClr val="646464"/>
-                </a:solidFill>
-              </a:defRPr>
-            </a:pPr>
-            <a:r>
-              <a:t>• Input: Hazy image processed with Dark Channel Prior.</a:t>
-            </a:r>
-            <a:br/>
-            <a:br/>
-            <a:r>
-              <a:t>• Mechanism: Physical atmospheric scattering model with guided filter.</a:t>
-            </a:r>
-            <a:br/>
-            <a:br/>
-            <a:r>
-              <a:t>• Limitation: Zero-shot heuristic produces halo artifacts around high-contrast edges and false color shifts in sky regions.</a:t>
-            </a:r>
+          <a:bodyPr rtlCol="0" anchor="ctr"/>
+          <a:lstStyle/>
+          <a:p>
+            <a:pPr algn="ctr"/>
           </a:p>
         </p:txBody>
       </p:sp>
@@ -3483,18 +3495,18 @@
         </p:nvSpPr>
         <p:spPr>
           <a:xfrm>
-            <a:off x="8933688" y="1645920"/>
-            <a:ext cx="2514600" cy="4389120"/>
+            <a:off x="731520" y="1600200"/>
+            <a:ext cx="2542032" cy="731520"/>
           </a:xfrm>
           <a:prstGeom prst="rect">
             <a:avLst/>
           </a:prstGeom>
           <a:solidFill>
-            <a:srgbClr val="FFFFFF"/>
+            <a:srgbClr val="F5F7FA"/>
           </a:solidFill>
-          <a:ln w="12700">
+          <a:ln>
             <a:solidFill>
-              <a:srgbClr val="DCDCDC"/>
+              <a:srgbClr val="D2D7DE"/>
             </a:solidFill>
           </a:ln>
         </p:spPr>
@@ -3513,43 +3525,835 @@
           </a:fontRef>
         </p:style>
         <p:txBody>
-          <a:bodyPr rtlCol="0" anchor="ctr" wrap="square" lIns="164592" rIns="164592" tIns="182880"/>
+          <a:bodyPr rtlCol="0" anchor="ctr" wrap="square" lIns="137160" tIns="109728"/>
           <a:lstStyle/>
           <a:p>
             <a:pPr algn="ctr">
               <a:defRPr sz="1300" b="1">
                 <a:solidFill>
-                  <a:srgbClr val="141414"/>
-                </a:solidFill>
+                  <a:srgbClr val="262626"/>
+                </a:solidFill>
+                <a:latin typeface="Calibri"/>
               </a:defRPr>
             </a:pPr>
             <a:r>
-              <a:t>Our Method</a:t>
+              <a:t>1. Raw Hazy Baseline</a:t>
+            </a:r>
+          </a:p>
+          <a:p>
+            <a:pPr>
+              <a:defRPr sz="1000">
+                <a:solidFill>
+                  <a:srgbClr val="595959"/>
+                </a:solidFill>
+                <a:latin typeface="Calibri"/>
+              </a:defRPr>
+            </a:pPr>
+            <a:r>
+              <a:t>Untreated Capture</a:t>
+            </a:r>
+          </a:p>
+        </p:txBody>
+      </p:sp>
+      <p:sp>
+        <p:nvSpPr>
+          <p:cNvPr id="7" name="TextBox 6"/>
+          <p:cNvSpPr txBox="1"/>
+          <p:nvPr/>
+        </p:nvSpPr>
+        <p:spPr>
+          <a:xfrm>
+            <a:off x="841248" y="2423160"/>
+            <a:ext cx="2322576" cy="3566160"/>
+          </a:xfrm>
+          <a:prstGeom prst="rect">
+            <a:avLst/>
+          </a:prstGeom>
+          <a:noFill/>
+        </p:spPr>
+        <p:txBody>
+          <a:bodyPr wrap="square" lIns="0" tIns="0" rIns="0" bIns="0">
+            <a:spAutoFit/>
+          </a:bodyPr>
+          <a:lstStyle/>
+          <a:p>
+            <a:pPr>
+              <a:defRPr sz="1100" b="1">
+                <a:solidFill>
+                  <a:srgbClr val="262626"/>
+                </a:solidFill>
+                <a:latin typeface="Calibri"/>
+              </a:defRPr>
+            </a:pPr>
+            <a:r>
+              <a:t>Pipeline:</a:t>
             </a:r>
           </a:p>
           <a:p>
             <a:pPr>
               <a:spcBef>
-                <a:spcPts val="1000"/>
+                <a:spcPts val="200"/>
               </a:spcBef>
-              <a:defRPr sz="1050">
-                <a:solidFill>
-                  <a:srgbClr val="646464"/>
-                </a:solidFill>
+              <a:defRPr sz="1000">
+                <a:solidFill>
+                  <a:srgbClr val="595959"/>
+                </a:solidFill>
+                <a:latin typeface="Calibri"/>
               </a:defRPr>
             </a:pPr>
             <a:r>
-              <a:t>• Input: Hazy image processed by a single unified network.</a:t>
-            </a:r>
-            <a:br/>
-            <a:br/>
-            <a:r>
-              <a:t>• Mechanism: Continuous per-pixel spatial gating adapting across depth.</a:t>
-            </a:r>
-            <a:br/>
-            <a:br/>
-            <a:r>
-              <a:t>• Innovation: Realistic atmospheric light randomization and task-aligned feature adaptation with frozen detector supervision.</a:t>
+              <a:t>Direct camera input evaluated without enhancement preprocessing.</a:t>
+            </a:r>
+          </a:p>
+          <a:p>
+            <a:pPr>
+              <a:spcBef>
+                <a:spcPts val="800"/>
+              </a:spcBef>
+              <a:defRPr sz="1100" b="1">
+                <a:solidFill>
+                  <a:srgbClr val="262626"/>
+                </a:solidFill>
+                <a:latin typeface="Calibri"/>
+              </a:defRPr>
+            </a:pPr>
+            <a:r>
+              <a:t>Principle:</a:t>
+            </a:r>
+          </a:p>
+          <a:p>
+            <a:pPr>
+              <a:spcBef>
+                <a:spcPts val="200"/>
+              </a:spcBef>
+              <a:defRPr sz="1000">
+                <a:solidFill>
+                  <a:srgbClr val="595959"/>
+                </a:solidFill>
+                <a:latin typeface="Calibri"/>
+              </a:defRPr>
+            </a:pPr>
+            <a:r>
+              <a:t>Preserves unmodified sensor pixel values directly for detection.</a:t>
+            </a:r>
+          </a:p>
+          <a:p>
+            <a:pPr>
+              <a:spcBef>
+                <a:spcPts val="800"/>
+              </a:spcBef>
+              <a:defRPr sz="1100" b="1">
+                <a:solidFill>
+                  <a:srgbClr val="262626"/>
+                </a:solidFill>
+                <a:latin typeface="Calibri"/>
+              </a:defRPr>
+            </a:pPr>
+            <a:r>
+              <a:t>Limitation:</a:t>
+            </a:r>
+          </a:p>
+          <a:p>
+            <a:pPr>
+              <a:spcBef>
+                <a:spcPts val="200"/>
+              </a:spcBef>
+              <a:defRPr sz="1000">
+                <a:solidFill>
+                  <a:srgbClr val="595959"/>
+                </a:solidFill>
+                <a:latin typeface="Calibri"/>
+              </a:defRPr>
+            </a:pPr>
+            <a:r>
+              <a:t>Severe contrast loss, faded color saturation, and dense atmospheric veil obscuring distant objects.</a:t>
+            </a:r>
+          </a:p>
+        </p:txBody>
+      </p:sp>
+      <p:sp>
+        <p:nvSpPr>
+          <p:cNvPr id="8" name="Rounded Rectangle 7"/>
+          <p:cNvSpPr/>
+          <p:nvPr/>
+        </p:nvSpPr>
+        <p:spPr>
+          <a:xfrm>
+            <a:off x="3456432" y="1600200"/>
+            <a:ext cx="2542032" cy="4480560"/>
+          </a:xfrm>
+          <a:prstGeom prst="roundRect">
+            <a:avLst/>
+          </a:prstGeom>
+          <a:solidFill>
+            <a:srgbClr val="FFFFFF"/>
+          </a:solidFill>
+          <a:ln w="12700">
+            <a:solidFill>
+              <a:srgbClr val="D2D7DE"/>
+            </a:solidFill>
+          </a:ln>
+        </p:spPr>
+        <p:style>
+          <a:lnRef idx="1">
+            <a:schemeClr val="accent1"/>
+          </a:lnRef>
+          <a:fillRef idx="3">
+            <a:schemeClr val="accent1"/>
+          </a:fillRef>
+          <a:effectRef idx="2">
+            <a:schemeClr val="accent1"/>
+          </a:effectRef>
+          <a:fontRef idx="minor">
+            <a:schemeClr val="lt1"/>
+          </a:fontRef>
+        </p:style>
+        <p:txBody>
+          <a:bodyPr rtlCol="0" anchor="ctr"/>
+          <a:lstStyle/>
+          <a:p>
+            <a:pPr algn="ctr"/>
+          </a:p>
+        </p:txBody>
+      </p:sp>
+      <p:sp>
+        <p:nvSpPr>
+          <p:cNvPr id="9" name="Rectangle 8"/>
+          <p:cNvSpPr/>
+          <p:nvPr/>
+        </p:nvSpPr>
+        <p:spPr>
+          <a:xfrm>
+            <a:off x="3456432" y="1600200"/>
+            <a:ext cx="2542032" cy="731520"/>
+          </a:xfrm>
+          <a:prstGeom prst="rect">
+            <a:avLst/>
+          </a:prstGeom>
+          <a:solidFill>
+            <a:srgbClr val="F5F7FA"/>
+          </a:solidFill>
+          <a:ln>
+            <a:solidFill>
+              <a:srgbClr val="D2D7DE"/>
+            </a:solidFill>
+          </a:ln>
+        </p:spPr>
+        <p:style>
+          <a:lnRef idx="1">
+            <a:schemeClr val="accent1"/>
+          </a:lnRef>
+          <a:fillRef idx="3">
+            <a:schemeClr val="accent1"/>
+          </a:fillRef>
+          <a:effectRef idx="2">
+            <a:schemeClr val="accent1"/>
+          </a:effectRef>
+          <a:fontRef idx="minor">
+            <a:schemeClr val="lt1"/>
+          </a:fontRef>
+        </p:style>
+        <p:txBody>
+          <a:bodyPr rtlCol="0" anchor="ctr" wrap="square" lIns="137160" tIns="109728"/>
+          <a:lstStyle/>
+          <a:p>
+            <a:pPr algn="ctr">
+              <a:defRPr sz="1300" b="1">
+                <a:solidFill>
+                  <a:srgbClr val="262626"/>
+                </a:solidFill>
+                <a:latin typeface="Calibri"/>
+              </a:defRPr>
+            </a:pPr>
+            <a:r>
+              <a:t>2. Reference Paper</a:t>
+            </a:r>
+          </a:p>
+          <a:p>
+            <a:pPr>
+              <a:defRPr sz="1000">
+                <a:solidFill>
+                  <a:srgbClr val="595959"/>
+                </a:solidFill>
+                <a:latin typeface="Calibri"/>
+              </a:defRPr>
+            </a:pPr>
+            <a:r>
+              <a:t>Density-Routed CORUN</a:t>
+            </a:r>
+          </a:p>
+        </p:txBody>
+      </p:sp>
+      <p:sp>
+        <p:nvSpPr>
+          <p:cNvPr id="10" name="TextBox 9"/>
+          <p:cNvSpPr txBox="1"/>
+          <p:nvPr/>
+        </p:nvSpPr>
+        <p:spPr>
+          <a:xfrm>
+            <a:off x="3566160" y="2423160"/>
+            <a:ext cx="2322576" cy="3566160"/>
+          </a:xfrm>
+          <a:prstGeom prst="rect">
+            <a:avLst/>
+          </a:prstGeom>
+          <a:noFill/>
+        </p:spPr>
+        <p:txBody>
+          <a:bodyPr wrap="square" lIns="0" tIns="0" rIns="0" bIns="0">
+            <a:spAutoFit/>
+          </a:bodyPr>
+          <a:lstStyle/>
+          <a:p>
+            <a:pPr>
+              <a:defRPr sz="1100" b="1">
+                <a:solidFill>
+                  <a:srgbClr val="262626"/>
+                </a:solidFill>
+                <a:latin typeface="Calibri"/>
+              </a:defRPr>
+            </a:pPr>
+            <a:r>
+              <a:t>Pipeline:</a:t>
+            </a:r>
+          </a:p>
+          <a:p>
+            <a:pPr>
+              <a:spcBef>
+                <a:spcPts val="200"/>
+              </a:spcBef>
+              <a:defRPr sz="1000">
+                <a:solidFill>
+                  <a:srgbClr val="595959"/>
+                </a:solidFill>
+                <a:latin typeface="Calibri"/>
+              </a:defRPr>
+            </a:pPr>
+            <a:r>
+              <a:t>Classifier categorizes frame into Light, Medium, or Heavy fog, routing to 1 of 3 U-Nets.</a:t>
+            </a:r>
+          </a:p>
+          <a:p>
+            <a:pPr>
+              <a:spcBef>
+                <a:spcPts val="800"/>
+              </a:spcBef>
+              <a:defRPr sz="1100" b="1">
+                <a:solidFill>
+                  <a:srgbClr val="262626"/>
+                </a:solidFill>
+                <a:latin typeface="Calibri"/>
+              </a:defRPr>
+            </a:pPr>
+            <a:r>
+              <a:t>Principle:</a:t>
+            </a:r>
+          </a:p>
+          <a:p>
+            <a:pPr>
+              <a:spcBef>
+                <a:spcPts val="200"/>
+              </a:spcBef>
+              <a:defRPr sz="1000">
+                <a:solidFill>
+                  <a:srgbClr val="595959"/>
+                </a:solidFill>
+                <a:latin typeface="Calibri"/>
+              </a:defRPr>
+            </a:pPr>
+            <a:r>
+              <a:t>Multi-branch specialization targeting discrete synthetic fog levels.</a:t>
+            </a:r>
+          </a:p>
+          <a:p>
+            <a:pPr>
+              <a:spcBef>
+                <a:spcPts val="800"/>
+              </a:spcBef>
+              <a:defRPr sz="1100" b="1">
+                <a:solidFill>
+                  <a:srgbClr val="262626"/>
+                </a:solidFill>
+                <a:latin typeface="Calibri"/>
+              </a:defRPr>
+            </a:pPr>
+            <a:r>
+              <a:t>Limitation:</a:t>
+            </a:r>
+          </a:p>
+          <a:p>
+            <a:pPr>
+              <a:spcBef>
+                <a:spcPts val="200"/>
+              </a:spcBef>
+              <a:defRPr sz="1000">
+                <a:solidFill>
+                  <a:srgbClr val="595959"/>
+                </a:solidFill>
+                <a:latin typeface="Calibri"/>
+              </a:defRPr>
+            </a:pPr>
+            <a:r>
+              <a:t>Uniform fog assumption fails on 3D perspective scenes; partitions training data into 3 smaller subsets.</a:t>
+            </a:r>
+          </a:p>
+        </p:txBody>
+      </p:sp>
+      <p:sp>
+        <p:nvSpPr>
+          <p:cNvPr id="11" name="Rounded Rectangle 10"/>
+          <p:cNvSpPr/>
+          <p:nvPr/>
+        </p:nvSpPr>
+        <p:spPr>
+          <a:xfrm>
+            <a:off x="6181344" y="1600200"/>
+            <a:ext cx="2542032" cy="4480560"/>
+          </a:xfrm>
+          <a:prstGeom prst="roundRect">
+            <a:avLst/>
+          </a:prstGeom>
+          <a:solidFill>
+            <a:srgbClr val="FFFFFF"/>
+          </a:solidFill>
+          <a:ln w="12700">
+            <a:solidFill>
+              <a:srgbClr val="D2D7DE"/>
+            </a:solidFill>
+          </a:ln>
+        </p:spPr>
+        <p:style>
+          <a:lnRef idx="1">
+            <a:schemeClr val="accent1"/>
+          </a:lnRef>
+          <a:fillRef idx="3">
+            <a:schemeClr val="accent1"/>
+          </a:fillRef>
+          <a:effectRef idx="2">
+            <a:schemeClr val="accent1"/>
+          </a:effectRef>
+          <a:fontRef idx="minor">
+            <a:schemeClr val="lt1"/>
+          </a:fontRef>
+        </p:style>
+        <p:txBody>
+          <a:bodyPr rtlCol="0" anchor="ctr"/>
+          <a:lstStyle/>
+          <a:p>
+            <a:pPr algn="ctr"/>
+          </a:p>
+        </p:txBody>
+      </p:sp>
+      <p:sp>
+        <p:nvSpPr>
+          <p:cNvPr id="12" name="Rectangle 11"/>
+          <p:cNvSpPr/>
+          <p:nvPr/>
+        </p:nvSpPr>
+        <p:spPr>
+          <a:xfrm>
+            <a:off x="6181344" y="1600200"/>
+            <a:ext cx="2542032" cy="731520"/>
+          </a:xfrm>
+          <a:prstGeom prst="rect">
+            <a:avLst/>
+          </a:prstGeom>
+          <a:solidFill>
+            <a:srgbClr val="F5F7FA"/>
+          </a:solidFill>
+          <a:ln>
+            <a:solidFill>
+              <a:srgbClr val="D2D7DE"/>
+            </a:solidFill>
+          </a:ln>
+        </p:spPr>
+        <p:style>
+          <a:lnRef idx="1">
+            <a:schemeClr val="accent1"/>
+          </a:lnRef>
+          <a:fillRef idx="3">
+            <a:schemeClr val="accent1"/>
+          </a:fillRef>
+          <a:effectRef idx="2">
+            <a:schemeClr val="accent1"/>
+          </a:effectRef>
+          <a:fontRef idx="minor">
+            <a:schemeClr val="lt1"/>
+          </a:fontRef>
+        </p:style>
+        <p:txBody>
+          <a:bodyPr rtlCol="0" anchor="ctr" wrap="square" lIns="137160" tIns="109728"/>
+          <a:lstStyle/>
+          <a:p>
+            <a:pPr algn="ctr">
+              <a:defRPr sz="1300" b="1">
+                <a:solidFill>
+                  <a:srgbClr val="262626"/>
+                </a:solidFill>
+                <a:latin typeface="Calibri"/>
+              </a:defRPr>
+            </a:pPr>
+            <a:r>
+              <a:t>3. Classical DCP</a:t>
+            </a:r>
+          </a:p>
+          <a:p>
+            <a:pPr>
+              <a:defRPr sz="1000">
+                <a:solidFill>
+                  <a:srgbClr val="595959"/>
+                </a:solidFill>
+                <a:latin typeface="Calibri"/>
+              </a:defRPr>
+            </a:pPr>
+            <a:r>
+              <a:t>He et al. (2009) Prior</a:t>
+            </a:r>
+          </a:p>
+        </p:txBody>
+      </p:sp>
+      <p:sp>
+        <p:nvSpPr>
+          <p:cNvPr id="13" name="TextBox 12"/>
+          <p:cNvSpPr txBox="1"/>
+          <p:nvPr/>
+        </p:nvSpPr>
+        <p:spPr>
+          <a:xfrm>
+            <a:off x="6291072" y="2423160"/>
+            <a:ext cx="2322576" cy="3566160"/>
+          </a:xfrm>
+          <a:prstGeom prst="rect">
+            <a:avLst/>
+          </a:prstGeom>
+          <a:noFill/>
+        </p:spPr>
+        <p:txBody>
+          <a:bodyPr wrap="square" lIns="0" tIns="0" rIns="0" bIns="0">
+            <a:spAutoFit/>
+          </a:bodyPr>
+          <a:lstStyle/>
+          <a:p>
+            <a:pPr>
+              <a:defRPr sz="1100" b="1">
+                <a:solidFill>
+                  <a:srgbClr val="262626"/>
+                </a:solidFill>
+                <a:latin typeface="Calibri"/>
+              </a:defRPr>
+            </a:pPr>
+            <a:r>
+              <a:t>Pipeline:</a:t>
+            </a:r>
+          </a:p>
+          <a:p>
+            <a:pPr>
+              <a:spcBef>
+                <a:spcPts val="200"/>
+              </a:spcBef>
+              <a:defRPr sz="1000">
+                <a:solidFill>
+                  <a:srgbClr val="595959"/>
+                </a:solidFill>
+                <a:latin typeface="Calibri"/>
+              </a:defRPr>
+            </a:pPr>
+            <a:r>
+              <a:t>Dark Channel Prior with guided filtering to invert the atmospheric scattering model.</a:t>
+            </a:r>
+          </a:p>
+          <a:p>
+            <a:pPr>
+              <a:spcBef>
+                <a:spcPts val="800"/>
+              </a:spcBef>
+              <a:defRPr sz="1100" b="1">
+                <a:solidFill>
+                  <a:srgbClr val="262626"/>
+                </a:solidFill>
+                <a:latin typeface="Calibri"/>
+              </a:defRPr>
+            </a:pPr>
+            <a:r>
+              <a:t>Principle:</a:t>
+            </a:r>
+          </a:p>
+          <a:p>
+            <a:pPr>
+              <a:spcBef>
+                <a:spcPts val="200"/>
+              </a:spcBef>
+              <a:defRPr sz="1000">
+                <a:solidFill>
+                  <a:srgbClr val="595959"/>
+                </a:solidFill>
+                <a:latin typeface="Calibri"/>
+              </a:defRPr>
+            </a:pPr>
+            <a:r>
+              <a:t>Parameter-free physical heuristic; long-standing historical real-fog benchmark.</a:t>
+            </a:r>
+          </a:p>
+          <a:p>
+            <a:pPr>
+              <a:spcBef>
+                <a:spcPts val="800"/>
+              </a:spcBef>
+              <a:defRPr sz="1100" b="1">
+                <a:solidFill>
+                  <a:srgbClr val="262626"/>
+                </a:solidFill>
+                <a:latin typeface="Calibri"/>
+              </a:defRPr>
+            </a:pPr>
+            <a:r>
+              <a:t>Limitation:</a:t>
+            </a:r>
+          </a:p>
+          <a:p>
+            <a:pPr>
+              <a:spcBef>
+                <a:spcPts val="200"/>
+              </a:spcBef>
+              <a:defRPr sz="1000">
+                <a:solidFill>
+                  <a:srgbClr val="595959"/>
+                </a:solidFill>
+                <a:latin typeface="Calibri"/>
+              </a:defRPr>
+            </a:pPr>
+            <a:r>
+              <a:t>Prior assumption fails in sky, facades, and headlights, creating severe halos and blocking artifacts.</a:t>
+            </a:r>
+          </a:p>
+        </p:txBody>
+      </p:sp>
+      <p:sp>
+        <p:nvSpPr>
+          <p:cNvPr id="14" name="Rounded Rectangle 13"/>
+          <p:cNvSpPr/>
+          <p:nvPr/>
+        </p:nvSpPr>
+        <p:spPr>
+          <a:xfrm>
+            <a:off x="8906256" y="1600200"/>
+            <a:ext cx="2542032" cy="4480560"/>
+          </a:xfrm>
+          <a:prstGeom prst="roundRect">
+            <a:avLst/>
+          </a:prstGeom>
+          <a:solidFill>
+            <a:srgbClr val="EBF3FA"/>
+          </a:solidFill>
+          <a:ln w="19050">
+            <a:solidFill>
+              <a:srgbClr val="1F4E78"/>
+            </a:solidFill>
+          </a:ln>
+        </p:spPr>
+        <p:style>
+          <a:lnRef idx="1">
+            <a:schemeClr val="accent1"/>
+          </a:lnRef>
+          <a:fillRef idx="3">
+            <a:schemeClr val="accent1"/>
+          </a:fillRef>
+          <a:effectRef idx="2">
+            <a:schemeClr val="accent1"/>
+          </a:effectRef>
+          <a:fontRef idx="minor">
+            <a:schemeClr val="lt1"/>
+          </a:fontRef>
+        </p:style>
+        <p:txBody>
+          <a:bodyPr rtlCol="0" anchor="ctr"/>
+          <a:lstStyle/>
+          <a:p>
+            <a:pPr algn="ctr"/>
+          </a:p>
+        </p:txBody>
+      </p:sp>
+      <p:sp>
+        <p:nvSpPr>
+          <p:cNvPr id="15" name="Rectangle 14"/>
+          <p:cNvSpPr/>
+          <p:nvPr/>
+        </p:nvSpPr>
+        <p:spPr>
+          <a:xfrm>
+            <a:off x="8906256" y="1600200"/>
+            <a:ext cx="2542032" cy="731520"/>
+          </a:xfrm>
+          <a:prstGeom prst="rect">
+            <a:avLst/>
+          </a:prstGeom>
+          <a:solidFill>
+            <a:srgbClr val="1F4E78"/>
+          </a:solidFill>
+          <a:ln>
+            <a:solidFill>
+              <a:srgbClr val="1F4E78"/>
+            </a:solidFill>
+          </a:ln>
+        </p:spPr>
+        <p:style>
+          <a:lnRef idx="1">
+            <a:schemeClr val="accent1"/>
+          </a:lnRef>
+          <a:fillRef idx="3">
+            <a:schemeClr val="accent1"/>
+          </a:fillRef>
+          <a:effectRef idx="2">
+            <a:schemeClr val="accent1"/>
+          </a:effectRef>
+          <a:fontRef idx="minor">
+            <a:schemeClr val="lt1"/>
+          </a:fontRef>
+        </p:style>
+        <p:txBody>
+          <a:bodyPr rtlCol="0" anchor="ctr" wrap="square" lIns="137160" tIns="109728"/>
+          <a:lstStyle/>
+          <a:p>
+            <a:pPr algn="ctr">
+              <a:defRPr sz="1300" b="1">
+                <a:solidFill>
+                  <a:srgbClr val="FFFFFF"/>
+                </a:solidFill>
+                <a:latin typeface="Calibri"/>
+              </a:defRPr>
+            </a:pPr>
+            <a:r>
+              <a:t>4. Our Method</a:t>
+            </a:r>
+          </a:p>
+          <a:p>
+            <a:pPr>
+              <a:defRPr sz="1000">
+                <a:solidFill>
+                  <a:srgbClr val="D2E6FA"/>
+                </a:solidFill>
+                <a:latin typeface="Calibri"/>
+              </a:defRPr>
+            </a:pPr>
+            <a:r>
+              <a:t>Unified Spatial Network</a:t>
+            </a:r>
+          </a:p>
+        </p:txBody>
+      </p:sp>
+      <p:sp>
+        <p:nvSpPr>
+          <p:cNvPr id="16" name="TextBox 15"/>
+          <p:cNvSpPr txBox="1"/>
+          <p:nvPr/>
+        </p:nvSpPr>
+        <p:spPr>
+          <a:xfrm>
+            <a:off x="9015984" y="2423160"/>
+            <a:ext cx="2322576" cy="3566160"/>
+          </a:xfrm>
+          <a:prstGeom prst="rect">
+            <a:avLst/>
+          </a:prstGeom>
+          <a:noFill/>
+        </p:spPr>
+        <p:txBody>
+          <a:bodyPr wrap="square" lIns="0" tIns="0" rIns="0" bIns="0">
+            <a:spAutoFit/>
+          </a:bodyPr>
+          <a:lstStyle/>
+          <a:p>
+            <a:pPr>
+              <a:defRPr sz="1100" b="1">
+                <a:solidFill>
+                  <a:srgbClr val="1F4E78"/>
+                </a:solidFill>
+                <a:latin typeface="Calibri"/>
+              </a:defRPr>
+            </a:pPr>
+            <a:r>
+              <a:t>Pipeline:</a:t>
+            </a:r>
+          </a:p>
+          <a:p>
+            <a:pPr>
+              <a:spcBef>
+                <a:spcPts val="200"/>
+              </a:spcBef>
+              <a:defRPr sz="1000">
+                <a:solidFill>
+                  <a:srgbClr val="262626"/>
+                </a:solidFill>
+                <a:latin typeface="Calibri"/>
+              </a:defRPr>
+            </a:pPr>
+            <a:r>
+              <a:t>Single compact neural network with continuous per-pixel spatial gating across depth.</a:t>
+            </a:r>
+          </a:p>
+          <a:p>
+            <a:pPr>
+              <a:spcBef>
+                <a:spcPts val="800"/>
+              </a:spcBef>
+              <a:defRPr sz="1100" b="1">
+                <a:solidFill>
+                  <a:srgbClr val="1F4E78"/>
+                </a:solidFill>
+                <a:latin typeface="Calibri"/>
+              </a:defRPr>
+            </a:pPr>
+            <a:r>
+              <a:t>Principle:</a:t>
+            </a:r>
+          </a:p>
+          <a:p>
+            <a:pPr>
+              <a:spcBef>
+                <a:spcPts val="200"/>
+              </a:spcBef>
+              <a:defRPr sz="1000">
+                <a:solidFill>
+                  <a:srgbClr val="262626"/>
+                </a:solidFill>
+                <a:latin typeface="Calibri"/>
+              </a:defRPr>
+            </a:pPr>
+            <a:r>
+              <a:t>Physical airlight randomization (A in [0.4, 0.95]) and task-aligned feature supervision.</a:t>
+            </a:r>
+          </a:p>
+          <a:p>
+            <a:pPr>
+              <a:spcBef>
+                <a:spcPts val="800"/>
+              </a:spcBef>
+              <a:defRPr sz="1100" b="1">
+                <a:solidFill>
+                  <a:srgbClr val="1F4E78"/>
+                </a:solidFill>
+                <a:latin typeface="Calibri"/>
+              </a:defRPr>
+            </a:pPr>
+            <a:r>
+              <a:t>Advantage:</a:t>
+            </a:r>
+          </a:p>
+          <a:p>
+            <a:pPr>
+              <a:spcBef>
+                <a:spcPts val="200"/>
+              </a:spcBef>
+              <a:defRPr sz="1000">
+                <a:solidFill>
+                  <a:srgbClr val="262626"/>
+                </a:solidFill>
+                <a:latin typeface="Calibri"/>
+              </a:defRPr>
+            </a:pPr>
+            <a:r>
+              <a:t>Adapts across scene depth gradients without haloing, delivering genuine real-world perceptual recovery.</a:t>
             </a:r>
           </a:p>
         </p:txBody>
@@ -3565,14 +4369,6 @@
 <file path=ppt/slides/slide3.xml><?xml version="1.0" encoding="utf-8"?>
 <p:sld xmlns:a="http://schemas.openxmlformats.org/drawingml/2006/main" xmlns:p="http://schemas.openxmlformats.org/presentationml/2006/main" xmlns:r="http://schemas.openxmlformats.org/officeDocument/2006/relationships">
   <p:cSld>
-    <p:bg>
-      <p:bgPr>
-        <a:solidFill>
-          <a:srgbClr val="FFFFFF"/>
-        </a:solidFill>
-        <a:effectLst/>
-      </p:bgPr>
-    </p:bg>
     <p:spTree>
       <p:nvGrpSpPr>
         <p:cNvPr id="1" name=""/>
@@ -3588,8 +4384,8 @@
         </p:nvSpPr>
         <p:spPr>
           <a:xfrm>
-            <a:off x="731520" y="457200"/>
-            <a:ext cx="10728655" cy="914400"/>
+            <a:off x="731520" y="411480"/>
+            <a:ext cx="10728655" cy="1005840"/>
           </a:xfrm>
           <a:prstGeom prst="rect">
             <a:avLst/>
@@ -3605,31 +4401,153 @@
             <a:pPr>
               <a:defRPr sz="1000" b="1">
                 <a:solidFill>
-                  <a:srgbClr val="646464"/>
-                </a:solidFill>
+                  <a:srgbClr val="1F4E78"/>
+                </a:solidFill>
+                <a:latin typeface="Calibri"/>
               </a:defRPr>
             </a:pPr>
             <a:r>
-              <a:t>DISTINGUISHABLE CHARACTERISTICS</a:t>
+              <a:t>VISUAL RESULTS</a:t>
             </a:r>
           </a:p>
           <a:p>
             <a:pPr>
+              <a:spcBef>
+                <a:spcPts val="300"/>
+              </a:spcBef>
               <a:defRPr sz="2400" b="1">
                 <a:solidFill>
-                  <a:srgbClr val="141414"/>
-                </a:solidFill>
+                  <a:srgbClr val="262626"/>
+                </a:solidFill>
+                <a:latin typeface="Calibri"/>
               </a:defRPr>
             </a:pPr>
             <a:r>
-              <a:t>Visual Results on Real Fog</a:t>
+              <a:t>Qualitative Comparison: Distinguishable Visual Characteristics</a:t>
+            </a:r>
+          </a:p>
+        </p:txBody>
+      </p:sp>
+      <p:sp>
+        <p:nvSpPr>
+          <p:cNvPr id="3" name="Rectangle 2"/>
+          <p:cNvSpPr/>
+          <p:nvPr/>
+        </p:nvSpPr>
+        <p:spPr>
+          <a:xfrm>
+            <a:off x="731520" y="1371600"/>
+            <a:ext cx="10728655" cy="18288"/>
+          </a:xfrm>
+          <a:prstGeom prst="rect">
+            <a:avLst/>
+          </a:prstGeom>
+          <a:solidFill>
+            <a:srgbClr val="D2D7DE"/>
+          </a:solidFill>
+          <a:ln>
+            <a:solidFill>
+              <a:srgbClr val="D2D7DE"/>
+            </a:solidFill>
+          </a:ln>
+        </p:spPr>
+        <p:style>
+          <a:lnRef idx="1">
+            <a:schemeClr val="accent1"/>
+          </a:lnRef>
+          <a:fillRef idx="3">
+            <a:schemeClr val="accent1"/>
+          </a:fillRef>
+          <a:effectRef idx="2">
+            <a:schemeClr val="accent1"/>
+          </a:effectRef>
+          <a:fontRef idx="minor">
+            <a:schemeClr val="lt1"/>
+          </a:fontRef>
+        </p:style>
+        <p:txBody>
+          <a:bodyPr rtlCol="0" anchor="ctr"/>
+          <a:lstStyle/>
+          <a:p>
+            <a:pPr algn="ctr"/>
+          </a:p>
+        </p:txBody>
+      </p:sp>
+      <p:sp>
+        <p:nvSpPr>
+          <p:cNvPr id="4" name="TextBox 3"/>
+          <p:cNvSpPr txBox="1"/>
+          <p:nvPr/>
+        </p:nvSpPr>
+        <p:spPr>
+          <a:xfrm>
+            <a:off x="731520" y="6400800"/>
+            <a:ext cx="10728655" cy="320040"/>
+          </a:xfrm>
+          <a:prstGeom prst="rect">
+            <a:avLst/>
+          </a:prstGeom>
+          <a:noFill/>
+        </p:spPr>
+        <p:txBody>
+          <a:bodyPr wrap="none" lIns="0" tIns="0" rIns="0" bIns="0">
+            <a:spAutoFit/>
+          </a:bodyPr>
+          <a:lstStyle/>
+          <a:p>
+            <a:pPr>
+              <a:defRPr sz="900">
+                <a:solidFill>
+                  <a:srgbClr val="A0A0A0"/>
+                </a:solidFill>
+                <a:latin typeface="Calibri"/>
+              </a:defRPr>
+            </a:pPr>
+            <a:r>
+              <a:t>Real-World Dehazing Evaluation | Frozen COCO YOLOv8n | RTTS Validation Benchmark</a:t>
+            </a:r>
+          </a:p>
+        </p:txBody>
+      </p:sp>
+      <p:sp>
+        <p:nvSpPr>
+          <p:cNvPr id="5" name="TextBox 4"/>
+          <p:cNvSpPr txBox="1"/>
+          <p:nvPr/>
+        </p:nvSpPr>
+        <p:spPr>
+          <a:xfrm>
+            <a:off x="731520" y="1508760"/>
+            <a:ext cx="10728655" cy="274320"/>
+          </a:xfrm>
+          <a:prstGeom prst="rect">
+            <a:avLst/>
+          </a:prstGeom>
+          <a:noFill/>
+        </p:spPr>
+        <p:txBody>
+          <a:bodyPr wrap="none" lIns="0" tIns="0" rIns="0" bIns="0">
+            <a:spAutoFit/>
+          </a:bodyPr>
+          <a:lstStyle/>
+          <a:p>
+            <a:pPr>
+              <a:defRPr sz="1000" b="1">
+                <a:solidFill>
+                  <a:srgbClr val="1F4E78"/>
+                </a:solidFill>
+                <a:latin typeface="Calibri"/>
+              </a:defRPr>
+            </a:pPr>
+            <a:r>
+              <a:t>DEHAZED IMAGE QUALITY (LEFT TO RIGHT: RAW HAZY | REFERENCE PAPER | CLASSICAL DCP | OUR METHOD)</a:t>
             </a:r>
           </a:p>
         </p:txBody>
       </p:sp>
       <p:pic>
         <p:nvPicPr>
-          <p:cNvPr id="3" name="Picture 2" descr="method_comparison_visual.png"/>
+          <p:cNvPr id="6" name="Picture 5" descr="method_comparison_visual.png"/>
           <p:cNvPicPr>
             <a:picLocks noChangeAspect="1"/>
           </p:cNvPicPr>
@@ -3643,17 +4561,53 @@
         </p:blipFill>
         <p:spPr>
           <a:xfrm>
-            <a:off x="731520" y="1645920"/>
-            <a:ext cx="10728655" cy="1920240"/>
+            <a:off x="731520" y="1783080"/>
+            <a:ext cx="10728655" cy="1783080"/>
           </a:xfrm>
           <a:prstGeom prst="rect">
             <a:avLst/>
           </a:prstGeom>
         </p:spPr>
       </p:pic>
+      <p:sp>
+        <p:nvSpPr>
+          <p:cNvPr id="7" name="TextBox 6"/>
+          <p:cNvSpPr txBox="1"/>
+          <p:nvPr/>
+        </p:nvSpPr>
+        <p:spPr>
+          <a:xfrm>
+            <a:off x="731520" y="3657600"/>
+            <a:ext cx="10728655" cy="274320"/>
+          </a:xfrm>
+          <a:prstGeom prst="rect">
+            <a:avLst/>
+          </a:prstGeom>
+          <a:noFill/>
+        </p:spPr>
+        <p:txBody>
+          <a:bodyPr wrap="none" lIns="0" tIns="0" rIns="0" bIns="0">
+            <a:spAutoFit/>
+          </a:bodyPr>
+          <a:lstStyle/>
+          <a:p>
+            <a:pPr>
+              <a:defRPr sz="1000" b="1">
+                <a:solidFill>
+                  <a:srgbClr val="1F4E78"/>
+                </a:solidFill>
+                <a:latin typeface="Calibri"/>
+              </a:defRPr>
+            </a:pPr>
+            <a:r>
+              <a:t>DOWNSTREAM DETECTION OUTPUTS (YOLOV8N PREDICTIONS WITH BOUNDING BOXES)</a:t>
+            </a:r>
+          </a:p>
+        </p:txBody>
+      </p:sp>
       <p:pic>
         <p:nvPicPr>
-          <p:cNvPr id="4" name="Picture 3" descr="method_comparison_detection.png"/>
+          <p:cNvPr id="8" name="Picture 7" descr="method_comparison_detection.png"/>
           <p:cNvPicPr>
             <a:picLocks noChangeAspect="1"/>
           </p:cNvPicPr>
@@ -3667,8 +4621,8 @@
         </p:blipFill>
         <p:spPr>
           <a:xfrm>
-            <a:off x="731520" y="3749039"/>
-            <a:ext cx="10728655" cy="1920240"/>
+            <a:off x="731520" y="3931920"/>
+            <a:ext cx="10728655" cy="1783080"/>
           </a:xfrm>
           <a:prstGeom prst="rect">
             <a:avLst/>
@@ -3677,14 +4631,14 @@
       </p:pic>
       <p:sp>
         <p:nvSpPr>
-          <p:cNvPr id="5" name="TextBox 4"/>
+          <p:cNvPr id="9" name="TextBox 8"/>
           <p:cNvSpPr txBox="1"/>
           <p:nvPr/>
         </p:nvSpPr>
         <p:spPr>
           <a:xfrm>
-            <a:off x="731520" y="5852160"/>
-            <a:ext cx="10728655" cy="548640"/>
+            <a:off x="731520" y="5806440"/>
+            <a:ext cx="10728655" cy="594360"/>
           </a:xfrm>
           <a:prstGeom prst="rect">
             <a:avLst/>
@@ -3692,20 +4646,21 @@
           <a:noFill/>
         </p:spPr>
         <p:txBody>
-          <a:bodyPr wrap="square">
+          <a:bodyPr wrap="square" lIns="0" tIns="0" rIns="0" bIns="0">
             <a:spAutoFit/>
           </a:bodyPr>
           <a:lstStyle/>
           <a:p>
             <a:pPr>
-              <a:defRPr sz="1000">
-                <a:solidFill>
-                  <a:srgbClr val="646464"/>
-                </a:solidFill>
+              <a:defRPr sz="950">
+                <a:solidFill>
+                  <a:srgbClr val="595959"/>
+                </a:solidFill>
+                <a:latin typeface="Calibri"/>
               </a:defRPr>
             </a:pPr>
             <a:r>
-              <a:t>Top Row: Direct visual dehazing. Bottom Row: Downstream YOLOv8n object detection. (a) Raw hazy is pale and veiled; (b) Reference paper exhibits dark background halos; (c) DCP causes sky color banding; (d) Our method achieves clean, balanced contrast with the highest detection count (7 vs 4-5).</a:t>
+              <a:t>Visual Distinctions: (a) Raw Hazy is pale and contrast-deprived; (b) Reference Paper creates blotchy sky halos and over-darkens foreground structures; (c) Classical DCP exhibits yellow/green sky posterization; (d) Our Method achieves balanced contrast and clean contours, yielding 7 valid detections vs 4-5 for other methods.</a:t>
             </a:r>
           </a:p>
         </p:txBody>
@@ -3721,14 +4676,6 @@
 <file path=ppt/slides/slide4.xml><?xml version="1.0" encoding="utf-8"?>
 <p:sld xmlns:a="http://schemas.openxmlformats.org/drawingml/2006/main" xmlns:p="http://schemas.openxmlformats.org/presentationml/2006/main" xmlns:r="http://schemas.openxmlformats.org/officeDocument/2006/relationships">
   <p:cSld>
-    <p:bg>
-      <p:bgPr>
-        <a:solidFill>
-          <a:srgbClr val="FFFFFF"/>
-        </a:solidFill>
-        <a:effectLst/>
-      </p:bgPr>
-    </p:bg>
     <p:spTree>
       <p:nvGrpSpPr>
         <p:cNvPr id="1" name=""/>
@@ -3744,8 +4691,8 @@
         </p:nvSpPr>
         <p:spPr>
           <a:xfrm>
-            <a:off x="731520" y="457200"/>
-            <a:ext cx="10728655" cy="914400"/>
+            <a:off x="731520" y="411480"/>
+            <a:ext cx="10728655" cy="1005840"/>
           </a:xfrm>
           <a:prstGeom prst="rect">
             <a:avLst/>
@@ -3761,39 +4708,125 @@
             <a:pPr>
               <a:defRPr sz="1000" b="1">
                 <a:solidFill>
-                  <a:srgbClr val="646464"/>
-                </a:solidFill>
+                  <a:srgbClr val="1F4E78"/>
+                </a:solidFill>
+                <a:latin typeface="Calibri"/>
               </a:defRPr>
             </a:pPr>
             <a:r>
-              <a:t>EVALUATION METRICS (RTTS VALID, 865 IMAGES, FROZEN YOLOV8N)</a:t>
+              <a:t>EMPIRICAL EVALUATION</a:t>
             </a:r>
           </a:p>
           <a:p>
             <a:pPr>
+              <a:spcBef>
+                <a:spcPts val="300"/>
+              </a:spcBef>
               <a:defRPr sz="2400" b="1">
                 <a:solidFill>
-                  <a:srgbClr val="141414"/>
-                </a:solidFill>
+                  <a:srgbClr val="262626"/>
+                </a:solidFill>
+                <a:latin typeface="Calibri"/>
               </a:defRPr>
             </a:pPr>
             <a:r>
-              <a:t>Quantitative Benchmark on Real Fog</a:t>
+              <a:t>Quantitative Evaluation: Detection Performance on Real Fog</a:t>
+            </a:r>
+          </a:p>
+        </p:txBody>
+      </p:sp>
+      <p:sp>
+        <p:nvSpPr>
+          <p:cNvPr id="3" name="Rectangle 2"/>
+          <p:cNvSpPr/>
+          <p:nvPr/>
+        </p:nvSpPr>
+        <p:spPr>
+          <a:xfrm>
+            <a:off x="731520" y="1371600"/>
+            <a:ext cx="10728655" cy="18288"/>
+          </a:xfrm>
+          <a:prstGeom prst="rect">
+            <a:avLst/>
+          </a:prstGeom>
+          <a:solidFill>
+            <a:srgbClr val="D2D7DE"/>
+          </a:solidFill>
+          <a:ln>
+            <a:solidFill>
+              <a:srgbClr val="D2D7DE"/>
+            </a:solidFill>
+          </a:ln>
+        </p:spPr>
+        <p:style>
+          <a:lnRef idx="1">
+            <a:schemeClr val="accent1"/>
+          </a:lnRef>
+          <a:fillRef idx="3">
+            <a:schemeClr val="accent1"/>
+          </a:fillRef>
+          <a:effectRef idx="2">
+            <a:schemeClr val="accent1"/>
+          </a:effectRef>
+          <a:fontRef idx="minor">
+            <a:schemeClr val="lt1"/>
+          </a:fontRef>
+        </p:style>
+        <p:txBody>
+          <a:bodyPr rtlCol="0" anchor="ctr"/>
+          <a:lstStyle/>
+          <a:p>
+            <a:pPr algn="ctr"/>
+          </a:p>
+        </p:txBody>
+      </p:sp>
+      <p:sp>
+        <p:nvSpPr>
+          <p:cNvPr id="4" name="TextBox 3"/>
+          <p:cNvSpPr txBox="1"/>
+          <p:nvPr/>
+        </p:nvSpPr>
+        <p:spPr>
+          <a:xfrm>
+            <a:off x="731520" y="6400800"/>
+            <a:ext cx="10728655" cy="320040"/>
+          </a:xfrm>
+          <a:prstGeom prst="rect">
+            <a:avLst/>
+          </a:prstGeom>
+          <a:noFill/>
+        </p:spPr>
+        <p:txBody>
+          <a:bodyPr wrap="none" lIns="0" tIns="0" rIns="0" bIns="0">
+            <a:spAutoFit/>
+          </a:bodyPr>
+          <a:lstStyle/>
+          <a:p>
+            <a:pPr>
+              <a:defRPr sz="900">
+                <a:solidFill>
+                  <a:srgbClr val="A0A0A0"/>
+                </a:solidFill>
+                <a:latin typeface="Calibri"/>
+              </a:defRPr>
+            </a:pPr>
+            <a:r>
+              <a:t>Real-World Dehazing Evaluation | Frozen COCO YOLOv8n | RTTS Validation Benchmark</a:t>
             </a:r>
           </a:p>
         </p:txBody>
       </p:sp>
       <p:graphicFrame>
         <p:nvGraphicFramePr>
-          <p:cNvPr id="3" name="Table 2"/>
+          <p:cNvPr id="5" name="Table 4"/>
           <p:cNvGraphicFramePr>
             <a:graphicFrameLocks noGrp="1"/>
           </p:cNvGraphicFramePr>
           <p:nvPr/>
         </p:nvGraphicFramePr>
         <p:xfrm>
-          <a:off x="731520" y="1645920"/>
-          <a:ext cx="10698480" cy="2926080"/>
+          <a:off x="731520" y="1600200"/>
+          <a:ext cx="10728655" cy="2834640"/>
         </p:xfrm>
         <a:graphic>
           <a:graphicData uri="http://schemas.openxmlformats.org/drawingml/2006/table">
@@ -3802,15 +4835,15 @@
                 <a:tableStyleId>{5C22544A-7EE6-4342-B048-85BDC9FD1C3A}</a:tableStyleId>
               </a:tblPr>
               <a:tblGrid>
-                <a:gridCol w="2560320"/>
-                <a:gridCol w="1280160"/>
-                <a:gridCol w="1280160"/>
+                <a:gridCol w="2499055"/>
                 <a:gridCol w="1280160"/>
                 <a:gridCol w="1371600"/>
-                <a:gridCol w="1463040"/>
+                <a:gridCol w="1371600"/>
+                <a:gridCol w="1371600"/>
+                <a:gridCol w="1371600"/>
                 <a:gridCol w="1463040"/>
               </a:tblGrid>
-              <a:tr h="487680">
+              <a:tr h="472440">
                 <a:tc>
                   <a:txBody>
                     <a:bodyPr/>
@@ -3819,19 +4852,19 @@
                       <a:pPr>
                         <a:defRPr sz="1100" b="1">
                           <a:solidFill>
-                            <a:srgbClr val="141414"/>
+                            <a:srgbClr val="FFFFFF"/>
                           </a:solidFill>
                           <a:latin typeface="Calibri"/>
                         </a:defRPr>
                       </a:pPr>
                       <a:r>
-                        <a:t>Metric</a:t>
+                        <a:t>Evaluation Metric</a:t>
                       </a:r>
                     </a:p>
                   </a:txBody>
-                  <a:tcPr>
+                  <a:tcPr anchor="ctr">
                     <a:solidFill>
-                      <a:srgbClr val="F5F5F5"/>
+                      <a:srgbClr val="1F4E78"/>
                     </a:solidFill>
                   </a:tcPr>
                 </a:tc>
@@ -3843,7 +4876,7 @@
                       <a:pPr algn="ctr">
                         <a:defRPr sz="1100" b="1">
                           <a:solidFill>
-                            <a:srgbClr val="141414"/>
+                            <a:srgbClr val="FFFFFF"/>
                           </a:solidFill>
                           <a:latin typeface="Calibri"/>
                         </a:defRPr>
@@ -3853,9 +4886,9 @@
                       </a:r>
                     </a:p>
                   </a:txBody>
-                  <a:tcPr>
+                  <a:tcPr anchor="ctr">
                     <a:solidFill>
-                      <a:srgbClr val="F5F5F5"/>
+                      <a:srgbClr val="1F4E78"/>
                     </a:solidFill>
                   </a:tcPr>
                 </a:tc>
@@ -3867,7 +4900,7 @@
                       <a:pPr algn="ctr">
                         <a:defRPr sz="1100" b="1">
                           <a:solidFill>
-                            <a:srgbClr val="141414"/>
+                            <a:srgbClr val="FFFFFF"/>
                           </a:solidFill>
                           <a:latin typeface="Calibri"/>
                         </a:defRPr>
@@ -3877,9 +4910,9 @@
                       </a:r>
                     </a:p>
                   </a:txBody>
-                  <a:tcPr>
+                  <a:tcPr anchor="ctr">
                     <a:solidFill>
-                      <a:srgbClr val="F5F5F5"/>
+                      <a:srgbClr val="1F4E78"/>
                     </a:solidFill>
                   </a:tcPr>
                 </a:tc>
@@ -3891,7 +4924,7 @@
                       <a:pPr algn="ctr">
                         <a:defRPr sz="1100" b="1">
                           <a:solidFill>
-                            <a:srgbClr val="141414"/>
+                            <a:srgbClr val="FFFFFF"/>
                           </a:solidFill>
                           <a:latin typeface="Calibri"/>
                         </a:defRPr>
@@ -3901,9 +4934,9 @@
                       </a:r>
                     </a:p>
                   </a:txBody>
-                  <a:tcPr>
+                  <a:tcPr anchor="ctr">
                     <a:solidFill>
-                      <a:srgbClr val="F5F5F5"/>
+                      <a:srgbClr val="1F4E78"/>
                     </a:solidFill>
                   </a:tcPr>
                 </a:tc>
@@ -3915,7 +4948,7 @@
                       <a:pPr algn="ctr">
                         <a:defRPr sz="1100" b="1">
                           <a:solidFill>
-                            <a:srgbClr val="141414"/>
+                            <a:srgbClr val="FFFFFF"/>
                           </a:solidFill>
                           <a:latin typeface="Calibri"/>
                         </a:defRPr>
@@ -3925,9 +4958,9 @@
                       </a:r>
                     </a:p>
                   </a:txBody>
-                  <a:tcPr>
+                  <a:tcPr anchor="ctr">
                     <a:solidFill>
-                      <a:srgbClr val="F5F5F5"/>
+                      <a:srgbClr val="1F4E78"/>
                     </a:solidFill>
                   </a:tcPr>
                 </a:tc>
@@ -3939,19 +4972,19 @@
                       <a:pPr algn="ctr">
                         <a:defRPr sz="1100" b="1">
                           <a:solidFill>
-                            <a:srgbClr val="141414"/>
+                            <a:srgbClr val="FFFFFF"/>
                           </a:solidFill>
                           <a:latin typeface="Calibri"/>
                         </a:defRPr>
                       </a:pPr>
                       <a:r>
-                        <a:t>Gain vs Raw Hazy</a:t>
+                        <a:t>Gain vs Hazy</a:t>
                       </a:r>
                     </a:p>
                   </a:txBody>
-                  <a:tcPr>
+                  <a:tcPr anchor="ctr">
                     <a:solidFill>
-                      <a:srgbClr val="F5F5F5"/>
+                      <a:srgbClr val="1F4E78"/>
                     </a:solidFill>
                   </a:tcPr>
                 </a:tc>
@@ -3963,7 +4996,7 @@
                       <a:pPr algn="ctr">
                         <a:defRPr sz="1100" b="1">
                           <a:solidFill>
-                            <a:srgbClr val="141414"/>
+                            <a:srgbClr val="FFFFFF"/>
                           </a:solidFill>
                           <a:latin typeface="Calibri"/>
                         </a:defRPr>
@@ -3973,14 +5006,14 @@
                       </a:r>
                     </a:p>
                   </a:txBody>
-                  <a:tcPr>
+                  <a:tcPr anchor="ctr">
                     <a:solidFill>
-                      <a:srgbClr val="F5F5F5"/>
+                      <a:srgbClr val="1F4E78"/>
                     </a:solidFill>
                   </a:tcPr>
                 </a:tc>
               </a:tr>
-              <a:tr h="487680">
+              <a:tr h="472440">
                 <a:tc>
                   <a:txBody>
                     <a:bodyPr/>
@@ -3989,7 +5022,7 @@
                       <a:pPr>
                         <a:defRPr sz="1100">
                           <a:solidFill>
-                            <a:srgbClr val="646464"/>
+                            <a:srgbClr val="262626"/>
                           </a:solidFill>
                           <a:latin typeface="Calibri"/>
                         </a:defRPr>
@@ -3999,7 +5032,177 @@
                       </a:r>
                     </a:p>
                   </a:txBody>
-                  <a:tcPr>
+                  <a:tcPr anchor="ctr">
+                    <a:solidFill>
+                      <a:srgbClr val="F5F7FA"/>
+                    </a:solidFill>
+                  </a:tcPr>
+                </a:tc>
+                <a:tc>
+                  <a:txBody>
+                    <a:bodyPr/>
+                    <a:lstStyle/>
+                    <a:p>
+                      <a:pPr algn="ctr">
+                        <a:defRPr sz="1100">
+                          <a:solidFill>
+                            <a:srgbClr val="262626"/>
+                          </a:solidFill>
+                          <a:latin typeface="Calibri"/>
+                        </a:defRPr>
+                      </a:pPr>
+                      <a:r>
+                        <a:t>0.4527</a:t>
+                      </a:r>
+                    </a:p>
+                  </a:txBody>
+                  <a:tcPr anchor="ctr">
+                    <a:solidFill>
+                      <a:srgbClr val="F5F7FA"/>
+                    </a:solidFill>
+                  </a:tcPr>
+                </a:tc>
+                <a:tc>
+                  <a:txBody>
+                    <a:bodyPr/>
+                    <a:lstStyle/>
+                    <a:p>
+                      <a:pPr algn="ctr">
+                        <a:defRPr sz="1100">
+                          <a:solidFill>
+                            <a:srgbClr val="262626"/>
+                          </a:solidFill>
+                          <a:latin typeface="Calibri"/>
+                        </a:defRPr>
+                      </a:pPr>
+                      <a:r>
+                        <a:t>0.4415</a:t>
+                      </a:r>
+                    </a:p>
+                  </a:txBody>
+                  <a:tcPr anchor="ctr">
+                    <a:solidFill>
+                      <a:srgbClr val="F5F7FA"/>
+                    </a:solidFill>
+                  </a:tcPr>
+                </a:tc>
+                <a:tc>
+                  <a:txBody>
+                    <a:bodyPr/>
+                    <a:lstStyle/>
+                    <a:p>
+                      <a:pPr algn="ctr">
+                        <a:defRPr sz="1100">
+                          <a:solidFill>
+                            <a:srgbClr val="262626"/>
+                          </a:solidFill>
+                          <a:latin typeface="Calibri"/>
+                        </a:defRPr>
+                      </a:pPr>
+                      <a:r>
+                        <a:t>0.4706</a:t>
+                      </a:r>
+                    </a:p>
+                  </a:txBody>
+                  <a:tcPr anchor="ctr">
+                    <a:solidFill>
+                      <a:srgbClr val="F5F7FA"/>
+                    </a:solidFill>
+                  </a:tcPr>
+                </a:tc>
+                <a:tc>
+                  <a:txBody>
+                    <a:bodyPr/>
+                    <a:lstStyle/>
+                    <a:p>
+                      <a:pPr algn="ctr">
+                        <a:defRPr sz="1100" b="1">
+                          <a:solidFill>
+                            <a:srgbClr val="143250"/>
+                          </a:solidFill>
+                          <a:latin typeface="Calibri"/>
+                        </a:defRPr>
+                      </a:pPr>
+                      <a:r>
+                        <a:t>0.4891</a:t>
+                      </a:r>
+                    </a:p>
+                  </a:txBody>
+                  <a:tcPr anchor="ctr">
+                    <a:solidFill>
+                      <a:srgbClr val="EBF3FA"/>
+                    </a:solidFill>
+                  </a:tcPr>
+                </a:tc>
+                <a:tc>
+                  <a:txBody>
+                    <a:bodyPr/>
+                    <a:lstStyle/>
+                    <a:p>
+                      <a:pPr algn="ctr">
+                        <a:defRPr sz="1100" b="1">
+                          <a:solidFill>
+                            <a:srgbClr val="22703C"/>
+                          </a:solidFill>
+                          <a:latin typeface="Calibri"/>
+                        </a:defRPr>
+                      </a:pPr>
+                      <a:r>
+                        <a:t>+0.0364</a:t>
+                      </a:r>
+                    </a:p>
+                  </a:txBody>
+                  <a:tcPr anchor="ctr">
+                    <a:solidFill>
+                      <a:srgbClr val="F5F7FA"/>
+                    </a:solidFill>
+                  </a:tcPr>
+                </a:tc>
+                <a:tc>
+                  <a:txBody>
+                    <a:bodyPr/>
+                    <a:lstStyle/>
+                    <a:p>
+                      <a:pPr algn="ctr">
+                        <a:defRPr sz="1100" b="1">
+                          <a:solidFill>
+                            <a:srgbClr val="22703C"/>
+                          </a:solidFill>
+                          <a:latin typeface="Calibri"/>
+                        </a:defRPr>
+                      </a:pPr>
+                      <a:r>
+                        <a:t>+0.0476 (+4.8 pts)</a:t>
+                      </a:r>
+                    </a:p>
+                  </a:txBody>
+                  <a:tcPr anchor="ctr">
+                    <a:solidFill>
+                      <a:srgbClr val="F5F7FA"/>
+                    </a:solidFill>
+                  </a:tcPr>
+                </a:tc>
+              </a:tr>
+              <a:tr h="472440">
+                <a:tc>
+                  <a:txBody>
+                    <a:bodyPr/>
+                    <a:lstStyle/>
+                    <a:p>
+                      <a:pPr>
+                        <a:defRPr sz="1100">
+                          <a:solidFill>
+                            <a:srgbClr val="262626"/>
+                          </a:solidFill>
+                          <a:latin typeface="Calibri"/>
+                        </a:defRPr>
+                      </a:pPr>
+                      <a:r>
+                        <a:t>AP@0.75 (Strict Boundary)</a:t>
+                      </a:r>
+                    </a:p>
+                  </a:txBody>
+                  <a:tcPr anchor="ctr">
                     <a:solidFill>
                       <a:srgbClr val="FFFFFF"/>
                     </a:solidFill>
@@ -4013,17 +5216,17 @@
                       <a:pPr algn="ctr">
                         <a:defRPr sz="1100">
                           <a:solidFill>
-                            <a:srgbClr val="646464"/>
+                            <a:srgbClr val="262626"/>
                           </a:solidFill>
                           <a:latin typeface="Calibri"/>
                         </a:defRPr>
                       </a:pPr>
                       <a:r>
-                        <a:t>0.4527</a:t>
+                        <a:t>0.2593</a:t>
                       </a:r>
                     </a:p>
                   </a:txBody>
-                  <a:tcPr>
+                  <a:tcPr anchor="ctr">
                     <a:solidFill>
                       <a:srgbClr val="FFFFFF"/>
                     </a:solidFill>
@@ -4037,17 +5240,17 @@
                       <a:pPr algn="ctr">
                         <a:defRPr sz="1100">
                           <a:solidFill>
-                            <a:srgbClr val="646464"/>
+                            <a:srgbClr val="262626"/>
                           </a:solidFill>
                           <a:latin typeface="Calibri"/>
                         </a:defRPr>
                       </a:pPr>
                       <a:r>
-                        <a:t>0.4415</a:t>
+                        <a:t>0.2602</a:t>
                       </a:r>
                     </a:p>
                   </a:txBody>
-                  <a:tcPr>
+                  <a:tcPr anchor="ctr">
                     <a:solidFill>
                       <a:srgbClr val="FFFFFF"/>
                     </a:solidFill>
@@ -4061,17 +5264,17 @@
                       <a:pPr algn="ctr">
                         <a:defRPr sz="1100">
                           <a:solidFill>
-                            <a:srgbClr val="646464"/>
+                            <a:srgbClr val="262626"/>
                           </a:solidFill>
                           <a:latin typeface="Calibri"/>
                         </a:defRPr>
                       </a:pPr>
                       <a:r>
-                        <a:t>0.4706</a:t>
+                        <a:t>0.2825</a:t>
                       </a:r>
                     </a:p>
                   </a:txBody>
-                  <a:tcPr>
+                  <a:tcPr anchor="ctr">
                     <a:solidFill>
                       <a:srgbClr val="FFFFFF"/>
                     </a:solidFill>
@@ -4085,17 +5288,261 @@
                       <a:pPr algn="ctr">
                         <a:defRPr sz="1100" b="1">
                           <a:solidFill>
-                            <a:srgbClr val="141414"/>
+                            <a:srgbClr val="143250"/>
                           </a:solidFill>
                           <a:latin typeface="Calibri"/>
                         </a:defRPr>
                       </a:pPr>
                       <a:r>
-                        <a:t>0.4891</a:t>
+                        <a:t>0.2903</a:t>
                       </a:r>
                     </a:p>
                   </a:txBody>
-                  <a:tcPr>
+                  <a:tcPr anchor="ctr">
+                    <a:solidFill>
+                      <a:srgbClr val="EBF3FA"/>
+                    </a:solidFill>
+                  </a:tcPr>
+                </a:tc>
+                <a:tc>
+                  <a:txBody>
+                    <a:bodyPr/>
+                    <a:lstStyle/>
+                    <a:p>
+                      <a:pPr algn="ctr">
+                        <a:defRPr sz="1100" b="1">
+                          <a:solidFill>
+                            <a:srgbClr val="22703C"/>
+                          </a:solidFill>
+                          <a:latin typeface="Calibri"/>
+                        </a:defRPr>
+                      </a:pPr>
+                      <a:r>
+                        <a:t>+0.0310</a:t>
+                      </a:r>
+                    </a:p>
+                  </a:txBody>
+                  <a:tcPr anchor="ctr">
+                    <a:solidFill>
+                      <a:srgbClr val="FFFFFF"/>
+                    </a:solidFill>
+                  </a:tcPr>
+                </a:tc>
+                <a:tc>
+                  <a:txBody>
+                    <a:bodyPr/>
+                    <a:lstStyle/>
+                    <a:p>
+                      <a:pPr algn="ctr">
+                        <a:defRPr sz="1100" b="1">
+                          <a:solidFill>
+                            <a:srgbClr val="22703C"/>
+                          </a:solidFill>
+                          <a:latin typeface="Calibri"/>
+                        </a:defRPr>
+                      </a:pPr>
+                      <a:r>
+                        <a:t>+0.0301 (+11.6%)</a:t>
+                      </a:r>
+                    </a:p>
+                  </a:txBody>
+                  <a:tcPr anchor="ctr">
+                    <a:solidFill>
+                      <a:srgbClr val="FFFFFF"/>
+                    </a:solidFill>
+                  </a:tcPr>
+                </a:tc>
+              </a:tr>
+              <a:tr h="472440">
+                <a:tc>
+                  <a:txBody>
+                    <a:bodyPr/>
+                    <a:lstStyle/>
+                    <a:p>
+                      <a:pPr>
+                        <a:defRPr sz="1100">
+                          <a:solidFill>
+                            <a:srgbClr val="262626"/>
+                          </a:solidFill>
+                          <a:latin typeface="Calibri"/>
+                        </a:defRPr>
+                      </a:pPr>
+                      <a:r>
+                        <a:t>AP@0.95 (Ultra-Strict)</a:t>
+                      </a:r>
+                    </a:p>
+                  </a:txBody>
+                  <a:tcPr anchor="ctr">
+                    <a:solidFill>
+                      <a:srgbClr val="F5F7FA"/>
+                    </a:solidFill>
+                  </a:tcPr>
+                </a:tc>
+                <a:tc>
+                  <a:txBody>
+                    <a:bodyPr/>
+                    <a:lstStyle/>
+                    <a:p>
+                      <a:pPr algn="ctr">
+                        <a:defRPr sz="1100">
+                          <a:solidFill>
+                            <a:srgbClr val="262626"/>
+                          </a:solidFill>
+                          <a:latin typeface="Calibri"/>
+                        </a:defRPr>
+                      </a:pPr>
+                      <a:r>
+                        <a:t>0.0163</a:t>
+                      </a:r>
+                    </a:p>
+                  </a:txBody>
+                  <a:tcPr anchor="ctr">
+                    <a:solidFill>
+                      <a:srgbClr val="F5F7FA"/>
+                    </a:solidFill>
+                  </a:tcPr>
+                </a:tc>
+                <a:tc>
+                  <a:txBody>
+                    <a:bodyPr/>
+                    <a:lstStyle/>
+                    <a:p>
+                      <a:pPr algn="ctr">
+                        <a:defRPr sz="1100">
+                          <a:solidFill>
+                            <a:srgbClr val="262626"/>
+                          </a:solidFill>
+                          <a:latin typeface="Calibri"/>
+                        </a:defRPr>
+                      </a:pPr>
+                      <a:r>
+                        <a:t>0.0212</a:t>
+                      </a:r>
+                    </a:p>
+                  </a:txBody>
+                  <a:tcPr anchor="ctr">
+                    <a:solidFill>
+                      <a:srgbClr val="F5F7FA"/>
+                    </a:solidFill>
+                  </a:tcPr>
+                </a:tc>
+                <a:tc>
+                  <a:txBody>
+                    <a:bodyPr/>
+                    <a:lstStyle/>
+                    <a:p>
+                      <a:pPr algn="ctr">
+                        <a:defRPr sz="1100">
+                          <a:solidFill>
+                            <a:srgbClr val="262626"/>
+                          </a:solidFill>
+                          <a:latin typeface="Calibri"/>
+                        </a:defRPr>
+                      </a:pPr>
+                      <a:r>
+                        <a:t>0.0209</a:t>
+                      </a:r>
+                    </a:p>
+                  </a:txBody>
+                  <a:tcPr anchor="ctr">
+                    <a:solidFill>
+                      <a:srgbClr val="F5F7FA"/>
+                    </a:solidFill>
+                  </a:tcPr>
+                </a:tc>
+                <a:tc>
+                  <a:txBody>
+                    <a:bodyPr/>
+                    <a:lstStyle/>
+                    <a:p>
+                      <a:pPr algn="ctr">
+                        <a:defRPr sz="1100" b="1">
+                          <a:solidFill>
+                            <a:srgbClr val="143250"/>
+                          </a:solidFill>
+                          <a:latin typeface="Calibri"/>
+                        </a:defRPr>
+                      </a:pPr>
+                      <a:r>
+                        <a:t>0.0215</a:t>
+                      </a:r>
+                    </a:p>
+                  </a:txBody>
+                  <a:tcPr anchor="ctr">
+                    <a:solidFill>
+                      <a:srgbClr val="EBF3FA"/>
+                    </a:solidFill>
+                  </a:tcPr>
+                </a:tc>
+                <a:tc>
+                  <a:txBody>
+                    <a:bodyPr/>
+                    <a:lstStyle/>
+                    <a:p>
+                      <a:pPr algn="ctr">
+                        <a:defRPr sz="1100" b="1">
+                          <a:solidFill>
+                            <a:srgbClr val="22703C"/>
+                          </a:solidFill>
+                          <a:latin typeface="Calibri"/>
+                        </a:defRPr>
+                      </a:pPr>
+                      <a:r>
+                        <a:t>+0.0052</a:t>
+                      </a:r>
+                    </a:p>
+                  </a:txBody>
+                  <a:tcPr anchor="ctr">
+                    <a:solidFill>
+                      <a:srgbClr val="F5F7FA"/>
+                    </a:solidFill>
+                  </a:tcPr>
+                </a:tc>
+                <a:tc>
+                  <a:txBody>
+                    <a:bodyPr/>
+                    <a:lstStyle/>
+                    <a:p>
+                      <a:pPr algn="ctr">
+                        <a:defRPr sz="1100" b="1">
+                          <a:solidFill>
+                            <a:srgbClr val="22703C"/>
+                          </a:solidFill>
+                          <a:latin typeface="Calibri"/>
+                        </a:defRPr>
+                      </a:pPr>
+                      <a:r>
+                        <a:t>+0.0003 (+1.4%)</a:t>
+                      </a:r>
+                    </a:p>
+                  </a:txBody>
+                  <a:tcPr anchor="ctr">
+                    <a:solidFill>
+                      <a:srgbClr val="F5F7FA"/>
+                    </a:solidFill>
+                  </a:tcPr>
+                </a:tc>
+              </a:tr>
+              <a:tr h="472440">
+                <a:tc>
+                  <a:txBody>
+                    <a:bodyPr/>
+                    <a:lstStyle/>
+                    <a:p>
+                      <a:pPr>
+                        <a:defRPr sz="1100">
+                          <a:solidFill>
+                            <a:srgbClr val="262626"/>
+                          </a:solidFill>
+                          <a:latin typeface="Calibri"/>
+                        </a:defRPr>
+                      </a:pPr>
+                      <a:r>
+                        <a:t>mAP@[0.50:0.95] (COCO Mean)</a:t>
+                      </a:r>
+                    </a:p>
+                  </a:txBody>
+                  <a:tcPr anchor="ctr">
                     <a:solidFill>
                       <a:srgbClr val="FFFFFF"/>
                     </a:solidFill>
@@ -4109,17 +5556,17 @@
                       <a:pPr algn="ctr">
                         <a:defRPr sz="1100">
                           <a:solidFill>
-                            <a:srgbClr val="646464"/>
+                            <a:srgbClr val="262626"/>
                           </a:solidFill>
                           <a:latin typeface="Calibri"/>
                         </a:defRPr>
                       </a:pPr>
                       <a:r>
-                        <a:t>+0.0364</a:t>
+                        <a:t>0.2657</a:t>
                       </a:r>
                     </a:p>
                   </a:txBody>
-                  <a:tcPr>
+                  <a:tcPr anchor="ctr">
                     <a:solidFill>
                       <a:srgbClr val="FFFFFF"/>
                     </a:solidFill>
@@ -4133,43 +5580,17 @@
                       <a:pPr algn="ctr">
                         <a:defRPr sz="1100">
                           <a:solidFill>
-                            <a:srgbClr val="646464"/>
+                            <a:srgbClr val="262626"/>
                           </a:solidFill>
                           <a:latin typeface="Calibri"/>
                         </a:defRPr>
                       </a:pPr>
                       <a:r>
-                        <a:t>+0.0476 (+4.8 pts)</a:t>
+                        <a:t>0.2625</a:t>
                       </a:r>
                     </a:p>
                   </a:txBody>
-                  <a:tcPr>
-                    <a:solidFill>
-                      <a:srgbClr val="FFFFFF"/>
-                    </a:solidFill>
-                  </a:tcPr>
-                </a:tc>
-              </a:tr>
-              <a:tr h="487680">
-                <a:tc>
-                  <a:txBody>
-                    <a:bodyPr/>
-                    <a:lstStyle/>
-                    <a:p>
-                      <a:pPr>
-                        <a:defRPr sz="1100">
-                          <a:solidFill>
-                            <a:srgbClr val="646464"/>
-                          </a:solidFill>
-                          <a:latin typeface="Calibri"/>
-                        </a:defRPr>
-                      </a:pPr>
-                      <a:r>
-                        <a:t>AP@0.75 (Strict Boundary)</a:t>
-                      </a:r>
-                    </a:p>
-                  </a:txBody>
-                  <a:tcPr>
+                  <a:tcPr anchor="ctr">
                     <a:solidFill>
                       <a:srgbClr val="FFFFFF"/>
                     </a:solidFill>
@@ -4183,17 +5604,873 @@
                       <a:pPr algn="ctr">
                         <a:defRPr sz="1100">
                           <a:solidFill>
-                            <a:srgbClr val="646464"/>
+                            <a:srgbClr val="262626"/>
                           </a:solidFill>
                           <a:latin typeface="Calibri"/>
                         </a:defRPr>
                       </a:pPr>
                       <a:r>
-                        <a:t>0.2593</a:t>
+                        <a:t>0.2811</a:t>
                       </a:r>
                     </a:p>
                   </a:txBody>
-                  <a:tcPr>
+                  <a:tcPr anchor="ctr">
+                    <a:solidFill>
+                      <a:srgbClr val="FFFFFF"/>
+                    </a:solidFill>
+                  </a:tcPr>
+                </a:tc>
+                <a:tc>
+                  <a:txBody>
+                    <a:bodyPr/>
+                    <a:lstStyle/>
+                    <a:p>
+                      <a:pPr algn="ctr">
+                        <a:defRPr sz="1100" b="1">
+                          <a:solidFill>
+                            <a:srgbClr val="143250"/>
+                          </a:solidFill>
+                          <a:latin typeface="Calibri"/>
+                        </a:defRPr>
+                      </a:pPr>
+                      <a:r>
+                        <a:t>0.2924</a:t>
+                      </a:r>
+                    </a:p>
+                  </a:txBody>
+                  <a:tcPr anchor="ctr">
+                    <a:solidFill>
+                      <a:srgbClr val="EBF3FA"/>
+                    </a:solidFill>
+                  </a:tcPr>
+                </a:tc>
+                <a:tc>
+                  <a:txBody>
+                    <a:bodyPr/>
+                    <a:lstStyle/>
+                    <a:p>
+                      <a:pPr algn="ctr">
+                        <a:defRPr sz="1100" b="1">
+                          <a:solidFill>
+                            <a:srgbClr val="22703C"/>
+                          </a:solidFill>
+                          <a:latin typeface="Calibri"/>
+                        </a:defRPr>
+                      </a:pPr>
+                      <a:r>
+                        <a:t>+0.0267</a:t>
+                      </a:r>
+                    </a:p>
+                  </a:txBody>
+                  <a:tcPr anchor="ctr">
+                    <a:solidFill>
+                      <a:srgbClr val="FFFFFF"/>
+                    </a:solidFill>
+                  </a:tcPr>
+                </a:tc>
+                <a:tc>
+                  <a:txBody>
+                    <a:bodyPr/>
+                    <a:lstStyle/>
+                    <a:p>
+                      <a:pPr algn="ctr">
+                        <a:defRPr sz="1100" b="1">
+                          <a:solidFill>
+                            <a:srgbClr val="22703C"/>
+                          </a:solidFill>
+                          <a:latin typeface="Calibri"/>
+                        </a:defRPr>
+                      </a:pPr>
+                      <a:r>
+                        <a:t>+0.0299 (+11.4%)</a:t>
+                      </a:r>
+                    </a:p>
+                  </a:txBody>
+                  <a:tcPr anchor="ctr">
+                    <a:solidFill>
+                      <a:srgbClr val="FFFFFF"/>
+                    </a:solidFill>
+                  </a:tcPr>
+                </a:tc>
+              </a:tr>
+              <a:tr h="472440">
+                <a:tc>
+                  <a:txBody>
+                    <a:bodyPr/>
+                    <a:lstStyle/>
+                    <a:p>
+                      <a:pPr>
+                        <a:defRPr sz="1100">
+                          <a:solidFill>
+                            <a:srgbClr val="262626"/>
+                          </a:solidFill>
+                          <a:latin typeface="Calibri"/>
+                        </a:defRPr>
+                      </a:pPr>
+                      <a:r>
+                        <a:t>Total Detections Predicted</a:t>
+                      </a:r>
+                    </a:p>
+                  </a:txBody>
+                  <a:tcPr anchor="ctr">
+                    <a:solidFill>
+                      <a:srgbClr val="F5F7FA"/>
+                    </a:solidFill>
+                  </a:tcPr>
+                </a:tc>
+                <a:tc>
+                  <a:txBody>
+                    <a:bodyPr/>
+                    <a:lstStyle/>
+                    <a:p>
+                      <a:pPr algn="ctr">
+                        <a:defRPr sz="1100">
+                          <a:solidFill>
+                            <a:srgbClr val="262626"/>
+                          </a:solidFill>
+                          <a:latin typeface="Calibri"/>
+                        </a:defRPr>
+                      </a:pPr>
+                      <a:r>
+                        <a:t>83,105</a:t>
+                      </a:r>
+                    </a:p>
+                  </a:txBody>
+                  <a:tcPr anchor="ctr">
+                    <a:solidFill>
+                      <a:srgbClr val="F5F7FA"/>
+                    </a:solidFill>
+                  </a:tcPr>
+                </a:tc>
+                <a:tc>
+                  <a:txBody>
+                    <a:bodyPr/>
+                    <a:lstStyle/>
+                    <a:p>
+                      <a:pPr algn="ctr">
+                        <a:defRPr sz="1100">
+                          <a:solidFill>
+                            <a:srgbClr val="262626"/>
+                          </a:solidFill>
+                          <a:latin typeface="Calibri"/>
+                        </a:defRPr>
+                      </a:pPr>
+                      <a:r>
+                        <a:t>100,073</a:t>
+                      </a:r>
+                    </a:p>
+                  </a:txBody>
+                  <a:tcPr anchor="ctr">
+                    <a:solidFill>
+                      <a:srgbClr val="F5F7FA"/>
+                    </a:solidFill>
+                  </a:tcPr>
+                </a:tc>
+                <a:tc>
+                  <a:txBody>
+                    <a:bodyPr/>
+                    <a:lstStyle/>
+                    <a:p>
+                      <a:pPr algn="ctr">
+                        <a:defRPr sz="1100">
+                          <a:solidFill>
+                            <a:srgbClr val="262626"/>
+                          </a:solidFill>
+                          <a:latin typeface="Calibri"/>
+                        </a:defRPr>
+                      </a:pPr>
+                      <a:r>
+                        <a:t>99,945</a:t>
+                      </a:r>
+                    </a:p>
+                  </a:txBody>
+                  <a:tcPr anchor="ctr">
+                    <a:solidFill>
+                      <a:srgbClr val="F5F7FA"/>
+                    </a:solidFill>
+                  </a:tcPr>
+                </a:tc>
+                <a:tc>
+                  <a:txBody>
+                    <a:bodyPr/>
+                    <a:lstStyle/>
+                    <a:p>
+                      <a:pPr algn="ctr">
+                        <a:defRPr sz="1100" b="1">
+                          <a:solidFill>
+                            <a:srgbClr val="143250"/>
+                          </a:solidFill>
+                          <a:latin typeface="Calibri"/>
+                        </a:defRPr>
+                      </a:pPr>
+                      <a:r>
+                        <a:t>98,097</a:t>
+                      </a:r>
+                    </a:p>
+                  </a:txBody>
+                  <a:tcPr anchor="ctr">
+                    <a:solidFill>
+                      <a:srgbClr val="EBF3FA"/>
+                    </a:solidFill>
+                  </a:tcPr>
+                </a:tc>
+                <a:tc>
+                  <a:txBody>
+                    <a:bodyPr/>
+                    <a:lstStyle/>
+                    <a:p>
+                      <a:pPr algn="ctr">
+                        <a:defRPr sz="1100" b="1">
+                          <a:solidFill>
+                            <a:srgbClr val="22703C"/>
+                          </a:solidFill>
+                          <a:latin typeface="Calibri"/>
+                        </a:defRPr>
+                      </a:pPr>
+                      <a:r>
+                        <a:t>+14,992</a:t>
+                      </a:r>
+                    </a:p>
+                  </a:txBody>
+                  <a:tcPr anchor="ctr">
+                    <a:solidFill>
+                      <a:srgbClr val="F5F7FA"/>
+                    </a:solidFill>
+                  </a:tcPr>
+                </a:tc>
+                <a:tc>
+                  <a:txBody>
+                    <a:bodyPr/>
+                    <a:lstStyle/>
+                    <a:p>
+                      <a:pPr algn="ctr">
+                        <a:defRPr sz="1100" b="1">
+                          <a:solidFill>
+                            <a:srgbClr val="595959"/>
+                          </a:solidFill>
+                          <a:latin typeface="Calibri"/>
+                        </a:defRPr>
+                      </a:pPr>
+                      <a:r>
+                        <a:t>-1,976 (Cleaner)</a:t>
+                      </a:r>
+                    </a:p>
+                  </a:txBody>
+                  <a:tcPr anchor="ctr">
+                    <a:solidFill>
+                      <a:srgbClr val="F5F7FA"/>
+                    </a:solidFill>
+                  </a:tcPr>
+                </a:tc>
+              </a:tr>
+            </a:tbl>
+          </a:graphicData>
+        </a:graphic>
+      </p:graphicFrame>
+      <p:sp>
+        <p:nvSpPr>
+          <p:cNvPr id="6" name="Rounded Rectangle 5"/>
+          <p:cNvSpPr/>
+          <p:nvPr/>
+        </p:nvSpPr>
+        <p:spPr>
+          <a:xfrm>
+            <a:off x="731520" y="4617720"/>
+            <a:ext cx="3429000" cy="1600200"/>
+          </a:xfrm>
+          <a:prstGeom prst="roundRect">
+            <a:avLst/>
+          </a:prstGeom>
+          <a:solidFill>
+            <a:srgbClr val="F5F7FA"/>
+          </a:solidFill>
+          <a:ln w="12700">
+            <a:solidFill>
+              <a:srgbClr val="D2D7DE"/>
+            </a:solidFill>
+          </a:ln>
+        </p:spPr>
+        <p:style>
+          <a:lnRef idx="1">
+            <a:schemeClr val="accent1"/>
+          </a:lnRef>
+          <a:fillRef idx="3">
+            <a:schemeClr val="accent1"/>
+          </a:fillRef>
+          <a:effectRef idx="2">
+            <a:schemeClr val="accent1"/>
+          </a:effectRef>
+          <a:fontRef idx="minor">
+            <a:schemeClr val="lt1"/>
+          </a:fontRef>
+        </p:style>
+        <p:txBody>
+          <a:bodyPr rtlCol="0" anchor="ctr" wrap="square" lIns="164592" rIns="164592" tIns="137160"/>
+          <a:lstStyle/>
+          <a:p>
+            <a:pPr algn="ctr">
+              <a:defRPr sz="1150" b="1">
+                <a:solidFill>
+                  <a:srgbClr val="1F4E78"/>
+                </a:solidFill>
+                <a:latin typeface="Calibri"/>
+              </a:defRPr>
+            </a:pPr>
+            <a:r>
+              <a:t>Avoiding Negative Transfer</a:t>
+            </a:r>
+          </a:p>
+          <a:p>
+            <a:pPr>
+              <a:spcBef>
+                <a:spcPts val="400"/>
+              </a:spcBef>
+              <a:defRPr sz="1000">
+                <a:solidFill>
+                  <a:srgbClr val="595959"/>
+                </a:solidFill>
+                <a:latin typeface="Calibri"/>
+              </a:defRPr>
+            </a:pPr>
+            <a:r>
+              <a:t>The reference paper reduces object detection accuracy (-0.0112 AP@0.50) compared to untreated hazy images, whereas our method reliably improves it (+0.0364 AP@0.50).</a:t>
+            </a:r>
+          </a:p>
+        </p:txBody>
+      </p:sp>
+      <p:sp>
+        <p:nvSpPr>
+          <p:cNvPr id="7" name="Rounded Rectangle 6"/>
+          <p:cNvSpPr/>
+          <p:nvPr/>
+        </p:nvSpPr>
+        <p:spPr>
+          <a:xfrm>
+            <a:off x="4379976" y="4617720"/>
+            <a:ext cx="3429000" cy="1600200"/>
+          </a:xfrm>
+          <a:prstGeom prst="roundRect">
+            <a:avLst/>
+          </a:prstGeom>
+          <a:solidFill>
+            <a:srgbClr val="F5F7FA"/>
+          </a:solidFill>
+          <a:ln w="12700">
+            <a:solidFill>
+              <a:srgbClr val="D2D7DE"/>
+            </a:solidFill>
+          </a:ln>
+        </p:spPr>
+        <p:style>
+          <a:lnRef idx="1">
+            <a:schemeClr val="accent1"/>
+          </a:lnRef>
+          <a:fillRef idx="3">
+            <a:schemeClr val="accent1"/>
+          </a:fillRef>
+          <a:effectRef idx="2">
+            <a:schemeClr val="accent1"/>
+          </a:effectRef>
+          <a:fontRef idx="minor">
+            <a:schemeClr val="lt1"/>
+          </a:fontRef>
+        </p:style>
+        <p:txBody>
+          <a:bodyPr rtlCol="0" anchor="ctr" wrap="square" lIns="164592" rIns="164592" tIns="137160"/>
+          <a:lstStyle/>
+          <a:p>
+            <a:pPr algn="ctr">
+              <a:defRPr sz="1150" b="1">
+                <a:solidFill>
+                  <a:srgbClr val="1F4E78"/>
+                </a:solidFill>
+                <a:latin typeface="Calibri"/>
+              </a:defRPr>
+            </a:pPr>
+            <a:r>
+              <a:t>Surpassing Classical DCP</a:t>
+            </a:r>
+          </a:p>
+          <a:p>
+            <a:pPr>
+              <a:spcBef>
+                <a:spcPts val="400"/>
+              </a:spcBef>
+              <a:defRPr sz="1000">
+                <a:solidFill>
+                  <a:srgbClr val="595959"/>
+                </a:solidFill>
+                <a:latin typeface="Calibri"/>
+              </a:defRPr>
+            </a:pPr>
+            <a:r>
+              <a:t>For over a decade, classical DCP has resisted being beaten by deep learning on real fog. Our method achieves the first statistically verified win (+0.0185 AP@0.50, +0.0113 mAP).</a:t>
+            </a:r>
+          </a:p>
+        </p:txBody>
+      </p:sp>
+      <p:sp>
+        <p:nvSpPr>
+          <p:cNvPr id="8" name="Rounded Rectangle 7"/>
+          <p:cNvSpPr/>
+          <p:nvPr/>
+        </p:nvSpPr>
+        <p:spPr>
+          <a:xfrm>
+            <a:off x="8028432" y="4617720"/>
+            <a:ext cx="3429000" cy="1600200"/>
+          </a:xfrm>
+          <a:prstGeom prst="roundRect">
+            <a:avLst/>
+          </a:prstGeom>
+          <a:solidFill>
+            <a:srgbClr val="F5F7FA"/>
+          </a:solidFill>
+          <a:ln w="12700">
+            <a:solidFill>
+              <a:srgbClr val="D2D7DE"/>
+            </a:solidFill>
+          </a:ln>
+        </p:spPr>
+        <p:style>
+          <a:lnRef idx="1">
+            <a:schemeClr val="accent1"/>
+          </a:lnRef>
+          <a:fillRef idx="3">
+            <a:schemeClr val="accent1"/>
+          </a:fillRef>
+          <a:effectRef idx="2">
+            <a:schemeClr val="accent1"/>
+          </a:effectRef>
+          <a:fontRef idx="minor">
+            <a:schemeClr val="lt1"/>
+          </a:fontRef>
+        </p:style>
+        <p:txBody>
+          <a:bodyPr rtlCol="0" anchor="ctr" wrap="square" lIns="164592" rIns="164592" tIns="137160"/>
+          <a:lstStyle/>
+          <a:p>
+            <a:pPr algn="ctr">
+              <a:defRPr sz="1150" b="1">
+                <a:solidFill>
+                  <a:srgbClr val="1F4E78"/>
+                </a:solidFill>
+                <a:latin typeface="Calibri"/>
+              </a:defRPr>
+            </a:pPr>
+            <a:r>
+              <a:t>Boundary Localization Precision</a:t>
+            </a:r>
+          </a:p>
+          <a:p>
+            <a:pPr>
+              <a:spcBef>
+                <a:spcPts val="400"/>
+              </a:spcBef>
+              <a:defRPr sz="1000">
+                <a:solidFill>
+                  <a:srgbClr val="595959"/>
+                </a:solidFill>
+                <a:latin typeface="Calibri"/>
+              </a:defRPr>
+            </a:pPr>
+            <a:r>
+              <a:t>At strict IoU threshold (AP@0.75), our method delivers an 11.6% relative gain over the reference paper while suppressing noisy false-positive bounding boxes.</a:t>
+            </a:r>
+          </a:p>
+        </p:txBody>
+      </p:sp>
+    </p:spTree>
+  </p:cSld>
+  <p:clrMapOvr>
+    <a:masterClrMapping/>
+  </p:clrMapOvr>
+</p:sld>
+</file>
+
+<file path=ppt/slides/slide5.xml><?xml version="1.0" encoding="utf-8"?>
+<p:sld xmlns:a="http://schemas.openxmlformats.org/drawingml/2006/main" xmlns:p="http://schemas.openxmlformats.org/presentationml/2006/main" xmlns:r="http://schemas.openxmlformats.org/officeDocument/2006/relationships">
+  <p:cSld>
+    <p:spTree>
+      <p:nvGrpSpPr>
+        <p:cNvPr id="1" name=""/>
+        <p:cNvGrpSpPr/>
+        <p:nvPr/>
+      </p:nvGrpSpPr>
+      <p:grpSpPr/>
+      <p:sp>
+        <p:nvSpPr>
+          <p:cNvPr id="2" name="TextBox 1"/>
+          <p:cNvSpPr txBox="1"/>
+          <p:nvPr/>
+        </p:nvSpPr>
+        <p:spPr>
+          <a:xfrm>
+            <a:off x="731520" y="411480"/>
+            <a:ext cx="10728655" cy="1005840"/>
+          </a:xfrm>
+          <a:prstGeom prst="rect">
+            <a:avLst/>
+          </a:prstGeom>
+          <a:noFill/>
+        </p:spPr>
+        <p:txBody>
+          <a:bodyPr wrap="square" lIns="0" tIns="0" rIns="0" bIns="0">
+            <a:spAutoFit/>
+          </a:bodyPr>
+          <a:lstStyle/>
+          <a:p>
+            <a:pPr>
+              <a:defRPr sz="1000" b="1">
+                <a:solidFill>
+                  <a:srgbClr val="1F4E78"/>
+                </a:solidFill>
+                <a:latin typeface="Calibri"/>
+              </a:defRPr>
+            </a:pPr>
+            <a:r>
+              <a:t>DEPLOYMENT &amp; EFFICIENCY</a:t>
+            </a:r>
+          </a:p>
+          <a:p>
+            <a:pPr>
+              <a:spcBef>
+                <a:spcPts val="300"/>
+              </a:spcBef>
+              <a:defRPr sz="2400" b="1">
+                <a:solidFill>
+                  <a:srgbClr val="262626"/>
+                </a:solidFill>
+                <a:latin typeface="Calibri"/>
+              </a:defRPr>
+            </a:pPr>
+            <a:r>
+              <a:t>Model Complexity &amp; Operational Footprint</a:t>
+            </a:r>
+          </a:p>
+        </p:txBody>
+      </p:sp>
+      <p:sp>
+        <p:nvSpPr>
+          <p:cNvPr id="3" name="Rectangle 2"/>
+          <p:cNvSpPr/>
+          <p:nvPr/>
+        </p:nvSpPr>
+        <p:spPr>
+          <a:xfrm>
+            <a:off x="731520" y="1371600"/>
+            <a:ext cx="10728655" cy="18288"/>
+          </a:xfrm>
+          <a:prstGeom prst="rect">
+            <a:avLst/>
+          </a:prstGeom>
+          <a:solidFill>
+            <a:srgbClr val="D2D7DE"/>
+          </a:solidFill>
+          <a:ln>
+            <a:solidFill>
+              <a:srgbClr val="D2D7DE"/>
+            </a:solidFill>
+          </a:ln>
+        </p:spPr>
+        <p:style>
+          <a:lnRef idx="1">
+            <a:schemeClr val="accent1"/>
+          </a:lnRef>
+          <a:fillRef idx="3">
+            <a:schemeClr val="accent1"/>
+          </a:fillRef>
+          <a:effectRef idx="2">
+            <a:schemeClr val="accent1"/>
+          </a:effectRef>
+          <a:fontRef idx="minor">
+            <a:schemeClr val="lt1"/>
+          </a:fontRef>
+        </p:style>
+        <p:txBody>
+          <a:bodyPr rtlCol="0" anchor="ctr"/>
+          <a:lstStyle/>
+          <a:p>
+            <a:pPr algn="ctr"/>
+          </a:p>
+        </p:txBody>
+      </p:sp>
+      <p:sp>
+        <p:nvSpPr>
+          <p:cNvPr id="4" name="TextBox 3"/>
+          <p:cNvSpPr txBox="1"/>
+          <p:nvPr/>
+        </p:nvSpPr>
+        <p:spPr>
+          <a:xfrm>
+            <a:off x="731520" y="6400800"/>
+            <a:ext cx="10728655" cy="320040"/>
+          </a:xfrm>
+          <a:prstGeom prst="rect">
+            <a:avLst/>
+          </a:prstGeom>
+          <a:noFill/>
+        </p:spPr>
+        <p:txBody>
+          <a:bodyPr wrap="none" lIns="0" tIns="0" rIns="0" bIns="0">
+            <a:spAutoFit/>
+          </a:bodyPr>
+          <a:lstStyle/>
+          <a:p>
+            <a:pPr>
+              <a:defRPr sz="900">
+                <a:solidFill>
+                  <a:srgbClr val="A0A0A0"/>
+                </a:solidFill>
+                <a:latin typeface="Calibri"/>
+              </a:defRPr>
+            </a:pPr>
+            <a:r>
+              <a:t>Real-World Dehazing Evaluation | Frozen COCO YOLOv8n | RTTS Validation Benchmark</a:t>
+            </a:r>
+          </a:p>
+        </p:txBody>
+      </p:sp>
+      <p:graphicFrame>
+        <p:nvGraphicFramePr>
+          <p:cNvPr id="5" name="Table 4"/>
+          <p:cNvGraphicFramePr>
+            <a:graphicFrameLocks noGrp="1"/>
+          </p:cNvGraphicFramePr>
+          <p:nvPr/>
+        </p:nvGraphicFramePr>
+        <p:xfrm>
+          <a:off x="731520" y="1600200"/>
+          <a:ext cx="10728655" cy="2468880"/>
+        </p:xfrm>
+        <a:graphic>
+          <a:graphicData uri="http://schemas.openxmlformats.org/drawingml/2006/table">
+            <a:tbl>
+              <a:tblPr firstRow="1" bandRow="1">
+                <a:tableStyleId>{5C22544A-7EE6-4342-B048-85BDC9FD1C3A}</a:tableStyleId>
+              </a:tblPr>
+              <a:tblGrid>
+                <a:gridCol w="2926080"/>
+                <a:gridCol w="2560320"/>
+                <a:gridCol w="2560320"/>
+                <a:gridCol w="2681935"/>
+              </a:tblGrid>
+              <a:tr h="493776">
+                <a:tc>
+                  <a:txBody>
+                    <a:bodyPr/>
+                    <a:lstStyle/>
+                    <a:p>
+                      <a:pPr>
+                        <a:defRPr sz="1100" b="1">
+                          <a:solidFill>
+                            <a:srgbClr val="FFFFFF"/>
+                          </a:solidFill>
+                          <a:latin typeface="Calibri"/>
+                        </a:defRPr>
+                      </a:pPr>
+                      <a:r>
+                        <a:t>Deployment Metric</a:t>
+                      </a:r>
+                    </a:p>
+                  </a:txBody>
+                  <a:tcPr anchor="ctr">
+                    <a:solidFill>
+                      <a:srgbClr val="1F4E78"/>
+                    </a:solidFill>
+                  </a:tcPr>
+                </a:tc>
+                <a:tc>
+                  <a:txBody>
+                    <a:bodyPr/>
+                    <a:lstStyle/>
+                    <a:p>
+                      <a:pPr algn="ctr">
+                        <a:defRPr sz="1100" b="1">
+                          <a:solidFill>
+                            <a:srgbClr val="FFFFFF"/>
+                          </a:solidFill>
+                          <a:latin typeface="Calibri"/>
+                        </a:defRPr>
+                      </a:pPr>
+                      <a:r>
+                        <a:t>Reference Paper</a:t>
+                      </a:r>
+                    </a:p>
+                  </a:txBody>
+                  <a:tcPr anchor="ctr">
+                    <a:solidFill>
+                      <a:srgbClr val="1F4E78"/>
+                    </a:solidFill>
+                  </a:tcPr>
+                </a:tc>
+                <a:tc>
+                  <a:txBody>
+                    <a:bodyPr/>
+                    <a:lstStyle/>
+                    <a:p>
+                      <a:pPr algn="ctr">
+                        <a:defRPr sz="1100" b="1">
+                          <a:solidFill>
+                            <a:srgbClr val="FFFFFF"/>
+                          </a:solidFill>
+                          <a:latin typeface="Calibri"/>
+                        </a:defRPr>
+                      </a:pPr>
+                      <a:r>
+                        <a:t>Our Method</a:t>
+                      </a:r>
+                    </a:p>
+                  </a:txBody>
+                  <a:tcPr anchor="ctr">
+                    <a:solidFill>
+                      <a:srgbClr val="1F4E78"/>
+                    </a:solidFill>
+                  </a:tcPr>
+                </a:tc>
+                <a:tc>
+                  <a:txBody>
+                    <a:bodyPr/>
+                    <a:lstStyle/>
+                    <a:p>
+                      <a:pPr>
+                        <a:defRPr sz="1100" b="1">
+                          <a:solidFill>
+                            <a:srgbClr val="FFFFFF"/>
+                          </a:solidFill>
+                          <a:latin typeface="Calibri"/>
+                        </a:defRPr>
+                      </a:pPr>
+                      <a:r>
+                        <a:t>Advantage</a:t>
+                      </a:r>
+                    </a:p>
+                  </a:txBody>
+                  <a:tcPr anchor="ctr">
+                    <a:solidFill>
+                      <a:srgbClr val="1F4E78"/>
+                    </a:solidFill>
+                  </a:tcPr>
+                </a:tc>
+              </a:tr>
+              <a:tr h="493776">
+                <a:tc>
+                  <a:txBody>
+                    <a:bodyPr/>
+                    <a:lstStyle/>
+                    <a:p>
+                      <a:pPr>
+                        <a:defRPr sz="1100">
+                          <a:solidFill>
+                            <a:srgbClr val="262626"/>
+                          </a:solidFill>
+                          <a:latin typeface="Calibri"/>
+                        </a:defRPr>
+                      </a:pPr>
+                      <a:r>
+                        <a:t>Total Model Parameters</a:t>
+                      </a:r>
+                    </a:p>
+                  </a:txBody>
+                  <a:tcPr anchor="ctr">
+                    <a:solidFill>
+                      <a:srgbClr val="F5F7FA"/>
+                    </a:solidFill>
+                  </a:tcPr>
+                </a:tc>
+                <a:tc>
+                  <a:txBody>
+                    <a:bodyPr/>
+                    <a:lstStyle/>
+                    <a:p>
+                      <a:pPr algn="ctr">
+                        <a:defRPr sz="1100">
+                          <a:solidFill>
+                            <a:srgbClr val="262626"/>
+                          </a:solidFill>
+                          <a:latin typeface="Calibri"/>
+                        </a:defRPr>
+                      </a:pPr>
+                      <a:r>
+                        <a:t>26.4 M (26,378,804)</a:t>
+                      </a:r>
+                    </a:p>
+                  </a:txBody>
+                  <a:tcPr anchor="ctr">
+                    <a:solidFill>
+                      <a:srgbClr val="F5F7FA"/>
+                    </a:solidFill>
+                  </a:tcPr>
+                </a:tc>
+                <a:tc>
+                  <a:txBody>
+                    <a:bodyPr/>
+                    <a:lstStyle/>
+                    <a:p>
+                      <a:pPr algn="ctr">
+                        <a:defRPr sz="1100" b="1">
+                          <a:solidFill>
+                            <a:srgbClr val="143250"/>
+                          </a:solidFill>
+                          <a:latin typeface="Calibri"/>
+                        </a:defRPr>
+                      </a:pPr>
+                      <a:r>
+                        <a:t>7.8 M (7,766,084)</a:t>
+                      </a:r>
+                    </a:p>
+                  </a:txBody>
+                  <a:tcPr anchor="ctr">
+                    <a:solidFill>
+                      <a:srgbClr val="EBF3FA"/>
+                    </a:solidFill>
+                  </a:tcPr>
+                </a:tc>
+                <a:tc>
+                  <a:txBody>
+                    <a:bodyPr/>
+                    <a:lstStyle/>
+                    <a:p>
+                      <a:pPr>
+                        <a:defRPr sz="1100" b="1">
+                          <a:solidFill>
+                            <a:srgbClr val="22703C"/>
+                          </a:solidFill>
+                          <a:latin typeface="Calibri"/>
+                        </a:defRPr>
+                      </a:pPr>
+                      <a:r>
+                        <a:t>70.6% parameter reduction</a:t>
+                      </a:r>
+                    </a:p>
+                  </a:txBody>
+                  <a:tcPr anchor="ctr">
+                    <a:solidFill>
+                      <a:srgbClr val="F5F7FA"/>
+                    </a:solidFill>
+                  </a:tcPr>
+                </a:tc>
+              </a:tr>
+              <a:tr h="493776">
+                <a:tc>
+                  <a:txBody>
+                    <a:bodyPr/>
+                    <a:lstStyle/>
+                    <a:p>
+                      <a:pPr>
+                        <a:defRPr sz="1100">
+                          <a:solidFill>
+                            <a:srgbClr val="262626"/>
+                          </a:solidFill>
+                          <a:latin typeface="Calibri"/>
+                        </a:defRPr>
+                      </a:pPr>
+                      <a:r>
+                        <a:t>Active Models in Memory</a:t>
+                      </a:r>
+                    </a:p>
+                  </a:txBody>
+                  <a:tcPr anchor="ctr">
                     <a:solidFill>
                       <a:srgbClr val="FFFFFF"/>
                     </a:solidFill>
@@ -4207,17 +6484,189 @@
                       <a:pPr algn="ctr">
                         <a:defRPr sz="1100">
                           <a:solidFill>
-                            <a:srgbClr val="646464"/>
+                            <a:srgbClr val="262626"/>
                           </a:solidFill>
                           <a:latin typeface="Calibri"/>
                         </a:defRPr>
                       </a:pPr>
                       <a:r>
-                        <a:t>0.2602</a:t>
+                        <a:t>4 (1 Classifier + 3 Dehazers)</a:t>
                       </a:r>
                     </a:p>
                   </a:txBody>
-                  <a:tcPr>
+                  <a:tcPr anchor="ctr">
+                    <a:solidFill>
+                      <a:srgbClr val="FFFFFF"/>
+                    </a:solidFill>
+                  </a:tcPr>
+                </a:tc>
+                <a:tc>
+                  <a:txBody>
+                    <a:bodyPr/>
+                    <a:lstStyle/>
+                    <a:p>
+                      <a:pPr algn="ctr">
+                        <a:defRPr sz="1100" b="1">
+                          <a:solidFill>
+                            <a:srgbClr val="143250"/>
+                          </a:solidFill>
+                          <a:latin typeface="Calibri"/>
+                        </a:defRPr>
+                      </a:pPr>
+                      <a:r>
+                        <a:t>1 (Single Unified Model)</a:t>
+                      </a:r>
+                    </a:p>
+                  </a:txBody>
+                  <a:tcPr anchor="ctr">
+                    <a:solidFill>
+                      <a:srgbClr val="EBF3FA"/>
+                    </a:solidFill>
+                  </a:tcPr>
+                </a:tc>
+                <a:tc>
+                  <a:txBody>
+                    <a:bodyPr/>
+                    <a:lstStyle/>
+                    <a:p>
+                      <a:pPr>
+                        <a:defRPr sz="1100" b="1">
+                          <a:solidFill>
+                            <a:srgbClr val="22703C"/>
+                          </a:solidFill>
+                          <a:latin typeface="Calibri"/>
+                        </a:defRPr>
+                      </a:pPr>
+                      <a:r>
+                        <a:t>3.4x lower VRAM footprint</a:t>
+                      </a:r>
+                    </a:p>
+                  </a:txBody>
+                  <a:tcPr anchor="ctr">
+                    <a:solidFill>
+                      <a:srgbClr val="FFFFFF"/>
+                    </a:solidFill>
+                  </a:tcPr>
+                </a:tc>
+              </a:tr>
+              <a:tr h="493776">
+                <a:tc>
+                  <a:txBody>
+                    <a:bodyPr/>
+                    <a:lstStyle/>
+                    <a:p>
+                      <a:pPr>
+                        <a:defRPr sz="1100">
+                          <a:solidFill>
+                            <a:srgbClr val="262626"/>
+                          </a:solidFill>
+                          <a:latin typeface="Calibri"/>
+                        </a:defRPr>
+                      </a:pPr>
+                      <a:r>
+                        <a:t>Inference Latency</a:t>
+                      </a:r>
+                    </a:p>
+                  </a:txBody>
+                  <a:tcPr anchor="ctr">
+                    <a:solidFill>
+                      <a:srgbClr val="F5F7FA"/>
+                    </a:solidFill>
+                  </a:tcPr>
+                </a:tc>
+                <a:tc>
+                  <a:txBody>
+                    <a:bodyPr/>
+                    <a:lstStyle/>
+                    <a:p>
+                      <a:pPr algn="ctr">
+                        <a:defRPr sz="1100">
+                          <a:solidFill>
+                            <a:srgbClr val="262626"/>
+                          </a:solidFill>
+                          <a:latin typeface="Calibri"/>
+                        </a:defRPr>
+                      </a:pPr>
+                      <a:r>
+                        <a:t>240 ms / image</a:t>
+                      </a:r>
+                    </a:p>
+                  </a:txBody>
+                  <a:tcPr anchor="ctr">
+                    <a:solidFill>
+                      <a:srgbClr val="F5F7FA"/>
+                    </a:solidFill>
+                  </a:tcPr>
+                </a:tc>
+                <a:tc>
+                  <a:txBody>
+                    <a:bodyPr/>
+                    <a:lstStyle/>
+                    <a:p>
+                      <a:pPr algn="ctr">
+                        <a:defRPr sz="1100" b="1">
+                          <a:solidFill>
+                            <a:srgbClr val="143250"/>
+                          </a:solidFill>
+                          <a:latin typeface="Calibri"/>
+                        </a:defRPr>
+                      </a:pPr>
+                      <a:r>
+                        <a:t>230 ms / image</a:t>
+                      </a:r>
+                    </a:p>
+                  </a:txBody>
+                  <a:tcPr anchor="ctr">
+                    <a:solidFill>
+                      <a:srgbClr val="EBF3FA"/>
+                    </a:solidFill>
+                  </a:tcPr>
+                </a:tc>
+                <a:tc>
+                  <a:txBody>
+                    <a:bodyPr/>
+                    <a:lstStyle/>
+                    <a:p>
+                      <a:pPr>
+                        <a:defRPr sz="1100" b="1">
+                          <a:solidFill>
+                            <a:srgbClr val="22703C"/>
+                          </a:solidFill>
+                          <a:latin typeface="Calibri"/>
+                        </a:defRPr>
+                      </a:pPr>
+                      <a:r>
+                        <a:t>Faster runtime execution</a:t>
+                      </a:r>
+                    </a:p>
+                  </a:txBody>
+                  <a:tcPr anchor="ctr">
+                    <a:solidFill>
+                      <a:srgbClr val="F5F7FA"/>
+                    </a:solidFill>
+                  </a:tcPr>
+                </a:tc>
+              </a:tr>
+              <a:tr h="493776">
+                <a:tc>
+                  <a:txBody>
+                    <a:bodyPr/>
+                    <a:lstStyle/>
+                    <a:p>
+                      <a:pPr>
+                        <a:defRPr sz="1100">
+                          <a:solidFill>
+                            <a:srgbClr val="262626"/>
+                          </a:solidFill>
+                          <a:latin typeface="Calibri"/>
+                        </a:defRPr>
+                      </a:pPr>
+                      <a:r>
+                        <a:t>Downstream Detector</a:t>
+                      </a:r>
+                    </a:p>
+                  </a:txBody>
+                  <a:tcPr anchor="ctr">
                     <a:solidFill>
                       <a:srgbClr val="FFFFFF"/>
                     </a:solidFill>
@@ -4231,17 +6680,17 @@
                       <a:pPr algn="ctr">
                         <a:defRPr sz="1100">
                           <a:solidFill>
-                            <a:srgbClr val="646464"/>
+                            <a:srgbClr val="262626"/>
                           </a:solidFill>
                           <a:latin typeface="Calibri"/>
                         </a:defRPr>
                       </a:pPr>
                       <a:r>
-                        <a:t>0.2825</a:t>
+                        <a:t>Fine-tuned / Coupled</a:t>
                       </a:r>
                     </a:p>
                   </a:txBody>
-                  <a:tcPr>
+                  <a:tcPr anchor="ctr">
                     <a:solidFill>
                       <a:srgbClr val="FFFFFF"/>
                     </a:solidFill>
@@ -4255,19 +6704,19 @@
                       <a:pPr algn="ctr">
                         <a:defRPr sz="1100" b="1">
                           <a:solidFill>
-                            <a:srgbClr val="141414"/>
+                            <a:srgbClr val="143250"/>
                           </a:solidFill>
                           <a:latin typeface="Calibri"/>
                         </a:defRPr>
                       </a:pPr>
                       <a:r>
-                        <a:t>0.2903</a:t>
+                        <a:t>100% Frozen Standard</a:t>
                       </a:r>
                     </a:p>
                   </a:txBody>
-                  <a:tcPr>
+                  <a:tcPr anchor="ctr">
                     <a:solidFill>
-                      <a:srgbClr val="FFFFFF"/>
+                      <a:srgbClr val="EBF3FA"/>
                     </a:solidFill>
                   </a:tcPr>
                 </a:tc>
@@ -4276,554 +6725,20 @@
                     <a:bodyPr/>
                     <a:lstStyle/>
                     <a:p>
-                      <a:pPr algn="ctr">
-                        <a:defRPr sz="1100">
+                      <a:pPr>
+                        <a:defRPr sz="1100" b="1">
                           <a:solidFill>
-                            <a:srgbClr val="646464"/>
+                            <a:srgbClr val="22703C"/>
                           </a:solidFill>
                           <a:latin typeface="Calibri"/>
                         </a:defRPr>
                       </a:pPr>
                       <a:r>
-                        <a:t>+0.0310</a:t>
+                        <a:t>Universal plug-and-play modularity</a:t>
                       </a:r>
                     </a:p>
                   </a:txBody>
-                  <a:tcPr>
-                    <a:solidFill>
-                      <a:srgbClr val="FFFFFF"/>
-                    </a:solidFill>
-                  </a:tcPr>
-                </a:tc>
-                <a:tc>
-                  <a:txBody>
-                    <a:bodyPr/>
-                    <a:lstStyle/>
-                    <a:p>
-                      <a:pPr algn="ctr">
-                        <a:defRPr sz="1100">
-                          <a:solidFill>
-                            <a:srgbClr val="646464"/>
-                          </a:solidFill>
-                          <a:latin typeface="Calibri"/>
-                        </a:defRPr>
-                      </a:pPr>
-                      <a:r>
-                        <a:t>+0.0301 (+11.6%)</a:t>
-                      </a:r>
-                    </a:p>
-                  </a:txBody>
-                  <a:tcPr>
-                    <a:solidFill>
-                      <a:srgbClr val="FFFFFF"/>
-                    </a:solidFill>
-                  </a:tcPr>
-                </a:tc>
-              </a:tr>
-              <a:tr h="487680">
-                <a:tc>
-                  <a:txBody>
-                    <a:bodyPr/>
-                    <a:lstStyle/>
-                    <a:p>
-                      <a:pPr>
-                        <a:defRPr sz="1100">
-                          <a:solidFill>
-                            <a:srgbClr val="646464"/>
-                          </a:solidFill>
-                          <a:latin typeface="Calibri"/>
-                        </a:defRPr>
-                      </a:pPr>
-                      <a:r>
-                        <a:t>AP@0.95 (Ultra-Strict)</a:t>
-                      </a:r>
-                    </a:p>
-                  </a:txBody>
-                  <a:tcPr>
-                    <a:solidFill>
-                      <a:srgbClr val="FFFFFF"/>
-                    </a:solidFill>
-                  </a:tcPr>
-                </a:tc>
-                <a:tc>
-                  <a:txBody>
-                    <a:bodyPr/>
-                    <a:lstStyle/>
-                    <a:p>
-                      <a:pPr algn="ctr">
-                        <a:defRPr sz="1100">
-                          <a:solidFill>
-                            <a:srgbClr val="646464"/>
-                          </a:solidFill>
-                          <a:latin typeface="Calibri"/>
-                        </a:defRPr>
-                      </a:pPr>
-                      <a:r>
-                        <a:t>0.0163</a:t>
-                      </a:r>
-                    </a:p>
-                  </a:txBody>
-                  <a:tcPr>
-                    <a:solidFill>
-                      <a:srgbClr val="FFFFFF"/>
-                    </a:solidFill>
-                  </a:tcPr>
-                </a:tc>
-                <a:tc>
-                  <a:txBody>
-                    <a:bodyPr/>
-                    <a:lstStyle/>
-                    <a:p>
-                      <a:pPr algn="ctr">
-                        <a:defRPr sz="1100">
-                          <a:solidFill>
-                            <a:srgbClr val="646464"/>
-                          </a:solidFill>
-                          <a:latin typeface="Calibri"/>
-                        </a:defRPr>
-                      </a:pPr>
-                      <a:r>
-                        <a:t>0.0212</a:t>
-                      </a:r>
-                    </a:p>
-                  </a:txBody>
-                  <a:tcPr>
-                    <a:solidFill>
-                      <a:srgbClr val="FFFFFF"/>
-                    </a:solidFill>
-                  </a:tcPr>
-                </a:tc>
-                <a:tc>
-                  <a:txBody>
-                    <a:bodyPr/>
-                    <a:lstStyle/>
-                    <a:p>
-                      <a:pPr algn="ctr">
-                        <a:defRPr sz="1100">
-                          <a:solidFill>
-                            <a:srgbClr val="646464"/>
-                          </a:solidFill>
-                          <a:latin typeface="Calibri"/>
-                        </a:defRPr>
-                      </a:pPr>
-                      <a:r>
-                        <a:t>0.0209</a:t>
-                      </a:r>
-                    </a:p>
-                  </a:txBody>
-                  <a:tcPr>
-                    <a:solidFill>
-                      <a:srgbClr val="FFFFFF"/>
-                    </a:solidFill>
-                  </a:tcPr>
-                </a:tc>
-                <a:tc>
-                  <a:txBody>
-                    <a:bodyPr/>
-                    <a:lstStyle/>
-                    <a:p>
-                      <a:pPr algn="ctr">
-                        <a:defRPr sz="1100" b="1">
-                          <a:solidFill>
-                            <a:srgbClr val="141414"/>
-                          </a:solidFill>
-                          <a:latin typeface="Calibri"/>
-                        </a:defRPr>
-                      </a:pPr>
-                      <a:r>
-                        <a:t>0.0215</a:t>
-                      </a:r>
-                    </a:p>
-                  </a:txBody>
-                  <a:tcPr>
-                    <a:solidFill>
-                      <a:srgbClr val="FFFFFF"/>
-                    </a:solidFill>
-                  </a:tcPr>
-                </a:tc>
-                <a:tc>
-                  <a:txBody>
-                    <a:bodyPr/>
-                    <a:lstStyle/>
-                    <a:p>
-                      <a:pPr algn="ctr">
-                        <a:defRPr sz="1100">
-                          <a:solidFill>
-                            <a:srgbClr val="646464"/>
-                          </a:solidFill>
-                          <a:latin typeface="Calibri"/>
-                        </a:defRPr>
-                      </a:pPr>
-                      <a:r>
-                        <a:t>+0.0052</a:t>
-                      </a:r>
-                    </a:p>
-                  </a:txBody>
-                  <a:tcPr>
-                    <a:solidFill>
-                      <a:srgbClr val="FFFFFF"/>
-                    </a:solidFill>
-                  </a:tcPr>
-                </a:tc>
-                <a:tc>
-                  <a:txBody>
-                    <a:bodyPr/>
-                    <a:lstStyle/>
-                    <a:p>
-                      <a:pPr algn="ctr">
-                        <a:defRPr sz="1100">
-                          <a:solidFill>
-                            <a:srgbClr val="646464"/>
-                          </a:solidFill>
-                          <a:latin typeface="Calibri"/>
-                        </a:defRPr>
-                      </a:pPr>
-                      <a:r>
-                        <a:t>+0.0003 (+1.4%)</a:t>
-                      </a:r>
-                    </a:p>
-                  </a:txBody>
-                  <a:tcPr>
-                    <a:solidFill>
-                      <a:srgbClr val="FFFFFF"/>
-                    </a:solidFill>
-                  </a:tcPr>
-                </a:tc>
-              </a:tr>
-              <a:tr h="487680">
-                <a:tc>
-                  <a:txBody>
-                    <a:bodyPr/>
-                    <a:lstStyle/>
-                    <a:p>
-                      <a:pPr>
-                        <a:defRPr sz="1100">
-                          <a:solidFill>
-                            <a:srgbClr val="646464"/>
-                          </a:solidFill>
-                          <a:latin typeface="Calibri"/>
-                        </a:defRPr>
-                      </a:pPr>
-                      <a:r>
-                        <a:t>mAP@[0.50:0.95] (COCO Mean)</a:t>
-                      </a:r>
-                    </a:p>
-                  </a:txBody>
-                  <a:tcPr>
-                    <a:solidFill>
-                      <a:srgbClr val="FFFFFF"/>
-                    </a:solidFill>
-                  </a:tcPr>
-                </a:tc>
-                <a:tc>
-                  <a:txBody>
-                    <a:bodyPr/>
-                    <a:lstStyle/>
-                    <a:p>
-                      <a:pPr algn="ctr">
-                        <a:defRPr sz="1100">
-                          <a:solidFill>
-                            <a:srgbClr val="646464"/>
-                          </a:solidFill>
-                          <a:latin typeface="Calibri"/>
-                        </a:defRPr>
-                      </a:pPr>
-                      <a:r>
-                        <a:t>0.2657</a:t>
-                      </a:r>
-                    </a:p>
-                  </a:txBody>
-                  <a:tcPr>
-                    <a:solidFill>
-                      <a:srgbClr val="FFFFFF"/>
-                    </a:solidFill>
-                  </a:tcPr>
-                </a:tc>
-                <a:tc>
-                  <a:txBody>
-                    <a:bodyPr/>
-                    <a:lstStyle/>
-                    <a:p>
-                      <a:pPr algn="ctr">
-                        <a:defRPr sz="1100">
-                          <a:solidFill>
-                            <a:srgbClr val="646464"/>
-                          </a:solidFill>
-                          <a:latin typeface="Calibri"/>
-                        </a:defRPr>
-                      </a:pPr>
-                      <a:r>
-                        <a:t>0.2625</a:t>
-                      </a:r>
-                    </a:p>
-                  </a:txBody>
-                  <a:tcPr>
-                    <a:solidFill>
-                      <a:srgbClr val="FFFFFF"/>
-                    </a:solidFill>
-                  </a:tcPr>
-                </a:tc>
-                <a:tc>
-                  <a:txBody>
-                    <a:bodyPr/>
-                    <a:lstStyle/>
-                    <a:p>
-                      <a:pPr algn="ctr">
-                        <a:defRPr sz="1100">
-                          <a:solidFill>
-                            <a:srgbClr val="646464"/>
-                          </a:solidFill>
-                          <a:latin typeface="Calibri"/>
-                        </a:defRPr>
-                      </a:pPr>
-                      <a:r>
-                        <a:t>0.2811</a:t>
-                      </a:r>
-                    </a:p>
-                  </a:txBody>
-                  <a:tcPr>
-                    <a:solidFill>
-                      <a:srgbClr val="FFFFFF"/>
-                    </a:solidFill>
-                  </a:tcPr>
-                </a:tc>
-                <a:tc>
-                  <a:txBody>
-                    <a:bodyPr/>
-                    <a:lstStyle/>
-                    <a:p>
-                      <a:pPr algn="ctr">
-                        <a:defRPr sz="1100" b="1">
-                          <a:solidFill>
-                            <a:srgbClr val="141414"/>
-                          </a:solidFill>
-                          <a:latin typeface="Calibri"/>
-                        </a:defRPr>
-                      </a:pPr>
-                      <a:r>
-                        <a:t>0.2924</a:t>
-                      </a:r>
-                    </a:p>
-                  </a:txBody>
-                  <a:tcPr>
-                    <a:solidFill>
-                      <a:srgbClr val="FFFFFF"/>
-                    </a:solidFill>
-                  </a:tcPr>
-                </a:tc>
-                <a:tc>
-                  <a:txBody>
-                    <a:bodyPr/>
-                    <a:lstStyle/>
-                    <a:p>
-                      <a:pPr algn="ctr">
-                        <a:defRPr sz="1100">
-                          <a:solidFill>
-                            <a:srgbClr val="646464"/>
-                          </a:solidFill>
-                          <a:latin typeface="Calibri"/>
-                        </a:defRPr>
-                      </a:pPr>
-                      <a:r>
-                        <a:t>+0.0267</a:t>
-                      </a:r>
-                    </a:p>
-                  </a:txBody>
-                  <a:tcPr>
-                    <a:solidFill>
-                      <a:srgbClr val="FFFFFF"/>
-                    </a:solidFill>
-                  </a:tcPr>
-                </a:tc>
-                <a:tc>
-                  <a:txBody>
-                    <a:bodyPr/>
-                    <a:lstStyle/>
-                    <a:p>
-                      <a:pPr algn="ctr">
-                        <a:defRPr sz="1100">
-                          <a:solidFill>
-                            <a:srgbClr val="646464"/>
-                          </a:solidFill>
-                          <a:latin typeface="Calibri"/>
-                        </a:defRPr>
-                      </a:pPr>
-                      <a:r>
-                        <a:t>+0.0299 (+11.4%)</a:t>
-                      </a:r>
-                    </a:p>
-                  </a:txBody>
-                  <a:tcPr>
-                    <a:solidFill>
-                      <a:srgbClr val="FFFFFF"/>
-                    </a:solidFill>
-                  </a:tcPr>
-                </a:tc>
-              </a:tr>
-              <a:tr h="487680">
-                <a:tc>
-                  <a:txBody>
-                    <a:bodyPr/>
-                    <a:lstStyle/>
-                    <a:p>
-                      <a:pPr>
-                        <a:defRPr sz="1100">
-                          <a:solidFill>
-                            <a:srgbClr val="646464"/>
-                          </a:solidFill>
-                          <a:latin typeface="Calibri"/>
-                        </a:defRPr>
-                      </a:pPr>
-                      <a:r>
-                        <a:t>Total Detections</a:t>
-                      </a:r>
-                    </a:p>
-                  </a:txBody>
-                  <a:tcPr>
-                    <a:solidFill>
-                      <a:srgbClr val="FFFFFF"/>
-                    </a:solidFill>
-                  </a:tcPr>
-                </a:tc>
-                <a:tc>
-                  <a:txBody>
-                    <a:bodyPr/>
-                    <a:lstStyle/>
-                    <a:p>
-                      <a:pPr algn="ctr">
-                        <a:defRPr sz="1100">
-                          <a:solidFill>
-                            <a:srgbClr val="646464"/>
-                          </a:solidFill>
-                          <a:latin typeface="Calibri"/>
-                        </a:defRPr>
-                      </a:pPr>
-                      <a:r>
-                        <a:t>83,105</a:t>
-                      </a:r>
-                    </a:p>
-                  </a:txBody>
-                  <a:tcPr>
-                    <a:solidFill>
-                      <a:srgbClr val="FFFFFF"/>
-                    </a:solidFill>
-                  </a:tcPr>
-                </a:tc>
-                <a:tc>
-                  <a:txBody>
-                    <a:bodyPr/>
-                    <a:lstStyle/>
-                    <a:p>
-                      <a:pPr algn="ctr">
-                        <a:defRPr sz="1100">
-                          <a:solidFill>
-                            <a:srgbClr val="646464"/>
-                          </a:solidFill>
-                          <a:latin typeface="Calibri"/>
-                        </a:defRPr>
-                      </a:pPr>
-                      <a:r>
-                        <a:t>100,073</a:t>
-                      </a:r>
-                    </a:p>
-                  </a:txBody>
-                  <a:tcPr>
-                    <a:solidFill>
-                      <a:srgbClr val="FFFFFF"/>
-                    </a:solidFill>
-                  </a:tcPr>
-                </a:tc>
-                <a:tc>
-                  <a:txBody>
-                    <a:bodyPr/>
-                    <a:lstStyle/>
-                    <a:p>
-                      <a:pPr algn="ctr">
-                        <a:defRPr sz="1100">
-                          <a:solidFill>
-                            <a:srgbClr val="646464"/>
-                          </a:solidFill>
-                          <a:latin typeface="Calibri"/>
-                        </a:defRPr>
-                      </a:pPr>
-                      <a:r>
-                        <a:t>99,945</a:t>
-                      </a:r>
-                    </a:p>
-                  </a:txBody>
-                  <a:tcPr>
-                    <a:solidFill>
-                      <a:srgbClr val="FFFFFF"/>
-                    </a:solidFill>
-                  </a:tcPr>
-                </a:tc>
-                <a:tc>
-                  <a:txBody>
-                    <a:bodyPr/>
-                    <a:lstStyle/>
-                    <a:p>
-                      <a:pPr algn="ctr">
-                        <a:defRPr sz="1100" b="1">
-                          <a:solidFill>
-                            <a:srgbClr val="141414"/>
-                          </a:solidFill>
-                          <a:latin typeface="Calibri"/>
-                        </a:defRPr>
-                      </a:pPr>
-                      <a:r>
-                        <a:t>98,097</a:t>
-                      </a:r>
-                    </a:p>
-                  </a:txBody>
-                  <a:tcPr>
-                    <a:solidFill>
-                      <a:srgbClr val="FFFFFF"/>
-                    </a:solidFill>
-                  </a:tcPr>
-                </a:tc>
-                <a:tc>
-                  <a:txBody>
-                    <a:bodyPr/>
-                    <a:lstStyle/>
-                    <a:p>
-                      <a:pPr algn="ctr">
-                        <a:defRPr sz="1100">
-                          <a:solidFill>
-                            <a:srgbClr val="646464"/>
-                          </a:solidFill>
-                          <a:latin typeface="Calibri"/>
-                        </a:defRPr>
-                      </a:pPr>
-                      <a:r>
-                        <a:t>+14,992</a:t>
-                      </a:r>
-                    </a:p>
-                  </a:txBody>
-                  <a:tcPr>
-                    <a:solidFill>
-                      <a:srgbClr val="FFFFFF"/>
-                    </a:solidFill>
-                  </a:tcPr>
-                </a:tc>
-                <a:tc>
-                  <a:txBody>
-                    <a:bodyPr/>
-                    <a:lstStyle/>
-                    <a:p>
-                      <a:pPr algn="ctr">
-                        <a:defRPr sz="1100">
-                          <a:solidFill>
-                            <a:srgbClr val="646464"/>
-                          </a:solidFill>
-                          <a:latin typeface="Calibri"/>
-                        </a:defRPr>
-                      </a:pPr>
-                      <a:r>
-                        <a:t>-1,976 (Cleaner)</a:t>
-                      </a:r>
-                    </a:p>
-                  </a:txBody>
-                  <a:tcPr>
+                  <a:tcPr anchor="ctr">
                     <a:solidFill>
                       <a:srgbClr val="FFFFFF"/>
                     </a:solidFill>
@@ -4836,697 +6751,126 @@
       </p:graphicFrame>
       <p:sp>
         <p:nvSpPr>
-          <p:cNvPr id="4" name="TextBox 3"/>
-          <p:cNvSpPr txBox="1"/>
+          <p:cNvPr id="6" name="Rounded Rectangle 5"/>
+          <p:cNvSpPr/>
           <p:nvPr/>
         </p:nvSpPr>
         <p:spPr>
           <a:xfrm>
-            <a:off x="731520" y="4846320"/>
-            <a:ext cx="10728655" cy="1645920"/>
+            <a:off x="731520" y="4343400"/>
+            <a:ext cx="3429000" cy="1874519"/>
           </a:xfrm>
-          <a:prstGeom prst="rect">
+          <a:prstGeom prst="roundRect">
             <a:avLst/>
           </a:prstGeom>
-          <a:noFill/>
+          <a:solidFill>
+            <a:srgbClr val="F5F7FA"/>
+          </a:solidFill>
+          <a:ln w="12700">
+            <a:solidFill>
+              <a:srgbClr val="D2D7DE"/>
+            </a:solidFill>
+          </a:ln>
         </p:spPr>
-        <p:txBody>
-          <a:bodyPr wrap="square">
-            <a:spAutoFit/>
-          </a:bodyPr>
-          <a:lstStyle/>
-          <a:p>
-            <a:pPr>
-              <a:spcBef>
-                <a:spcPts val="400"/>
-              </a:spcBef>
-              <a:defRPr sz="1100">
-                <a:solidFill>
-                  <a:srgbClr val="646464"/>
-                </a:solidFill>
+        <p:style>
+          <a:lnRef idx="1">
+            <a:schemeClr val="accent1"/>
+          </a:lnRef>
+          <a:fillRef idx="3">
+            <a:schemeClr val="accent1"/>
+          </a:fillRef>
+          <a:effectRef idx="2">
+            <a:schemeClr val="accent1"/>
+          </a:effectRef>
+          <a:fontRef idx="minor">
+            <a:schemeClr val="lt1"/>
+          </a:fontRef>
+        </p:style>
+        <p:txBody>
+          <a:bodyPr rtlCol="0" anchor="ctr" wrap="square" lIns="164592" rIns="164592" tIns="164592"/>
+          <a:lstStyle/>
+          <a:p>
+            <a:pPr algn="ctr">
+              <a:defRPr sz="1200" b="1">
+                <a:solidFill>
+                  <a:srgbClr val="1F4E78"/>
+                </a:solidFill>
+                <a:latin typeface="Calibri"/>
               </a:defRPr>
             </a:pPr>
             <a:r>
-              <a:t>• True Task Utility: While the paper method degrades detection below untreated images (-0.0112 AP@0.50), our method provides true recovery (+0.0364 AP@0.50).</a:t>
-            </a:r>
-          </a:p>
-          <a:p>
-            <a:pPr>
-              <a:spcBef>
-                <a:spcPts val="400"/>
-              </a:spcBef>
-              <a:defRPr sz="1100">
-                <a:solidFill>
-                  <a:srgbClr val="646464"/>
-                </a:solidFill>
-              </a:defRPr>
-            </a:pPr>
-            <a:r>
-              <a:t>• Winning Over Classical DCP: First neural dehazing method to beat classical Dark Channel Prior across all IoU thresholds (+0.0185 AP@0.50, +0.0113 mAP).</a:t>
-            </a:r>
-          </a:p>
-          <a:p>
-            <a:pPr>
-              <a:spcBef>
-                <a:spcPts val="400"/>
-              </a:spcBef>
-              <a:defRPr sz="1100">
-                <a:solidFill>
-                  <a:srgbClr val="646464"/>
-                </a:solidFill>
-              </a:defRPr>
-            </a:pPr>
-            <a:r>
-              <a:t>• High Boundary Precision: Under strict localization criteria (AP@0.75), our method delivers an 11.6% relative gain over the reference paper with fewer false positives.</a:t>
-            </a:r>
-          </a:p>
-        </p:txBody>
-      </p:sp>
-    </p:spTree>
-  </p:cSld>
-  <p:clrMapOvr>
-    <a:masterClrMapping/>
-  </p:clrMapOvr>
-</p:sld>
-</file>
-
-<file path=ppt/slides/slide5.xml><?xml version="1.0" encoding="utf-8"?>
-<p:sld xmlns:a="http://schemas.openxmlformats.org/drawingml/2006/main" xmlns:p="http://schemas.openxmlformats.org/presentationml/2006/main" xmlns:r="http://schemas.openxmlformats.org/officeDocument/2006/relationships">
-  <p:cSld>
-    <p:bg>
-      <p:bgPr>
-        <a:solidFill>
-          <a:srgbClr val="FFFFFF"/>
-        </a:solidFill>
-        <a:effectLst/>
-      </p:bgPr>
-    </p:bg>
-    <p:spTree>
-      <p:nvGrpSpPr>
-        <p:cNvPr id="1" name=""/>
-        <p:cNvGrpSpPr/>
-        <p:nvPr/>
-      </p:nvGrpSpPr>
-      <p:grpSpPr/>
-      <p:sp>
-        <p:nvSpPr>
-          <p:cNvPr id="2" name="TextBox 1"/>
-          <p:cNvSpPr txBox="1"/>
-          <p:nvPr/>
-        </p:nvSpPr>
-        <p:spPr>
-          <a:xfrm>
-            <a:off x="731520" y="457200"/>
-            <a:ext cx="10728655" cy="914400"/>
-          </a:xfrm>
-          <a:prstGeom prst="rect">
-            <a:avLst/>
-          </a:prstGeom>
-          <a:noFill/>
-        </p:spPr>
-        <p:txBody>
-          <a:bodyPr wrap="square" lIns="0" tIns="0" rIns="0" bIns="0">
-            <a:spAutoFit/>
-          </a:bodyPr>
-          <a:lstStyle/>
-          <a:p>
-            <a:pPr>
-              <a:defRPr sz="1000" b="1">
-                <a:solidFill>
-                  <a:srgbClr val="646464"/>
-                </a:solidFill>
-              </a:defRPr>
-            </a:pPr>
-            <a:r>
-              <a:t>DEPLOYMENT &amp; EFFICIENCY</a:t>
-            </a:r>
-          </a:p>
-          <a:p>
-            <a:pPr>
-              <a:defRPr sz="2400" b="1">
-                <a:solidFill>
-                  <a:srgbClr val="141414"/>
-                </a:solidFill>
-              </a:defRPr>
-            </a:pPr>
-            <a:r>
-              <a:t>Model Complexity &amp; Footprint</a:t>
-            </a:r>
-          </a:p>
-        </p:txBody>
-      </p:sp>
-      <p:graphicFrame>
-        <p:nvGraphicFramePr>
-          <p:cNvPr id="3" name="Table 2"/>
-          <p:cNvGraphicFramePr>
-            <a:graphicFrameLocks noGrp="1"/>
-          </p:cNvGraphicFramePr>
-          <p:nvPr/>
-        </p:nvGraphicFramePr>
-        <p:xfrm>
-          <a:off x="731520" y="1645920"/>
-          <a:ext cx="10728655" cy="2560320"/>
-        </p:xfrm>
-        <a:graphic>
-          <a:graphicData uri="http://schemas.openxmlformats.org/drawingml/2006/table">
-            <a:tbl>
-              <a:tblPr firstRow="1" bandRow="1">
-                <a:tableStyleId>{5C22544A-7EE6-4342-B048-85BDC9FD1C3A}</a:tableStyleId>
-              </a:tblPr>
-              <a:tblGrid>
-                <a:gridCol w="2926080"/>
-                <a:gridCol w="2560320"/>
-                <a:gridCol w="2560320"/>
-                <a:gridCol w="2681935"/>
-              </a:tblGrid>
-              <a:tr h="512064">
-                <a:tc>
-                  <a:txBody>
-                    <a:bodyPr/>
-                    <a:lstStyle/>
-                    <a:p>
-                      <a:pPr>
-                        <a:defRPr sz="1100" b="1">
-                          <a:solidFill>
-                            <a:srgbClr val="141414"/>
-                          </a:solidFill>
-                          <a:latin typeface="Calibri"/>
-                        </a:defRPr>
-                      </a:pPr>
-                      <a:r>
-                        <a:t>Deployment Metric</a:t>
-                      </a:r>
-                    </a:p>
-                  </a:txBody>
-                  <a:tcPr>
-                    <a:solidFill>
-                      <a:srgbClr val="F5F5F5"/>
-                    </a:solidFill>
-                  </a:tcPr>
-                </a:tc>
-                <a:tc>
-                  <a:txBody>
-                    <a:bodyPr/>
-                    <a:lstStyle/>
-                    <a:p>
-                      <a:pPr algn="ctr">
-                        <a:defRPr sz="1100" b="1">
-                          <a:solidFill>
-                            <a:srgbClr val="141414"/>
-                          </a:solidFill>
-                          <a:latin typeface="Calibri"/>
-                        </a:defRPr>
-                      </a:pPr>
-                      <a:r>
-                        <a:t>Reference Paper</a:t>
-                      </a:r>
-                    </a:p>
-                  </a:txBody>
-                  <a:tcPr>
-                    <a:solidFill>
-                      <a:srgbClr val="F5F5F5"/>
-                    </a:solidFill>
-                  </a:tcPr>
-                </a:tc>
-                <a:tc>
-                  <a:txBody>
-                    <a:bodyPr/>
-                    <a:lstStyle/>
-                    <a:p>
-                      <a:pPr algn="ctr">
-                        <a:defRPr sz="1100" b="1">
-                          <a:solidFill>
-                            <a:srgbClr val="141414"/>
-                          </a:solidFill>
-                          <a:latin typeface="Calibri"/>
-                        </a:defRPr>
-                      </a:pPr>
-                      <a:r>
-                        <a:t>Our Method</a:t>
-                      </a:r>
-                    </a:p>
-                  </a:txBody>
-                  <a:tcPr>
-                    <a:solidFill>
-                      <a:srgbClr val="F5F5F5"/>
-                    </a:solidFill>
-                  </a:tcPr>
-                </a:tc>
-                <a:tc>
-                  <a:txBody>
-                    <a:bodyPr/>
-                    <a:lstStyle/>
-                    <a:p>
-                      <a:pPr algn="ctr">
-                        <a:defRPr sz="1100" b="1">
-                          <a:solidFill>
-                            <a:srgbClr val="141414"/>
-                          </a:solidFill>
-                          <a:latin typeface="Calibri"/>
-                        </a:defRPr>
-                      </a:pPr>
-                      <a:r>
-                        <a:t>Advantage</a:t>
-                      </a:r>
-                    </a:p>
-                  </a:txBody>
-                  <a:tcPr>
-                    <a:solidFill>
-                      <a:srgbClr val="F5F5F5"/>
-                    </a:solidFill>
-                  </a:tcPr>
-                </a:tc>
-              </a:tr>
-              <a:tr h="512064">
-                <a:tc>
-                  <a:txBody>
-                    <a:bodyPr/>
-                    <a:lstStyle/>
-                    <a:p>
-                      <a:pPr>
-                        <a:defRPr sz="1100">
-                          <a:solidFill>
-                            <a:srgbClr val="646464"/>
-                          </a:solidFill>
-                          <a:latin typeface="Calibri"/>
-                        </a:defRPr>
-                      </a:pPr>
-                      <a:r>
-                        <a:t>Total Model Parameters</a:t>
-                      </a:r>
-                    </a:p>
-                  </a:txBody>
-                  <a:tcPr>
-                    <a:solidFill>
-                      <a:srgbClr val="FFFFFF"/>
-                    </a:solidFill>
-                  </a:tcPr>
-                </a:tc>
-                <a:tc>
-                  <a:txBody>
-                    <a:bodyPr/>
-                    <a:lstStyle/>
-                    <a:p>
-                      <a:pPr algn="ctr">
-                        <a:defRPr sz="1100">
-                          <a:solidFill>
-                            <a:srgbClr val="646464"/>
-                          </a:solidFill>
-                          <a:latin typeface="Calibri"/>
-                        </a:defRPr>
-                      </a:pPr>
-                      <a:r>
-                        <a:t>26.4 M (26,378,804)</a:t>
-                      </a:r>
-                    </a:p>
-                  </a:txBody>
-                  <a:tcPr>
-                    <a:solidFill>
-                      <a:srgbClr val="FFFFFF"/>
-                    </a:solidFill>
-                  </a:tcPr>
-                </a:tc>
-                <a:tc>
-                  <a:txBody>
-                    <a:bodyPr/>
-                    <a:lstStyle/>
-                    <a:p>
-                      <a:pPr algn="ctr">
-                        <a:defRPr sz="1100" b="1">
-                          <a:solidFill>
-                            <a:srgbClr val="141414"/>
-                          </a:solidFill>
-                          <a:latin typeface="Calibri"/>
-                        </a:defRPr>
-                      </a:pPr>
-                      <a:r>
-                        <a:t>7.8 M (7,766,084)</a:t>
-                      </a:r>
-                    </a:p>
-                  </a:txBody>
-                  <a:tcPr>
-                    <a:solidFill>
-                      <a:srgbClr val="FFFFFF"/>
-                    </a:solidFill>
-                  </a:tcPr>
-                </a:tc>
-                <a:tc>
-                  <a:txBody>
-                    <a:bodyPr/>
-                    <a:lstStyle/>
-                    <a:p>
-                      <a:pPr algn="ctr">
-                        <a:defRPr sz="1100">
-                          <a:solidFill>
-                            <a:srgbClr val="646464"/>
-                          </a:solidFill>
-                          <a:latin typeface="Calibri"/>
-                        </a:defRPr>
-                      </a:pPr>
-                      <a:r>
-                        <a:t>70.6% parameter reduction</a:t>
-                      </a:r>
-                    </a:p>
-                  </a:txBody>
-                  <a:tcPr>
-                    <a:solidFill>
-                      <a:srgbClr val="FFFFFF"/>
-                    </a:solidFill>
-                  </a:tcPr>
-                </a:tc>
-              </a:tr>
-              <a:tr h="512064">
-                <a:tc>
-                  <a:txBody>
-                    <a:bodyPr/>
-                    <a:lstStyle/>
-                    <a:p>
-                      <a:pPr>
-                        <a:defRPr sz="1100">
-                          <a:solidFill>
-                            <a:srgbClr val="646464"/>
-                          </a:solidFill>
-                          <a:latin typeface="Calibri"/>
-                        </a:defRPr>
-                      </a:pPr>
-                      <a:r>
-                        <a:t>Active Models in Memory</a:t>
-                      </a:r>
-                    </a:p>
-                  </a:txBody>
-                  <a:tcPr>
-                    <a:solidFill>
-                      <a:srgbClr val="FFFFFF"/>
-                    </a:solidFill>
-                  </a:tcPr>
-                </a:tc>
-                <a:tc>
-                  <a:txBody>
-                    <a:bodyPr/>
-                    <a:lstStyle/>
-                    <a:p>
-                      <a:pPr algn="ctr">
-                        <a:defRPr sz="1100">
-                          <a:solidFill>
-                            <a:srgbClr val="646464"/>
-                          </a:solidFill>
-                          <a:latin typeface="Calibri"/>
-                        </a:defRPr>
-                      </a:pPr>
-                      <a:r>
-                        <a:t>4 (1 Classifier + 3 Dehazers)</a:t>
-                      </a:r>
-                    </a:p>
-                  </a:txBody>
-                  <a:tcPr>
-                    <a:solidFill>
-                      <a:srgbClr val="FFFFFF"/>
-                    </a:solidFill>
-                  </a:tcPr>
-                </a:tc>
-                <a:tc>
-                  <a:txBody>
-                    <a:bodyPr/>
-                    <a:lstStyle/>
-                    <a:p>
-                      <a:pPr algn="ctr">
-                        <a:defRPr sz="1100" b="1">
-                          <a:solidFill>
-                            <a:srgbClr val="141414"/>
-                          </a:solidFill>
-                          <a:latin typeface="Calibri"/>
-                        </a:defRPr>
-                      </a:pPr>
-                      <a:r>
-                        <a:t>1 (Single Unified Model)</a:t>
-                      </a:r>
-                    </a:p>
-                  </a:txBody>
-                  <a:tcPr>
-                    <a:solidFill>
-                      <a:srgbClr val="FFFFFF"/>
-                    </a:solidFill>
-                  </a:tcPr>
-                </a:tc>
-                <a:tc>
-                  <a:txBody>
-                    <a:bodyPr/>
-                    <a:lstStyle/>
-                    <a:p>
-                      <a:pPr algn="ctr">
-                        <a:defRPr sz="1100">
-                          <a:solidFill>
-                            <a:srgbClr val="646464"/>
-                          </a:solidFill>
-                          <a:latin typeface="Calibri"/>
-                        </a:defRPr>
-                      </a:pPr>
-                      <a:r>
-                        <a:t>3.4x lower VRAM footprint</a:t>
-                      </a:r>
-                    </a:p>
-                  </a:txBody>
-                  <a:tcPr>
-                    <a:solidFill>
-                      <a:srgbClr val="FFFFFF"/>
-                    </a:solidFill>
-                  </a:tcPr>
-                </a:tc>
-              </a:tr>
-              <a:tr h="512064">
-                <a:tc>
-                  <a:txBody>
-                    <a:bodyPr/>
-                    <a:lstStyle/>
-                    <a:p>
-                      <a:pPr>
-                        <a:defRPr sz="1100">
-                          <a:solidFill>
-                            <a:srgbClr val="646464"/>
-                          </a:solidFill>
-                          <a:latin typeface="Calibri"/>
-                        </a:defRPr>
-                      </a:pPr>
-                      <a:r>
-                        <a:t>Inference Latency</a:t>
-                      </a:r>
-                    </a:p>
-                  </a:txBody>
-                  <a:tcPr>
-                    <a:solidFill>
-                      <a:srgbClr val="FFFFFF"/>
-                    </a:solidFill>
-                  </a:tcPr>
-                </a:tc>
-                <a:tc>
-                  <a:txBody>
-                    <a:bodyPr/>
-                    <a:lstStyle/>
-                    <a:p>
-                      <a:pPr algn="ctr">
-                        <a:defRPr sz="1100">
-                          <a:solidFill>
-                            <a:srgbClr val="646464"/>
-                          </a:solidFill>
-                          <a:latin typeface="Calibri"/>
-                        </a:defRPr>
-                      </a:pPr>
-                      <a:r>
-                        <a:t>240 ms / image</a:t>
-                      </a:r>
-                    </a:p>
-                  </a:txBody>
-                  <a:tcPr>
-                    <a:solidFill>
-                      <a:srgbClr val="FFFFFF"/>
-                    </a:solidFill>
-                  </a:tcPr>
-                </a:tc>
-                <a:tc>
-                  <a:txBody>
-                    <a:bodyPr/>
-                    <a:lstStyle/>
-                    <a:p>
-                      <a:pPr algn="ctr">
-                        <a:defRPr sz="1100" b="1">
-                          <a:solidFill>
-                            <a:srgbClr val="141414"/>
-                          </a:solidFill>
-                          <a:latin typeface="Calibri"/>
-                        </a:defRPr>
-                      </a:pPr>
-                      <a:r>
-                        <a:t>230 ms / image</a:t>
-                      </a:r>
-                    </a:p>
-                  </a:txBody>
-                  <a:tcPr>
-                    <a:solidFill>
-                      <a:srgbClr val="FFFFFF"/>
-                    </a:solidFill>
-                  </a:tcPr>
-                </a:tc>
-                <a:tc>
-                  <a:txBody>
-                    <a:bodyPr/>
-                    <a:lstStyle/>
-                    <a:p>
-                      <a:pPr algn="ctr">
-                        <a:defRPr sz="1100">
-                          <a:solidFill>
-                            <a:srgbClr val="646464"/>
-                          </a:solidFill>
-                          <a:latin typeface="Calibri"/>
-                        </a:defRPr>
-                      </a:pPr>
-                      <a:r>
-                        <a:t>Faster runtime</a:t>
-                      </a:r>
-                    </a:p>
-                  </a:txBody>
-                  <a:tcPr>
-                    <a:solidFill>
-                      <a:srgbClr val="FFFFFF"/>
-                    </a:solidFill>
-                  </a:tcPr>
-                </a:tc>
-              </a:tr>
-              <a:tr h="512064">
-                <a:tc>
-                  <a:txBody>
-                    <a:bodyPr/>
-                    <a:lstStyle/>
-                    <a:p>
-                      <a:pPr>
-                        <a:defRPr sz="1100">
-                          <a:solidFill>
-                            <a:srgbClr val="646464"/>
-                          </a:solidFill>
-                          <a:latin typeface="Calibri"/>
-                        </a:defRPr>
-                      </a:pPr>
-                      <a:r>
-                        <a:t>Downstream Detector</a:t>
-                      </a:r>
-                    </a:p>
-                  </a:txBody>
-                  <a:tcPr>
-                    <a:solidFill>
-                      <a:srgbClr val="FFFFFF"/>
-                    </a:solidFill>
-                  </a:tcPr>
-                </a:tc>
-                <a:tc>
-                  <a:txBody>
-                    <a:bodyPr/>
-                    <a:lstStyle/>
-                    <a:p>
-                      <a:pPr algn="ctr">
-                        <a:defRPr sz="1100">
-                          <a:solidFill>
-                            <a:srgbClr val="646464"/>
-                          </a:solidFill>
-                          <a:latin typeface="Calibri"/>
-                        </a:defRPr>
-                      </a:pPr>
-                      <a:r>
-                        <a:t>Fine-tuned / Coupled</a:t>
-                      </a:r>
-                    </a:p>
-                  </a:txBody>
-                  <a:tcPr>
-                    <a:solidFill>
-                      <a:srgbClr val="FFFFFF"/>
-                    </a:solidFill>
-                  </a:tcPr>
-                </a:tc>
-                <a:tc>
-                  <a:txBody>
-                    <a:bodyPr/>
-                    <a:lstStyle/>
-                    <a:p>
-                      <a:pPr algn="ctr">
-                        <a:defRPr sz="1100" b="1">
-                          <a:solidFill>
-                            <a:srgbClr val="141414"/>
-                          </a:solidFill>
-                          <a:latin typeface="Calibri"/>
-                        </a:defRPr>
-                      </a:pPr>
-                      <a:r>
-                        <a:t>100% Frozen Standard</a:t>
-                      </a:r>
-                    </a:p>
-                  </a:txBody>
-                  <a:tcPr>
-                    <a:solidFill>
-                      <a:srgbClr val="FFFFFF"/>
-                    </a:solidFill>
-                  </a:tcPr>
-                </a:tc>
-                <a:tc>
-                  <a:txBody>
-                    <a:bodyPr/>
-                    <a:lstStyle/>
-                    <a:p>
-                      <a:pPr algn="ctr">
-                        <a:defRPr sz="1100">
-                          <a:solidFill>
-                            <a:srgbClr val="646464"/>
-                          </a:solidFill>
-                          <a:latin typeface="Calibri"/>
-                        </a:defRPr>
-                      </a:pPr>
-                      <a:r>
-                        <a:t>Universal plug-and-play</a:t>
-                      </a:r>
-                    </a:p>
-                  </a:txBody>
-                  <a:tcPr>
-                    <a:solidFill>
-                      <a:srgbClr val="FFFFFF"/>
-                    </a:solidFill>
-                  </a:tcPr>
-                </a:tc>
-              </a:tr>
-            </a:tbl>
-          </a:graphicData>
-        </a:graphic>
-      </p:graphicFrame>
-      <p:sp>
-        <p:nvSpPr>
-          <p:cNvPr id="4" name="TextBox 3"/>
-          <p:cNvSpPr txBox="1"/>
-          <p:nvPr/>
-        </p:nvSpPr>
-        <p:spPr>
-          <a:xfrm>
-            <a:off x="731520" y="4480560"/>
-            <a:ext cx="10728655" cy="1828800"/>
-          </a:xfrm>
-          <a:prstGeom prst="rect">
-            <a:avLst/>
-          </a:prstGeom>
-          <a:noFill/>
-        </p:spPr>
-        <p:txBody>
-          <a:bodyPr wrap="square">
-            <a:spAutoFit/>
-          </a:bodyPr>
-          <a:lstStyle/>
+              <a:t>Single Unified Backbone</a:t>
+            </a:r>
+          </a:p>
           <a:p>
             <a:pPr>
               <a:spcBef>
                 <a:spcPts val="600"/>
               </a:spcBef>
-              <a:defRPr sz="1100">
-                <a:solidFill>
-                  <a:srgbClr val="646464"/>
-                </a:solidFill>
+              <a:defRPr sz="1000">
+                <a:solidFill>
+                  <a:srgbClr val="595959"/>
+                </a:solidFill>
+                <a:latin typeface="Calibri"/>
               </a:defRPr>
             </a:pPr>
             <a:r>
-              <a:t>• Unified Backbone: Instead of maintaining 4 distinct neural networks in VRAM, our architecture relies on a single compact spatial backbone.</a:t>
+              <a:t>Instead of maintaining 4 distinct neural networks in VRAM (classifier + 3 branches), our architecture relies on a single compact spatial backbone with depth-adaptive gating.</a:t>
+            </a:r>
+          </a:p>
+        </p:txBody>
+      </p:sp>
+      <p:sp>
+        <p:nvSpPr>
+          <p:cNvPr id="7" name="Rounded Rectangle 6"/>
+          <p:cNvSpPr/>
+          <p:nvPr/>
+        </p:nvSpPr>
+        <p:spPr>
+          <a:xfrm>
+            <a:off x="4379976" y="4343400"/>
+            <a:ext cx="3429000" cy="1874519"/>
+          </a:xfrm>
+          <a:prstGeom prst="roundRect">
+            <a:avLst/>
+          </a:prstGeom>
+          <a:solidFill>
+            <a:srgbClr val="F5F7FA"/>
+          </a:solidFill>
+          <a:ln w="12700">
+            <a:solidFill>
+              <a:srgbClr val="D2D7DE"/>
+            </a:solidFill>
+          </a:ln>
+        </p:spPr>
+        <p:style>
+          <a:lnRef idx="1">
+            <a:schemeClr val="accent1"/>
+          </a:lnRef>
+          <a:fillRef idx="3">
+            <a:schemeClr val="accent1"/>
+          </a:fillRef>
+          <a:effectRef idx="2">
+            <a:schemeClr val="accent1"/>
+          </a:effectRef>
+          <a:fontRef idx="minor">
+            <a:schemeClr val="lt1"/>
+          </a:fontRef>
+        </p:style>
+        <p:txBody>
+          <a:bodyPr rtlCol="0" anchor="ctr" wrap="square" lIns="164592" rIns="164592" tIns="164592"/>
+          <a:lstStyle/>
+          <a:p>
+            <a:pPr algn="ctr">
+              <a:defRPr sz="1200" b="1">
+                <a:solidFill>
+                  <a:srgbClr val="1F4E78"/>
+                </a:solidFill>
+                <a:latin typeface="Calibri"/>
+              </a:defRPr>
+            </a:pPr>
+            <a:r>
+              <a:t>Universal Plug-and-Play</a:t>
             </a:r>
           </a:p>
           <a:p>
@@ -5534,14 +6878,70 @@
               <a:spcBef>
                 <a:spcPts val="600"/>
               </a:spcBef>
-              <a:defRPr sz="1100">
-                <a:solidFill>
-                  <a:srgbClr val="646464"/>
-                </a:solidFill>
+              <a:defRPr sz="1000">
+                <a:solidFill>
+                  <a:srgbClr val="595959"/>
+                </a:solidFill>
+                <a:latin typeface="Calibri"/>
               </a:defRPr>
             </a:pPr>
             <a:r>
-              <a:t>• Plug-and-Play Perception: Because the downstream YOLO detector is completely frozen and unmodified, our dehazer acts as an impartial visual pre-processor compatible with any perception system.</a:t>
+              <a:t>The downstream YOLO detector is completely frozen and unmodified. Our dehazer functions as an impartial optical pre-processor compatible with any off-the-shelf vision system.</a:t>
+            </a:r>
+          </a:p>
+        </p:txBody>
+      </p:sp>
+      <p:sp>
+        <p:nvSpPr>
+          <p:cNvPr id="8" name="Rounded Rectangle 7"/>
+          <p:cNvSpPr/>
+          <p:nvPr/>
+        </p:nvSpPr>
+        <p:spPr>
+          <a:xfrm>
+            <a:off x="8028432" y="4343400"/>
+            <a:ext cx="3429000" cy="1874519"/>
+          </a:xfrm>
+          <a:prstGeom prst="roundRect">
+            <a:avLst/>
+          </a:prstGeom>
+          <a:solidFill>
+            <a:srgbClr val="F5F7FA"/>
+          </a:solidFill>
+          <a:ln w="12700">
+            <a:solidFill>
+              <a:srgbClr val="D2D7DE"/>
+            </a:solidFill>
+          </a:ln>
+        </p:spPr>
+        <p:style>
+          <a:lnRef idx="1">
+            <a:schemeClr val="accent1"/>
+          </a:lnRef>
+          <a:fillRef idx="3">
+            <a:schemeClr val="accent1"/>
+          </a:fillRef>
+          <a:effectRef idx="2">
+            <a:schemeClr val="accent1"/>
+          </a:effectRef>
+          <a:fontRef idx="minor">
+            <a:schemeClr val="lt1"/>
+          </a:fontRef>
+        </p:style>
+        <p:txBody>
+          <a:bodyPr rtlCol="0" anchor="ctr" wrap="square" lIns="164592" rIns="164592" tIns="164592"/>
+          <a:lstStyle/>
+          <a:p>
+            <a:pPr algn="ctr">
+              <a:defRPr sz="1200" b="1">
+                <a:solidFill>
+                  <a:srgbClr val="1F4E78"/>
+                </a:solidFill>
+                <a:latin typeface="Calibri"/>
+              </a:defRPr>
+            </a:pPr>
+            <a:r>
+              <a:t>Edge &amp; Real-Time Viability</a:t>
             </a:r>
           </a:p>
           <a:p>
@@ -5549,14 +6949,15 @@
               <a:spcBef>
                 <a:spcPts val="600"/>
               </a:spcBef>
-              <a:defRPr sz="1100">
-                <a:solidFill>
-                  <a:srgbClr val="646464"/>
-                </a:solidFill>
+              <a:defRPr sz="1000">
+                <a:solidFill>
+                  <a:srgbClr val="595959"/>
+                </a:solidFill>
+                <a:latin typeface="Calibri"/>
               </a:defRPr>
             </a:pPr>
             <a:r>
-              <a:t>• Practical Real-Time Viability: Delivers superior restoration accuracy with reduced latency and 70% lower parameter weight.</a:t>
+              <a:t>Delivers superior restoration and detection accuracy while reducing parameters by 70% and inference latency to 230 ms, making it feasible for embedded and automotive applications.</a:t>
             </a:r>
           </a:p>
         </p:txBody>

--- a/docs/reports/presentation.pptx
+++ b/docs/reports/presentation.pptx
@@ -3270,7 +3270,7 @@
           <a:lstStyle/>
           <a:p>
             <a:pPr>
-              <a:defRPr sz="1100">
+              <a:defRPr sz="1050">
                 <a:solidFill>
                   <a:srgbClr val="595959"/>
                 </a:solidFill>
@@ -3278,15 +3278,19 @@
               </a:defRPr>
             </a:pPr>
             <a:r>
-              <a:t>Dataset: Real-world hazy photography (RTTS Valid, 865 images)</a:t>
+              <a:t>Evaluation Protocol:</a:t>
             </a:r>
             <a:br/>
             <a:r>
-              <a:t>Detector: Off-the-shelf YOLOv8n (COCO weights, 100% frozen)</a:t>
+              <a:t>• Image Reconstruction Fidelity: PSNR &amp; SSIM on paired Foggy Cityscapes (1,500 scenes @ 2048x1024)</a:t>
             </a:r>
             <a:br/>
             <a:r>
-              <a:t>Metrics: VOC AP@0.50, Strict AP@0.75, COCO mAP@[0.50:0.95], Model Footprint</a:t>
+              <a:t>• Real-World Detection Utility: VOC AP@0.50, Strict AP@0.75, COCO mAP on held-out RTTS Valid (865 images)</a:t>
+            </a:r>
+            <a:br/>
+            <a:r>
+              <a:t>• Impartial Perception Setup: Off-the-shelf YOLOv8n detector with 100% frozen COCO weights</a:t>
             </a:r>
           </a:p>
         </p:txBody>
@@ -3437,7 +3441,7 @@
               </a:defRPr>
             </a:pPr>
             <a:r>
-              <a:t>Real-World Dehazing Evaluation | Frozen COCO YOLOv8n | RTTS Validation Benchmark</a:t>
+              <a:t>Real-World Dehazing Evaluation | Frozen COCO YOLOv8n | Foggy Cityscapes &amp; RTTS Benchmark</a:t>
             </a:r>
           </a:p>
         </p:txBody>
@@ -4504,7 +4508,7 @@
               </a:defRPr>
             </a:pPr>
             <a:r>
-              <a:t>Real-World Dehazing Evaluation | Frozen COCO YOLOv8n | RTTS Validation Benchmark</a:t>
+              <a:t>Real-World Dehazing Evaluation | Frozen COCO YOLOv8n | Foggy Cityscapes &amp; RTTS Benchmark</a:t>
             </a:r>
           </a:p>
         </p:txBody>
@@ -4730,7 +4734,7 @@
               </a:defRPr>
             </a:pPr>
             <a:r>
-              <a:t>Quantitative Evaluation: Detection Performance on Real Fog</a:t>
+              <a:t>Quantitative Benchmark: PSNR Fidelity &amp; Detection Performance</a:t>
             </a:r>
           </a:p>
         </p:txBody>
@@ -4811,7 +4815,7 @@
               </a:defRPr>
             </a:pPr>
             <a:r>
-              <a:t>Real-World Dehazing Evaluation | Frozen COCO YOLOv8n | RTTS Validation Benchmark</a:t>
+              <a:t>Real-World Dehazing Evaluation | Frozen COCO YOLOv8n | Foggy Cityscapes &amp; RTTS Benchmark</a:t>
             </a:r>
           </a:p>
         </p:txBody>
@@ -4825,8 +4829,8 @@
           <p:nvPr/>
         </p:nvGraphicFramePr>
         <p:xfrm>
-          <a:off x="731520" y="1600200"/>
-          <a:ext cx="10728655" cy="2834640"/>
+          <a:off x="731520" y="1572768"/>
+          <a:ext cx="10728655" cy="3063240"/>
         </p:xfrm>
         <a:graphic>
           <a:graphicData uri="http://schemas.openxmlformats.org/drawingml/2006/table">
@@ -4835,22 +4839,22 @@
                 <a:tableStyleId>{5C22544A-7EE6-4342-B048-85BDC9FD1C3A}</a:tableStyleId>
               </a:tblPr>
               <a:tblGrid>
-                <a:gridCol w="2499055"/>
-                <a:gridCol w="1280160"/>
-                <a:gridCol w="1371600"/>
-                <a:gridCol w="1371600"/>
-                <a:gridCol w="1371600"/>
-                <a:gridCol w="1371600"/>
-                <a:gridCol w="1463040"/>
+                <a:gridCol w="2681935"/>
+                <a:gridCol w="1234440"/>
+                <a:gridCol w="1325880"/>
+                <a:gridCol w="1325880"/>
+                <a:gridCol w="1325880"/>
+                <a:gridCol w="1417320"/>
+                <a:gridCol w="1417320"/>
               </a:tblGrid>
-              <a:tr h="472440">
+              <a:tr h="382905">
                 <a:tc>
                   <a:txBody>
                     <a:bodyPr/>
                     <a:lstStyle/>
                     <a:p>
                       <a:pPr>
-                        <a:defRPr sz="1100" b="1">
+                        <a:defRPr sz="1050" b="1">
                           <a:solidFill>
                             <a:srgbClr val="FFFFFF"/>
                           </a:solidFill>
@@ -4874,7 +4878,7 @@
                     <a:lstStyle/>
                     <a:p>
                       <a:pPr algn="ctr">
-                        <a:defRPr sz="1100" b="1">
+                        <a:defRPr sz="1050" b="1">
                           <a:solidFill>
                             <a:srgbClr val="FFFFFF"/>
                           </a:solidFill>
@@ -4898,7 +4902,7 @@
                     <a:lstStyle/>
                     <a:p>
                       <a:pPr algn="ctr">
-                        <a:defRPr sz="1100" b="1">
+                        <a:defRPr sz="1050" b="1">
                           <a:solidFill>
                             <a:srgbClr val="FFFFFF"/>
                           </a:solidFill>
@@ -4922,7 +4926,7 @@
                     <a:lstStyle/>
                     <a:p>
                       <a:pPr algn="ctr">
-                        <a:defRPr sz="1100" b="1">
+                        <a:defRPr sz="1050" b="1">
                           <a:solidFill>
                             <a:srgbClr val="FFFFFF"/>
                           </a:solidFill>
@@ -4946,7 +4950,7 @@
                     <a:lstStyle/>
                     <a:p>
                       <a:pPr algn="ctr">
-                        <a:defRPr sz="1100" b="1">
+                        <a:defRPr sz="1050" b="1">
                           <a:solidFill>
                             <a:srgbClr val="FFFFFF"/>
                           </a:solidFill>
@@ -4970,7 +4974,7 @@
                     <a:lstStyle/>
                     <a:p>
                       <a:pPr algn="ctr">
-                        <a:defRPr sz="1100" b="1">
+                        <a:defRPr sz="1050" b="1">
                           <a:solidFill>
                             <a:srgbClr val="FFFFFF"/>
                           </a:solidFill>
@@ -4994,7 +4998,7 @@
                     <a:lstStyle/>
                     <a:p>
                       <a:pPr algn="ctr">
-                        <a:defRPr sz="1100" b="1">
+                        <a:defRPr sz="1050" b="1">
                           <a:solidFill>
                             <a:srgbClr val="FFFFFF"/>
                           </a:solidFill>
@@ -5013,14 +5017,354 @@
                   </a:tcPr>
                 </a:tc>
               </a:tr>
-              <a:tr h="472440">
+              <a:tr h="382905">
                 <a:tc>
                   <a:txBody>
                     <a:bodyPr/>
                     <a:lstStyle/>
                     <a:p>
                       <a:pPr>
-                        <a:defRPr sz="1100">
+                        <a:defRPr sz="1050">
+                          <a:solidFill>
+                            <a:srgbClr val="262626"/>
+                          </a:solidFill>
+                          <a:latin typeface="Calibri"/>
+                        </a:defRPr>
+                      </a:pPr>
+                      <a:r>
+                        <a:t>PSNR (In-Domain Full Val, dB)</a:t>
+                      </a:r>
+                    </a:p>
+                  </a:txBody>
+                  <a:tcPr anchor="ctr">
+                    <a:solidFill>
+                      <a:srgbClr val="F5F7FA"/>
+                    </a:solidFill>
+                  </a:tcPr>
+                </a:tc>
+                <a:tc>
+                  <a:txBody>
+                    <a:bodyPr/>
+                    <a:lstStyle/>
+                    <a:p>
+                      <a:pPr algn="ctr">
+                        <a:defRPr sz="1050">
+                          <a:solidFill>
+                            <a:srgbClr val="262626"/>
+                          </a:solidFill>
+                          <a:latin typeface="Calibri"/>
+                        </a:defRPr>
+                      </a:pPr>
+                      <a:r>
+                        <a:t>14.65 dB</a:t>
+                      </a:r>
+                    </a:p>
+                  </a:txBody>
+                  <a:tcPr anchor="ctr">
+                    <a:solidFill>
+                      <a:srgbClr val="F5F7FA"/>
+                    </a:solidFill>
+                  </a:tcPr>
+                </a:tc>
+                <a:tc>
+                  <a:txBody>
+                    <a:bodyPr/>
+                    <a:lstStyle/>
+                    <a:p>
+                      <a:pPr algn="ctr">
+                        <a:defRPr sz="1050">
+                          <a:solidFill>
+                            <a:srgbClr val="262626"/>
+                          </a:solidFill>
+                          <a:latin typeface="Calibri"/>
+                        </a:defRPr>
+                      </a:pPr>
+                      <a:r>
+                        <a:t>26.42 dB</a:t>
+                      </a:r>
+                    </a:p>
+                  </a:txBody>
+                  <a:tcPr anchor="ctr">
+                    <a:solidFill>
+                      <a:srgbClr val="F5F7FA"/>
+                    </a:solidFill>
+                  </a:tcPr>
+                </a:tc>
+                <a:tc>
+                  <a:txBody>
+                    <a:bodyPr/>
+                    <a:lstStyle/>
+                    <a:p>
+                      <a:pPr algn="ctr">
+                        <a:defRPr sz="1050">
+                          <a:solidFill>
+                            <a:srgbClr val="262626"/>
+                          </a:solidFill>
+                          <a:latin typeface="Calibri"/>
+                        </a:defRPr>
+                      </a:pPr>
+                      <a:r>
+                        <a:t>15.79 dB</a:t>
+                      </a:r>
+                    </a:p>
+                  </a:txBody>
+                  <a:tcPr anchor="ctr">
+                    <a:solidFill>
+                      <a:srgbClr val="F5F7FA"/>
+                    </a:solidFill>
+                  </a:tcPr>
+                </a:tc>
+                <a:tc>
+                  <a:txBody>
+                    <a:bodyPr/>
+                    <a:lstStyle/>
+                    <a:p>
+                      <a:pPr algn="ctr">
+                        <a:defRPr sz="1050" b="1">
+                          <a:solidFill>
+                            <a:srgbClr val="143250"/>
+                          </a:solidFill>
+                          <a:latin typeface="Calibri"/>
+                        </a:defRPr>
+                      </a:pPr>
+                      <a:r>
+                        <a:t>26.71 dB</a:t>
+                      </a:r>
+                    </a:p>
+                  </a:txBody>
+                  <a:tcPr anchor="ctr">
+                    <a:solidFill>
+                      <a:srgbClr val="EBF3FA"/>
+                    </a:solidFill>
+                  </a:tcPr>
+                </a:tc>
+                <a:tc>
+                  <a:txBody>
+                    <a:bodyPr/>
+                    <a:lstStyle/>
+                    <a:p>
+                      <a:pPr algn="ctr">
+                        <a:defRPr sz="1050" b="1">
+                          <a:solidFill>
+                            <a:srgbClr val="22703C"/>
+                          </a:solidFill>
+                          <a:latin typeface="Calibri"/>
+                        </a:defRPr>
+                      </a:pPr>
+                      <a:r>
+                        <a:t>+12.06 dB</a:t>
+                      </a:r>
+                    </a:p>
+                  </a:txBody>
+                  <a:tcPr anchor="ctr">
+                    <a:solidFill>
+                      <a:srgbClr val="F5F7FA"/>
+                    </a:solidFill>
+                  </a:tcPr>
+                </a:tc>
+                <a:tc>
+                  <a:txBody>
+                    <a:bodyPr/>
+                    <a:lstStyle/>
+                    <a:p>
+                      <a:pPr algn="ctr">
+                        <a:defRPr sz="1050" b="1">
+                          <a:solidFill>
+                            <a:srgbClr val="22703C"/>
+                          </a:solidFill>
+                          <a:latin typeface="Calibri"/>
+                        </a:defRPr>
+                      </a:pPr>
+                      <a:r>
+                        <a:t>+0.29 dB</a:t>
+                      </a:r>
+                    </a:p>
+                  </a:txBody>
+                  <a:tcPr anchor="ctr">
+                    <a:solidFill>
+                      <a:srgbClr val="F5F7FA"/>
+                    </a:solidFill>
+                  </a:tcPr>
+                </a:tc>
+              </a:tr>
+              <a:tr h="382905">
+                <a:tc>
+                  <a:txBody>
+                    <a:bodyPr/>
+                    <a:lstStyle/>
+                    <a:p>
+                      <a:pPr>
+                        <a:defRPr sz="1050">
+                          <a:solidFill>
+                            <a:srgbClr val="262626"/>
+                          </a:solidFill>
+                          <a:latin typeface="Calibri"/>
+                        </a:defRPr>
+                      </a:pPr>
+                      <a:r>
+                        <a:t>SSIM (Structural Similarity)</a:t>
+                      </a:r>
+                    </a:p>
+                  </a:txBody>
+                  <a:tcPr anchor="ctr">
+                    <a:solidFill>
+                      <a:srgbClr val="FFFFFF"/>
+                    </a:solidFill>
+                  </a:tcPr>
+                </a:tc>
+                <a:tc>
+                  <a:txBody>
+                    <a:bodyPr/>
+                    <a:lstStyle/>
+                    <a:p>
+                      <a:pPr algn="ctr">
+                        <a:defRPr sz="1050">
+                          <a:solidFill>
+                            <a:srgbClr val="262626"/>
+                          </a:solidFill>
+                          <a:latin typeface="Calibri"/>
+                        </a:defRPr>
+                      </a:pPr>
+                      <a:r>
+                        <a:t>0.8250</a:t>
+                      </a:r>
+                    </a:p>
+                  </a:txBody>
+                  <a:tcPr anchor="ctr">
+                    <a:solidFill>
+                      <a:srgbClr val="FFFFFF"/>
+                    </a:solidFill>
+                  </a:tcPr>
+                </a:tc>
+                <a:tc>
+                  <a:txBody>
+                    <a:bodyPr/>
+                    <a:lstStyle/>
+                    <a:p>
+                      <a:pPr algn="ctr">
+                        <a:defRPr sz="1050">
+                          <a:solidFill>
+                            <a:srgbClr val="262626"/>
+                          </a:solidFill>
+                          <a:latin typeface="Calibri"/>
+                        </a:defRPr>
+                      </a:pPr>
+                      <a:r>
+                        <a:t>0.9482</a:t>
+                      </a:r>
+                    </a:p>
+                  </a:txBody>
+                  <a:tcPr anchor="ctr">
+                    <a:solidFill>
+                      <a:srgbClr val="FFFFFF"/>
+                    </a:solidFill>
+                  </a:tcPr>
+                </a:tc>
+                <a:tc>
+                  <a:txBody>
+                    <a:bodyPr/>
+                    <a:lstStyle/>
+                    <a:p>
+                      <a:pPr algn="ctr">
+                        <a:defRPr sz="1050">
+                          <a:solidFill>
+                            <a:srgbClr val="262626"/>
+                          </a:solidFill>
+                          <a:latin typeface="Calibri"/>
+                        </a:defRPr>
+                      </a:pPr>
+                      <a:r>
+                        <a:t>0.7037</a:t>
+                      </a:r>
+                    </a:p>
+                  </a:txBody>
+                  <a:tcPr anchor="ctr">
+                    <a:solidFill>
+                      <a:srgbClr val="FFFFFF"/>
+                    </a:solidFill>
+                  </a:tcPr>
+                </a:tc>
+                <a:tc>
+                  <a:txBody>
+                    <a:bodyPr/>
+                    <a:lstStyle/>
+                    <a:p>
+                      <a:pPr algn="ctr">
+                        <a:defRPr sz="1050" b="1">
+                          <a:solidFill>
+                            <a:srgbClr val="143250"/>
+                          </a:solidFill>
+                          <a:latin typeface="Calibri"/>
+                        </a:defRPr>
+                      </a:pPr>
+                      <a:r>
+                        <a:t>0.9485</a:t>
+                      </a:r>
+                    </a:p>
+                  </a:txBody>
+                  <a:tcPr anchor="ctr">
+                    <a:solidFill>
+                      <a:srgbClr val="EBF3FA"/>
+                    </a:solidFill>
+                  </a:tcPr>
+                </a:tc>
+                <a:tc>
+                  <a:txBody>
+                    <a:bodyPr/>
+                    <a:lstStyle/>
+                    <a:p>
+                      <a:pPr algn="ctr">
+                        <a:defRPr sz="1050" b="1">
+                          <a:solidFill>
+                            <a:srgbClr val="22703C"/>
+                          </a:solidFill>
+                          <a:latin typeface="Calibri"/>
+                        </a:defRPr>
+                      </a:pPr>
+                      <a:r>
+                        <a:t>+0.1235</a:t>
+                      </a:r>
+                    </a:p>
+                  </a:txBody>
+                  <a:tcPr anchor="ctr">
+                    <a:solidFill>
+                      <a:srgbClr val="FFFFFF"/>
+                    </a:solidFill>
+                  </a:tcPr>
+                </a:tc>
+                <a:tc>
+                  <a:txBody>
+                    <a:bodyPr/>
+                    <a:lstStyle/>
+                    <a:p>
+                      <a:pPr algn="ctr">
+                        <a:defRPr sz="1050" b="1">
+                          <a:solidFill>
+                            <a:srgbClr val="22703C"/>
+                          </a:solidFill>
+                          <a:latin typeface="Calibri"/>
+                        </a:defRPr>
+                      </a:pPr>
+                      <a:r>
+                        <a:t>+0.0003</a:t>
+                      </a:r>
+                    </a:p>
+                  </a:txBody>
+                  <a:tcPr anchor="ctr">
+                    <a:solidFill>
+                      <a:srgbClr val="FFFFFF"/>
+                    </a:solidFill>
+                  </a:tcPr>
+                </a:tc>
+              </a:tr>
+              <a:tr h="382905">
+                <a:tc>
+                  <a:txBody>
+                    <a:bodyPr/>
+                    <a:lstStyle/>
+                    <a:p>
+                      <a:pPr>
+                        <a:defRPr sz="1050">
                           <a:solidFill>
                             <a:srgbClr val="262626"/>
                           </a:solidFill>
@@ -5044,7 +5388,7 @@
                     <a:lstStyle/>
                     <a:p>
                       <a:pPr algn="ctr">
-                        <a:defRPr sz="1100">
+                        <a:defRPr sz="1050">
                           <a:solidFill>
                             <a:srgbClr val="262626"/>
                           </a:solidFill>
@@ -5068,7 +5412,7 @@
                     <a:lstStyle/>
                     <a:p>
                       <a:pPr algn="ctr">
-                        <a:defRPr sz="1100">
+                        <a:defRPr sz="1050">
                           <a:solidFill>
                             <a:srgbClr val="262626"/>
                           </a:solidFill>
@@ -5092,7 +5436,7 @@
                     <a:lstStyle/>
                     <a:p>
                       <a:pPr algn="ctr">
-                        <a:defRPr sz="1100">
+                        <a:defRPr sz="1050">
                           <a:solidFill>
                             <a:srgbClr val="262626"/>
                           </a:solidFill>
@@ -5116,7 +5460,7 @@
                     <a:lstStyle/>
                     <a:p>
                       <a:pPr algn="ctr">
-                        <a:defRPr sz="1100" b="1">
+                        <a:defRPr sz="1050" b="1">
                           <a:solidFill>
                             <a:srgbClr val="143250"/>
                           </a:solidFill>
@@ -5140,7 +5484,7 @@
                     <a:lstStyle/>
                     <a:p>
                       <a:pPr algn="ctr">
-                        <a:defRPr sz="1100" b="1">
+                        <a:defRPr sz="1050" b="1">
                           <a:solidFill>
                             <a:srgbClr val="22703C"/>
                           </a:solidFill>
@@ -5164,7 +5508,7 @@
                     <a:lstStyle/>
                     <a:p>
                       <a:pPr algn="ctr">
-                        <a:defRPr sz="1100" b="1">
+                        <a:defRPr sz="1050" b="1">
                           <a:solidFill>
                             <a:srgbClr val="22703C"/>
                           </a:solidFill>
@@ -5183,14 +5527,14 @@
                   </a:tcPr>
                 </a:tc>
               </a:tr>
-              <a:tr h="472440">
+              <a:tr h="382905">
                 <a:tc>
                   <a:txBody>
                     <a:bodyPr/>
                     <a:lstStyle/>
                     <a:p>
                       <a:pPr>
-                        <a:defRPr sz="1100">
+                        <a:defRPr sz="1050">
                           <a:solidFill>
                             <a:srgbClr val="262626"/>
                           </a:solidFill>
@@ -5214,7 +5558,7 @@
                     <a:lstStyle/>
                     <a:p>
                       <a:pPr algn="ctr">
-                        <a:defRPr sz="1100">
+                        <a:defRPr sz="1050">
                           <a:solidFill>
                             <a:srgbClr val="262626"/>
                           </a:solidFill>
@@ -5238,7 +5582,7 @@
                     <a:lstStyle/>
                     <a:p>
                       <a:pPr algn="ctr">
-                        <a:defRPr sz="1100">
+                        <a:defRPr sz="1050">
                           <a:solidFill>
                             <a:srgbClr val="262626"/>
                           </a:solidFill>
@@ -5262,7 +5606,7 @@
                     <a:lstStyle/>
                     <a:p>
                       <a:pPr algn="ctr">
-                        <a:defRPr sz="1100">
+                        <a:defRPr sz="1050">
                           <a:solidFill>
                             <a:srgbClr val="262626"/>
                           </a:solidFill>
@@ -5286,7 +5630,7 @@
                     <a:lstStyle/>
                     <a:p>
                       <a:pPr algn="ctr">
-                        <a:defRPr sz="1100" b="1">
+                        <a:defRPr sz="1050" b="1">
                           <a:solidFill>
                             <a:srgbClr val="143250"/>
                           </a:solidFill>
@@ -5310,7 +5654,7 @@
                     <a:lstStyle/>
                     <a:p>
                       <a:pPr algn="ctr">
-                        <a:defRPr sz="1100" b="1">
+                        <a:defRPr sz="1050" b="1">
                           <a:solidFill>
                             <a:srgbClr val="22703C"/>
                           </a:solidFill>
@@ -5334,7 +5678,7 @@
                     <a:lstStyle/>
                     <a:p>
                       <a:pPr algn="ctr">
-                        <a:defRPr sz="1100" b="1">
+                        <a:defRPr sz="1050" b="1">
                           <a:solidFill>
                             <a:srgbClr val="22703C"/>
                           </a:solidFill>
@@ -5353,14 +5697,14 @@
                   </a:tcPr>
                 </a:tc>
               </a:tr>
-              <a:tr h="472440">
+              <a:tr h="382905">
                 <a:tc>
                   <a:txBody>
                     <a:bodyPr/>
                     <a:lstStyle/>
                     <a:p>
                       <a:pPr>
-                        <a:defRPr sz="1100">
+                        <a:defRPr sz="1050">
                           <a:solidFill>
                             <a:srgbClr val="262626"/>
                           </a:solidFill>
@@ -5384,7 +5728,7 @@
                     <a:lstStyle/>
                     <a:p>
                       <a:pPr algn="ctr">
-                        <a:defRPr sz="1100">
+                        <a:defRPr sz="1050">
                           <a:solidFill>
                             <a:srgbClr val="262626"/>
                           </a:solidFill>
@@ -5408,7 +5752,7 @@
                     <a:lstStyle/>
                     <a:p>
                       <a:pPr algn="ctr">
-                        <a:defRPr sz="1100">
+                        <a:defRPr sz="1050">
                           <a:solidFill>
                             <a:srgbClr val="262626"/>
                           </a:solidFill>
@@ -5432,7 +5776,7 @@
                     <a:lstStyle/>
                     <a:p>
                       <a:pPr algn="ctr">
-                        <a:defRPr sz="1100">
+                        <a:defRPr sz="1050">
                           <a:solidFill>
                             <a:srgbClr val="262626"/>
                           </a:solidFill>
@@ -5456,7 +5800,7 @@
                     <a:lstStyle/>
                     <a:p>
                       <a:pPr algn="ctr">
-                        <a:defRPr sz="1100" b="1">
+                        <a:defRPr sz="1050" b="1">
                           <a:solidFill>
                             <a:srgbClr val="143250"/>
                           </a:solidFill>
@@ -5480,7 +5824,7 @@
                     <a:lstStyle/>
                     <a:p>
                       <a:pPr algn="ctr">
-                        <a:defRPr sz="1100" b="1">
+                        <a:defRPr sz="1050" b="1">
                           <a:solidFill>
                             <a:srgbClr val="22703C"/>
                           </a:solidFill>
@@ -5504,7 +5848,7 @@
                     <a:lstStyle/>
                     <a:p>
                       <a:pPr algn="ctr">
-                        <a:defRPr sz="1100" b="1">
+                        <a:defRPr sz="1050" b="1">
                           <a:solidFill>
                             <a:srgbClr val="22703C"/>
                           </a:solidFill>
@@ -5523,14 +5867,14 @@
                   </a:tcPr>
                 </a:tc>
               </a:tr>
-              <a:tr h="472440">
+              <a:tr h="382905">
                 <a:tc>
                   <a:txBody>
                     <a:bodyPr/>
                     <a:lstStyle/>
                     <a:p>
                       <a:pPr>
-                        <a:defRPr sz="1100">
+                        <a:defRPr sz="1050">
                           <a:solidFill>
                             <a:srgbClr val="262626"/>
                           </a:solidFill>
@@ -5554,7 +5898,7 @@
                     <a:lstStyle/>
                     <a:p>
                       <a:pPr algn="ctr">
-                        <a:defRPr sz="1100">
+                        <a:defRPr sz="1050">
                           <a:solidFill>
                             <a:srgbClr val="262626"/>
                           </a:solidFill>
@@ -5578,7 +5922,7 @@
                     <a:lstStyle/>
                     <a:p>
                       <a:pPr algn="ctr">
-                        <a:defRPr sz="1100">
+                        <a:defRPr sz="1050">
                           <a:solidFill>
                             <a:srgbClr val="262626"/>
                           </a:solidFill>
@@ -5602,7 +5946,7 @@
                     <a:lstStyle/>
                     <a:p>
                       <a:pPr algn="ctr">
-                        <a:defRPr sz="1100">
+                        <a:defRPr sz="1050">
                           <a:solidFill>
                             <a:srgbClr val="262626"/>
                           </a:solidFill>
@@ -5626,7 +5970,7 @@
                     <a:lstStyle/>
                     <a:p>
                       <a:pPr algn="ctr">
-                        <a:defRPr sz="1100" b="1">
+                        <a:defRPr sz="1050" b="1">
                           <a:solidFill>
                             <a:srgbClr val="143250"/>
                           </a:solidFill>
@@ -5650,7 +5994,7 @@
                     <a:lstStyle/>
                     <a:p>
                       <a:pPr algn="ctr">
-                        <a:defRPr sz="1100" b="1">
+                        <a:defRPr sz="1050" b="1">
                           <a:solidFill>
                             <a:srgbClr val="22703C"/>
                           </a:solidFill>
@@ -5674,7 +6018,7 @@
                     <a:lstStyle/>
                     <a:p>
                       <a:pPr algn="ctr">
-                        <a:defRPr sz="1100" b="1">
+                        <a:defRPr sz="1050" b="1">
                           <a:solidFill>
                             <a:srgbClr val="22703C"/>
                           </a:solidFill>
@@ -5693,14 +6037,14 @@
                   </a:tcPr>
                 </a:tc>
               </a:tr>
-              <a:tr h="472440">
+              <a:tr h="382905">
                 <a:tc>
                   <a:txBody>
                     <a:bodyPr/>
                     <a:lstStyle/>
                     <a:p>
                       <a:pPr>
-                        <a:defRPr sz="1100">
+                        <a:defRPr sz="1050">
                           <a:solidFill>
                             <a:srgbClr val="262626"/>
                           </a:solidFill>
@@ -5724,7 +6068,7 @@
                     <a:lstStyle/>
                     <a:p>
                       <a:pPr algn="ctr">
-                        <a:defRPr sz="1100">
+                        <a:defRPr sz="1050">
                           <a:solidFill>
                             <a:srgbClr val="262626"/>
                           </a:solidFill>
@@ -5748,7 +6092,7 @@
                     <a:lstStyle/>
                     <a:p>
                       <a:pPr algn="ctr">
-                        <a:defRPr sz="1100">
+                        <a:defRPr sz="1050">
                           <a:solidFill>
                             <a:srgbClr val="262626"/>
                           </a:solidFill>
@@ -5772,7 +6116,7 @@
                     <a:lstStyle/>
                     <a:p>
                       <a:pPr algn="ctr">
-                        <a:defRPr sz="1100">
+                        <a:defRPr sz="1050">
                           <a:solidFill>
                             <a:srgbClr val="262626"/>
                           </a:solidFill>
@@ -5796,7 +6140,7 @@
                     <a:lstStyle/>
                     <a:p>
                       <a:pPr algn="ctr">
-                        <a:defRPr sz="1100" b="1">
+                        <a:defRPr sz="1050" b="1">
                           <a:solidFill>
                             <a:srgbClr val="143250"/>
                           </a:solidFill>
@@ -5820,7 +6164,7 @@
                     <a:lstStyle/>
                     <a:p>
                       <a:pPr algn="ctr">
-                        <a:defRPr sz="1100" b="1">
+                        <a:defRPr sz="1050" b="1">
                           <a:solidFill>
                             <a:srgbClr val="22703C"/>
                           </a:solidFill>
@@ -5844,7 +6188,7 @@
                     <a:lstStyle/>
                     <a:p>
                       <a:pPr algn="ctr">
-                        <a:defRPr sz="1100" b="1">
+                        <a:defRPr sz="1050" b="1">
                           <a:solidFill>
                             <a:srgbClr val="595959"/>
                           </a:solidFill>
@@ -5875,8 +6219,8 @@
         </p:nvSpPr>
         <p:spPr>
           <a:xfrm>
-            <a:off x="731520" y="4617720"/>
-            <a:ext cx="3429000" cy="1600200"/>
+            <a:off x="731520" y="4736592"/>
+            <a:ext cx="3429000" cy="1536192"/>
           </a:xfrm>
           <a:prstGeom prst="roundRect">
             <a:avLst/>
@@ -5905,11 +6249,11 @@
           </a:fontRef>
         </p:style>
         <p:txBody>
-          <a:bodyPr rtlCol="0" anchor="ctr" wrap="square" lIns="164592" rIns="164592" tIns="137160"/>
+          <a:bodyPr rtlCol="0" anchor="ctr" wrap="square" lIns="164592" rIns="164592" tIns="128016"/>
           <a:lstStyle/>
           <a:p>
             <a:pPr algn="ctr">
-              <a:defRPr sz="1150" b="1">
+              <a:defRPr sz="1100" b="1">
                 <a:solidFill>
                   <a:srgbClr val="1F4E78"/>
                 </a:solidFill>
@@ -5917,15 +6261,15 @@
               </a:defRPr>
             </a:pPr>
             <a:r>
-              <a:t>Avoiding Negative Transfer</a:t>
+              <a:t>In-Domain Reconstruction (PSNR)</a:t>
             </a:r>
           </a:p>
           <a:p>
             <a:pPr>
               <a:spcBef>
-                <a:spcPts val="400"/>
+                <a:spcPts val="300"/>
               </a:spcBef>
-              <a:defRPr sz="1000">
+              <a:defRPr sz="950">
                 <a:solidFill>
                   <a:srgbClr val="595959"/>
                 </a:solidFill>
@@ -5933,7 +6277,7 @@
               </a:defRPr>
             </a:pPr>
             <a:r>
-              <a:t>The reference paper reduces object detection accuracy (-0.0112 AP@0.50) compared to untreated hazy images, whereas our method reliably improves it (+0.0364 AP@0.50).</a:t>
+              <a:t>On 1,500 paired Foggy Cityscapes scenes @ 2048x1024, our method achieves 26.71 dB PSNR (+0.29 dB over the paper). Classical DCP yields only 15.79 dB due to unnatural texture and color distortions.</a:t>
             </a:r>
           </a:p>
         </p:txBody>
@@ -5946,8 +6290,8 @@
         </p:nvSpPr>
         <p:spPr>
           <a:xfrm>
-            <a:off x="4379976" y="4617720"/>
-            <a:ext cx="3429000" cy="1600200"/>
+            <a:off x="4379976" y="4736592"/>
+            <a:ext cx="3429000" cy="1536192"/>
           </a:xfrm>
           <a:prstGeom prst="roundRect">
             <a:avLst/>
@@ -5976,11 +6320,11 @@
           </a:fontRef>
         </p:style>
         <p:txBody>
-          <a:bodyPr rtlCol="0" anchor="ctr" wrap="square" lIns="164592" rIns="164592" tIns="137160"/>
+          <a:bodyPr rtlCol="0" anchor="ctr" wrap="square" lIns="164592" rIns="164592" tIns="128016"/>
           <a:lstStyle/>
           <a:p>
             <a:pPr algn="ctr">
-              <a:defRPr sz="1150" b="1">
+              <a:defRPr sz="1100" b="1">
                 <a:solidFill>
                   <a:srgbClr val="1F4E78"/>
                 </a:solidFill>
@@ -5988,15 +6332,15 @@
               </a:defRPr>
             </a:pPr>
             <a:r>
-              <a:t>Surpassing Classical DCP</a:t>
+              <a:t>Real Fog Task Utility (AP@0.50)</a:t>
             </a:r>
           </a:p>
           <a:p>
             <a:pPr>
               <a:spcBef>
-                <a:spcPts val="400"/>
+                <a:spcPts val="300"/>
               </a:spcBef>
-              <a:defRPr sz="1000">
+              <a:defRPr sz="950">
                 <a:solidFill>
                   <a:srgbClr val="595959"/>
                 </a:solidFill>
@@ -6004,7 +6348,7 @@
               </a:defRPr>
             </a:pPr>
             <a:r>
-              <a:t>For over a decade, classical DCP has resisted being beaten by deep learning on real fog. Our method achieves the first statistically verified win (+0.0185 AP@0.50, +0.0113 mAP).</a:t>
+              <a:t>While the reference paper reduces detection accuracy on real fog (-0.0112 AP@0.50 vs raw hazy), our method provides genuine visual recovery (+0.0364 AP@0.50, beating classical DCP by +0.0185).</a:t>
             </a:r>
           </a:p>
         </p:txBody>
@@ -6017,8 +6361,8 @@
         </p:nvSpPr>
         <p:spPr>
           <a:xfrm>
-            <a:off x="8028432" y="4617720"/>
-            <a:ext cx="3429000" cy="1600200"/>
+            <a:off x="8028432" y="4736592"/>
+            <a:ext cx="3429000" cy="1536192"/>
           </a:xfrm>
           <a:prstGeom prst="roundRect">
             <a:avLst/>
@@ -6047,11 +6391,11 @@
           </a:fontRef>
         </p:style>
         <p:txBody>
-          <a:bodyPr rtlCol="0" anchor="ctr" wrap="square" lIns="164592" rIns="164592" tIns="137160"/>
+          <a:bodyPr rtlCol="0" anchor="ctr" wrap="square" lIns="164592" rIns="164592" tIns="128016"/>
           <a:lstStyle/>
           <a:p>
             <a:pPr algn="ctr">
-              <a:defRPr sz="1150" b="1">
+              <a:defRPr sz="1100" b="1">
                 <a:solidFill>
                   <a:srgbClr val="1F4E78"/>
                 </a:solidFill>
@@ -6065,9 +6409,9 @@
           <a:p>
             <a:pPr>
               <a:spcBef>
-                <a:spcPts val="400"/>
+                <a:spcPts val="300"/>
               </a:spcBef>
-              <a:defRPr sz="1000">
+              <a:defRPr sz="950">
                 <a:solidFill>
                   <a:srgbClr val="595959"/>
                 </a:solidFill>
@@ -6075,7 +6419,7 @@
               </a:defRPr>
             </a:pPr>
             <a:r>
-              <a:t>At strict IoU threshold (AP@0.75), our method delivers an 11.6% relative gain over the reference paper while suppressing noisy false-positive bounding boxes.</a:t>
+              <a:t>Under strict IoU criteria (AP@0.75), our method delivers an 11.6% relative gain over the reference paper (+0.0301 AP) while predicting 1,976 fewer false-positive boxes.</a:t>
             </a:r>
           </a:p>
         </p:txBody>
@@ -6226,7 +6570,7 @@
               </a:defRPr>
             </a:pPr>
             <a:r>
-              <a:t>Real-World Dehazing Evaluation | Frozen COCO YOLOv8n | RTTS Validation Benchmark</a:t>
+              <a:t>Real-World Dehazing Evaluation | Frozen COCO YOLOv8n | Foggy Cityscapes &amp; RTTS Benchmark</a:t>
             </a:r>
           </a:p>
         </p:txBody>

--- a/docs/reports/presentation.pptx
+++ b/docs/reports/presentation.pptx
@@ -1,15 +1,18 @@
 
 <file path=ppt/presentation.xml><?xml version="1.0" encoding="utf-8"?>
-<p:presentation xmlns:a="http://schemas.openxmlformats.org/drawingml/2006/main" xmlns:r="http://schemas.openxmlformats.org/officeDocument/2006/relationships" xmlns:p="http://schemas.openxmlformats.org/presentationml/2006/main" saveSubsetFonts="1" autoCompressPictures="0">
+<p:presentation xmlns:a="http://schemas.openxmlformats.org/drawingml/2006/main" xmlns:r="http://schemas.openxmlformats.org/officeDocument/2006/relationships" xmlns:p="http://schemas.openxmlformats.org/presentationml/2006/main" xmlns:m="http://schemas.openxmlformats.org/officeDocument/2006/math" xmlns:w="http://schemas.openxmlformats.org/wordprocessingml/2006/main" autoCompressPictures="0" saveSubsetFonts="1">
   <p:sldMasterIdLst>
     <p:sldMasterId id="2147483648" r:id="rId1"/>
   </p:sldMasterIdLst>
+  <p:notesMasterIdLst>
+    <p:notesMasterId r:id="rId9"/>
+  </p:notesMasterIdLst>
   <p:sldIdLst>
-    <p:sldId id="256" r:id="rId7"/>
-    <p:sldId id="257" r:id="rId8"/>
-    <p:sldId id="258" r:id="rId9"/>
-    <p:sldId id="259" r:id="rId10"/>
-    <p:sldId id="260" r:id="rId11"/>
+    <p:sldId id="256" r:id="rId4"/>
+    <p:sldId id="257" r:id="rId5"/>
+    <p:sldId id="258" r:id="rId6"/>
+    <p:sldId id="259" r:id="rId7"/>
+    <p:sldId id="260" r:id="rId8"/>
   </p:sldIdLst>
   <p:sldSz cx="12191695" cy="6858000" type="screen4x3"/>
   <p:notesSz cx="6858000" cy="9144000"/>
@@ -17,8 +20,8 @@
     <a:defPPr>
       <a:defRPr lang="en-US"/>
     </a:defPPr>
-    <a:lvl1pPr marL="0" algn="l" defTabSz="457200" rtl="0" eaLnBrk="1" latinLnBrk="0" hangingPunct="1">
-      <a:defRPr sz="1800" kern="1200">
+    <a:lvl1pPr marL="0" algn="l" defTabSz="457200" rtl="0">
+      <a:defRPr sz="1800">
         <a:solidFill>
           <a:schemeClr val="tx1"/>
         </a:solidFill>
@@ -27,8 +30,8 @@
         <a:cs typeface="+mn-cs"/>
       </a:defRPr>
     </a:lvl1pPr>
-    <a:lvl2pPr marL="457200" algn="l" defTabSz="457200" rtl="0" eaLnBrk="1" latinLnBrk="0" hangingPunct="1">
-      <a:defRPr sz="1800" kern="1200">
+    <a:lvl2pPr marL="457200" algn="l" defTabSz="457200" rtl="0">
+      <a:defRPr sz="1800">
         <a:solidFill>
           <a:schemeClr val="tx1"/>
         </a:solidFill>
@@ -37,8 +40,8 @@
         <a:cs typeface="+mn-cs"/>
       </a:defRPr>
     </a:lvl2pPr>
-    <a:lvl3pPr marL="914400" algn="l" defTabSz="457200" rtl="0" eaLnBrk="1" latinLnBrk="0" hangingPunct="1">
-      <a:defRPr sz="1800" kern="1200">
+    <a:lvl3pPr marL="914400" algn="l" defTabSz="457200" rtl="0">
+      <a:defRPr sz="1800">
         <a:solidFill>
           <a:schemeClr val="tx1"/>
         </a:solidFill>
@@ -47,8 +50,8 @@
         <a:cs typeface="+mn-cs"/>
       </a:defRPr>
     </a:lvl3pPr>
-    <a:lvl4pPr marL="1371600" algn="l" defTabSz="457200" rtl="0" eaLnBrk="1" latinLnBrk="0" hangingPunct="1">
-      <a:defRPr sz="1800" kern="1200">
+    <a:lvl4pPr marL="1371600" algn="l" defTabSz="457200" rtl="0">
+      <a:defRPr sz="1800">
         <a:solidFill>
           <a:schemeClr val="tx1"/>
         </a:solidFill>
@@ -57,8 +60,8 @@
         <a:cs typeface="+mn-cs"/>
       </a:defRPr>
     </a:lvl4pPr>
-    <a:lvl5pPr marL="1828800" algn="l" defTabSz="457200" rtl="0" eaLnBrk="1" latinLnBrk="0" hangingPunct="1">
-      <a:defRPr sz="1800" kern="1200">
+    <a:lvl5pPr marL="1828800" algn="l" defTabSz="457200" rtl="0">
+      <a:defRPr sz="1800">
         <a:solidFill>
           <a:schemeClr val="tx1"/>
         </a:solidFill>
@@ -67,8 +70,8 @@
         <a:cs typeface="+mn-cs"/>
       </a:defRPr>
     </a:lvl5pPr>
-    <a:lvl6pPr marL="2286000" algn="l" defTabSz="457200" rtl="0" eaLnBrk="1" latinLnBrk="0" hangingPunct="1">
-      <a:defRPr sz="1800" kern="1200">
+    <a:lvl6pPr marL="2286000" algn="l" defTabSz="457200" rtl="0">
+      <a:defRPr sz="1800">
         <a:solidFill>
           <a:schemeClr val="tx1"/>
         </a:solidFill>
@@ -77,8 +80,8 @@
         <a:cs typeface="+mn-cs"/>
       </a:defRPr>
     </a:lvl6pPr>
-    <a:lvl7pPr marL="2743200" algn="l" defTabSz="457200" rtl="0" eaLnBrk="1" latinLnBrk="0" hangingPunct="1">
-      <a:defRPr sz="1800" kern="1200">
+    <a:lvl7pPr marL="2743200" algn="l" defTabSz="457200" rtl="0">
+      <a:defRPr sz="1800">
         <a:solidFill>
           <a:schemeClr val="tx1"/>
         </a:solidFill>
@@ -87,8 +90,8 @@
         <a:cs typeface="+mn-cs"/>
       </a:defRPr>
     </a:lvl7pPr>
-    <a:lvl8pPr marL="3200400" algn="l" defTabSz="457200" rtl="0" eaLnBrk="1" latinLnBrk="0" hangingPunct="1">
-      <a:defRPr sz="1800" kern="1200">
+    <a:lvl8pPr marL="3200400" algn="l" defTabSz="457200" rtl="0">
+      <a:defRPr sz="1800">
         <a:solidFill>
           <a:schemeClr val="tx1"/>
         </a:solidFill>
@@ -97,8 +100,8 @@
         <a:cs typeface="+mn-cs"/>
       </a:defRPr>
     </a:lvl8pPr>
-    <a:lvl9pPr marL="3657600" algn="l" defTabSz="457200" rtl="0" eaLnBrk="1" latinLnBrk="0" hangingPunct="1">
-      <a:defRPr sz="1800" kern="1200">
+    <a:lvl9pPr marL="3657600" algn="l" defTabSz="457200" rtl="0">
+      <a:defRPr sz="1800">
         <a:solidFill>
           <a:schemeClr val="tx1"/>
         </a:solidFill>
@@ -111,8 +114,753 @@
 </p:presentation>
 </file>
 
+<file path=ppt/notesMasters/notesMaster1.xml><?xml version="1.0" encoding="utf-8"?>
+<p:notesMaster xmlns:a="http://schemas.openxmlformats.org/drawingml/2006/main" xmlns:r="http://schemas.openxmlformats.org/officeDocument/2006/relationships" xmlns:p="http://schemas.openxmlformats.org/presentationml/2006/main">
+  <p:cSld name="">
+    <p:bg>
+      <p:bgRef idx="1001">
+        <a:schemeClr val="bg1"/>
+      </p:bgRef>
+    </p:bg>
+    <p:spTree>
+      <p:nvGrpSpPr>
+        <p:cNvPr id="1" name=""/>
+        <p:cNvGrpSpPr/>
+        <p:nvPr/>
+      </p:nvGrpSpPr>
+      <p:grpSpPr bwMode="auto">
+        <a:xfrm>
+          <a:off x="0" y="0"/>
+          <a:ext cx="0" cy="0"/>
+          <a:chOff x="0" y="0"/>
+          <a:chExt cx="0" cy="0"/>
+        </a:xfrm>
+      </p:grpSpPr>
+      <p:sp>
+        <p:nvSpPr>
+          <p:cNvPr id="2" name="Header Placeholder 1"/>
+          <p:cNvSpPr>
+            <a:spLocks noGrp="1"/>
+          </p:cNvSpPr>
+          <p:nvPr>
+            <p:ph type="hdr" sz="quarter"/>
+          </p:nvPr>
+        </p:nvSpPr>
+        <p:spPr bwMode="auto">
+          <a:xfrm>
+            <a:off x="0" y="0"/>
+            <a:ext cx="2971800" cy="458788"/>
+          </a:xfrm>
+          <a:prstGeom prst="rect">
+            <a:avLst/>
+          </a:prstGeom>
+        </p:spPr>
+        <p:txBody>
+          <a:bodyPr vert="horz" lIns="91440" tIns="45720" rIns="91440" bIns="45720" rtlCol="0" anchor="ctr"/>
+          <a:lstStyle>
+            <a:lvl1pPr algn="l">
+              <a:defRPr sz="1200"/>
+            </a:lvl1pPr>
+          </a:lstStyle>
+          <a:p>
+            <a:pPr>
+              <a:defRPr/>
+            </a:pPr>
+            <a:endParaRPr/>
+          </a:p>
+        </p:txBody>
+      </p:sp>
+      <p:sp>
+        <p:nvSpPr>
+          <p:cNvPr id="3" name="Date Placeholder 2"/>
+          <p:cNvSpPr>
+            <a:spLocks noGrp="1"/>
+          </p:cNvSpPr>
+          <p:nvPr>
+            <p:ph type="dt" idx="2"/>
+          </p:nvPr>
+        </p:nvSpPr>
+        <p:spPr bwMode="auto">
+          <a:xfrm>
+            <a:off x="3884613" y="0"/>
+            <a:ext cx="2971800" cy="458788"/>
+          </a:xfrm>
+          <a:prstGeom prst="rect">
+            <a:avLst/>
+          </a:prstGeom>
+        </p:spPr>
+        <p:txBody>
+          <a:bodyPr vert="horz" lIns="91440" tIns="45720" rIns="91440" bIns="45720" rtlCol="0" anchor="ctr"/>
+          <a:lstStyle>
+            <a:lvl1pPr algn="r">
+              <a:defRPr sz="1200"/>
+            </a:lvl1pPr>
+          </a:lstStyle>
+          <a:p>
+            <a:pPr>
+              <a:defRPr/>
+            </a:pPr>
+            <a:endParaRPr/>
+          </a:p>
+        </p:txBody>
+      </p:sp>
+      <p:sp>
+        <p:nvSpPr>
+          <p:cNvPr id="3" name="Date Placeholder 2"/>
+          <p:cNvSpPr>
+            <a:spLocks noGrp="1"/>
+          </p:cNvSpPr>
+          <p:nvPr>
+            <p:ph type="dt" idx="3"/>
+          </p:nvPr>
+        </p:nvSpPr>
+        <p:spPr bwMode="auto">
+          <a:xfrm>
+            <a:off x="3884613" y="0"/>
+            <a:ext cx="2971800" cy="458788"/>
+          </a:xfrm>
+          <a:prstGeom prst="rect">
+            <a:avLst/>
+          </a:prstGeom>
+        </p:spPr>
+        <p:txBody>
+          <a:bodyPr vert="horz" lIns="91440" tIns="45720" rIns="91440" bIns="45720" rtlCol="0" anchor="ctr"/>
+          <a:lstStyle>
+            <a:lvl1pPr algn="r">
+              <a:defRPr sz="1200"/>
+            </a:lvl1pPr>
+          </a:lstStyle>
+          <a:p>
+            <a:pPr>
+              <a:defRPr/>
+            </a:pPr>
+            <a:endParaRPr/>
+          </a:p>
+        </p:txBody>
+      </p:sp>
+      <p:sp>
+        <p:nvSpPr>
+          <p:cNvPr id="5" name="Notes Placeholder 4"/>
+          <p:cNvSpPr>
+            <a:spLocks noGrp="1"/>
+          </p:cNvSpPr>
+          <p:nvPr>
+            <p:ph type="body" sz="quarter" idx="1"/>
+          </p:nvPr>
+        </p:nvSpPr>
+        <p:spPr bwMode="auto">
+          <a:xfrm>
+            <a:off x="685800" y="4400550"/>
+            <a:ext cx="5486400" cy="3600450"/>
+          </a:xfrm>
+          <a:prstGeom prst="rect">
+            <a:avLst/>
+          </a:prstGeom>
+        </p:spPr>
+        <p:txBody>
+          <a:bodyPr vert="horz" lIns="91440" tIns="45720" rIns="91440" bIns="45720" rtlCol="0" anchor="ctr"/>
+          <a:lstStyle/>
+          <a:p>
+            <a:pPr>
+              <a:defRPr/>
+            </a:pPr>
+            <a:endParaRPr/>
+          </a:p>
+        </p:txBody>
+      </p:sp>
+      <p:sp>
+        <p:nvSpPr>
+          <p:cNvPr id="6" name="Footer Placeholder 5"/>
+          <p:cNvSpPr>
+            <a:spLocks noGrp="1"/>
+          </p:cNvSpPr>
+          <p:nvPr>
+            <p:ph type="ftr" sz="quarter" idx="4"/>
+          </p:nvPr>
+        </p:nvSpPr>
+        <p:spPr bwMode="auto">
+          <a:xfrm>
+            <a:off x="0" y="8685213"/>
+            <a:ext cx="2971800" cy="458787"/>
+          </a:xfrm>
+          <a:prstGeom prst="rect">
+            <a:avLst/>
+          </a:prstGeom>
+        </p:spPr>
+        <p:txBody>
+          <a:bodyPr vert="horz" lIns="91440" tIns="45720" rIns="91440" bIns="45720" rtlCol="0" anchor="b"/>
+          <a:lstStyle>
+            <a:lvl1pPr algn="l">
+              <a:defRPr sz="1200"/>
+            </a:lvl1pPr>
+          </a:lstStyle>
+          <a:p>
+            <a:pPr>
+              <a:defRPr/>
+            </a:pPr>
+            <a:endParaRPr/>
+          </a:p>
+        </p:txBody>
+      </p:sp>
+      <p:sp>
+        <p:nvSpPr>
+          <p:cNvPr id="7" name="Slide Number Placeholder 6"/>
+          <p:cNvSpPr>
+            <a:spLocks noGrp="1"/>
+          </p:cNvSpPr>
+          <p:nvPr>
+            <p:ph type="sldNum" sz="quarter" idx="10"/>
+          </p:nvPr>
+        </p:nvSpPr>
+        <p:spPr bwMode="auto">
+          <a:xfrm>
+            <a:off x="3884613" y="8685213"/>
+            <a:ext cx="2971800" cy="458787"/>
+          </a:xfrm>
+          <a:prstGeom prst="rect">
+            <a:avLst/>
+          </a:prstGeom>
+        </p:spPr>
+        <p:txBody>
+          <a:bodyPr vert="horz" lIns="91440" tIns="45720" rIns="91440" bIns="45720" rtlCol="0" anchor="b"/>
+          <a:lstStyle>
+            <a:lvl1pPr algn="r">
+              <a:defRPr sz="1200"/>
+            </a:lvl1pPr>
+          </a:lstStyle>
+          <a:p>
+            <a:pPr>
+              <a:defRPr/>
+            </a:pPr>
+            <a:endParaRPr/>
+          </a:p>
+        </p:txBody>
+      </p:sp>
+    </p:spTree>
+  </p:cSld>
+  <p:clrMap bg1="lt1" tx1="dk1" bg2="lt2" tx2="dk2" accent1="accent1" accent2="accent2" accent3="accent3" accent4="accent4" accent5="accent5" accent6="accent6" hlink="hlink" folHlink="folHlink"/>
+  <p:notesStyle>
+    <a:lvl1pPr marL="0" algn="l" defTabSz="914400">
+      <a:defRPr sz="1200">
+        <a:solidFill>
+          <a:schemeClr val="tx1"/>
+        </a:solidFill>
+        <a:latin typeface="+mn-lt"/>
+        <a:ea typeface="+mn-ea"/>
+        <a:cs typeface="+mn-cs"/>
+      </a:defRPr>
+    </a:lvl1pPr>
+    <a:lvl2pPr marL="457200" algn="l" defTabSz="914400">
+      <a:defRPr sz="1200">
+        <a:solidFill>
+          <a:schemeClr val="tx1"/>
+        </a:solidFill>
+        <a:latin typeface="+mn-lt"/>
+        <a:ea typeface="+mn-ea"/>
+        <a:cs typeface="+mn-cs"/>
+      </a:defRPr>
+    </a:lvl2pPr>
+    <a:lvl3pPr marL="914400" algn="l" defTabSz="914400">
+      <a:defRPr sz="1200">
+        <a:solidFill>
+          <a:schemeClr val="tx1"/>
+        </a:solidFill>
+        <a:latin typeface="+mn-lt"/>
+        <a:ea typeface="+mn-ea"/>
+        <a:cs typeface="+mn-cs"/>
+      </a:defRPr>
+    </a:lvl3pPr>
+    <a:lvl4pPr marL="1371600" algn="l" defTabSz="914400">
+      <a:defRPr sz="1200">
+        <a:solidFill>
+          <a:schemeClr val="tx1"/>
+        </a:solidFill>
+        <a:latin typeface="+mn-lt"/>
+        <a:ea typeface="+mn-ea"/>
+        <a:cs typeface="+mn-cs"/>
+      </a:defRPr>
+    </a:lvl4pPr>
+    <a:lvl5pPr marL="1828800" algn="l" defTabSz="914400">
+      <a:defRPr sz="1200">
+        <a:solidFill>
+          <a:schemeClr val="tx1"/>
+        </a:solidFill>
+        <a:latin typeface="+mn-lt"/>
+        <a:ea typeface="+mn-ea"/>
+        <a:cs typeface="+mn-cs"/>
+      </a:defRPr>
+    </a:lvl5pPr>
+    <a:lvl6pPr marL="2286000" algn="l" defTabSz="914400">
+      <a:defRPr sz="1200">
+        <a:solidFill>
+          <a:schemeClr val="tx1"/>
+        </a:solidFill>
+        <a:latin typeface="+mn-lt"/>
+        <a:ea typeface="+mn-ea"/>
+        <a:cs typeface="+mn-cs"/>
+      </a:defRPr>
+    </a:lvl6pPr>
+    <a:lvl7pPr marL="2743200" algn="l" defTabSz="914400">
+      <a:defRPr sz="1200">
+        <a:solidFill>
+          <a:schemeClr val="tx1"/>
+        </a:solidFill>
+        <a:latin typeface="+mn-lt"/>
+        <a:ea typeface="+mn-ea"/>
+        <a:cs typeface="+mn-cs"/>
+      </a:defRPr>
+    </a:lvl7pPr>
+    <a:lvl8pPr marL="3200400" algn="l" defTabSz="914400">
+      <a:defRPr sz="1200">
+        <a:solidFill>
+          <a:schemeClr val="tx1"/>
+        </a:solidFill>
+        <a:latin typeface="+mn-lt"/>
+        <a:ea typeface="+mn-ea"/>
+        <a:cs typeface="+mn-cs"/>
+      </a:defRPr>
+    </a:lvl8pPr>
+    <a:lvl9pPr marL="3657600" algn="l" defTabSz="914400">
+      <a:defRPr sz="1200">
+        <a:solidFill>
+          <a:schemeClr val="tx1"/>
+        </a:solidFill>
+        <a:latin typeface="+mn-lt"/>
+        <a:ea typeface="+mn-ea"/>
+        <a:cs typeface="+mn-cs"/>
+      </a:defRPr>
+    </a:lvl9pPr>
+  </p:notesStyle>
+</p:notesMaster>
+</file>
+
+<file path=ppt/notesSlides/notesSlide1.xml><?xml version="1.0" encoding="utf-8"?>
+<p:notes xmlns:a="http://schemas.openxmlformats.org/drawingml/2006/main" xmlns:r="http://schemas.openxmlformats.org/officeDocument/2006/relationships" xmlns:p="http://schemas.openxmlformats.org/presentationml/2006/main" xmlns:m="http://schemas.openxmlformats.org/officeDocument/2006/math" xmlns:w="http://schemas.openxmlformats.org/wordprocessingml/2006/main">
+  <p:cSld name="">
+    <p:spTree>
+      <p:nvGrpSpPr>
+        <p:cNvPr id="1" name=""/>
+        <p:cNvGrpSpPr/>
+        <p:nvPr/>
+      </p:nvGrpSpPr>
+      <p:grpSpPr bwMode="auto">
+        <a:xfrm>
+          <a:off x="0" y="0"/>
+          <a:ext cx="0" cy="0"/>
+          <a:chOff x="0" y="0"/>
+          <a:chExt cx="0" cy="0"/>
+        </a:xfrm>
+      </p:grpSpPr>
+      <p:sp>
+        <p:nvSpPr>
+          <p:cNvPr id="2" name="Slide Image Placeholder 1"/>
+          <p:cNvSpPr>
+            <a:spLocks noChangeAspect="1" noGrp="1" noRot="1"/>
+          </p:cNvSpPr>
+          <p:nvPr>
+            <p:ph type="sldImg"/>
+          </p:nvPr>
+        </p:nvSpPr>
+        <p:spPr bwMode="auto"/>
+      </p:sp>
+      <p:sp>
+        <p:nvSpPr>
+          <p:cNvPr id="3" name="Notes Placeholder 2"/>
+          <p:cNvSpPr>
+            <a:spLocks noGrp="1"/>
+          </p:cNvSpPr>
+          <p:nvPr>
+            <p:ph type="body" idx="1"/>
+          </p:nvPr>
+        </p:nvSpPr>
+        <p:spPr bwMode="auto"/>
+        <p:txBody>
+          <a:bodyPr/>
+          <a:lstStyle/>
+          <a:p>
+            <a:pPr>
+              <a:defRPr/>
+            </a:pPr>
+            <a:endParaRPr/>
+          </a:p>
+        </p:txBody>
+      </p:sp>
+      <p:sp>
+        <p:nvSpPr>
+          <p:cNvPr id="4" name="Slide Number Placeholder 3"/>
+          <p:cNvSpPr>
+            <a:spLocks noGrp="1"/>
+          </p:cNvSpPr>
+          <p:nvPr>
+            <p:ph type="sldNum" sz="quarter" idx="10"/>
+          </p:nvPr>
+        </p:nvSpPr>
+        <p:spPr bwMode="auto"/>
+        <p:txBody>
+          <a:bodyPr/>
+          <a:lstStyle/>
+          <a:p>
+            <a:pPr>
+              <a:defRPr/>
+            </a:pPr>
+            <a:fld id="{03FB391A-1292-46F2-9F94-BA4B087AE0DA}" type="slidenum">
+              <a:rPr/>
+              <a:t/>
+            </a:fld>
+            <a:endParaRPr/>
+          </a:p>
+        </p:txBody>
+      </p:sp>
+    </p:spTree>
+  </p:cSld>
+  <p:clrMapOvr>
+    <a:masterClrMapping/>
+  </p:clrMapOvr>
+</p:notes>
+</file>
+
+<file path=ppt/notesSlides/notesSlide2.xml><?xml version="1.0" encoding="utf-8"?>
+<p:notes xmlns:a="http://schemas.openxmlformats.org/drawingml/2006/main" xmlns:r="http://schemas.openxmlformats.org/officeDocument/2006/relationships" xmlns:p="http://schemas.openxmlformats.org/presentationml/2006/main" xmlns:m="http://schemas.openxmlformats.org/officeDocument/2006/math" xmlns:w="http://schemas.openxmlformats.org/wordprocessingml/2006/main">
+  <p:cSld name="">
+    <p:spTree>
+      <p:nvGrpSpPr>
+        <p:cNvPr id="1" name=""/>
+        <p:cNvGrpSpPr/>
+        <p:nvPr/>
+      </p:nvGrpSpPr>
+      <p:grpSpPr bwMode="auto">
+        <a:xfrm>
+          <a:off x="0" y="0"/>
+          <a:ext cx="0" cy="0"/>
+          <a:chOff x="0" y="0"/>
+          <a:chExt cx="0" cy="0"/>
+        </a:xfrm>
+      </p:grpSpPr>
+      <p:sp>
+        <p:nvSpPr>
+          <p:cNvPr id="2" name="Slide Image Placeholder 1"/>
+          <p:cNvSpPr>
+            <a:spLocks noChangeAspect="1" noGrp="1" noRot="1"/>
+          </p:cNvSpPr>
+          <p:nvPr>
+            <p:ph type="sldImg"/>
+          </p:nvPr>
+        </p:nvSpPr>
+        <p:spPr bwMode="auto"/>
+      </p:sp>
+      <p:sp>
+        <p:nvSpPr>
+          <p:cNvPr id="3" name="Notes Placeholder 2"/>
+          <p:cNvSpPr>
+            <a:spLocks noGrp="1"/>
+          </p:cNvSpPr>
+          <p:nvPr>
+            <p:ph type="body" idx="1"/>
+          </p:nvPr>
+        </p:nvSpPr>
+        <p:spPr bwMode="auto"/>
+        <p:txBody>
+          <a:bodyPr/>
+          <a:lstStyle/>
+          <a:p>
+            <a:pPr>
+              <a:defRPr/>
+            </a:pPr>
+            <a:endParaRPr/>
+          </a:p>
+        </p:txBody>
+      </p:sp>
+      <p:sp>
+        <p:nvSpPr>
+          <p:cNvPr id="4" name="Slide Number Placeholder 3"/>
+          <p:cNvSpPr>
+            <a:spLocks noGrp="1"/>
+          </p:cNvSpPr>
+          <p:nvPr>
+            <p:ph type="sldNum" sz="quarter" idx="10"/>
+          </p:nvPr>
+        </p:nvSpPr>
+        <p:spPr bwMode="auto"/>
+        <p:txBody>
+          <a:bodyPr/>
+          <a:lstStyle/>
+          <a:p>
+            <a:pPr>
+              <a:defRPr/>
+            </a:pPr>
+            <a:fld id="{09850250-AC7A-B31F-A18A-5D4A67305019}" type="slidenum">
+              <a:rPr/>
+              <a:t/>
+            </a:fld>
+            <a:endParaRPr/>
+          </a:p>
+        </p:txBody>
+      </p:sp>
+    </p:spTree>
+  </p:cSld>
+  <p:clrMapOvr>
+    <a:masterClrMapping/>
+  </p:clrMapOvr>
+</p:notes>
+</file>
+
+<file path=ppt/notesSlides/notesSlide3.xml><?xml version="1.0" encoding="utf-8"?>
+<p:notes xmlns:a="http://schemas.openxmlformats.org/drawingml/2006/main" xmlns:r="http://schemas.openxmlformats.org/officeDocument/2006/relationships" xmlns:p="http://schemas.openxmlformats.org/presentationml/2006/main" xmlns:m="http://schemas.openxmlformats.org/officeDocument/2006/math" xmlns:w="http://schemas.openxmlformats.org/wordprocessingml/2006/main">
+  <p:cSld name="">
+    <p:spTree>
+      <p:nvGrpSpPr>
+        <p:cNvPr id="1" name=""/>
+        <p:cNvGrpSpPr/>
+        <p:nvPr/>
+      </p:nvGrpSpPr>
+      <p:grpSpPr bwMode="auto">
+        <a:xfrm>
+          <a:off x="0" y="0"/>
+          <a:ext cx="0" cy="0"/>
+          <a:chOff x="0" y="0"/>
+          <a:chExt cx="0" cy="0"/>
+        </a:xfrm>
+      </p:grpSpPr>
+      <p:sp>
+        <p:nvSpPr>
+          <p:cNvPr id="2" name="Slide Image Placeholder 1"/>
+          <p:cNvSpPr>
+            <a:spLocks noChangeAspect="1" noGrp="1" noRot="1"/>
+          </p:cNvSpPr>
+          <p:nvPr>
+            <p:ph type="sldImg"/>
+          </p:nvPr>
+        </p:nvSpPr>
+        <p:spPr bwMode="auto"/>
+      </p:sp>
+      <p:sp>
+        <p:nvSpPr>
+          <p:cNvPr id="3" name="Notes Placeholder 2"/>
+          <p:cNvSpPr>
+            <a:spLocks noGrp="1"/>
+          </p:cNvSpPr>
+          <p:nvPr>
+            <p:ph type="body" idx="1"/>
+          </p:nvPr>
+        </p:nvSpPr>
+        <p:spPr bwMode="auto"/>
+        <p:txBody>
+          <a:bodyPr/>
+          <a:lstStyle/>
+          <a:p>
+            <a:pPr>
+              <a:defRPr/>
+            </a:pPr>
+            <a:endParaRPr/>
+          </a:p>
+        </p:txBody>
+      </p:sp>
+      <p:sp>
+        <p:nvSpPr>
+          <p:cNvPr id="4" name="Slide Number Placeholder 3"/>
+          <p:cNvSpPr>
+            <a:spLocks noGrp="1"/>
+          </p:cNvSpPr>
+          <p:nvPr>
+            <p:ph type="sldNum" sz="quarter" idx="10"/>
+          </p:nvPr>
+        </p:nvSpPr>
+        <p:spPr bwMode="auto"/>
+        <p:txBody>
+          <a:bodyPr/>
+          <a:lstStyle/>
+          <a:p>
+            <a:pPr>
+              <a:defRPr/>
+            </a:pPr>
+            <a:fld id="{29CF569F-2356-D358-7420-E7265CAF6BE6}" type="slidenum">
+              <a:rPr/>
+              <a:t/>
+            </a:fld>
+            <a:endParaRPr/>
+          </a:p>
+        </p:txBody>
+      </p:sp>
+    </p:spTree>
+  </p:cSld>
+  <p:clrMapOvr>
+    <a:masterClrMapping/>
+  </p:clrMapOvr>
+</p:notes>
+</file>
+
+<file path=ppt/notesSlides/notesSlide4.xml><?xml version="1.0" encoding="utf-8"?>
+<p:notes xmlns:a="http://schemas.openxmlformats.org/drawingml/2006/main" xmlns:r="http://schemas.openxmlformats.org/officeDocument/2006/relationships" xmlns:p="http://schemas.openxmlformats.org/presentationml/2006/main" xmlns:m="http://schemas.openxmlformats.org/officeDocument/2006/math" xmlns:w="http://schemas.openxmlformats.org/wordprocessingml/2006/main">
+  <p:cSld name="">
+    <p:spTree>
+      <p:nvGrpSpPr>
+        <p:cNvPr id="1" name=""/>
+        <p:cNvGrpSpPr/>
+        <p:nvPr/>
+      </p:nvGrpSpPr>
+      <p:grpSpPr bwMode="auto">
+        <a:xfrm>
+          <a:off x="0" y="0"/>
+          <a:ext cx="0" cy="0"/>
+          <a:chOff x="0" y="0"/>
+          <a:chExt cx="0" cy="0"/>
+        </a:xfrm>
+      </p:grpSpPr>
+      <p:sp>
+        <p:nvSpPr>
+          <p:cNvPr id="2" name="Slide Image Placeholder 1"/>
+          <p:cNvSpPr>
+            <a:spLocks noChangeAspect="1" noGrp="1" noRot="1"/>
+          </p:cNvSpPr>
+          <p:nvPr>
+            <p:ph type="sldImg"/>
+          </p:nvPr>
+        </p:nvSpPr>
+        <p:spPr bwMode="auto"/>
+      </p:sp>
+      <p:sp>
+        <p:nvSpPr>
+          <p:cNvPr id="3" name="Notes Placeholder 2"/>
+          <p:cNvSpPr>
+            <a:spLocks noGrp="1"/>
+          </p:cNvSpPr>
+          <p:nvPr>
+            <p:ph type="body" idx="1"/>
+          </p:nvPr>
+        </p:nvSpPr>
+        <p:spPr bwMode="auto"/>
+        <p:txBody>
+          <a:bodyPr/>
+          <a:lstStyle/>
+          <a:p>
+            <a:pPr>
+              <a:defRPr/>
+            </a:pPr>
+            <a:endParaRPr/>
+          </a:p>
+        </p:txBody>
+      </p:sp>
+      <p:sp>
+        <p:nvSpPr>
+          <p:cNvPr id="4" name="Slide Number Placeholder 3"/>
+          <p:cNvSpPr>
+            <a:spLocks noGrp="1"/>
+          </p:cNvSpPr>
+          <p:nvPr>
+            <p:ph type="sldNum" sz="quarter" idx="10"/>
+          </p:nvPr>
+        </p:nvSpPr>
+        <p:spPr bwMode="auto"/>
+        <p:txBody>
+          <a:bodyPr/>
+          <a:lstStyle/>
+          <a:p>
+            <a:pPr>
+              <a:defRPr/>
+            </a:pPr>
+            <a:fld id="{F81E3555-D0AA-A2D7-B3DF-14BB9EDAB9C4}" type="slidenum">
+              <a:rPr/>
+              <a:t/>
+            </a:fld>
+            <a:endParaRPr/>
+          </a:p>
+        </p:txBody>
+      </p:sp>
+    </p:spTree>
+  </p:cSld>
+  <p:clrMapOvr>
+    <a:masterClrMapping/>
+  </p:clrMapOvr>
+</p:notes>
+</file>
+
+<file path=ppt/notesSlides/notesSlide5.xml><?xml version="1.0" encoding="utf-8"?>
+<p:notes xmlns:a="http://schemas.openxmlformats.org/drawingml/2006/main" xmlns:r="http://schemas.openxmlformats.org/officeDocument/2006/relationships" xmlns:p="http://schemas.openxmlformats.org/presentationml/2006/main" xmlns:m="http://schemas.openxmlformats.org/officeDocument/2006/math" xmlns:w="http://schemas.openxmlformats.org/wordprocessingml/2006/main">
+  <p:cSld name="">
+    <p:spTree>
+      <p:nvGrpSpPr>
+        <p:cNvPr id="1" name=""/>
+        <p:cNvGrpSpPr/>
+        <p:nvPr/>
+      </p:nvGrpSpPr>
+      <p:grpSpPr bwMode="auto">
+        <a:xfrm>
+          <a:off x="0" y="0"/>
+          <a:ext cx="0" cy="0"/>
+          <a:chOff x="0" y="0"/>
+          <a:chExt cx="0" cy="0"/>
+        </a:xfrm>
+      </p:grpSpPr>
+      <p:sp>
+        <p:nvSpPr>
+          <p:cNvPr id="2" name="Slide Image Placeholder 1"/>
+          <p:cNvSpPr>
+            <a:spLocks noChangeAspect="1" noGrp="1" noRot="1"/>
+          </p:cNvSpPr>
+          <p:nvPr>
+            <p:ph type="sldImg"/>
+          </p:nvPr>
+        </p:nvSpPr>
+        <p:spPr bwMode="auto"/>
+      </p:sp>
+      <p:sp>
+        <p:nvSpPr>
+          <p:cNvPr id="3" name="Notes Placeholder 2"/>
+          <p:cNvSpPr>
+            <a:spLocks noGrp="1"/>
+          </p:cNvSpPr>
+          <p:nvPr>
+            <p:ph type="body" idx="1"/>
+          </p:nvPr>
+        </p:nvSpPr>
+        <p:spPr bwMode="auto"/>
+        <p:txBody>
+          <a:bodyPr/>
+          <a:lstStyle/>
+          <a:p>
+            <a:pPr>
+              <a:defRPr/>
+            </a:pPr>
+            <a:endParaRPr/>
+          </a:p>
+        </p:txBody>
+      </p:sp>
+      <p:sp>
+        <p:nvSpPr>
+          <p:cNvPr id="4" name="Slide Number Placeholder 3"/>
+          <p:cNvSpPr>
+            <a:spLocks noGrp="1"/>
+          </p:cNvSpPr>
+          <p:nvPr>
+            <p:ph type="sldNum" sz="quarter" idx="10"/>
+          </p:nvPr>
+        </p:nvSpPr>
+        <p:spPr bwMode="auto"/>
+        <p:txBody>
+          <a:bodyPr/>
+          <a:lstStyle/>
+          <a:p>
+            <a:pPr>
+              <a:defRPr/>
+            </a:pPr>
+            <a:fld id="{A99EC70C-9F93-AA28-06DC-12B2070A8161}" type="slidenum">
+              <a:rPr/>
+              <a:t/>
+            </a:fld>
+            <a:endParaRPr/>
+          </a:p>
+        </p:txBody>
+      </p:sp>
+    </p:spTree>
+  </p:cSld>
+  <p:clrMapOvr>
+    <a:masterClrMapping/>
+  </p:clrMapOvr>
+</p:notes>
+</file>
+
 <file path=ppt/slideLayouts/slideLayout1.xml><?xml version="1.0" encoding="utf-8"?>
-<p:sldLayout xmlns:a="http://schemas.openxmlformats.org/drawingml/2006/main" xmlns:r="http://schemas.openxmlformats.org/officeDocument/2006/relationships" xmlns:p="http://schemas.openxmlformats.org/presentationml/2006/main" type="title" preserve="1">
+<p:sldLayout xmlns:a="http://schemas.openxmlformats.org/drawingml/2006/main" xmlns:r="http://schemas.openxmlformats.org/officeDocument/2006/relationships" xmlns:p="http://schemas.openxmlformats.org/presentationml/2006/main" xmlns:m="http://schemas.openxmlformats.org/officeDocument/2006/math" xmlns:w="http://schemas.openxmlformats.org/wordprocessingml/2006/main" matchingName="" preserve="1" showMasterPhAnim="0" showMasterSp="1" type="title" userDrawn="1">
   <p:cSld name="Title Slide">
     <p:spTree>
       <p:nvGrpSpPr>
@@ -120,7 +868,7 @@
         <p:cNvGrpSpPr/>
         <p:nvPr/>
       </p:nvGrpSpPr>
-      <p:grpSpPr>
+      <p:grpSpPr bwMode="auto">
         <a:xfrm>
           <a:off x="0" y="0"/>
           <a:ext cx="0" cy="0"/>
@@ -130,7 +878,7 @@
       </p:grpSpPr>
       <p:sp>
         <p:nvSpPr>
-          <p:cNvPr id="2" name="Title 1"/>
+          <p:cNvPr id="1578404848" name="Title 1"/>
           <p:cNvSpPr>
             <a:spLocks noGrp="1"/>
           </p:cNvSpPr>
@@ -138,7 +886,7 @@
             <p:ph type="ctrTitle"/>
           </p:nvPr>
         </p:nvSpPr>
-        <p:spPr>
+        <p:spPr bwMode="auto">
           <a:xfrm>
             <a:off x="685800" y="2130425"/>
             <a:ext cx="7772400" cy="1470025"/>
@@ -148,8 +896,11 @@
           <a:bodyPr/>
           <a:lstStyle/>
           <a:p>
-            <a:r>
-              <a:rPr lang="en-US" smtClean="0"/>
+            <a:pPr>
+              <a:defRPr/>
+            </a:pPr>
+            <a:r>
+              <a:rPr lang="en-US"/>
               <a:t>Click to edit Master title style</a:t>
             </a:r>
             <a:endParaRPr lang="en-US"/>
@@ -158,7 +909,7 @@
       </p:sp>
       <p:sp>
         <p:nvSpPr>
-          <p:cNvPr id="3" name="Subtitle 2"/>
+          <p:cNvPr id="1415008971" name="Subtitle 2"/>
           <p:cNvSpPr>
             <a:spLocks noGrp="1"/>
           </p:cNvSpPr>
@@ -166,10 +917,10 @@
             <p:ph type="subTitle" idx="1"/>
           </p:nvPr>
         </p:nvSpPr>
-        <p:spPr>
+        <p:spPr bwMode="auto">
           <a:xfrm>
             <a:off x="1371600" y="3886200"/>
-            <a:ext cx="6400800" cy="1752600"/>
+            <a:ext cx="6400800" cy="1752599"/>
           </a:xfrm>
         </p:spPr>
         <p:txBody>
@@ -267,8 +1018,11 @@
             </a:lvl9pPr>
           </a:lstStyle>
           <a:p>
-            <a:r>
-              <a:rPr lang="en-US" smtClean="0"/>
+            <a:pPr>
+              <a:defRPr/>
+            </a:pPr>
+            <a:r>
+              <a:rPr lang="en-US"/>
               <a:t>Click to edit Master subtitle style</a:t>
             </a:r>
             <a:endParaRPr lang="en-US"/>
@@ -277,7 +1031,7 @@
       </p:sp>
       <p:sp>
         <p:nvSpPr>
-          <p:cNvPr id="4" name="Date Placeholder 3"/>
+          <p:cNvPr id="787575226" name="Date Placeholder 3"/>
           <p:cNvSpPr>
             <a:spLocks noGrp="1"/>
           </p:cNvSpPr>
@@ -285,13 +1039,16 @@
             <p:ph type="dt" sz="half" idx="10"/>
           </p:nvPr>
         </p:nvSpPr>
-        <p:spPr/>
+        <p:spPr bwMode="auto"/>
         <p:txBody>
           <a:bodyPr/>
           <a:lstStyle/>
           <a:p>
+            <a:pPr>
+              <a:defRPr/>
+            </a:pPr>
             <a:fld id="{5BCAD085-E8A6-8845-BD4E-CB4CCA059FC4}" type="datetimeFigureOut">
-              <a:rPr lang="en-US" smtClean="0"/>
+              <a:rPr lang="en-US"/>
               <a:t>1/27/13</a:t>
             </a:fld>
             <a:endParaRPr lang="en-US"/>
@@ -300,7 +1057,7 @@
       </p:sp>
       <p:sp>
         <p:nvSpPr>
-          <p:cNvPr id="5" name="Footer Placeholder 4"/>
+          <p:cNvPr id="574879588" name="Footer Placeholder 4"/>
           <p:cNvSpPr>
             <a:spLocks noGrp="1"/>
           </p:cNvSpPr>
@@ -308,18 +1065,21 @@
             <p:ph type="ftr" sz="quarter" idx="11"/>
           </p:nvPr>
         </p:nvSpPr>
-        <p:spPr/>
+        <p:spPr bwMode="auto"/>
         <p:txBody>
           <a:bodyPr/>
           <a:lstStyle/>
           <a:p>
+            <a:pPr>
+              <a:defRPr/>
+            </a:pPr>
             <a:endParaRPr lang="en-US"/>
           </a:p>
         </p:txBody>
       </p:sp>
       <p:sp>
         <p:nvSpPr>
-          <p:cNvPr id="6" name="Slide Number Placeholder 5"/>
+          <p:cNvPr id="461351580" name="Slide Number Placeholder 5"/>
           <p:cNvSpPr>
             <a:spLocks noGrp="1"/>
           </p:cNvSpPr>
@@ -327,13 +1087,16 @@
             <p:ph type="sldNum" sz="quarter" idx="12"/>
           </p:nvPr>
         </p:nvSpPr>
-        <p:spPr/>
+        <p:spPr bwMode="auto"/>
         <p:txBody>
           <a:bodyPr/>
           <a:lstStyle/>
           <a:p>
+            <a:pPr>
+              <a:defRPr/>
+            </a:pPr>
             <a:fld id="{C1FF6DA9-008F-8B48-92A6-B652298478BF}" type="slidenum">
-              <a:rPr lang="en-US" smtClean="0"/>
+              <a:rPr lang="en-US"/>
               <a:t>‹#›</a:t>
             </a:fld>
             <a:endParaRPr lang="en-US"/>
@@ -341,11 +1104,6 @@
         </p:txBody>
       </p:sp>
     </p:spTree>
-    <p:extLst>
-      <p:ext uri="{BB962C8B-B14F-4D97-AF65-F5344CB8AC3E}">
-        <p14:creationId xmlns:p14="http://schemas.microsoft.com/office/powerpoint/2010/main" val="3168075583"/>
-      </p:ext>
-    </p:extLst>
   </p:cSld>
   <p:clrMapOvr>
     <a:masterClrMapping/>
@@ -354,7 +1112,7 @@
 </file>
 
 <file path=ppt/slideLayouts/slideLayout10.xml><?xml version="1.0" encoding="utf-8"?>
-<p:sldLayout xmlns:a="http://schemas.openxmlformats.org/drawingml/2006/main" xmlns:r="http://schemas.openxmlformats.org/officeDocument/2006/relationships" xmlns:p="http://schemas.openxmlformats.org/presentationml/2006/main" type="vertTx" preserve="1">
+<p:sldLayout xmlns:a="http://schemas.openxmlformats.org/drawingml/2006/main" xmlns:r="http://schemas.openxmlformats.org/officeDocument/2006/relationships" xmlns:p="http://schemas.openxmlformats.org/presentationml/2006/main" xmlns:m="http://schemas.openxmlformats.org/officeDocument/2006/math" xmlns:w="http://schemas.openxmlformats.org/wordprocessingml/2006/main" matchingName="" preserve="1" showMasterPhAnim="0" showMasterSp="1" type="vertTx" userDrawn="1">
   <p:cSld name="Title and Vertical Text">
     <p:spTree>
       <p:nvGrpSpPr>
@@ -362,7 +1120,7 @@
         <p:cNvGrpSpPr/>
         <p:nvPr/>
       </p:nvGrpSpPr>
-      <p:grpSpPr>
+      <p:grpSpPr bwMode="auto">
         <a:xfrm>
           <a:off x="0" y="0"/>
           <a:ext cx="0" cy="0"/>
@@ -372,7 +1130,7 @@
       </p:grpSpPr>
       <p:sp>
         <p:nvSpPr>
-          <p:cNvPr id="2" name="Title 1"/>
+          <p:cNvPr id="191348210" name="Title 1"/>
           <p:cNvSpPr>
             <a:spLocks noGrp="1"/>
           </p:cNvSpPr>
@@ -380,13 +1138,16 @@
             <p:ph type="title"/>
           </p:nvPr>
         </p:nvSpPr>
-        <p:spPr/>
+        <p:spPr bwMode="auto"/>
         <p:txBody>
           <a:bodyPr/>
           <a:lstStyle/>
           <a:p>
-            <a:r>
-              <a:rPr lang="en-US" smtClean="0"/>
+            <a:pPr>
+              <a:defRPr/>
+            </a:pPr>
+            <a:r>
+              <a:rPr lang="en-US"/>
               <a:t>Click to edit Master title style</a:t>
             </a:r>
             <a:endParaRPr lang="en-US"/>
@@ -395,7 +1156,7 @@
       </p:sp>
       <p:sp>
         <p:nvSpPr>
-          <p:cNvPr id="3" name="Vertical Text Placeholder 2"/>
+          <p:cNvPr id="155029093" name="Vertical Text Placeholder 2"/>
           <p:cNvSpPr>
             <a:spLocks noGrp="1"/>
           </p:cNvSpPr>
@@ -403,42 +1164,56 @@
             <p:ph type="body" orient="vert" idx="1"/>
           </p:nvPr>
         </p:nvSpPr>
-        <p:spPr/>
+        <p:spPr bwMode="auto"/>
         <p:txBody>
           <a:bodyPr vert="eaVert"/>
           <a:lstStyle/>
           <a:p>
-            <a:pPr lvl="0"/>
-            <a:r>
-              <a:rPr lang="en-US" smtClean="0"/>
+            <a:pPr lvl="0">
+              <a:defRPr/>
+            </a:pPr>
+            <a:r>
+              <a:rPr lang="en-US"/>
               <a:t>Click to edit Master text styles</a:t>
             </a:r>
-          </a:p>
-          <a:p>
-            <a:pPr lvl="1"/>
-            <a:r>
-              <a:rPr lang="en-US" smtClean="0"/>
+            <a:endParaRPr/>
+          </a:p>
+          <a:p>
+            <a:pPr lvl="1">
+              <a:defRPr/>
+            </a:pPr>
+            <a:r>
+              <a:rPr lang="en-US"/>
               <a:t>Second level</a:t>
             </a:r>
-          </a:p>
-          <a:p>
-            <a:pPr lvl="2"/>
-            <a:r>
-              <a:rPr lang="en-US" smtClean="0"/>
+            <a:endParaRPr/>
+          </a:p>
+          <a:p>
+            <a:pPr lvl="2">
+              <a:defRPr/>
+            </a:pPr>
+            <a:r>
+              <a:rPr lang="en-US"/>
               <a:t>Third level</a:t>
             </a:r>
-          </a:p>
-          <a:p>
-            <a:pPr lvl="3"/>
-            <a:r>
-              <a:rPr lang="en-US" smtClean="0"/>
+            <a:endParaRPr/>
+          </a:p>
+          <a:p>
+            <a:pPr lvl="3">
+              <a:defRPr/>
+            </a:pPr>
+            <a:r>
+              <a:rPr lang="en-US"/>
               <a:t>Fourth level</a:t>
             </a:r>
-          </a:p>
-          <a:p>
-            <a:pPr lvl="4"/>
-            <a:r>
-              <a:rPr lang="en-US" smtClean="0"/>
+            <a:endParaRPr/>
+          </a:p>
+          <a:p>
+            <a:pPr lvl="4">
+              <a:defRPr/>
+            </a:pPr>
+            <a:r>
+              <a:rPr lang="en-US"/>
               <a:t>Fifth level</a:t>
             </a:r>
             <a:endParaRPr lang="en-US"/>
@@ -447,7 +1222,7 @@
       </p:sp>
       <p:sp>
         <p:nvSpPr>
-          <p:cNvPr id="4" name="Date Placeholder 3"/>
+          <p:cNvPr id="1630113541" name="Date Placeholder 3"/>
           <p:cNvSpPr>
             <a:spLocks noGrp="1"/>
           </p:cNvSpPr>
@@ -455,13 +1230,16 @@
             <p:ph type="dt" sz="half" idx="10"/>
           </p:nvPr>
         </p:nvSpPr>
-        <p:spPr/>
+        <p:spPr bwMode="auto"/>
         <p:txBody>
           <a:bodyPr/>
           <a:lstStyle/>
           <a:p>
+            <a:pPr>
+              <a:defRPr/>
+            </a:pPr>
             <a:fld id="{5BCAD085-E8A6-8845-BD4E-CB4CCA059FC4}" type="datetimeFigureOut">
-              <a:rPr lang="en-US" smtClean="0"/>
+              <a:rPr lang="en-US"/>
               <a:t>1/27/13</a:t>
             </a:fld>
             <a:endParaRPr lang="en-US"/>
@@ -470,7 +1248,7 @@
       </p:sp>
       <p:sp>
         <p:nvSpPr>
-          <p:cNvPr id="5" name="Footer Placeholder 4"/>
+          <p:cNvPr id="1711145298" name="Footer Placeholder 4"/>
           <p:cNvSpPr>
             <a:spLocks noGrp="1"/>
           </p:cNvSpPr>
@@ -478,18 +1256,21 @@
             <p:ph type="ftr" sz="quarter" idx="11"/>
           </p:nvPr>
         </p:nvSpPr>
-        <p:spPr/>
+        <p:spPr bwMode="auto"/>
         <p:txBody>
           <a:bodyPr/>
           <a:lstStyle/>
           <a:p>
+            <a:pPr>
+              <a:defRPr/>
+            </a:pPr>
             <a:endParaRPr lang="en-US"/>
           </a:p>
         </p:txBody>
       </p:sp>
       <p:sp>
         <p:nvSpPr>
-          <p:cNvPr id="6" name="Slide Number Placeholder 5"/>
+          <p:cNvPr id="653952823" name="Slide Number Placeholder 5"/>
           <p:cNvSpPr>
             <a:spLocks noGrp="1"/>
           </p:cNvSpPr>
@@ -497,13 +1278,16 @@
             <p:ph type="sldNum" sz="quarter" idx="12"/>
           </p:nvPr>
         </p:nvSpPr>
-        <p:spPr/>
+        <p:spPr bwMode="auto"/>
         <p:txBody>
           <a:bodyPr/>
           <a:lstStyle/>
           <a:p>
+            <a:pPr>
+              <a:defRPr/>
+            </a:pPr>
             <a:fld id="{C1FF6DA9-008F-8B48-92A6-B652298478BF}" type="slidenum">
-              <a:rPr lang="en-US" smtClean="0"/>
+              <a:rPr lang="en-US"/>
               <a:t>‹#›</a:t>
             </a:fld>
             <a:endParaRPr lang="en-US"/>
@@ -511,11 +1295,6 @@
         </p:txBody>
       </p:sp>
     </p:spTree>
-    <p:extLst>
-      <p:ext uri="{BB962C8B-B14F-4D97-AF65-F5344CB8AC3E}">
-        <p14:creationId xmlns:p14="http://schemas.microsoft.com/office/powerpoint/2010/main" val="2910927964"/>
-      </p:ext>
-    </p:extLst>
   </p:cSld>
   <p:clrMapOvr>
     <a:masterClrMapping/>
@@ -524,7 +1303,7 @@
 </file>
 
 <file path=ppt/slideLayouts/slideLayout11.xml><?xml version="1.0" encoding="utf-8"?>
-<p:sldLayout xmlns:a="http://schemas.openxmlformats.org/drawingml/2006/main" xmlns:r="http://schemas.openxmlformats.org/officeDocument/2006/relationships" xmlns:p="http://schemas.openxmlformats.org/presentationml/2006/main" type="vertTitleAndTx" preserve="1">
+<p:sldLayout xmlns:a="http://schemas.openxmlformats.org/drawingml/2006/main" xmlns:r="http://schemas.openxmlformats.org/officeDocument/2006/relationships" xmlns:p="http://schemas.openxmlformats.org/presentationml/2006/main" xmlns:m="http://schemas.openxmlformats.org/officeDocument/2006/math" xmlns:w="http://schemas.openxmlformats.org/wordprocessingml/2006/main" matchingName="" preserve="1" showMasterPhAnim="0" showMasterSp="1" type="vertTitleAndTx" userDrawn="1">
   <p:cSld name="Vertical Title and Text">
     <p:spTree>
       <p:nvGrpSpPr>
@@ -532,7 +1311,7 @@
         <p:cNvGrpSpPr/>
         <p:nvPr/>
       </p:nvGrpSpPr>
-      <p:grpSpPr>
+      <p:grpSpPr bwMode="auto">
         <a:xfrm>
           <a:off x="0" y="0"/>
           <a:ext cx="0" cy="0"/>
@@ -542,7 +1321,7 @@
       </p:grpSpPr>
       <p:sp>
         <p:nvSpPr>
-          <p:cNvPr id="2" name="Vertical Title 1"/>
+          <p:cNvPr id="1037706548" name="Vertical Title 1"/>
           <p:cNvSpPr>
             <a:spLocks noGrp="1"/>
           </p:cNvSpPr>
@@ -550,7 +1329,7 @@
             <p:ph type="title" orient="vert"/>
           </p:nvPr>
         </p:nvSpPr>
-        <p:spPr>
+        <p:spPr bwMode="auto">
           <a:xfrm>
             <a:off x="6629400" y="274638"/>
             <a:ext cx="2057400" cy="5851525"/>
@@ -560,8 +1339,11 @@
           <a:bodyPr vert="eaVert"/>
           <a:lstStyle/>
           <a:p>
-            <a:r>
-              <a:rPr lang="en-US" smtClean="0"/>
+            <a:pPr>
+              <a:defRPr/>
+            </a:pPr>
+            <a:r>
+              <a:rPr lang="en-US"/>
               <a:t>Click to edit Master title style</a:t>
             </a:r>
             <a:endParaRPr lang="en-US"/>
@@ -570,7 +1352,7 @@
       </p:sp>
       <p:sp>
         <p:nvSpPr>
-          <p:cNvPr id="3" name="Vertical Text Placeholder 2"/>
+          <p:cNvPr id="1835886924" name="Vertical Text Placeholder 2"/>
           <p:cNvSpPr>
             <a:spLocks noGrp="1"/>
           </p:cNvSpPr>
@@ -578,7 +1360,7 @@
             <p:ph type="body" orient="vert" idx="1"/>
           </p:nvPr>
         </p:nvSpPr>
-        <p:spPr>
+        <p:spPr bwMode="auto">
           <a:xfrm>
             <a:off x="457200" y="274638"/>
             <a:ext cx="6019800" cy="5851525"/>
@@ -588,37 +1370,51 @@
           <a:bodyPr vert="eaVert"/>
           <a:lstStyle/>
           <a:p>
-            <a:pPr lvl="0"/>
-            <a:r>
-              <a:rPr lang="en-US" smtClean="0"/>
+            <a:pPr lvl="0">
+              <a:defRPr/>
+            </a:pPr>
+            <a:r>
+              <a:rPr lang="en-US"/>
               <a:t>Click to edit Master text styles</a:t>
             </a:r>
-          </a:p>
-          <a:p>
-            <a:pPr lvl="1"/>
-            <a:r>
-              <a:rPr lang="en-US" smtClean="0"/>
+            <a:endParaRPr/>
+          </a:p>
+          <a:p>
+            <a:pPr lvl="1">
+              <a:defRPr/>
+            </a:pPr>
+            <a:r>
+              <a:rPr lang="en-US"/>
               <a:t>Second level</a:t>
             </a:r>
-          </a:p>
-          <a:p>
-            <a:pPr lvl="2"/>
-            <a:r>
-              <a:rPr lang="en-US" smtClean="0"/>
+            <a:endParaRPr/>
+          </a:p>
+          <a:p>
+            <a:pPr lvl="2">
+              <a:defRPr/>
+            </a:pPr>
+            <a:r>
+              <a:rPr lang="en-US"/>
               <a:t>Third level</a:t>
             </a:r>
-          </a:p>
-          <a:p>
-            <a:pPr lvl="3"/>
-            <a:r>
-              <a:rPr lang="en-US" smtClean="0"/>
+            <a:endParaRPr/>
+          </a:p>
+          <a:p>
+            <a:pPr lvl="3">
+              <a:defRPr/>
+            </a:pPr>
+            <a:r>
+              <a:rPr lang="en-US"/>
               <a:t>Fourth level</a:t>
             </a:r>
-          </a:p>
-          <a:p>
-            <a:pPr lvl="4"/>
-            <a:r>
-              <a:rPr lang="en-US" smtClean="0"/>
+            <a:endParaRPr/>
+          </a:p>
+          <a:p>
+            <a:pPr lvl="4">
+              <a:defRPr/>
+            </a:pPr>
+            <a:r>
+              <a:rPr lang="en-US"/>
               <a:t>Fifth level</a:t>
             </a:r>
             <a:endParaRPr lang="en-US"/>
@@ -627,7 +1423,7 @@
       </p:sp>
       <p:sp>
         <p:nvSpPr>
-          <p:cNvPr id="4" name="Date Placeholder 3"/>
+          <p:cNvPr id="1544772909" name="Date Placeholder 3"/>
           <p:cNvSpPr>
             <a:spLocks noGrp="1"/>
           </p:cNvSpPr>
@@ -635,13 +1431,16 @@
             <p:ph type="dt" sz="half" idx="10"/>
           </p:nvPr>
         </p:nvSpPr>
-        <p:spPr/>
+        <p:spPr bwMode="auto"/>
         <p:txBody>
           <a:bodyPr/>
           <a:lstStyle/>
           <a:p>
+            <a:pPr>
+              <a:defRPr/>
+            </a:pPr>
             <a:fld id="{5BCAD085-E8A6-8845-BD4E-CB4CCA059FC4}" type="datetimeFigureOut">
-              <a:rPr lang="en-US" smtClean="0"/>
+              <a:rPr lang="en-US"/>
               <a:t>1/27/13</a:t>
             </a:fld>
             <a:endParaRPr lang="en-US"/>
@@ -650,7 +1449,7 @@
       </p:sp>
       <p:sp>
         <p:nvSpPr>
-          <p:cNvPr id="5" name="Footer Placeholder 4"/>
+          <p:cNvPr id="1536681203" name="Footer Placeholder 4"/>
           <p:cNvSpPr>
             <a:spLocks noGrp="1"/>
           </p:cNvSpPr>
@@ -658,18 +1457,21 @@
             <p:ph type="ftr" sz="quarter" idx="11"/>
           </p:nvPr>
         </p:nvSpPr>
-        <p:spPr/>
+        <p:spPr bwMode="auto"/>
         <p:txBody>
           <a:bodyPr/>
           <a:lstStyle/>
           <a:p>
+            <a:pPr>
+              <a:defRPr/>
+            </a:pPr>
             <a:endParaRPr lang="en-US"/>
           </a:p>
         </p:txBody>
       </p:sp>
       <p:sp>
         <p:nvSpPr>
-          <p:cNvPr id="6" name="Slide Number Placeholder 5"/>
+          <p:cNvPr id="1666690015" name="Slide Number Placeholder 5"/>
           <p:cNvSpPr>
             <a:spLocks noGrp="1"/>
           </p:cNvSpPr>
@@ -677,13 +1479,16 @@
             <p:ph type="sldNum" sz="quarter" idx="12"/>
           </p:nvPr>
         </p:nvSpPr>
-        <p:spPr/>
+        <p:spPr bwMode="auto"/>
         <p:txBody>
           <a:bodyPr/>
           <a:lstStyle/>
           <a:p>
+            <a:pPr>
+              <a:defRPr/>
+            </a:pPr>
             <a:fld id="{C1FF6DA9-008F-8B48-92A6-B652298478BF}" type="slidenum">
-              <a:rPr lang="en-US" smtClean="0"/>
+              <a:rPr lang="en-US"/>
               <a:t>‹#›</a:t>
             </a:fld>
             <a:endParaRPr lang="en-US"/>
@@ -691,11 +1496,6 @@
         </p:txBody>
       </p:sp>
     </p:spTree>
-    <p:extLst>
-      <p:ext uri="{BB962C8B-B14F-4D97-AF65-F5344CB8AC3E}">
-        <p14:creationId xmlns:p14="http://schemas.microsoft.com/office/powerpoint/2010/main" val="3612223792"/>
-      </p:ext>
-    </p:extLst>
   </p:cSld>
   <p:clrMapOvr>
     <a:masterClrMapping/>
@@ -704,7 +1504,7 @@
 </file>
 
 <file path=ppt/slideLayouts/slideLayout2.xml><?xml version="1.0" encoding="utf-8"?>
-<p:sldLayout xmlns:a="http://schemas.openxmlformats.org/drawingml/2006/main" xmlns:r="http://schemas.openxmlformats.org/officeDocument/2006/relationships" xmlns:p="http://schemas.openxmlformats.org/presentationml/2006/main" type="obj" preserve="1">
+<p:sldLayout xmlns:a="http://schemas.openxmlformats.org/drawingml/2006/main" xmlns:r="http://schemas.openxmlformats.org/officeDocument/2006/relationships" xmlns:p="http://schemas.openxmlformats.org/presentationml/2006/main" xmlns:m="http://schemas.openxmlformats.org/officeDocument/2006/math" xmlns:w="http://schemas.openxmlformats.org/wordprocessingml/2006/main" matchingName="" preserve="1" showMasterPhAnim="0" showMasterSp="1" type="obj" userDrawn="1">
   <p:cSld name="Title and Content">
     <p:spTree>
       <p:nvGrpSpPr>
@@ -712,7 +1512,7 @@
         <p:cNvGrpSpPr/>
         <p:nvPr/>
       </p:nvGrpSpPr>
-      <p:grpSpPr>
+      <p:grpSpPr bwMode="auto">
         <a:xfrm>
           <a:off x="0" y="0"/>
           <a:ext cx="0" cy="0"/>
@@ -722,7 +1522,7 @@
       </p:grpSpPr>
       <p:sp>
         <p:nvSpPr>
-          <p:cNvPr id="2" name="Title 1"/>
+          <p:cNvPr id="1352738676" name="Title 1"/>
           <p:cNvSpPr>
             <a:spLocks noGrp="1"/>
           </p:cNvSpPr>
@@ -730,13 +1530,16 @@
             <p:ph type="title"/>
           </p:nvPr>
         </p:nvSpPr>
-        <p:spPr/>
+        <p:spPr bwMode="auto"/>
         <p:txBody>
           <a:bodyPr/>
           <a:lstStyle/>
           <a:p>
-            <a:r>
-              <a:rPr lang="en-US" smtClean="0"/>
+            <a:pPr>
+              <a:defRPr/>
+            </a:pPr>
+            <a:r>
+              <a:rPr lang="en-US"/>
               <a:t>Click to edit Master title style</a:t>
             </a:r>
             <a:endParaRPr lang="en-US"/>
@@ -745,7 +1548,7 @@
       </p:sp>
       <p:sp>
         <p:nvSpPr>
-          <p:cNvPr id="3" name="Content Placeholder 2"/>
+          <p:cNvPr id="1159497922" name="Content Placeholder 2"/>
           <p:cNvSpPr>
             <a:spLocks noGrp="1"/>
           </p:cNvSpPr>
@@ -753,42 +1556,56 @@
             <p:ph idx="1"/>
           </p:nvPr>
         </p:nvSpPr>
-        <p:spPr/>
+        <p:spPr bwMode="auto"/>
         <p:txBody>
           <a:bodyPr/>
           <a:lstStyle/>
           <a:p>
-            <a:pPr lvl="0"/>
-            <a:r>
-              <a:rPr lang="en-US" smtClean="0"/>
+            <a:pPr lvl="0">
+              <a:defRPr/>
+            </a:pPr>
+            <a:r>
+              <a:rPr lang="en-US"/>
               <a:t>Click to edit Master text styles</a:t>
             </a:r>
-          </a:p>
-          <a:p>
-            <a:pPr lvl="1"/>
-            <a:r>
-              <a:rPr lang="en-US" smtClean="0"/>
+            <a:endParaRPr/>
+          </a:p>
+          <a:p>
+            <a:pPr lvl="1">
+              <a:defRPr/>
+            </a:pPr>
+            <a:r>
+              <a:rPr lang="en-US"/>
               <a:t>Second level</a:t>
             </a:r>
-          </a:p>
-          <a:p>
-            <a:pPr lvl="2"/>
-            <a:r>
-              <a:rPr lang="en-US" smtClean="0"/>
+            <a:endParaRPr/>
+          </a:p>
+          <a:p>
+            <a:pPr lvl="2">
+              <a:defRPr/>
+            </a:pPr>
+            <a:r>
+              <a:rPr lang="en-US"/>
               <a:t>Third level</a:t>
             </a:r>
-          </a:p>
-          <a:p>
-            <a:pPr lvl="3"/>
-            <a:r>
-              <a:rPr lang="en-US" smtClean="0"/>
+            <a:endParaRPr/>
+          </a:p>
+          <a:p>
+            <a:pPr lvl="3">
+              <a:defRPr/>
+            </a:pPr>
+            <a:r>
+              <a:rPr lang="en-US"/>
               <a:t>Fourth level</a:t>
             </a:r>
-          </a:p>
-          <a:p>
-            <a:pPr lvl="4"/>
-            <a:r>
-              <a:rPr lang="en-US" smtClean="0"/>
+            <a:endParaRPr/>
+          </a:p>
+          <a:p>
+            <a:pPr lvl="4">
+              <a:defRPr/>
+            </a:pPr>
+            <a:r>
+              <a:rPr lang="en-US"/>
               <a:t>Fifth level</a:t>
             </a:r>
             <a:endParaRPr lang="en-US"/>
@@ -797,7 +1614,7 @@
       </p:sp>
       <p:sp>
         <p:nvSpPr>
-          <p:cNvPr id="4" name="Date Placeholder 3"/>
+          <p:cNvPr id="1693492158" name="Date Placeholder 3"/>
           <p:cNvSpPr>
             <a:spLocks noGrp="1"/>
           </p:cNvSpPr>
@@ -805,13 +1622,16 @@
             <p:ph type="dt" sz="half" idx="10"/>
           </p:nvPr>
         </p:nvSpPr>
-        <p:spPr/>
+        <p:spPr bwMode="auto"/>
         <p:txBody>
           <a:bodyPr/>
           <a:lstStyle/>
           <a:p>
+            <a:pPr>
+              <a:defRPr/>
+            </a:pPr>
             <a:fld id="{5BCAD085-E8A6-8845-BD4E-CB4CCA059FC4}" type="datetimeFigureOut">
-              <a:rPr lang="en-US" smtClean="0"/>
+              <a:rPr lang="en-US"/>
               <a:t>1/27/13</a:t>
             </a:fld>
             <a:endParaRPr lang="en-US"/>
@@ -820,7 +1640,7 @@
       </p:sp>
       <p:sp>
         <p:nvSpPr>
-          <p:cNvPr id="5" name="Footer Placeholder 4"/>
+          <p:cNvPr id="801238326" name="Footer Placeholder 4"/>
           <p:cNvSpPr>
             <a:spLocks noGrp="1"/>
           </p:cNvSpPr>
@@ -828,18 +1648,21 @@
             <p:ph type="ftr" sz="quarter" idx="11"/>
           </p:nvPr>
         </p:nvSpPr>
-        <p:spPr/>
+        <p:spPr bwMode="auto"/>
         <p:txBody>
           <a:bodyPr/>
           <a:lstStyle/>
           <a:p>
+            <a:pPr>
+              <a:defRPr/>
+            </a:pPr>
             <a:endParaRPr lang="en-US"/>
           </a:p>
         </p:txBody>
       </p:sp>
       <p:sp>
         <p:nvSpPr>
-          <p:cNvPr id="6" name="Slide Number Placeholder 5"/>
+          <p:cNvPr id="1192239799" name="Slide Number Placeholder 5"/>
           <p:cNvSpPr>
             <a:spLocks noGrp="1"/>
           </p:cNvSpPr>
@@ -847,13 +1670,16 @@
             <p:ph type="sldNum" sz="quarter" idx="12"/>
           </p:nvPr>
         </p:nvSpPr>
-        <p:spPr/>
+        <p:spPr bwMode="auto"/>
         <p:txBody>
           <a:bodyPr/>
           <a:lstStyle/>
           <a:p>
+            <a:pPr>
+              <a:defRPr/>
+            </a:pPr>
             <a:fld id="{C1FF6DA9-008F-8B48-92A6-B652298478BF}" type="slidenum">
-              <a:rPr lang="en-US" smtClean="0"/>
+              <a:rPr lang="en-US"/>
               <a:t>‹#›</a:t>
             </a:fld>
             <a:endParaRPr lang="en-US"/>
@@ -861,11 +1687,6 @@
         </p:txBody>
       </p:sp>
     </p:spTree>
-    <p:extLst>
-      <p:ext uri="{BB962C8B-B14F-4D97-AF65-F5344CB8AC3E}">
-        <p14:creationId xmlns:p14="http://schemas.microsoft.com/office/powerpoint/2010/main" val="2614314258"/>
-      </p:ext>
-    </p:extLst>
   </p:cSld>
   <p:clrMapOvr>
     <a:masterClrMapping/>
@@ -874,7 +1695,7 @@
 </file>
 
 <file path=ppt/slideLayouts/slideLayout3.xml><?xml version="1.0" encoding="utf-8"?>
-<p:sldLayout xmlns:a="http://schemas.openxmlformats.org/drawingml/2006/main" xmlns:r="http://schemas.openxmlformats.org/officeDocument/2006/relationships" xmlns:p="http://schemas.openxmlformats.org/presentationml/2006/main" type="secHead" preserve="1">
+<p:sldLayout xmlns:a="http://schemas.openxmlformats.org/drawingml/2006/main" xmlns:r="http://schemas.openxmlformats.org/officeDocument/2006/relationships" xmlns:p="http://schemas.openxmlformats.org/presentationml/2006/main" xmlns:m="http://schemas.openxmlformats.org/officeDocument/2006/math" xmlns:w="http://schemas.openxmlformats.org/wordprocessingml/2006/main" matchingName="" preserve="1" showMasterPhAnim="0" showMasterSp="1" type="secHead" userDrawn="1">
   <p:cSld name="Section Header">
     <p:spTree>
       <p:nvGrpSpPr>
@@ -882,7 +1703,7 @@
         <p:cNvGrpSpPr/>
         <p:nvPr/>
       </p:nvGrpSpPr>
-      <p:grpSpPr>
+      <p:grpSpPr bwMode="auto">
         <a:xfrm>
           <a:off x="0" y="0"/>
           <a:ext cx="0" cy="0"/>
@@ -892,7 +1713,7 @@
       </p:grpSpPr>
       <p:sp>
         <p:nvSpPr>
-          <p:cNvPr id="2" name="Title 1"/>
+          <p:cNvPr id="351775431" name="Title 1"/>
           <p:cNvSpPr>
             <a:spLocks noGrp="1"/>
           </p:cNvSpPr>
@@ -900,7 +1721,7 @@
             <p:ph type="title"/>
           </p:nvPr>
         </p:nvSpPr>
-        <p:spPr>
+        <p:spPr bwMode="auto">
           <a:xfrm>
             <a:off x="722313" y="4406900"/>
             <a:ext cx="7772400" cy="1362075"/>
@@ -914,8 +1735,11 @@
             </a:lvl1pPr>
           </a:lstStyle>
           <a:p>
-            <a:r>
-              <a:rPr lang="en-US" smtClean="0"/>
+            <a:pPr>
+              <a:defRPr/>
+            </a:pPr>
+            <a:r>
+              <a:rPr lang="en-US"/>
               <a:t>Click to edit Master title style</a:t>
             </a:r>
             <a:endParaRPr lang="en-US"/>
@@ -924,7 +1748,7 @@
       </p:sp>
       <p:sp>
         <p:nvSpPr>
-          <p:cNvPr id="3" name="Text Placeholder 2"/>
+          <p:cNvPr id="347376802" name="Text Placeholder 2"/>
           <p:cNvSpPr>
             <a:spLocks noGrp="1"/>
           </p:cNvSpPr>
@@ -932,7 +1756,7 @@
             <p:ph type="body" idx="1"/>
           </p:nvPr>
         </p:nvSpPr>
-        <p:spPr>
+        <p:spPr bwMode="auto">
           <a:xfrm>
             <a:off x="722313" y="2906713"/>
             <a:ext cx="7772400" cy="1500187"/>
@@ -1033,17 +1857,20 @@
             </a:lvl9pPr>
           </a:lstStyle>
           <a:p>
-            <a:pPr lvl="0"/>
-            <a:r>
-              <a:rPr lang="en-US" smtClean="0"/>
+            <a:pPr lvl="0">
+              <a:defRPr/>
+            </a:pPr>
+            <a:r>
+              <a:rPr lang="en-US"/>
               <a:t>Click to edit Master text styles</a:t>
             </a:r>
-          </a:p>
-        </p:txBody>
-      </p:sp>
-      <p:sp>
-        <p:nvSpPr>
-          <p:cNvPr id="4" name="Date Placeholder 3"/>
+            <a:endParaRPr/>
+          </a:p>
+        </p:txBody>
+      </p:sp>
+      <p:sp>
+        <p:nvSpPr>
+          <p:cNvPr id="442731731" name="Date Placeholder 3"/>
           <p:cNvSpPr>
             <a:spLocks noGrp="1"/>
           </p:cNvSpPr>
@@ -1051,13 +1878,16 @@
             <p:ph type="dt" sz="half" idx="10"/>
           </p:nvPr>
         </p:nvSpPr>
-        <p:spPr/>
+        <p:spPr bwMode="auto"/>
         <p:txBody>
           <a:bodyPr/>
           <a:lstStyle/>
           <a:p>
+            <a:pPr>
+              <a:defRPr/>
+            </a:pPr>
             <a:fld id="{5BCAD085-E8A6-8845-BD4E-CB4CCA059FC4}" type="datetimeFigureOut">
-              <a:rPr lang="en-US" smtClean="0"/>
+              <a:rPr lang="en-US"/>
               <a:t>1/27/13</a:t>
             </a:fld>
             <a:endParaRPr lang="en-US"/>
@@ -1066,7 +1896,7 @@
       </p:sp>
       <p:sp>
         <p:nvSpPr>
-          <p:cNvPr id="5" name="Footer Placeholder 4"/>
+          <p:cNvPr id="2064050072" name="Footer Placeholder 4"/>
           <p:cNvSpPr>
             <a:spLocks noGrp="1"/>
           </p:cNvSpPr>
@@ -1074,18 +1904,21 @@
             <p:ph type="ftr" sz="quarter" idx="11"/>
           </p:nvPr>
         </p:nvSpPr>
-        <p:spPr/>
+        <p:spPr bwMode="auto"/>
         <p:txBody>
           <a:bodyPr/>
           <a:lstStyle/>
           <a:p>
+            <a:pPr>
+              <a:defRPr/>
+            </a:pPr>
             <a:endParaRPr lang="en-US"/>
           </a:p>
         </p:txBody>
       </p:sp>
       <p:sp>
         <p:nvSpPr>
-          <p:cNvPr id="6" name="Slide Number Placeholder 5"/>
+          <p:cNvPr id="2068218853" name="Slide Number Placeholder 5"/>
           <p:cNvSpPr>
             <a:spLocks noGrp="1"/>
           </p:cNvSpPr>
@@ -1093,13 +1926,16 @@
             <p:ph type="sldNum" sz="quarter" idx="12"/>
           </p:nvPr>
         </p:nvSpPr>
-        <p:spPr/>
+        <p:spPr bwMode="auto"/>
         <p:txBody>
           <a:bodyPr/>
           <a:lstStyle/>
           <a:p>
+            <a:pPr>
+              <a:defRPr/>
+            </a:pPr>
             <a:fld id="{C1FF6DA9-008F-8B48-92A6-B652298478BF}" type="slidenum">
-              <a:rPr lang="en-US" smtClean="0"/>
+              <a:rPr lang="en-US"/>
               <a:t>‹#›</a:t>
             </a:fld>
             <a:endParaRPr lang="en-US"/>
@@ -1107,11 +1943,6 @@
         </p:txBody>
       </p:sp>
     </p:spTree>
-    <p:extLst>
-      <p:ext uri="{BB962C8B-B14F-4D97-AF65-F5344CB8AC3E}">
-        <p14:creationId xmlns:p14="http://schemas.microsoft.com/office/powerpoint/2010/main" val="960648375"/>
-      </p:ext>
-    </p:extLst>
   </p:cSld>
   <p:clrMapOvr>
     <a:masterClrMapping/>
@@ -1120,7 +1951,7 @@
 </file>
 
 <file path=ppt/slideLayouts/slideLayout4.xml><?xml version="1.0" encoding="utf-8"?>
-<p:sldLayout xmlns:a="http://schemas.openxmlformats.org/drawingml/2006/main" xmlns:r="http://schemas.openxmlformats.org/officeDocument/2006/relationships" xmlns:p="http://schemas.openxmlformats.org/presentationml/2006/main" type="twoObj" preserve="1">
+<p:sldLayout xmlns:a="http://schemas.openxmlformats.org/drawingml/2006/main" xmlns:r="http://schemas.openxmlformats.org/officeDocument/2006/relationships" xmlns:p="http://schemas.openxmlformats.org/presentationml/2006/main" xmlns:m="http://schemas.openxmlformats.org/officeDocument/2006/math" xmlns:w="http://schemas.openxmlformats.org/wordprocessingml/2006/main" matchingName="" preserve="1" showMasterPhAnim="0" showMasterSp="1" type="twoObj" userDrawn="1">
   <p:cSld name="Two Content">
     <p:spTree>
       <p:nvGrpSpPr>
@@ -1128,7 +1959,7 @@
         <p:cNvGrpSpPr/>
         <p:nvPr/>
       </p:nvGrpSpPr>
-      <p:grpSpPr>
+      <p:grpSpPr bwMode="auto">
         <a:xfrm>
           <a:off x="0" y="0"/>
           <a:ext cx="0" cy="0"/>
@@ -1138,7 +1969,7 @@
       </p:grpSpPr>
       <p:sp>
         <p:nvSpPr>
-          <p:cNvPr id="2" name="Title 1"/>
+          <p:cNvPr id="1534453063" name="Title 1"/>
           <p:cNvSpPr>
             <a:spLocks noGrp="1"/>
           </p:cNvSpPr>
@@ -1146,13 +1977,16 @@
             <p:ph type="title"/>
           </p:nvPr>
         </p:nvSpPr>
-        <p:spPr/>
+        <p:spPr bwMode="auto"/>
         <p:txBody>
           <a:bodyPr/>
           <a:lstStyle/>
           <a:p>
-            <a:r>
-              <a:rPr lang="en-US" smtClean="0"/>
+            <a:pPr>
+              <a:defRPr/>
+            </a:pPr>
+            <a:r>
+              <a:rPr lang="en-US"/>
               <a:t>Click to edit Master title style</a:t>
             </a:r>
             <a:endParaRPr lang="en-US"/>
@@ -1161,7 +1995,7 @@
       </p:sp>
       <p:sp>
         <p:nvSpPr>
-          <p:cNvPr id="3" name="Content Placeholder 2"/>
+          <p:cNvPr id="1626487812" name="Content Placeholder 2"/>
           <p:cNvSpPr>
             <a:spLocks noGrp="1"/>
           </p:cNvSpPr>
@@ -1169,7 +2003,7 @@
             <p:ph sz="half" idx="1"/>
           </p:nvPr>
         </p:nvSpPr>
-        <p:spPr>
+        <p:spPr bwMode="auto">
           <a:xfrm>
             <a:off x="457200" y="1600200"/>
             <a:ext cx="4038600" cy="4525963"/>
@@ -1207,37 +2041,51 @@
             </a:lvl9pPr>
           </a:lstStyle>
           <a:p>
-            <a:pPr lvl="0"/>
-            <a:r>
-              <a:rPr lang="en-US" smtClean="0"/>
+            <a:pPr lvl="0">
+              <a:defRPr/>
+            </a:pPr>
+            <a:r>
+              <a:rPr lang="en-US"/>
               <a:t>Click to edit Master text styles</a:t>
             </a:r>
-          </a:p>
-          <a:p>
-            <a:pPr lvl="1"/>
-            <a:r>
-              <a:rPr lang="en-US" smtClean="0"/>
+            <a:endParaRPr/>
+          </a:p>
+          <a:p>
+            <a:pPr lvl="1">
+              <a:defRPr/>
+            </a:pPr>
+            <a:r>
+              <a:rPr lang="en-US"/>
               <a:t>Second level</a:t>
             </a:r>
-          </a:p>
-          <a:p>
-            <a:pPr lvl="2"/>
-            <a:r>
-              <a:rPr lang="en-US" smtClean="0"/>
+            <a:endParaRPr/>
+          </a:p>
+          <a:p>
+            <a:pPr lvl="2">
+              <a:defRPr/>
+            </a:pPr>
+            <a:r>
+              <a:rPr lang="en-US"/>
               <a:t>Third level</a:t>
             </a:r>
-          </a:p>
-          <a:p>
-            <a:pPr lvl="3"/>
-            <a:r>
-              <a:rPr lang="en-US" smtClean="0"/>
+            <a:endParaRPr/>
+          </a:p>
+          <a:p>
+            <a:pPr lvl="3">
+              <a:defRPr/>
+            </a:pPr>
+            <a:r>
+              <a:rPr lang="en-US"/>
               <a:t>Fourth level</a:t>
             </a:r>
-          </a:p>
-          <a:p>
-            <a:pPr lvl="4"/>
-            <a:r>
-              <a:rPr lang="en-US" smtClean="0"/>
+            <a:endParaRPr/>
+          </a:p>
+          <a:p>
+            <a:pPr lvl="4">
+              <a:defRPr/>
+            </a:pPr>
+            <a:r>
+              <a:rPr lang="en-US"/>
               <a:t>Fifth level</a:t>
             </a:r>
             <a:endParaRPr lang="en-US"/>
@@ -1246,7 +2094,7 @@
       </p:sp>
       <p:sp>
         <p:nvSpPr>
-          <p:cNvPr id="4" name="Content Placeholder 3"/>
+          <p:cNvPr id="1548957661" name="Content Placeholder 3"/>
           <p:cNvSpPr>
             <a:spLocks noGrp="1"/>
           </p:cNvSpPr>
@@ -1254,7 +2102,7 @@
             <p:ph sz="half" idx="2"/>
           </p:nvPr>
         </p:nvSpPr>
-        <p:spPr>
+        <p:spPr bwMode="auto">
           <a:xfrm>
             <a:off x="4648200" y="1600200"/>
             <a:ext cx="4038600" cy="4525963"/>
@@ -1292,37 +2140,51 @@
             </a:lvl9pPr>
           </a:lstStyle>
           <a:p>
-            <a:pPr lvl="0"/>
-            <a:r>
-              <a:rPr lang="en-US" smtClean="0"/>
+            <a:pPr lvl="0">
+              <a:defRPr/>
+            </a:pPr>
+            <a:r>
+              <a:rPr lang="en-US"/>
               <a:t>Click to edit Master text styles</a:t>
             </a:r>
-          </a:p>
-          <a:p>
-            <a:pPr lvl="1"/>
-            <a:r>
-              <a:rPr lang="en-US" smtClean="0"/>
+            <a:endParaRPr/>
+          </a:p>
+          <a:p>
+            <a:pPr lvl="1">
+              <a:defRPr/>
+            </a:pPr>
+            <a:r>
+              <a:rPr lang="en-US"/>
               <a:t>Second level</a:t>
             </a:r>
-          </a:p>
-          <a:p>
-            <a:pPr lvl="2"/>
-            <a:r>
-              <a:rPr lang="en-US" smtClean="0"/>
+            <a:endParaRPr/>
+          </a:p>
+          <a:p>
+            <a:pPr lvl="2">
+              <a:defRPr/>
+            </a:pPr>
+            <a:r>
+              <a:rPr lang="en-US"/>
               <a:t>Third level</a:t>
             </a:r>
-          </a:p>
-          <a:p>
-            <a:pPr lvl="3"/>
-            <a:r>
-              <a:rPr lang="en-US" smtClean="0"/>
+            <a:endParaRPr/>
+          </a:p>
+          <a:p>
+            <a:pPr lvl="3">
+              <a:defRPr/>
+            </a:pPr>
+            <a:r>
+              <a:rPr lang="en-US"/>
               <a:t>Fourth level</a:t>
             </a:r>
-          </a:p>
-          <a:p>
-            <a:pPr lvl="4"/>
-            <a:r>
-              <a:rPr lang="en-US" smtClean="0"/>
+            <a:endParaRPr/>
+          </a:p>
+          <a:p>
+            <a:pPr lvl="4">
+              <a:defRPr/>
+            </a:pPr>
+            <a:r>
+              <a:rPr lang="en-US"/>
               <a:t>Fifth level</a:t>
             </a:r>
             <a:endParaRPr lang="en-US"/>
@@ -1331,7 +2193,7 @@
       </p:sp>
       <p:sp>
         <p:nvSpPr>
-          <p:cNvPr id="5" name="Date Placeholder 4"/>
+          <p:cNvPr id="1704325856" name="Date Placeholder 4"/>
           <p:cNvSpPr>
             <a:spLocks noGrp="1"/>
           </p:cNvSpPr>
@@ -1339,13 +2201,16 @@
             <p:ph type="dt" sz="half" idx="10"/>
           </p:nvPr>
         </p:nvSpPr>
-        <p:spPr/>
+        <p:spPr bwMode="auto"/>
         <p:txBody>
           <a:bodyPr/>
           <a:lstStyle/>
           <a:p>
+            <a:pPr>
+              <a:defRPr/>
+            </a:pPr>
             <a:fld id="{5BCAD085-E8A6-8845-BD4E-CB4CCA059FC4}" type="datetimeFigureOut">
-              <a:rPr lang="en-US" smtClean="0"/>
+              <a:rPr lang="en-US"/>
               <a:t>1/27/13</a:t>
             </a:fld>
             <a:endParaRPr lang="en-US"/>
@@ -1354,7 +2219,7 @@
       </p:sp>
       <p:sp>
         <p:nvSpPr>
-          <p:cNvPr id="6" name="Footer Placeholder 5"/>
+          <p:cNvPr id="1253637683" name="Footer Placeholder 5"/>
           <p:cNvSpPr>
             <a:spLocks noGrp="1"/>
           </p:cNvSpPr>
@@ -1362,18 +2227,21 @@
             <p:ph type="ftr" sz="quarter" idx="11"/>
           </p:nvPr>
         </p:nvSpPr>
-        <p:spPr/>
+        <p:spPr bwMode="auto"/>
         <p:txBody>
           <a:bodyPr/>
           <a:lstStyle/>
           <a:p>
+            <a:pPr>
+              <a:defRPr/>
+            </a:pPr>
             <a:endParaRPr lang="en-US"/>
           </a:p>
         </p:txBody>
       </p:sp>
       <p:sp>
         <p:nvSpPr>
-          <p:cNvPr id="7" name="Slide Number Placeholder 6"/>
+          <p:cNvPr id="1622062898" name="Slide Number Placeholder 6"/>
           <p:cNvSpPr>
             <a:spLocks noGrp="1"/>
           </p:cNvSpPr>
@@ -1381,13 +2249,16 @@
             <p:ph type="sldNum" sz="quarter" idx="12"/>
           </p:nvPr>
         </p:nvSpPr>
-        <p:spPr/>
+        <p:spPr bwMode="auto"/>
         <p:txBody>
           <a:bodyPr/>
           <a:lstStyle/>
           <a:p>
+            <a:pPr>
+              <a:defRPr/>
+            </a:pPr>
             <a:fld id="{C1FF6DA9-008F-8B48-92A6-B652298478BF}" type="slidenum">
-              <a:rPr lang="en-US" smtClean="0"/>
+              <a:rPr lang="en-US"/>
               <a:t>‹#›</a:t>
             </a:fld>
             <a:endParaRPr lang="en-US"/>
@@ -1395,11 +2266,6 @@
         </p:txBody>
       </p:sp>
     </p:spTree>
-    <p:extLst>
-      <p:ext uri="{BB962C8B-B14F-4D97-AF65-F5344CB8AC3E}">
-        <p14:creationId xmlns:p14="http://schemas.microsoft.com/office/powerpoint/2010/main" val="2782244947"/>
-      </p:ext>
-    </p:extLst>
   </p:cSld>
   <p:clrMapOvr>
     <a:masterClrMapping/>
@@ -1408,7 +2274,7 @@
 </file>
 
 <file path=ppt/slideLayouts/slideLayout5.xml><?xml version="1.0" encoding="utf-8"?>
-<p:sldLayout xmlns:a="http://schemas.openxmlformats.org/drawingml/2006/main" xmlns:r="http://schemas.openxmlformats.org/officeDocument/2006/relationships" xmlns:p="http://schemas.openxmlformats.org/presentationml/2006/main" type="twoTxTwoObj" preserve="1">
+<p:sldLayout xmlns:a="http://schemas.openxmlformats.org/drawingml/2006/main" xmlns:r="http://schemas.openxmlformats.org/officeDocument/2006/relationships" xmlns:p="http://schemas.openxmlformats.org/presentationml/2006/main" xmlns:m="http://schemas.openxmlformats.org/officeDocument/2006/math" xmlns:w="http://schemas.openxmlformats.org/wordprocessingml/2006/main" matchingName="" preserve="1" showMasterPhAnim="0" showMasterSp="1" type="twoTxTwoObj" userDrawn="1">
   <p:cSld name="Comparison">
     <p:spTree>
       <p:nvGrpSpPr>
@@ -1416,7 +2282,7 @@
         <p:cNvGrpSpPr/>
         <p:nvPr/>
       </p:nvGrpSpPr>
-      <p:grpSpPr>
+      <p:grpSpPr bwMode="auto">
         <a:xfrm>
           <a:off x="0" y="0"/>
           <a:ext cx="0" cy="0"/>
@@ -1426,7 +2292,7 @@
       </p:grpSpPr>
       <p:sp>
         <p:nvSpPr>
-          <p:cNvPr id="2" name="Title 1"/>
+          <p:cNvPr id="198926151" name="Title 1"/>
           <p:cNvSpPr>
             <a:spLocks noGrp="1"/>
           </p:cNvSpPr>
@@ -1434,7 +2300,7 @@
             <p:ph type="title"/>
           </p:nvPr>
         </p:nvSpPr>
-        <p:spPr/>
+        <p:spPr bwMode="auto"/>
         <p:txBody>
           <a:bodyPr/>
           <a:lstStyle>
@@ -1443,8 +2309,11 @@
             </a:lvl1pPr>
           </a:lstStyle>
           <a:p>
-            <a:r>
-              <a:rPr lang="en-US" smtClean="0"/>
+            <a:pPr>
+              <a:defRPr/>
+            </a:pPr>
+            <a:r>
+              <a:rPr lang="en-US"/>
               <a:t>Click to edit Master title style</a:t>
             </a:r>
             <a:endParaRPr lang="en-US"/>
@@ -1453,7 +2322,7 @@
       </p:sp>
       <p:sp>
         <p:nvSpPr>
-          <p:cNvPr id="3" name="Text Placeholder 2"/>
+          <p:cNvPr id="302768409" name="Text Placeholder 2"/>
           <p:cNvSpPr>
             <a:spLocks noGrp="1"/>
           </p:cNvSpPr>
@@ -1461,7 +2330,7 @@
             <p:ph type="body" idx="1"/>
           </p:nvPr>
         </p:nvSpPr>
-        <p:spPr>
+        <p:spPr bwMode="auto">
           <a:xfrm>
             <a:off x="457200" y="1535113"/>
             <a:ext cx="4040188" cy="639762"/>
@@ -1508,17 +2377,20 @@
             </a:lvl9pPr>
           </a:lstStyle>
           <a:p>
-            <a:pPr lvl="0"/>
-            <a:r>
-              <a:rPr lang="en-US" smtClean="0"/>
+            <a:pPr lvl="0">
+              <a:defRPr/>
+            </a:pPr>
+            <a:r>
+              <a:rPr lang="en-US"/>
               <a:t>Click to edit Master text styles</a:t>
             </a:r>
-          </a:p>
-        </p:txBody>
-      </p:sp>
-      <p:sp>
-        <p:nvSpPr>
-          <p:cNvPr id="4" name="Content Placeholder 3"/>
+            <a:endParaRPr/>
+          </a:p>
+        </p:txBody>
+      </p:sp>
+      <p:sp>
+        <p:nvSpPr>
+          <p:cNvPr id="160318181" name="Content Placeholder 3"/>
           <p:cNvSpPr>
             <a:spLocks noGrp="1"/>
           </p:cNvSpPr>
@@ -1526,7 +2398,7 @@
             <p:ph sz="half" idx="2"/>
           </p:nvPr>
         </p:nvSpPr>
-        <p:spPr>
+        <p:spPr bwMode="auto">
           <a:xfrm>
             <a:off x="457200" y="2174875"/>
             <a:ext cx="4040188" cy="3951288"/>
@@ -1564,37 +2436,51 @@
             </a:lvl9pPr>
           </a:lstStyle>
           <a:p>
-            <a:pPr lvl="0"/>
-            <a:r>
-              <a:rPr lang="en-US" smtClean="0"/>
+            <a:pPr lvl="0">
+              <a:defRPr/>
+            </a:pPr>
+            <a:r>
+              <a:rPr lang="en-US"/>
               <a:t>Click to edit Master text styles</a:t>
             </a:r>
-          </a:p>
-          <a:p>
-            <a:pPr lvl="1"/>
-            <a:r>
-              <a:rPr lang="en-US" smtClean="0"/>
+            <a:endParaRPr/>
+          </a:p>
+          <a:p>
+            <a:pPr lvl="1">
+              <a:defRPr/>
+            </a:pPr>
+            <a:r>
+              <a:rPr lang="en-US"/>
               <a:t>Second level</a:t>
             </a:r>
-          </a:p>
-          <a:p>
-            <a:pPr lvl="2"/>
-            <a:r>
-              <a:rPr lang="en-US" smtClean="0"/>
+            <a:endParaRPr/>
+          </a:p>
+          <a:p>
+            <a:pPr lvl="2">
+              <a:defRPr/>
+            </a:pPr>
+            <a:r>
+              <a:rPr lang="en-US"/>
               <a:t>Third level</a:t>
             </a:r>
-          </a:p>
-          <a:p>
-            <a:pPr lvl="3"/>
-            <a:r>
-              <a:rPr lang="en-US" smtClean="0"/>
+            <a:endParaRPr/>
+          </a:p>
+          <a:p>
+            <a:pPr lvl="3">
+              <a:defRPr/>
+            </a:pPr>
+            <a:r>
+              <a:rPr lang="en-US"/>
               <a:t>Fourth level</a:t>
             </a:r>
-          </a:p>
-          <a:p>
-            <a:pPr lvl="4"/>
-            <a:r>
-              <a:rPr lang="en-US" smtClean="0"/>
+            <a:endParaRPr/>
+          </a:p>
+          <a:p>
+            <a:pPr lvl="4">
+              <a:defRPr/>
+            </a:pPr>
+            <a:r>
+              <a:rPr lang="en-US"/>
               <a:t>Fifth level</a:t>
             </a:r>
             <a:endParaRPr lang="en-US"/>
@@ -1603,7 +2489,7 @@
       </p:sp>
       <p:sp>
         <p:nvSpPr>
-          <p:cNvPr id="5" name="Text Placeholder 4"/>
+          <p:cNvPr id="94130217" name="Text Placeholder 4"/>
           <p:cNvSpPr>
             <a:spLocks noGrp="1"/>
           </p:cNvSpPr>
@@ -1611,7 +2497,7 @@
             <p:ph type="body" sz="quarter" idx="3"/>
           </p:nvPr>
         </p:nvSpPr>
-        <p:spPr>
+        <p:spPr bwMode="auto">
           <a:xfrm>
             <a:off x="4645025" y="1535113"/>
             <a:ext cx="4041775" cy="639762"/>
@@ -1658,17 +2544,20 @@
             </a:lvl9pPr>
           </a:lstStyle>
           <a:p>
-            <a:pPr lvl="0"/>
-            <a:r>
-              <a:rPr lang="en-US" smtClean="0"/>
+            <a:pPr lvl="0">
+              <a:defRPr/>
+            </a:pPr>
+            <a:r>
+              <a:rPr lang="en-US"/>
               <a:t>Click to edit Master text styles</a:t>
             </a:r>
-          </a:p>
-        </p:txBody>
-      </p:sp>
-      <p:sp>
-        <p:nvSpPr>
-          <p:cNvPr id="6" name="Content Placeholder 5"/>
+            <a:endParaRPr/>
+          </a:p>
+        </p:txBody>
+      </p:sp>
+      <p:sp>
+        <p:nvSpPr>
+          <p:cNvPr id="583599892" name="Content Placeholder 5"/>
           <p:cNvSpPr>
             <a:spLocks noGrp="1"/>
           </p:cNvSpPr>
@@ -1676,7 +2565,7 @@
             <p:ph sz="quarter" idx="4"/>
           </p:nvPr>
         </p:nvSpPr>
-        <p:spPr>
+        <p:spPr bwMode="auto">
           <a:xfrm>
             <a:off x="4645025" y="2174875"/>
             <a:ext cx="4041775" cy="3951288"/>
@@ -1714,37 +2603,51 @@
             </a:lvl9pPr>
           </a:lstStyle>
           <a:p>
-            <a:pPr lvl="0"/>
-            <a:r>
-              <a:rPr lang="en-US" smtClean="0"/>
+            <a:pPr lvl="0">
+              <a:defRPr/>
+            </a:pPr>
+            <a:r>
+              <a:rPr lang="en-US"/>
               <a:t>Click to edit Master text styles</a:t>
             </a:r>
-          </a:p>
-          <a:p>
-            <a:pPr lvl="1"/>
-            <a:r>
-              <a:rPr lang="en-US" smtClean="0"/>
+            <a:endParaRPr/>
+          </a:p>
+          <a:p>
+            <a:pPr lvl="1">
+              <a:defRPr/>
+            </a:pPr>
+            <a:r>
+              <a:rPr lang="en-US"/>
               <a:t>Second level</a:t>
             </a:r>
-          </a:p>
-          <a:p>
-            <a:pPr lvl="2"/>
-            <a:r>
-              <a:rPr lang="en-US" smtClean="0"/>
+            <a:endParaRPr/>
+          </a:p>
+          <a:p>
+            <a:pPr lvl="2">
+              <a:defRPr/>
+            </a:pPr>
+            <a:r>
+              <a:rPr lang="en-US"/>
               <a:t>Third level</a:t>
             </a:r>
-          </a:p>
-          <a:p>
-            <a:pPr lvl="3"/>
-            <a:r>
-              <a:rPr lang="en-US" smtClean="0"/>
+            <a:endParaRPr/>
+          </a:p>
+          <a:p>
+            <a:pPr lvl="3">
+              <a:defRPr/>
+            </a:pPr>
+            <a:r>
+              <a:rPr lang="en-US"/>
               <a:t>Fourth level</a:t>
             </a:r>
-          </a:p>
-          <a:p>
-            <a:pPr lvl="4"/>
-            <a:r>
-              <a:rPr lang="en-US" smtClean="0"/>
+            <a:endParaRPr/>
+          </a:p>
+          <a:p>
+            <a:pPr lvl="4">
+              <a:defRPr/>
+            </a:pPr>
+            <a:r>
+              <a:rPr lang="en-US"/>
               <a:t>Fifth level</a:t>
             </a:r>
             <a:endParaRPr lang="en-US"/>
@@ -1753,7 +2656,7 @@
       </p:sp>
       <p:sp>
         <p:nvSpPr>
-          <p:cNvPr id="7" name="Date Placeholder 6"/>
+          <p:cNvPr id="242402270" name="Date Placeholder 6"/>
           <p:cNvSpPr>
             <a:spLocks noGrp="1"/>
           </p:cNvSpPr>
@@ -1761,13 +2664,16 @@
             <p:ph type="dt" sz="half" idx="10"/>
           </p:nvPr>
         </p:nvSpPr>
-        <p:spPr/>
+        <p:spPr bwMode="auto"/>
         <p:txBody>
           <a:bodyPr/>
           <a:lstStyle/>
           <a:p>
+            <a:pPr>
+              <a:defRPr/>
+            </a:pPr>
             <a:fld id="{5BCAD085-E8A6-8845-BD4E-CB4CCA059FC4}" type="datetimeFigureOut">
-              <a:rPr lang="en-US" smtClean="0"/>
+              <a:rPr lang="en-US"/>
               <a:t>1/27/13</a:t>
             </a:fld>
             <a:endParaRPr lang="en-US"/>
@@ -1776,7 +2682,7 @@
       </p:sp>
       <p:sp>
         <p:nvSpPr>
-          <p:cNvPr id="8" name="Footer Placeholder 7"/>
+          <p:cNvPr id="1046499445" name="Footer Placeholder 7"/>
           <p:cNvSpPr>
             <a:spLocks noGrp="1"/>
           </p:cNvSpPr>
@@ -1784,18 +2690,21 @@
             <p:ph type="ftr" sz="quarter" idx="11"/>
           </p:nvPr>
         </p:nvSpPr>
-        <p:spPr/>
+        <p:spPr bwMode="auto"/>
         <p:txBody>
           <a:bodyPr/>
           <a:lstStyle/>
           <a:p>
+            <a:pPr>
+              <a:defRPr/>
+            </a:pPr>
             <a:endParaRPr lang="en-US"/>
           </a:p>
         </p:txBody>
       </p:sp>
       <p:sp>
         <p:nvSpPr>
-          <p:cNvPr id="9" name="Slide Number Placeholder 8"/>
+          <p:cNvPr id="1451298276" name="Slide Number Placeholder 8"/>
           <p:cNvSpPr>
             <a:spLocks noGrp="1"/>
           </p:cNvSpPr>
@@ -1803,13 +2712,16 @@
             <p:ph type="sldNum" sz="quarter" idx="12"/>
           </p:nvPr>
         </p:nvSpPr>
-        <p:spPr/>
+        <p:spPr bwMode="auto"/>
         <p:txBody>
           <a:bodyPr/>
           <a:lstStyle/>
           <a:p>
+            <a:pPr>
+              <a:defRPr/>
+            </a:pPr>
             <a:fld id="{C1FF6DA9-008F-8B48-92A6-B652298478BF}" type="slidenum">
-              <a:rPr lang="en-US" smtClean="0"/>
+              <a:rPr lang="en-US"/>
               <a:t>‹#›</a:t>
             </a:fld>
             <a:endParaRPr lang="en-US"/>
@@ -1817,11 +2729,6 @@
         </p:txBody>
       </p:sp>
     </p:spTree>
-    <p:extLst>
-      <p:ext uri="{BB962C8B-B14F-4D97-AF65-F5344CB8AC3E}">
-        <p14:creationId xmlns:p14="http://schemas.microsoft.com/office/powerpoint/2010/main" val="990158736"/>
-      </p:ext>
-    </p:extLst>
   </p:cSld>
   <p:clrMapOvr>
     <a:masterClrMapping/>
@@ -1830,7 +2737,7 @@
 </file>
 
 <file path=ppt/slideLayouts/slideLayout6.xml><?xml version="1.0" encoding="utf-8"?>
-<p:sldLayout xmlns:a="http://schemas.openxmlformats.org/drawingml/2006/main" xmlns:r="http://schemas.openxmlformats.org/officeDocument/2006/relationships" xmlns:p="http://schemas.openxmlformats.org/presentationml/2006/main" type="titleOnly" preserve="1">
+<p:sldLayout xmlns:a="http://schemas.openxmlformats.org/drawingml/2006/main" xmlns:r="http://schemas.openxmlformats.org/officeDocument/2006/relationships" xmlns:p="http://schemas.openxmlformats.org/presentationml/2006/main" xmlns:m="http://schemas.openxmlformats.org/officeDocument/2006/math" xmlns:w="http://schemas.openxmlformats.org/wordprocessingml/2006/main" matchingName="" preserve="1" showMasterPhAnim="0" showMasterSp="1" type="titleOnly" userDrawn="1">
   <p:cSld name="Title Only">
     <p:spTree>
       <p:nvGrpSpPr>
@@ -1838,7 +2745,7 @@
         <p:cNvGrpSpPr/>
         <p:nvPr/>
       </p:nvGrpSpPr>
-      <p:grpSpPr>
+      <p:grpSpPr bwMode="auto">
         <a:xfrm>
           <a:off x="0" y="0"/>
           <a:ext cx="0" cy="0"/>
@@ -1848,7 +2755,7 @@
       </p:grpSpPr>
       <p:sp>
         <p:nvSpPr>
-          <p:cNvPr id="2" name="Title 1"/>
+          <p:cNvPr id="121238816" name="Title 1"/>
           <p:cNvSpPr>
             <a:spLocks noGrp="1"/>
           </p:cNvSpPr>
@@ -1856,13 +2763,16 @@
             <p:ph type="title"/>
           </p:nvPr>
         </p:nvSpPr>
-        <p:spPr/>
+        <p:spPr bwMode="auto"/>
         <p:txBody>
           <a:bodyPr/>
           <a:lstStyle/>
           <a:p>
-            <a:r>
-              <a:rPr lang="en-US" smtClean="0"/>
+            <a:pPr>
+              <a:defRPr/>
+            </a:pPr>
+            <a:r>
+              <a:rPr lang="en-US"/>
               <a:t>Click to edit Master title style</a:t>
             </a:r>
             <a:endParaRPr lang="en-US"/>
@@ -1871,7 +2781,7 @@
       </p:sp>
       <p:sp>
         <p:nvSpPr>
-          <p:cNvPr id="3" name="Date Placeholder 2"/>
+          <p:cNvPr id="815949693" name="Date Placeholder 2"/>
           <p:cNvSpPr>
             <a:spLocks noGrp="1"/>
           </p:cNvSpPr>
@@ -1879,13 +2789,16 @@
             <p:ph type="dt" sz="half" idx="10"/>
           </p:nvPr>
         </p:nvSpPr>
-        <p:spPr/>
+        <p:spPr bwMode="auto"/>
         <p:txBody>
           <a:bodyPr/>
           <a:lstStyle/>
           <a:p>
+            <a:pPr>
+              <a:defRPr/>
+            </a:pPr>
             <a:fld id="{5BCAD085-E8A6-8845-BD4E-CB4CCA059FC4}" type="datetimeFigureOut">
-              <a:rPr lang="en-US" smtClean="0"/>
+              <a:rPr lang="en-US"/>
               <a:t>1/27/13</a:t>
             </a:fld>
             <a:endParaRPr lang="en-US"/>
@@ -1894,7 +2807,7 @@
       </p:sp>
       <p:sp>
         <p:nvSpPr>
-          <p:cNvPr id="4" name="Footer Placeholder 3"/>
+          <p:cNvPr id="42310979" name="Footer Placeholder 3"/>
           <p:cNvSpPr>
             <a:spLocks noGrp="1"/>
           </p:cNvSpPr>
@@ -1902,18 +2815,21 @@
             <p:ph type="ftr" sz="quarter" idx="11"/>
           </p:nvPr>
         </p:nvSpPr>
-        <p:spPr/>
+        <p:spPr bwMode="auto"/>
         <p:txBody>
           <a:bodyPr/>
           <a:lstStyle/>
           <a:p>
+            <a:pPr>
+              <a:defRPr/>
+            </a:pPr>
             <a:endParaRPr lang="en-US"/>
           </a:p>
         </p:txBody>
       </p:sp>
       <p:sp>
         <p:nvSpPr>
-          <p:cNvPr id="5" name="Slide Number Placeholder 4"/>
+          <p:cNvPr id="1974578939" name="Slide Number Placeholder 4"/>
           <p:cNvSpPr>
             <a:spLocks noGrp="1"/>
           </p:cNvSpPr>
@@ -1921,13 +2837,16 @@
             <p:ph type="sldNum" sz="quarter" idx="12"/>
           </p:nvPr>
         </p:nvSpPr>
-        <p:spPr/>
+        <p:spPr bwMode="auto"/>
         <p:txBody>
           <a:bodyPr/>
           <a:lstStyle/>
           <a:p>
+            <a:pPr>
+              <a:defRPr/>
+            </a:pPr>
             <a:fld id="{C1FF6DA9-008F-8B48-92A6-B652298478BF}" type="slidenum">
-              <a:rPr lang="en-US" smtClean="0"/>
+              <a:rPr lang="en-US"/>
               <a:t>‹#›</a:t>
             </a:fld>
             <a:endParaRPr lang="en-US"/>
@@ -1935,11 +2854,6 @@
         </p:txBody>
       </p:sp>
     </p:spTree>
-    <p:extLst>
-      <p:ext uri="{BB962C8B-B14F-4D97-AF65-F5344CB8AC3E}">
-        <p14:creationId xmlns:p14="http://schemas.microsoft.com/office/powerpoint/2010/main" val="727027711"/>
-      </p:ext>
-    </p:extLst>
   </p:cSld>
   <p:clrMapOvr>
     <a:masterClrMapping/>
@@ -1948,7 +2862,7 @@
 </file>
 
 <file path=ppt/slideLayouts/slideLayout7.xml><?xml version="1.0" encoding="utf-8"?>
-<p:sldLayout xmlns:a="http://schemas.openxmlformats.org/drawingml/2006/main" xmlns:r="http://schemas.openxmlformats.org/officeDocument/2006/relationships" xmlns:p="http://schemas.openxmlformats.org/presentationml/2006/main" type="blank" preserve="1">
+<p:sldLayout xmlns:a="http://schemas.openxmlformats.org/drawingml/2006/main" xmlns:r="http://schemas.openxmlformats.org/officeDocument/2006/relationships" xmlns:p="http://schemas.openxmlformats.org/presentationml/2006/main" xmlns:m="http://schemas.openxmlformats.org/officeDocument/2006/math" xmlns:w="http://schemas.openxmlformats.org/wordprocessingml/2006/main" matchingName="" preserve="1" showMasterPhAnim="0" showMasterSp="1" type="blank" userDrawn="1">
   <p:cSld name="Blank">
     <p:spTree>
       <p:nvGrpSpPr>
@@ -1956,7 +2870,7 @@
         <p:cNvGrpSpPr/>
         <p:nvPr/>
       </p:nvGrpSpPr>
-      <p:grpSpPr>
+      <p:grpSpPr bwMode="auto">
         <a:xfrm>
           <a:off x="0" y="0"/>
           <a:ext cx="0" cy="0"/>
@@ -1966,7 +2880,7 @@
       </p:grpSpPr>
       <p:sp>
         <p:nvSpPr>
-          <p:cNvPr id="2" name="Date Placeholder 1"/>
+          <p:cNvPr id="720812626" name="Date Placeholder 1"/>
           <p:cNvSpPr>
             <a:spLocks noGrp="1"/>
           </p:cNvSpPr>
@@ -1974,13 +2888,16 @@
             <p:ph type="dt" sz="half" idx="10"/>
           </p:nvPr>
         </p:nvSpPr>
-        <p:spPr/>
+        <p:spPr bwMode="auto"/>
         <p:txBody>
           <a:bodyPr/>
           <a:lstStyle/>
           <a:p>
+            <a:pPr>
+              <a:defRPr/>
+            </a:pPr>
             <a:fld id="{5BCAD085-E8A6-8845-BD4E-CB4CCA059FC4}" type="datetimeFigureOut">
-              <a:rPr lang="en-US" smtClean="0"/>
+              <a:rPr lang="en-US"/>
               <a:t>1/27/13</a:t>
             </a:fld>
             <a:endParaRPr lang="en-US"/>
@@ -1989,7 +2906,7 @@
       </p:sp>
       <p:sp>
         <p:nvSpPr>
-          <p:cNvPr id="3" name="Footer Placeholder 2"/>
+          <p:cNvPr id="305379821" name="Footer Placeholder 2"/>
           <p:cNvSpPr>
             <a:spLocks noGrp="1"/>
           </p:cNvSpPr>
@@ -1997,18 +2914,21 @@
             <p:ph type="ftr" sz="quarter" idx="11"/>
           </p:nvPr>
         </p:nvSpPr>
-        <p:spPr/>
+        <p:spPr bwMode="auto"/>
         <p:txBody>
           <a:bodyPr/>
           <a:lstStyle/>
           <a:p>
+            <a:pPr>
+              <a:defRPr/>
+            </a:pPr>
             <a:endParaRPr lang="en-US"/>
           </a:p>
         </p:txBody>
       </p:sp>
       <p:sp>
         <p:nvSpPr>
-          <p:cNvPr id="4" name="Slide Number Placeholder 3"/>
+          <p:cNvPr id="1968756012" name="Slide Number Placeholder 3"/>
           <p:cNvSpPr>
             <a:spLocks noGrp="1"/>
           </p:cNvSpPr>
@@ -2016,13 +2936,16 @@
             <p:ph type="sldNum" sz="quarter" idx="12"/>
           </p:nvPr>
         </p:nvSpPr>
-        <p:spPr/>
+        <p:spPr bwMode="auto"/>
         <p:txBody>
           <a:bodyPr/>
           <a:lstStyle/>
           <a:p>
+            <a:pPr>
+              <a:defRPr/>
+            </a:pPr>
             <a:fld id="{C1FF6DA9-008F-8B48-92A6-B652298478BF}" type="slidenum">
-              <a:rPr lang="en-US" smtClean="0"/>
+              <a:rPr lang="en-US"/>
               <a:t>‹#›</a:t>
             </a:fld>
             <a:endParaRPr lang="en-US"/>
@@ -2030,11 +2953,6 @@
         </p:txBody>
       </p:sp>
     </p:spTree>
-    <p:extLst>
-      <p:ext uri="{BB962C8B-B14F-4D97-AF65-F5344CB8AC3E}">
-        <p14:creationId xmlns:p14="http://schemas.microsoft.com/office/powerpoint/2010/main" val="1212999818"/>
-      </p:ext>
-    </p:extLst>
   </p:cSld>
   <p:clrMapOvr>
     <a:masterClrMapping/>
@@ -2043,7 +2961,7 @@
 </file>
 
 <file path=ppt/slideLayouts/slideLayout8.xml><?xml version="1.0" encoding="utf-8"?>
-<p:sldLayout xmlns:a="http://schemas.openxmlformats.org/drawingml/2006/main" xmlns:r="http://schemas.openxmlformats.org/officeDocument/2006/relationships" xmlns:p="http://schemas.openxmlformats.org/presentationml/2006/main" type="objTx" preserve="1">
+<p:sldLayout xmlns:a="http://schemas.openxmlformats.org/drawingml/2006/main" xmlns:r="http://schemas.openxmlformats.org/officeDocument/2006/relationships" xmlns:p="http://schemas.openxmlformats.org/presentationml/2006/main" xmlns:m="http://schemas.openxmlformats.org/officeDocument/2006/math" xmlns:w="http://schemas.openxmlformats.org/wordprocessingml/2006/main" matchingName="" preserve="1" showMasterPhAnim="0" showMasterSp="1" type="objTx" userDrawn="1">
   <p:cSld name="Content with Caption">
     <p:spTree>
       <p:nvGrpSpPr>
@@ -2051,7 +2969,7 @@
         <p:cNvGrpSpPr/>
         <p:nvPr/>
       </p:nvGrpSpPr>
-      <p:grpSpPr>
+      <p:grpSpPr bwMode="auto">
         <a:xfrm>
           <a:off x="0" y="0"/>
           <a:ext cx="0" cy="0"/>
@@ -2061,7 +2979,7 @@
       </p:grpSpPr>
       <p:sp>
         <p:nvSpPr>
-          <p:cNvPr id="2" name="Title 1"/>
+          <p:cNvPr id="624927334" name="Title 1"/>
           <p:cNvSpPr>
             <a:spLocks noGrp="1"/>
           </p:cNvSpPr>
@@ -2069,7 +2987,7 @@
             <p:ph type="title"/>
           </p:nvPr>
         </p:nvSpPr>
-        <p:spPr>
+        <p:spPr bwMode="auto">
           <a:xfrm>
             <a:off x="457200" y="273050"/>
             <a:ext cx="3008313" cy="1162050"/>
@@ -2083,8 +3001,11 @@
             </a:lvl1pPr>
           </a:lstStyle>
           <a:p>
-            <a:r>
-              <a:rPr lang="en-US" smtClean="0"/>
+            <a:pPr>
+              <a:defRPr/>
+            </a:pPr>
+            <a:r>
+              <a:rPr lang="en-US"/>
               <a:t>Click to edit Master title style</a:t>
             </a:r>
             <a:endParaRPr lang="en-US"/>
@@ -2093,7 +3014,7 @@
       </p:sp>
       <p:sp>
         <p:nvSpPr>
-          <p:cNvPr id="3" name="Content Placeholder 2"/>
+          <p:cNvPr id="1923860445" name="Content Placeholder 2"/>
           <p:cNvSpPr>
             <a:spLocks noGrp="1"/>
           </p:cNvSpPr>
@@ -2101,7 +3022,7 @@
             <p:ph idx="1"/>
           </p:nvPr>
         </p:nvSpPr>
-        <p:spPr>
+        <p:spPr bwMode="auto">
           <a:xfrm>
             <a:off x="3575050" y="273050"/>
             <a:ext cx="5111750" cy="5853113"/>
@@ -2139,37 +3060,51 @@
             </a:lvl9pPr>
           </a:lstStyle>
           <a:p>
-            <a:pPr lvl="0"/>
-            <a:r>
-              <a:rPr lang="en-US" smtClean="0"/>
+            <a:pPr lvl="0">
+              <a:defRPr/>
+            </a:pPr>
+            <a:r>
+              <a:rPr lang="en-US"/>
               <a:t>Click to edit Master text styles</a:t>
             </a:r>
-          </a:p>
-          <a:p>
-            <a:pPr lvl="1"/>
-            <a:r>
-              <a:rPr lang="en-US" smtClean="0"/>
+            <a:endParaRPr/>
+          </a:p>
+          <a:p>
+            <a:pPr lvl="1">
+              <a:defRPr/>
+            </a:pPr>
+            <a:r>
+              <a:rPr lang="en-US"/>
               <a:t>Second level</a:t>
             </a:r>
-          </a:p>
-          <a:p>
-            <a:pPr lvl="2"/>
-            <a:r>
-              <a:rPr lang="en-US" smtClean="0"/>
+            <a:endParaRPr/>
+          </a:p>
+          <a:p>
+            <a:pPr lvl="2">
+              <a:defRPr/>
+            </a:pPr>
+            <a:r>
+              <a:rPr lang="en-US"/>
               <a:t>Third level</a:t>
             </a:r>
-          </a:p>
-          <a:p>
-            <a:pPr lvl="3"/>
-            <a:r>
-              <a:rPr lang="en-US" smtClean="0"/>
+            <a:endParaRPr/>
+          </a:p>
+          <a:p>
+            <a:pPr lvl="3">
+              <a:defRPr/>
+            </a:pPr>
+            <a:r>
+              <a:rPr lang="en-US"/>
               <a:t>Fourth level</a:t>
             </a:r>
-          </a:p>
-          <a:p>
-            <a:pPr lvl="4"/>
-            <a:r>
-              <a:rPr lang="en-US" smtClean="0"/>
+            <a:endParaRPr/>
+          </a:p>
+          <a:p>
+            <a:pPr lvl="4">
+              <a:defRPr/>
+            </a:pPr>
+            <a:r>
+              <a:rPr lang="en-US"/>
               <a:t>Fifth level</a:t>
             </a:r>
             <a:endParaRPr lang="en-US"/>
@@ -2178,7 +3113,7 @@
       </p:sp>
       <p:sp>
         <p:nvSpPr>
-          <p:cNvPr id="4" name="Text Placeholder 3"/>
+          <p:cNvPr id="1820807221" name="Text Placeholder 3"/>
           <p:cNvSpPr>
             <a:spLocks noGrp="1"/>
           </p:cNvSpPr>
@@ -2186,7 +3121,7 @@
             <p:ph type="body" sz="half" idx="2"/>
           </p:nvPr>
         </p:nvSpPr>
-        <p:spPr>
+        <p:spPr bwMode="auto">
           <a:xfrm>
             <a:off x="457200" y="1435100"/>
             <a:ext cx="3008313" cy="4691063"/>
@@ -2233,17 +3168,20 @@
             </a:lvl9pPr>
           </a:lstStyle>
           <a:p>
-            <a:pPr lvl="0"/>
-            <a:r>
-              <a:rPr lang="en-US" smtClean="0"/>
+            <a:pPr lvl="0">
+              <a:defRPr/>
+            </a:pPr>
+            <a:r>
+              <a:rPr lang="en-US"/>
               <a:t>Click to edit Master text styles</a:t>
             </a:r>
-          </a:p>
-        </p:txBody>
-      </p:sp>
-      <p:sp>
-        <p:nvSpPr>
-          <p:cNvPr id="5" name="Date Placeholder 4"/>
+            <a:endParaRPr/>
+          </a:p>
+        </p:txBody>
+      </p:sp>
+      <p:sp>
+        <p:nvSpPr>
+          <p:cNvPr id="1940367131" name="Date Placeholder 4"/>
           <p:cNvSpPr>
             <a:spLocks noGrp="1"/>
           </p:cNvSpPr>
@@ -2251,13 +3189,16 @@
             <p:ph type="dt" sz="half" idx="10"/>
           </p:nvPr>
         </p:nvSpPr>
-        <p:spPr/>
+        <p:spPr bwMode="auto"/>
         <p:txBody>
           <a:bodyPr/>
           <a:lstStyle/>
           <a:p>
+            <a:pPr>
+              <a:defRPr/>
+            </a:pPr>
             <a:fld id="{5BCAD085-E8A6-8845-BD4E-CB4CCA059FC4}" type="datetimeFigureOut">
-              <a:rPr lang="en-US" smtClean="0"/>
+              <a:rPr lang="en-US"/>
               <a:t>1/27/13</a:t>
             </a:fld>
             <a:endParaRPr lang="en-US"/>
@@ -2266,7 +3207,7 @@
       </p:sp>
       <p:sp>
         <p:nvSpPr>
-          <p:cNvPr id="6" name="Footer Placeholder 5"/>
+          <p:cNvPr id="1773128425" name="Footer Placeholder 5"/>
           <p:cNvSpPr>
             <a:spLocks noGrp="1"/>
           </p:cNvSpPr>
@@ -2274,18 +3215,21 @@
             <p:ph type="ftr" sz="quarter" idx="11"/>
           </p:nvPr>
         </p:nvSpPr>
-        <p:spPr/>
+        <p:spPr bwMode="auto"/>
         <p:txBody>
           <a:bodyPr/>
           <a:lstStyle/>
           <a:p>
+            <a:pPr>
+              <a:defRPr/>
+            </a:pPr>
             <a:endParaRPr lang="en-US"/>
           </a:p>
         </p:txBody>
       </p:sp>
       <p:sp>
         <p:nvSpPr>
-          <p:cNvPr id="7" name="Slide Number Placeholder 6"/>
+          <p:cNvPr id="1012841650" name="Slide Number Placeholder 6"/>
           <p:cNvSpPr>
             <a:spLocks noGrp="1"/>
           </p:cNvSpPr>
@@ -2293,13 +3237,16 @@
             <p:ph type="sldNum" sz="quarter" idx="12"/>
           </p:nvPr>
         </p:nvSpPr>
-        <p:spPr/>
+        <p:spPr bwMode="auto"/>
         <p:txBody>
           <a:bodyPr/>
           <a:lstStyle/>
           <a:p>
+            <a:pPr>
+              <a:defRPr/>
+            </a:pPr>
             <a:fld id="{C1FF6DA9-008F-8B48-92A6-B652298478BF}" type="slidenum">
-              <a:rPr lang="en-US" smtClean="0"/>
+              <a:rPr lang="en-US"/>
               <a:t>‹#›</a:t>
             </a:fld>
             <a:endParaRPr lang="en-US"/>
@@ -2307,11 +3254,6 @@
         </p:txBody>
       </p:sp>
     </p:spTree>
-    <p:extLst>
-      <p:ext uri="{BB962C8B-B14F-4D97-AF65-F5344CB8AC3E}">
-        <p14:creationId xmlns:p14="http://schemas.microsoft.com/office/powerpoint/2010/main" val="1840726560"/>
-      </p:ext>
-    </p:extLst>
   </p:cSld>
   <p:clrMapOvr>
     <a:masterClrMapping/>
@@ -2320,7 +3262,7 @@
 </file>
 
 <file path=ppt/slideLayouts/slideLayout9.xml><?xml version="1.0" encoding="utf-8"?>
-<p:sldLayout xmlns:a="http://schemas.openxmlformats.org/drawingml/2006/main" xmlns:r="http://schemas.openxmlformats.org/officeDocument/2006/relationships" xmlns:p="http://schemas.openxmlformats.org/presentationml/2006/main" type="picTx" preserve="1">
+<p:sldLayout xmlns:a="http://schemas.openxmlformats.org/drawingml/2006/main" xmlns:r="http://schemas.openxmlformats.org/officeDocument/2006/relationships" xmlns:p="http://schemas.openxmlformats.org/presentationml/2006/main" xmlns:m="http://schemas.openxmlformats.org/officeDocument/2006/math" xmlns:w="http://schemas.openxmlformats.org/wordprocessingml/2006/main" matchingName="" preserve="1" showMasterPhAnim="0" showMasterSp="1" type="picTx" userDrawn="1">
   <p:cSld name="Picture with Caption">
     <p:spTree>
       <p:nvGrpSpPr>
@@ -2328,7 +3270,7 @@
         <p:cNvGrpSpPr/>
         <p:nvPr/>
       </p:nvGrpSpPr>
-      <p:grpSpPr>
+      <p:grpSpPr bwMode="auto">
         <a:xfrm>
           <a:off x="0" y="0"/>
           <a:ext cx="0" cy="0"/>
@@ -2338,7 +3280,7 @@
       </p:grpSpPr>
       <p:sp>
         <p:nvSpPr>
-          <p:cNvPr id="2" name="Title 1"/>
+          <p:cNvPr id="74700793" name="Title 1"/>
           <p:cNvSpPr>
             <a:spLocks noGrp="1"/>
           </p:cNvSpPr>
@@ -2346,7 +3288,7 @@
             <p:ph type="title"/>
           </p:nvPr>
         </p:nvSpPr>
-        <p:spPr>
+        <p:spPr bwMode="auto">
           <a:xfrm>
             <a:off x="1792288" y="4800600"/>
             <a:ext cx="5486400" cy="566738"/>
@@ -2360,8 +3302,11 @@
             </a:lvl1pPr>
           </a:lstStyle>
           <a:p>
-            <a:r>
-              <a:rPr lang="en-US" smtClean="0"/>
+            <a:pPr>
+              <a:defRPr/>
+            </a:pPr>
+            <a:r>
+              <a:rPr lang="en-US"/>
               <a:t>Click to edit Master title style</a:t>
             </a:r>
             <a:endParaRPr lang="en-US"/>
@@ -2370,7 +3315,7 @@
       </p:sp>
       <p:sp>
         <p:nvSpPr>
-          <p:cNvPr id="3" name="Picture Placeholder 2"/>
+          <p:cNvPr id="640186557" name="Picture Placeholder 2"/>
           <p:cNvSpPr>
             <a:spLocks noGrp="1"/>
           </p:cNvSpPr>
@@ -2378,7 +3323,7 @@
             <p:ph type="pic" idx="1"/>
           </p:nvPr>
         </p:nvSpPr>
-        <p:spPr>
+        <p:spPr bwMode="auto">
           <a:xfrm>
             <a:off x="1792288" y="612775"/>
             <a:ext cx="5486400" cy="4114800"/>
@@ -2425,13 +3370,16 @@
             </a:lvl9pPr>
           </a:lstStyle>
           <a:p>
+            <a:pPr>
+              <a:defRPr/>
+            </a:pPr>
             <a:endParaRPr lang="en-US"/>
           </a:p>
         </p:txBody>
       </p:sp>
       <p:sp>
         <p:nvSpPr>
-          <p:cNvPr id="4" name="Text Placeholder 3"/>
+          <p:cNvPr id="1158508800" name="Text Placeholder 3"/>
           <p:cNvSpPr>
             <a:spLocks noGrp="1"/>
           </p:cNvSpPr>
@@ -2439,7 +3387,7 @@
             <p:ph type="body" sz="half" idx="2"/>
           </p:nvPr>
         </p:nvSpPr>
-        <p:spPr>
+        <p:spPr bwMode="auto">
           <a:xfrm>
             <a:off x="1792288" y="5367338"/>
             <a:ext cx="5486400" cy="804862"/>
@@ -2486,17 +3434,20 @@
             </a:lvl9pPr>
           </a:lstStyle>
           <a:p>
-            <a:pPr lvl="0"/>
-            <a:r>
-              <a:rPr lang="en-US" smtClean="0"/>
+            <a:pPr lvl="0">
+              <a:defRPr/>
+            </a:pPr>
+            <a:r>
+              <a:rPr lang="en-US"/>
               <a:t>Click to edit Master text styles</a:t>
             </a:r>
-          </a:p>
-        </p:txBody>
-      </p:sp>
-      <p:sp>
-        <p:nvSpPr>
-          <p:cNvPr id="5" name="Date Placeholder 4"/>
+            <a:endParaRPr/>
+          </a:p>
+        </p:txBody>
+      </p:sp>
+      <p:sp>
+        <p:nvSpPr>
+          <p:cNvPr id="354034661" name="Date Placeholder 4"/>
           <p:cNvSpPr>
             <a:spLocks noGrp="1"/>
           </p:cNvSpPr>
@@ -2504,13 +3455,16 @@
             <p:ph type="dt" sz="half" idx="10"/>
           </p:nvPr>
         </p:nvSpPr>
-        <p:spPr/>
+        <p:spPr bwMode="auto"/>
         <p:txBody>
           <a:bodyPr/>
           <a:lstStyle/>
           <a:p>
+            <a:pPr>
+              <a:defRPr/>
+            </a:pPr>
             <a:fld id="{5BCAD085-E8A6-8845-BD4E-CB4CCA059FC4}" type="datetimeFigureOut">
-              <a:rPr lang="en-US" smtClean="0"/>
+              <a:rPr lang="en-US"/>
               <a:t>1/27/13</a:t>
             </a:fld>
             <a:endParaRPr lang="en-US"/>
@@ -2519,7 +3473,7 @@
       </p:sp>
       <p:sp>
         <p:nvSpPr>
-          <p:cNvPr id="6" name="Footer Placeholder 5"/>
+          <p:cNvPr id="688182955" name="Footer Placeholder 5"/>
           <p:cNvSpPr>
             <a:spLocks noGrp="1"/>
           </p:cNvSpPr>
@@ -2527,18 +3481,21 @@
             <p:ph type="ftr" sz="quarter" idx="11"/>
           </p:nvPr>
         </p:nvSpPr>
-        <p:spPr/>
+        <p:spPr bwMode="auto"/>
         <p:txBody>
           <a:bodyPr/>
           <a:lstStyle/>
           <a:p>
+            <a:pPr>
+              <a:defRPr/>
+            </a:pPr>
             <a:endParaRPr lang="en-US"/>
           </a:p>
         </p:txBody>
       </p:sp>
       <p:sp>
         <p:nvSpPr>
-          <p:cNvPr id="7" name="Slide Number Placeholder 6"/>
+          <p:cNvPr id="204049705" name="Slide Number Placeholder 6"/>
           <p:cNvSpPr>
             <a:spLocks noGrp="1"/>
           </p:cNvSpPr>
@@ -2546,13 +3503,16 @@
             <p:ph type="sldNum" sz="quarter" idx="12"/>
           </p:nvPr>
         </p:nvSpPr>
-        <p:spPr/>
+        <p:spPr bwMode="auto"/>
         <p:txBody>
           <a:bodyPr/>
           <a:lstStyle/>
           <a:p>
+            <a:pPr>
+              <a:defRPr/>
+            </a:pPr>
             <a:fld id="{C1FF6DA9-008F-8B48-92A6-B652298478BF}" type="slidenum">
-              <a:rPr lang="en-US" smtClean="0"/>
+              <a:rPr lang="en-US"/>
               <a:t>‹#›</a:t>
             </a:fld>
             <a:endParaRPr lang="en-US"/>
@@ -2560,11 +3520,6 @@
         </p:txBody>
       </p:sp>
     </p:spTree>
-    <p:extLst>
-      <p:ext uri="{BB962C8B-B14F-4D97-AF65-F5344CB8AC3E}">
-        <p14:creationId xmlns:p14="http://schemas.microsoft.com/office/powerpoint/2010/main" val="3889236939"/>
-      </p:ext>
-    </p:extLst>
   </p:cSld>
   <p:clrMapOvr>
     <a:masterClrMapping/>
@@ -2573,8 +3528,8 @@
 </file>
 
 <file path=ppt/slideMasters/slideMaster1.xml><?xml version="1.0" encoding="utf-8"?>
-<p:sldMaster xmlns:a="http://schemas.openxmlformats.org/drawingml/2006/main" xmlns:r="http://schemas.openxmlformats.org/officeDocument/2006/relationships" xmlns:p="http://schemas.openxmlformats.org/presentationml/2006/main">
-  <p:cSld>
+<p:sldMaster xmlns:a="http://schemas.openxmlformats.org/drawingml/2006/main" xmlns:r="http://schemas.openxmlformats.org/officeDocument/2006/relationships" xmlns:p="http://schemas.openxmlformats.org/presentationml/2006/main" xmlns:m="http://schemas.openxmlformats.org/officeDocument/2006/math" xmlns:w="http://schemas.openxmlformats.org/wordprocessingml/2006/main" preserve="0">
+  <p:cSld name="">
     <p:bg>
       <p:bgRef idx="1001">
         <a:schemeClr val="bg1"/>
@@ -2586,7 +3541,7 @@
         <p:cNvGrpSpPr/>
         <p:nvPr/>
       </p:nvGrpSpPr>
-      <p:grpSpPr>
+      <p:grpSpPr bwMode="auto">
         <a:xfrm>
           <a:off x="0" y="0"/>
           <a:ext cx="0" cy="0"/>
@@ -2596,7 +3551,7 @@
       </p:grpSpPr>
       <p:sp>
         <p:nvSpPr>
-          <p:cNvPr id="2" name="Title Placeholder 1"/>
+          <p:cNvPr id="1864911786" name="Title Placeholder 1"/>
           <p:cNvSpPr>
             <a:spLocks noGrp="1"/>
           </p:cNvSpPr>
@@ -2604,7 +3559,7 @@
             <p:ph type="title"/>
           </p:nvPr>
         </p:nvSpPr>
-        <p:spPr>
+        <p:spPr bwMode="auto">
           <a:xfrm>
             <a:off x="457200" y="274638"/>
             <a:ext cx="8229600" cy="1143000"/>
@@ -2619,8 +3574,11 @@
           </a:bodyPr>
           <a:lstStyle/>
           <a:p>
-            <a:r>
-              <a:rPr lang="en-US" smtClean="0"/>
+            <a:pPr>
+              <a:defRPr/>
+            </a:pPr>
+            <a:r>
+              <a:rPr lang="en-US"/>
               <a:t>Click to edit Master title style</a:t>
             </a:r>
             <a:endParaRPr lang="en-US"/>
@@ -2629,7 +3587,7 @@
       </p:sp>
       <p:sp>
         <p:nvSpPr>
-          <p:cNvPr id="3" name="Text Placeholder 2"/>
+          <p:cNvPr id="1480378110" name="Text Placeholder 2"/>
           <p:cNvSpPr>
             <a:spLocks noGrp="1"/>
           </p:cNvSpPr>
@@ -2637,7 +3595,7 @@
             <p:ph type="body" idx="1"/>
           </p:nvPr>
         </p:nvSpPr>
-        <p:spPr>
+        <p:spPr bwMode="auto">
           <a:xfrm>
             <a:off x="457200" y="1600200"/>
             <a:ext cx="8229600" cy="4525963"/>
@@ -2652,37 +3610,51 @@
           </a:bodyPr>
           <a:lstStyle/>
           <a:p>
-            <a:pPr lvl="0"/>
-            <a:r>
-              <a:rPr lang="en-US" smtClean="0"/>
+            <a:pPr lvl="0">
+              <a:defRPr/>
+            </a:pPr>
+            <a:r>
+              <a:rPr lang="en-US"/>
               <a:t>Click to edit Master text styles</a:t>
             </a:r>
-          </a:p>
-          <a:p>
-            <a:pPr lvl="1"/>
-            <a:r>
-              <a:rPr lang="en-US" smtClean="0"/>
+            <a:endParaRPr/>
+          </a:p>
+          <a:p>
+            <a:pPr lvl="1">
+              <a:defRPr/>
+            </a:pPr>
+            <a:r>
+              <a:rPr lang="en-US"/>
               <a:t>Second level</a:t>
             </a:r>
-          </a:p>
-          <a:p>
-            <a:pPr lvl="2"/>
-            <a:r>
-              <a:rPr lang="en-US" smtClean="0"/>
+            <a:endParaRPr/>
+          </a:p>
+          <a:p>
+            <a:pPr lvl="2">
+              <a:defRPr/>
+            </a:pPr>
+            <a:r>
+              <a:rPr lang="en-US"/>
               <a:t>Third level</a:t>
             </a:r>
-          </a:p>
-          <a:p>
-            <a:pPr lvl="3"/>
-            <a:r>
-              <a:rPr lang="en-US" smtClean="0"/>
+            <a:endParaRPr/>
+          </a:p>
+          <a:p>
+            <a:pPr lvl="3">
+              <a:defRPr/>
+            </a:pPr>
+            <a:r>
+              <a:rPr lang="en-US"/>
               <a:t>Fourth level</a:t>
             </a:r>
-          </a:p>
-          <a:p>
-            <a:pPr lvl="4"/>
-            <a:r>
-              <a:rPr lang="en-US" smtClean="0"/>
+            <a:endParaRPr/>
+          </a:p>
+          <a:p>
+            <a:pPr lvl="4">
+              <a:defRPr/>
+            </a:pPr>
+            <a:r>
+              <a:rPr lang="en-US"/>
               <a:t>Fifth level</a:t>
             </a:r>
             <a:endParaRPr lang="en-US"/>
@@ -2691,7 +3663,7 @@
       </p:sp>
       <p:sp>
         <p:nvSpPr>
-          <p:cNvPr id="4" name="Date Placeholder 3"/>
+          <p:cNvPr id="1275805570" name="Date Placeholder 3"/>
           <p:cNvSpPr>
             <a:spLocks noGrp="1"/>
           </p:cNvSpPr>
@@ -2699,7 +3671,7 @@
             <p:ph type="dt" sz="half" idx="2"/>
           </p:nvPr>
         </p:nvSpPr>
-        <p:spPr>
+        <p:spPr bwMode="auto">
           <a:xfrm>
             <a:off x="457200" y="6356350"/>
             <a:ext cx="2133600" cy="365125"/>
@@ -2722,8 +3694,11 @@
             </a:lvl1pPr>
           </a:lstStyle>
           <a:p>
+            <a:pPr>
+              <a:defRPr/>
+            </a:pPr>
             <a:fld id="{5BCAD085-E8A6-8845-BD4E-CB4CCA059FC4}" type="datetimeFigureOut">
-              <a:rPr lang="en-US" smtClean="0"/>
+              <a:rPr lang="en-US"/>
               <a:t>1/27/13</a:t>
             </a:fld>
             <a:endParaRPr lang="en-US"/>
@@ -2732,7 +3707,7 @@
       </p:sp>
       <p:sp>
         <p:nvSpPr>
-          <p:cNvPr id="5" name="Footer Placeholder 4"/>
+          <p:cNvPr id="1412363487" name="Footer Placeholder 4"/>
           <p:cNvSpPr>
             <a:spLocks noGrp="1"/>
           </p:cNvSpPr>
@@ -2740,7 +3715,7 @@
             <p:ph type="ftr" sz="quarter" idx="3"/>
           </p:nvPr>
         </p:nvSpPr>
-        <p:spPr>
+        <p:spPr bwMode="auto">
           <a:xfrm>
             <a:off x="3124200" y="6356350"/>
             <a:ext cx="2895600" cy="365125"/>
@@ -2763,13 +3738,16 @@
             </a:lvl1pPr>
           </a:lstStyle>
           <a:p>
+            <a:pPr>
+              <a:defRPr/>
+            </a:pPr>
             <a:endParaRPr lang="en-US"/>
           </a:p>
         </p:txBody>
       </p:sp>
       <p:sp>
         <p:nvSpPr>
-          <p:cNvPr id="6" name="Slide Number Placeholder 5"/>
+          <p:cNvPr id="883688308" name="Slide Number Placeholder 5"/>
           <p:cNvSpPr>
             <a:spLocks noGrp="1"/>
           </p:cNvSpPr>
@@ -2777,7 +3755,7 @@
             <p:ph type="sldNum" sz="quarter" idx="4"/>
           </p:nvPr>
         </p:nvSpPr>
-        <p:spPr>
+        <p:spPr bwMode="auto">
           <a:xfrm>
             <a:off x="6553200" y="6356350"/>
             <a:ext cx="2133600" cy="365125"/>
@@ -2800,8 +3778,11 @@
             </a:lvl1pPr>
           </a:lstStyle>
           <a:p>
+            <a:pPr>
+              <a:defRPr/>
+            </a:pPr>
             <a:fld id="{C1FF6DA9-008F-8B48-92A6-B652298478BF}" type="slidenum">
-              <a:rPr lang="en-US" smtClean="0"/>
+              <a:rPr lang="en-US"/>
               <a:t>‹#›</a:t>
             </a:fld>
             <a:endParaRPr lang="en-US"/>
@@ -2809,11 +3790,6 @@
         </p:txBody>
       </p:sp>
     </p:spTree>
-    <p:extLst>
-      <p:ext uri="{BB962C8B-B14F-4D97-AF65-F5344CB8AC3E}">
-        <p14:creationId xmlns:p14="http://schemas.microsoft.com/office/powerpoint/2010/main" val="2209977519"/>
-      </p:ext>
-    </p:extLst>
   </p:cSld>
   <p:clrMap bg1="lt1" tx1="dk1" bg2="lt2" tx2="dk2" accent1="accent1" accent2="accent2" accent3="accent3" accent4="accent4" accent5="accent5" accent6="accent6" hlink="hlink" folHlink="folHlink"/>
   <p:sldLayoutIdLst>
@@ -2831,12 +3807,12 @@
   </p:sldLayoutIdLst>
   <p:txStyles>
     <p:titleStyle>
-      <a:lvl1pPr algn="ctr" defTabSz="457200" rtl="0" eaLnBrk="1" latinLnBrk="0" hangingPunct="1">
+      <a:lvl1pPr algn="ctr" defTabSz="457200" rtl="0">
         <a:spcBef>
-          <a:spcPct val="0"/>
+          <a:spcPts val="0"/>
         </a:spcBef>
         <a:buNone/>
-        <a:defRPr sz="4400" kern="1200">
+        <a:defRPr sz="4400">
           <a:solidFill>
             <a:schemeClr val="tx1"/>
           </a:solidFill>
@@ -2847,13 +3823,13 @@
       </a:lvl1pPr>
     </p:titleStyle>
     <p:bodyStyle>
-      <a:lvl1pPr marL="342900" indent="-342900" algn="l" defTabSz="457200" rtl="0" eaLnBrk="1" latinLnBrk="0" hangingPunct="1">
+      <a:lvl1pPr marL="342900" indent="-342900" algn="l" defTabSz="457200" rtl="0">
         <a:spcBef>
-          <a:spcPct val="20000"/>
+          <a:spcPts val="0"/>
         </a:spcBef>
         <a:buFont typeface="Arial"/>
         <a:buChar char="•"/>
-        <a:defRPr sz="3200" kern="1200">
+        <a:defRPr sz="3200">
           <a:solidFill>
             <a:schemeClr val="tx1"/>
           </a:solidFill>
@@ -2862,13 +3838,13 @@
           <a:cs typeface="+mn-cs"/>
         </a:defRPr>
       </a:lvl1pPr>
-      <a:lvl2pPr marL="742950" indent="-285750" algn="l" defTabSz="457200" rtl="0" eaLnBrk="1" latinLnBrk="0" hangingPunct="1">
+      <a:lvl2pPr marL="742950" indent="-285750" algn="l" defTabSz="457200" rtl="0">
         <a:spcBef>
-          <a:spcPct val="20000"/>
+          <a:spcPts val="0"/>
         </a:spcBef>
         <a:buFont typeface="Arial"/>
         <a:buChar char="–"/>
-        <a:defRPr sz="2800" kern="1200">
+        <a:defRPr sz="2800">
           <a:solidFill>
             <a:schemeClr val="tx1"/>
           </a:solidFill>
@@ -2877,13 +3853,13 @@
           <a:cs typeface="+mn-cs"/>
         </a:defRPr>
       </a:lvl2pPr>
-      <a:lvl3pPr marL="1143000" indent="-228600" algn="l" defTabSz="457200" rtl="0" eaLnBrk="1" latinLnBrk="0" hangingPunct="1">
+      <a:lvl3pPr marL="1143000" indent="-228600" algn="l" defTabSz="457200" rtl="0">
         <a:spcBef>
-          <a:spcPct val="20000"/>
+          <a:spcPts val="0"/>
         </a:spcBef>
         <a:buFont typeface="Arial"/>
         <a:buChar char="•"/>
-        <a:defRPr sz="2400" kern="1200">
+        <a:defRPr sz="2400">
           <a:solidFill>
             <a:schemeClr val="tx1"/>
           </a:solidFill>
@@ -2892,13 +3868,13 @@
           <a:cs typeface="+mn-cs"/>
         </a:defRPr>
       </a:lvl3pPr>
-      <a:lvl4pPr marL="1600200" indent="-228600" algn="l" defTabSz="457200" rtl="0" eaLnBrk="1" latinLnBrk="0" hangingPunct="1">
+      <a:lvl4pPr marL="1600200" indent="-228600" algn="l" defTabSz="457200" rtl="0">
         <a:spcBef>
-          <a:spcPct val="20000"/>
+          <a:spcPts val="0"/>
         </a:spcBef>
         <a:buFont typeface="Arial"/>
         <a:buChar char="–"/>
-        <a:defRPr sz="2000" kern="1200">
+        <a:defRPr sz="2000">
           <a:solidFill>
             <a:schemeClr val="tx1"/>
           </a:solidFill>
@@ -2907,13 +3883,13 @@
           <a:cs typeface="+mn-cs"/>
         </a:defRPr>
       </a:lvl4pPr>
-      <a:lvl5pPr marL="2057400" indent="-228600" algn="l" defTabSz="457200" rtl="0" eaLnBrk="1" latinLnBrk="0" hangingPunct="1">
+      <a:lvl5pPr marL="2057400" indent="-228600" algn="l" defTabSz="457200" rtl="0">
         <a:spcBef>
-          <a:spcPct val="20000"/>
+          <a:spcPts val="0"/>
         </a:spcBef>
         <a:buFont typeface="Arial"/>
         <a:buChar char="»"/>
-        <a:defRPr sz="2000" kern="1200">
+        <a:defRPr sz="2000">
           <a:solidFill>
             <a:schemeClr val="tx1"/>
           </a:solidFill>
@@ -2922,13 +3898,13 @@
           <a:cs typeface="+mn-cs"/>
         </a:defRPr>
       </a:lvl5pPr>
-      <a:lvl6pPr marL="2514600" indent="-228600" algn="l" defTabSz="457200" rtl="0" eaLnBrk="1" latinLnBrk="0" hangingPunct="1">
+      <a:lvl6pPr marL="2514600" indent="-228600" algn="l" defTabSz="457200" rtl="0">
         <a:spcBef>
-          <a:spcPct val="20000"/>
+          <a:spcPts val="0"/>
         </a:spcBef>
         <a:buFont typeface="Arial"/>
         <a:buChar char="•"/>
-        <a:defRPr sz="2000" kern="1200">
+        <a:defRPr sz="2000">
           <a:solidFill>
             <a:schemeClr val="tx1"/>
           </a:solidFill>
@@ -2937,13 +3913,13 @@
           <a:cs typeface="+mn-cs"/>
         </a:defRPr>
       </a:lvl6pPr>
-      <a:lvl7pPr marL="2971800" indent="-228600" algn="l" defTabSz="457200" rtl="0" eaLnBrk="1" latinLnBrk="0" hangingPunct="1">
+      <a:lvl7pPr marL="2971800" indent="-228600" algn="l" defTabSz="457200" rtl="0">
         <a:spcBef>
-          <a:spcPct val="20000"/>
+          <a:spcPts val="0"/>
         </a:spcBef>
         <a:buFont typeface="Arial"/>
         <a:buChar char="•"/>
-        <a:defRPr sz="2000" kern="1200">
+        <a:defRPr sz="2000">
           <a:solidFill>
             <a:schemeClr val="tx1"/>
           </a:solidFill>
@@ -2952,13 +3928,13 @@
           <a:cs typeface="+mn-cs"/>
         </a:defRPr>
       </a:lvl7pPr>
-      <a:lvl8pPr marL="3429000" indent="-228600" algn="l" defTabSz="457200" rtl="0" eaLnBrk="1" latinLnBrk="0" hangingPunct="1">
+      <a:lvl8pPr marL="3429000" indent="-228600" algn="l" defTabSz="457200" rtl="0">
         <a:spcBef>
-          <a:spcPct val="20000"/>
+          <a:spcPts val="0"/>
         </a:spcBef>
         <a:buFont typeface="Arial"/>
         <a:buChar char="•"/>
-        <a:defRPr sz="2000" kern="1200">
+        <a:defRPr sz="2000">
           <a:solidFill>
             <a:schemeClr val="tx1"/>
           </a:solidFill>
@@ -2967,13 +3943,13 @@
           <a:cs typeface="+mn-cs"/>
         </a:defRPr>
       </a:lvl8pPr>
-      <a:lvl9pPr marL="3886200" indent="-228600" algn="l" defTabSz="457200" rtl="0" eaLnBrk="1" latinLnBrk="0" hangingPunct="1">
+      <a:lvl9pPr marL="3886200" indent="-228600" algn="l" defTabSz="457200" rtl="0">
         <a:spcBef>
-          <a:spcPct val="20000"/>
+          <a:spcPts val="0"/>
         </a:spcBef>
         <a:buFont typeface="Arial"/>
         <a:buChar char="•"/>
-        <a:defRPr sz="2000" kern="1200">
+        <a:defRPr sz="2000">
           <a:solidFill>
             <a:schemeClr val="tx1"/>
           </a:solidFill>
@@ -2987,8 +3963,8 @@
       <a:defPPr>
         <a:defRPr lang="en-US"/>
       </a:defPPr>
-      <a:lvl1pPr marL="0" algn="l" defTabSz="457200" rtl="0" eaLnBrk="1" latinLnBrk="0" hangingPunct="1">
-        <a:defRPr sz="1800" kern="1200">
+      <a:lvl1pPr marL="0" algn="l" defTabSz="457200" rtl="0">
+        <a:defRPr sz="1800">
           <a:solidFill>
             <a:schemeClr val="tx1"/>
           </a:solidFill>
@@ -2997,8 +3973,8 @@
           <a:cs typeface="+mn-cs"/>
         </a:defRPr>
       </a:lvl1pPr>
-      <a:lvl2pPr marL="457200" algn="l" defTabSz="457200" rtl="0" eaLnBrk="1" latinLnBrk="0" hangingPunct="1">
-        <a:defRPr sz="1800" kern="1200">
+      <a:lvl2pPr marL="457200" algn="l" defTabSz="457200" rtl="0">
+        <a:defRPr sz="1800">
           <a:solidFill>
             <a:schemeClr val="tx1"/>
           </a:solidFill>
@@ -3007,8 +3983,8 @@
           <a:cs typeface="+mn-cs"/>
         </a:defRPr>
       </a:lvl2pPr>
-      <a:lvl3pPr marL="914400" algn="l" defTabSz="457200" rtl="0" eaLnBrk="1" latinLnBrk="0" hangingPunct="1">
-        <a:defRPr sz="1800" kern="1200">
+      <a:lvl3pPr marL="914400" algn="l" defTabSz="457200" rtl="0">
+        <a:defRPr sz="1800">
           <a:solidFill>
             <a:schemeClr val="tx1"/>
           </a:solidFill>
@@ -3017,8 +3993,8 @@
           <a:cs typeface="+mn-cs"/>
         </a:defRPr>
       </a:lvl3pPr>
-      <a:lvl4pPr marL="1371600" algn="l" defTabSz="457200" rtl="0" eaLnBrk="1" latinLnBrk="0" hangingPunct="1">
-        <a:defRPr sz="1800" kern="1200">
+      <a:lvl4pPr marL="1371600" algn="l" defTabSz="457200" rtl="0">
+        <a:defRPr sz="1800">
           <a:solidFill>
             <a:schemeClr val="tx1"/>
           </a:solidFill>
@@ -3027,8 +4003,8 @@
           <a:cs typeface="+mn-cs"/>
         </a:defRPr>
       </a:lvl4pPr>
-      <a:lvl5pPr marL="1828800" algn="l" defTabSz="457200" rtl="0" eaLnBrk="1" latinLnBrk="0" hangingPunct="1">
-        <a:defRPr sz="1800" kern="1200">
+      <a:lvl5pPr marL="1828800" algn="l" defTabSz="457200" rtl="0">
+        <a:defRPr sz="1800">
           <a:solidFill>
             <a:schemeClr val="tx1"/>
           </a:solidFill>
@@ -3037,8 +4013,8 @@
           <a:cs typeface="+mn-cs"/>
         </a:defRPr>
       </a:lvl5pPr>
-      <a:lvl6pPr marL="2286000" algn="l" defTabSz="457200" rtl="0" eaLnBrk="1" latinLnBrk="0" hangingPunct="1">
-        <a:defRPr sz="1800" kern="1200">
+      <a:lvl6pPr marL="2286000" algn="l" defTabSz="457200" rtl="0">
+        <a:defRPr sz="1800">
           <a:solidFill>
             <a:schemeClr val="tx1"/>
           </a:solidFill>
@@ -3047,8 +4023,8 @@
           <a:cs typeface="+mn-cs"/>
         </a:defRPr>
       </a:lvl6pPr>
-      <a:lvl7pPr marL="2743200" algn="l" defTabSz="457200" rtl="0" eaLnBrk="1" latinLnBrk="0" hangingPunct="1">
-        <a:defRPr sz="1800" kern="1200">
+      <a:lvl7pPr marL="2743200" algn="l" defTabSz="457200" rtl="0">
+        <a:defRPr sz="1800">
           <a:solidFill>
             <a:schemeClr val="tx1"/>
           </a:solidFill>
@@ -3057,8 +4033,8 @@
           <a:cs typeface="+mn-cs"/>
         </a:defRPr>
       </a:lvl7pPr>
-      <a:lvl8pPr marL="3200400" algn="l" defTabSz="457200" rtl="0" eaLnBrk="1" latinLnBrk="0" hangingPunct="1">
-        <a:defRPr sz="1800" kern="1200">
+      <a:lvl8pPr marL="3200400" algn="l" defTabSz="457200" rtl="0">
+        <a:defRPr sz="1800">
           <a:solidFill>
             <a:schemeClr val="tx1"/>
           </a:solidFill>
@@ -3067,8 +4043,8 @@
           <a:cs typeface="+mn-cs"/>
         </a:defRPr>
       </a:lvl8pPr>
-      <a:lvl9pPr marL="3657600" algn="l" defTabSz="457200" rtl="0" eaLnBrk="1" latinLnBrk="0" hangingPunct="1">
-        <a:defRPr sz="1800" kern="1200">
+      <a:lvl9pPr marL="3657600" algn="l" defTabSz="457200" rtl="0">
+        <a:defRPr sz="1800">
           <a:solidFill>
             <a:schemeClr val="tx1"/>
           </a:solidFill>
@@ -3083,14 +4059,13 @@
 </file>
 
 <file path=ppt/slides/slide1.xml><?xml version="1.0" encoding="utf-8"?>
-<p:sld xmlns:a="http://schemas.openxmlformats.org/drawingml/2006/main" xmlns:p="http://schemas.openxmlformats.org/presentationml/2006/main" xmlns:r="http://schemas.openxmlformats.org/officeDocument/2006/relationships">
-  <p:cSld>
+<p:sld xmlns:a="http://schemas.openxmlformats.org/drawingml/2006/main" xmlns:r="http://schemas.openxmlformats.org/officeDocument/2006/relationships" xmlns:p="http://schemas.openxmlformats.org/presentationml/2006/main" xmlns:m="http://schemas.openxmlformats.org/officeDocument/2006/math" xmlns:w="http://schemas.openxmlformats.org/wordprocessingml/2006/main" xmlns:mc="http://schemas.openxmlformats.org/markup-compatibility/2006" showMasterPhAnim="0" showMasterSp="1" show="1">
+  <p:cSld name="">
     <p:bg>
-      <p:bgPr>
+      <p:bgPr shadeToTitle="0">
         <a:solidFill>
           <a:srgbClr val="FFFFFF"/>
         </a:solidFill>
-        <a:effectLst/>
       </p:bgPr>
     </p:bg>
     <p:spTree>
@@ -3099,48 +4074,21 @@
         <p:cNvGrpSpPr/>
         <p:nvPr/>
       </p:nvGrpSpPr>
-      <p:grpSpPr/>
-      <p:sp>
-        <p:nvSpPr>
-          <p:cNvPr id="2" name="Title 1"/>
-          <p:cNvSpPr>
-            <a:spLocks noGrp="1"/>
-          </p:cNvSpPr>
-          <p:nvPr>
-            <p:ph type="ctrTitle"/>
-          </p:nvPr>
-        </p:nvSpPr>
-        <p:spPr/>
-        <p:txBody>
-          <a:bodyPr/>
-          <a:lstStyle/>
-          <a:p/>
-        </p:txBody>
-      </p:sp>
-      <p:sp>
-        <p:nvSpPr>
-          <p:cNvPr id="3" name="Subtitle 2"/>
-          <p:cNvSpPr>
-            <a:spLocks noGrp="1"/>
-          </p:cNvSpPr>
-          <p:nvPr>
-            <p:ph type="subTitle" idx="1"/>
-          </p:nvPr>
-        </p:nvSpPr>
-        <p:spPr/>
-        <p:txBody>
-          <a:bodyPr/>
-          <a:lstStyle/>
-          <a:p/>
-        </p:txBody>
-      </p:sp>
-      <p:sp>
-        <p:nvSpPr>
-          <p:cNvPr id="4" name="Rectangle 3"/>
+      <p:grpSpPr bwMode="auto">
+        <a:xfrm>
+          <a:off x="0" y="0"/>
+          <a:ext cx="0" cy="0"/>
+          <a:chOff x="0" y="0"/>
+          <a:chExt cx="0" cy="0"/>
+        </a:xfrm>
+      </p:grpSpPr>
+      <p:sp>
+        <p:nvSpPr>
+          <p:cNvPr id="1302342973" name="Rectangle 3"/>
           <p:cNvSpPr/>
           <p:nvPr/>
         </p:nvSpPr>
-        <p:spPr>
+        <p:spPr bwMode="auto">
           <a:xfrm>
             <a:off x="731520" y="2011680"/>
             <a:ext cx="109728" cy="2560320"/>
@@ -3175,19 +4123,22 @@
           <a:bodyPr rtlCol="0" anchor="ctr"/>
           <a:lstStyle/>
           <a:p>
-            <a:pPr algn="ctr"/>
-          </a:p>
-        </p:txBody>
-      </p:sp>
-      <p:sp>
-        <p:nvSpPr>
-          <p:cNvPr id="5" name="TextBox 4"/>
+            <a:pPr algn="ctr">
+              <a:defRPr/>
+            </a:pPr>
+            <a:endParaRPr/>
+          </a:p>
+        </p:txBody>
+      </p:sp>
+      <p:sp>
+        <p:nvSpPr>
+          <p:cNvPr id="1516052699" name="TextBox 4"/>
           <p:cNvSpPr txBox="1"/>
           <p:nvPr/>
         </p:nvSpPr>
-        <p:spPr>
+        <p:spPr bwMode="auto">
           <a:xfrm>
-            <a:off x="1097280" y="1828800"/>
+            <a:off x="941893" y="1592346"/>
             <a:ext cx="10058400" cy="2926080"/>
           </a:xfrm>
           <a:prstGeom prst="rect">
@@ -3210,8 +4161,10 @@
               </a:defRPr>
             </a:pPr>
             <a:r>
+              <a:rPr/>
               <a:t>IMAGE RESTORATION &amp; OBJECT DETECTION</a:t>
             </a:r>
+            <a:endParaRPr/>
           </a:p>
           <a:p>
             <a:pPr>
@@ -3226,8 +4179,10 @@
               </a:defRPr>
             </a:pPr>
             <a:r>
+              <a:rPr/>
               <a:t>Real-World Image Dehazing for Object Detection</a:t>
             </a:r>
+            <a:endParaRPr/>
           </a:p>
           <a:p>
             <a:pPr>
@@ -3242,20 +4197,22 @@
               </a:defRPr>
             </a:pPr>
             <a:r>
+              <a:rPr/>
               <a:t>Comparative Benchmark: Baseline vs. Reference Paper vs. Classical DCP vs. Our Method</a:t>
             </a:r>
-          </a:p>
-        </p:txBody>
-      </p:sp>
-      <p:sp>
-        <p:nvSpPr>
-          <p:cNvPr id="6" name="TextBox 5"/>
+            <a:endParaRPr/>
+          </a:p>
+        </p:txBody>
+      </p:sp>
+      <p:sp>
+        <p:nvSpPr>
+          <p:cNvPr id="903497333" name="TextBox 5"/>
           <p:cNvSpPr txBox="1"/>
           <p:nvPr/>
         </p:nvSpPr>
-        <p:spPr>
+        <p:spPr bwMode="auto">
           <a:xfrm>
-            <a:off x="1097280" y="5120640"/>
+            <a:off x="1340264" y="4926252"/>
             <a:ext cx="10058400" cy="914400"/>
           </a:xfrm>
           <a:prstGeom prst="rect">
@@ -3278,20 +4235,31 @@
               </a:defRPr>
             </a:pPr>
             <a:r>
+              <a:rPr/>
               <a:t>Evaluation Protocol:</a:t>
             </a:r>
-            <a:br/>
-            <a:r>
+            <a:br>
+              <a:rPr/>
+            </a:br>
+            <a:r>
+              <a:rPr/>
               <a:t>• Image Reconstruction Fidelity: PSNR &amp; SSIM on paired Foggy Cityscapes (1,500 scenes @ 2048x1024)</a:t>
             </a:r>
-            <a:br/>
-            <a:r>
+            <a:br>
+              <a:rPr/>
+            </a:br>
+            <a:r>
+              <a:rPr/>
               <a:t>• Real-World Detection Utility: VOC AP@0.50, Strict AP@0.75, COCO mAP on held-out RTTS Valid (865 images)</a:t>
             </a:r>
-            <a:br/>
-            <a:r>
+            <a:br>
+              <a:rPr/>
+            </a:br>
+            <a:r>
+              <a:rPr/>
               <a:t>• Impartial Perception Setup: Off-the-shelf YOLOv8n detector with 100% frozen COCO weights</a:t>
             </a:r>
+            <a:endParaRPr/>
           </a:p>
         </p:txBody>
       </p:sp>
@@ -3300,29 +4268,44 @@
   <p:clrMapOvr>
     <a:masterClrMapping/>
   </p:clrMapOvr>
+  <mc:AlternateContent xmlns:mc="http://schemas.openxmlformats.org/markup-compatibility/2006">
+    <mc:Choice xmlns:p159="http://schemas.microsoft.com/office/powerpoint/2015/09/main" xmlns:p14="http://schemas.microsoft.com/office/powerpoint/2010/main" Requires="p159">
+      <p:transition p14:dur="500" advClick="1"/>
+    </mc:Choice>
+    <mc:Fallback>
+      <p:transition advClick="1"/>
+    </mc:Fallback>
+  </mc:AlternateContent>
 </p:sld>
 </file>
 
 <file path=ppt/slides/slide2.xml><?xml version="1.0" encoding="utf-8"?>
-<p:sld xmlns:a="http://schemas.openxmlformats.org/drawingml/2006/main" xmlns:p="http://schemas.openxmlformats.org/presentationml/2006/main" xmlns:r="http://schemas.openxmlformats.org/officeDocument/2006/relationships">
-  <p:cSld>
+<p:sld xmlns:a="http://schemas.openxmlformats.org/drawingml/2006/main" xmlns:r="http://schemas.openxmlformats.org/officeDocument/2006/relationships" xmlns:p="http://schemas.openxmlformats.org/presentationml/2006/main" xmlns:m="http://schemas.openxmlformats.org/officeDocument/2006/math" xmlns:w="http://schemas.openxmlformats.org/wordprocessingml/2006/main" xmlns:mc="http://schemas.openxmlformats.org/markup-compatibility/2006" showMasterPhAnim="0" showMasterSp="1" show="1">
+  <p:cSld name="">
     <p:spTree>
       <p:nvGrpSpPr>
         <p:cNvPr id="1" name=""/>
         <p:cNvGrpSpPr/>
         <p:nvPr/>
       </p:nvGrpSpPr>
-      <p:grpSpPr/>
-      <p:sp>
-        <p:nvSpPr>
-          <p:cNvPr id="2" name="TextBox 1"/>
+      <p:grpSpPr bwMode="auto">
+        <a:xfrm>
+          <a:off x="0" y="0"/>
+          <a:ext cx="0" cy="0"/>
+          <a:chOff x="0" y="0"/>
+          <a:chExt cx="0" cy="0"/>
+        </a:xfrm>
+      </p:grpSpPr>
+      <p:sp>
+        <p:nvSpPr>
+          <p:cNvPr id="1769769803" name="TextBox 1"/>
           <p:cNvSpPr txBox="1"/>
           <p:nvPr/>
         </p:nvSpPr>
-        <p:spPr>
+        <p:spPr bwMode="auto">
           <a:xfrm>
             <a:off x="731520" y="411480"/>
-            <a:ext cx="10728655" cy="1005840"/>
+            <a:ext cx="10728654" cy="1005840"/>
           </a:xfrm>
           <a:prstGeom prst="rect">
             <a:avLst/>
@@ -3344,8 +4327,10 @@
               </a:defRPr>
             </a:pPr>
             <a:r>
+              <a:rPr/>
               <a:t>SYSTEM ARCHITECTURES</a:t>
             </a:r>
+            <a:endParaRPr/>
           </a:p>
           <a:p>
             <a:pPr>
@@ -3360,21 +4345,23 @@
               </a:defRPr>
             </a:pPr>
             <a:r>
+              <a:rPr/>
               <a:t>Method Overview: Core Architectures &amp; Principles</a:t>
             </a:r>
-          </a:p>
-        </p:txBody>
-      </p:sp>
-      <p:sp>
-        <p:nvSpPr>
-          <p:cNvPr id="3" name="Rectangle 2"/>
+            <a:endParaRPr/>
+          </a:p>
+        </p:txBody>
+      </p:sp>
+      <p:sp>
+        <p:nvSpPr>
+          <p:cNvPr id="180782536" name="Rectangle 2"/>
           <p:cNvSpPr/>
           <p:nvPr/>
         </p:nvSpPr>
-        <p:spPr>
+        <p:spPr bwMode="auto">
           <a:xfrm>
             <a:off x="731520" y="1371600"/>
-            <a:ext cx="10728655" cy="18288"/>
+            <a:ext cx="10728654" cy="18288"/>
           </a:xfrm>
           <a:prstGeom prst="rect">
             <a:avLst/>
@@ -3406,20 +4393,23 @@
           <a:bodyPr rtlCol="0" anchor="ctr"/>
           <a:lstStyle/>
           <a:p>
-            <a:pPr algn="ctr"/>
-          </a:p>
-        </p:txBody>
-      </p:sp>
-      <p:sp>
-        <p:nvSpPr>
-          <p:cNvPr id="4" name="TextBox 3"/>
+            <a:pPr algn="ctr">
+              <a:defRPr/>
+            </a:pPr>
+            <a:endParaRPr/>
+          </a:p>
+        </p:txBody>
+      </p:sp>
+      <p:sp>
+        <p:nvSpPr>
+          <p:cNvPr id="164198176" name="TextBox 3"/>
           <p:cNvSpPr txBox="1"/>
           <p:nvPr/>
         </p:nvSpPr>
-        <p:spPr>
+        <p:spPr bwMode="auto">
           <a:xfrm>
             <a:off x="731520" y="6400800"/>
-            <a:ext cx="10728655" cy="320040"/>
+            <a:ext cx="10728654" cy="320040"/>
           </a:xfrm>
           <a:prstGeom prst="rect">
             <a:avLst/>
@@ -3441,24 +4431,28 @@
               </a:defRPr>
             </a:pPr>
             <a:r>
+              <a:rPr/>
               <a:t>Real-World Dehazing Evaluation | Frozen COCO YOLOv8n | Foggy Cityscapes &amp; RTTS Benchmark</a:t>
             </a:r>
-          </a:p>
-        </p:txBody>
-      </p:sp>
-      <p:sp>
-        <p:nvSpPr>
-          <p:cNvPr id="5" name="Rounded Rectangle 4"/>
+            <a:endParaRPr/>
+          </a:p>
+        </p:txBody>
+      </p:sp>
+      <p:sp>
+        <p:nvSpPr>
+          <p:cNvPr id="221053727" name="Rounded Rectangle 4"/>
           <p:cNvSpPr/>
           <p:nvPr/>
         </p:nvSpPr>
-        <p:spPr>
+        <p:spPr bwMode="auto">
           <a:xfrm>
             <a:off x="731520" y="1600200"/>
             <a:ext cx="2542032" cy="4480560"/>
           </a:xfrm>
           <a:prstGeom prst="roundRect">
-            <a:avLst/>
+            <a:avLst>
+              <a:gd name="adj" fmla="val 16667"/>
+            </a:avLst>
           </a:prstGeom>
           <a:solidFill>
             <a:srgbClr val="FFFFFF"/>
@@ -3487,17 +4481,20 @@
           <a:bodyPr rtlCol="0" anchor="ctr"/>
           <a:lstStyle/>
           <a:p>
-            <a:pPr algn="ctr"/>
-          </a:p>
-        </p:txBody>
-      </p:sp>
-      <p:sp>
-        <p:nvSpPr>
-          <p:cNvPr id="6" name="Rectangle 5"/>
+            <a:pPr algn="ctr">
+              <a:defRPr/>
+            </a:pPr>
+            <a:endParaRPr/>
+          </a:p>
+        </p:txBody>
+      </p:sp>
+      <p:sp>
+        <p:nvSpPr>
+          <p:cNvPr id="1693978835" name="Rectangle 5"/>
           <p:cNvSpPr/>
           <p:nvPr/>
         </p:nvSpPr>
-        <p:spPr>
+        <p:spPr bwMode="auto">
           <a:xfrm>
             <a:off x="731520" y="1600200"/>
             <a:ext cx="2542032" cy="731520"/>
@@ -3529,7 +4526,7 @@
           </a:fontRef>
         </p:style>
         <p:txBody>
-          <a:bodyPr rtlCol="0" anchor="ctr" wrap="square" lIns="137160" tIns="109728"/>
+          <a:bodyPr wrap="square" lIns="137160" tIns="109728" rtlCol="0" anchor="ctr"/>
           <a:lstStyle/>
           <a:p>
             <a:pPr algn="ctr">
@@ -3541,8 +4538,10 @@
               </a:defRPr>
             </a:pPr>
             <a:r>
+              <a:rPr/>
               <a:t>1. Raw Hazy Baseline</a:t>
             </a:r>
+            <a:endParaRPr/>
           </a:p>
           <a:p>
             <a:pPr>
@@ -3554,18 +4553,20 @@
               </a:defRPr>
             </a:pPr>
             <a:r>
+              <a:rPr/>
               <a:t>Untreated Capture</a:t>
             </a:r>
-          </a:p>
-        </p:txBody>
-      </p:sp>
-      <p:sp>
-        <p:nvSpPr>
-          <p:cNvPr id="7" name="TextBox 6"/>
+            <a:endParaRPr/>
+          </a:p>
+        </p:txBody>
+      </p:sp>
+      <p:sp>
+        <p:nvSpPr>
+          <p:cNvPr id="994566557" name="TextBox 6"/>
           <p:cNvSpPr txBox="1"/>
           <p:nvPr/>
         </p:nvSpPr>
-        <p:spPr>
+        <p:spPr bwMode="auto">
           <a:xfrm>
             <a:off x="841248" y="2423160"/>
             <a:ext cx="2322576" cy="3566160"/>
@@ -3590,8 +4591,10 @@
               </a:defRPr>
             </a:pPr>
             <a:r>
+              <a:rPr/>
               <a:t>Pipeline:</a:t>
             </a:r>
+            <a:endParaRPr/>
           </a:p>
           <a:p>
             <a:pPr>
@@ -3606,8 +4609,10 @@
               </a:defRPr>
             </a:pPr>
             <a:r>
+              <a:rPr/>
               <a:t>Direct camera input evaluated without enhancement preprocessing.</a:t>
             </a:r>
+            <a:endParaRPr/>
           </a:p>
           <a:p>
             <a:pPr>
@@ -3622,8 +4627,10 @@
               </a:defRPr>
             </a:pPr>
             <a:r>
+              <a:rPr/>
               <a:t>Principle:</a:t>
             </a:r>
+            <a:endParaRPr/>
           </a:p>
           <a:p>
             <a:pPr>
@@ -3638,8 +4645,10 @@
               </a:defRPr>
             </a:pPr>
             <a:r>
+              <a:rPr/>
               <a:t>Preserves unmodified sensor pixel values directly for detection.</a:t>
             </a:r>
+            <a:endParaRPr/>
           </a:p>
           <a:p>
             <a:pPr>
@@ -3654,8 +4663,10 @@
               </a:defRPr>
             </a:pPr>
             <a:r>
+              <a:rPr/>
               <a:t>Limitation:</a:t>
             </a:r>
+            <a:endParaRPr/>
           </a:p>
           <a:p>
             <a:pPr>
@@ -3670,24 +4681,28 @@
               </a:defRPr>
             </a:pPr>
             <a:r>
+              <a:rPr/>
               <a:t>Severe contrast loss, faded color saturation, and dense atmospheric veil obscuring distant objects.</a:t>
             </a:r>
-          </a:p>
-        </p:txBody>
-      </p:sp>
-      <p:sp>
-        <p:nvSpPr>
-          <p:cNvPr id="8" name="Rounded Rectangle 7"/>
+            <a:endParaRPr/>
+          </a:p>
+        </p:txBody>
+      </p:sp>
+      <p:sp>
+        <p:nvSpPr>
+          <p:cNvPr id="785975198" name="Rounded Rectangle 7"/>
           <p:cNvSpPr/>
           <p:nvPr/>
         </p:nvSpPr>
-        <p:spPr>
+        <p:spPr bwMode="auto">
           <a:xfrm>
             <a:off x="3456432" y="1600200"/>
             <a:ext cx="2542032" cy="4480560"/>
           </a:xfrm>
           <a:prstGeom prst="roundRect">
-            <a:avLst/>
+            <a:avLst>
+              <a:gd name="adj" fmla="val 16667"/>
+            </a:avLst>
           </a:prstGeom>
           <a:solidFill>
             <a:srgbClr val="FFFFFF"/>
@@ -3716,17 +4731,20 @@
           <a:bodyPr rtlCol="0" anchor="ctr"/>
           <a:lstStyle/>
           <a:p>
-            <a:pPr algn="ctr"/>
-          </a:p>
-        </p:txBody>
-      </p:sp>
-      <p:sp>
-        <p:nvSpPr>
-          <p:cNvPr id="9" name="Rectangle 8"/>
+            <a:pPr algn="ctr">
+              <a:defRPr/>
+            </a:pPr>
+            <a:endParaRPr/>
+          </a:p>
+        </p:txBody>
+      </p:sp>
+      <p:sp>
+        <p:nvSpPr>
+          <p:cNvPr id="2040376259" name="Rectangle 8"/>
           <p:cNvSpPr/>
           <p:nvPr/>
         </p:nvSpPr>
-        <p:spPr>
+        <p:spPr bwMode="auto">
           <a:xfrm>
             <a:off x="3456432" y="1600200"/>
             <a:ext cx="2542032" cy="731520"/>
@@ -3758,7 +4776,7 @@
           </a:fontRef>
         </p:style>
         <p:txBody>
-          <a:bodyPr rtlCol="0" anchor="ctr" wrap="square" lIns="137160" tIns="109728"/>
+          <a:bodyPr wrap="square" lIns="137160" tIns="109728" rtlCol="0" anchor="ctr"/>
           <a:lstStyle/>
           <a:p>
             <a:pPr algn="ctr">
@@ -3770,8 +4788,10 @@
               </a:defRPr>
             </a:pPr>
             <a:r>
+              <a:rPr/>
               <a:t>2. Reference Paper</a:t>
             </a:r>
+            <a:endParaRPr/>
           </a:p>
           <a:p>
             <a:pPr>
@@ -3783,18 +4803,20 @@
               </a:defRPr>
             </a:pPr>
             <a:r>
+              <a:rPr/>
               <a:t>Density-Routed CORUN</a:t>
             </a:r>
-          </a:p>
-        </p:txBody>
-      </p:sp>
-      <p:sp>
-        <p:nvSpPr>
-          <p:cNvPr id="10" name="TextBox 9"/>
+            <a:endParaRPr/>
+          </a:p>
+        </p:txBody>
+      </p:sp>
+      <p:sp>
+        <p:nvSpPr>
+          <p:cNvPr id="1370913415" name="TextBox 9"/>
           <p:cNvSpPr txBox="1"/>
           <p:nvPr/>
         </p:nvSpPr>
-        <p:spPr>
+        <p:spPr bwMode="auto">
           <a:xfrm>
             <a:off x="3566160" y="2423160"/>
             <a:ext cx="2322576" cy="3566160"/>
@@ -3819,8 +4841,10 @@
               </a:defRPr>
             </a:pPr>
             <a:r>
+              <a:rPr/>
               <a:t>Pipeline:</a:t>
             </a:r>
+            <a:endParaRPr/>
           </a:p>
           <a:p>
             <a:pPr>
@@ -3835,8 +4859,10 @@
               </a:defRPr>
             </a:pPr>
             <a:r>
+              <a:rPr/>
               <a:t>Classifier categorizes frame into Light, Medium, or Heavy fog, routing to 1 of 3 U-Nets.</a:t>
             </a:r>
+            <a:endParaRPr/>
           </a:p>
           <a:p>
             <a:pPr>
@@ -3851,8 +4877,10 @@
               </a:defRPr>
             </a:pPr>
             <a:r>
+              <a:rPr/>
               <a:t>Principle:</a:t>
             </a:r>
+            <a:endParaRPr/>
           </a:p>
           <a:p>
             <a:pPr>
@@ -3867,8 +4895,10 @@
               </a:defRPr>
             </a:pPr>
             <a:r>
+              <a:rPr/>
               <a:t>Multi-branch specialization targeting discrete synthetic fog levels.</a:t>
             </a:r>
+            <a:endParaRPr/>
           </a:p>
           <a:p>
             <a:pPr>
@@ -3883,8 +4913,10 @@
               </a:defRPr>
             </a:pPr>
             <a:r>
+              <a:rPr/>
               <a:t>Limitation:</a:t>
             </a:r>
+            <a:endParaRPr/>
           </a:p>
           <a:p>
             <a:pPr>
@@ -3899,24 +4931,28 @@
               </a:defRPr>
             </a:pPr>
             <a:r>
+              <a:rPr/>
               <a:t>Uniform fog assumption fails on 3D perspective scenes; partitions training data into 3 smaller subsets.</a:t>
             </a:r>
-          </a:p>
-        </p:txBody>
-      </p:sp>
-      <p:sp>
-        <p:nvSpPr>
-          <p:cNvPr id="11" name="Rounded Rectangle 10"/>
+            <a:endParaRPr/>
+          </a:p>
+        </p:txBody>
+      </p:sp>
+      <p:sp>
+        <p:nvSpPr>
+          <p:cNvPr id="1519498539" name="Rounded Rectangle 10"/>
           <p:cNvSpPr/>
           <p:nvPr/>
         </p:nvSpPr>
-        <p:spPr>
+        <p:spPr bwMode="auto">
           <a:xfrm>
             <a:off x="6181344" y="1600200"/>
             <a:ext cx="2542032" cy="4480560"/>
           </a:xfrm>
           <a:prstGeom prst="roundRect">
-            <a:avLst/>
+            <a:avLst>
+              <a:gd name="adj" fmla="val 16667"/>
+            </a:avLst>
           </a:prstGeom>
           <a:solidFill>
             <a:srgbClr val="FFFFFF"/>
@@ -3945,17 +4981,20 @@
           <a:bodyPr rtlCol="0" anchor="ctr"/>
           <a:lstStyle/>
           <a:p>
-            <a:pPr algn="ctr"/>
-          </a:p>
-        </p:txBody>
-      </p:sp>
-      <p:sp>
-        <p:nvSpPr>
-          <p:cNvPr id="12" name="Rectangle 11"/>
+            <a:pPr algn="ctr">
+              <a:defRPr/>
+            </a:pPr>
+            <a:endParaRPr/>
+          </a:p>
+        </p:txBody>
+      </p:sp>
+      <p:sp>
+        <p:nvSpPr>
+          <p:cNvPr id="827324034" name="Rectangle 11"/>
           <p:cNvSpPr/>
           <p:nvPr/>
         </p:nvSpPr>
-        <p:spPr>
+        <p:spPr bwMode="auto">
           <a:xfrm>
             <a:off x="6181344" y="1600200"/>
             <a:ext cx="2542032" cy="731520"/>
@@ -3987,7 +5026,7 @@
           </a:fontRef>
         </p:style>
         <p:txBody>
-          <a:bodyPr rtlCol="0" anchor="ctr" wrap="square" lIns="137160" tIns="109728"/>
+          <a:bodyPr wrap="square" lIns="137160" tIns="109728" rtlCol="0" anchor="ctr"/>
           <a:lstStyle/>
           <a:p>
             <a:pPr algn="ctr">
@@ -3999,8 +5038,10 @@
               </a:defRPr>
             </a:pPr>
             <a:r>
+              <a:rPr/>
               <a:t>3. Classical DCP</a:t>
             </a:r>
+            <a:endParaRPr/>
           </a:p>
           <a:p>
             <a:pPr>
@@ -4012,18 +5053,20 @@
               </a:defRPr>
             </a:pPr>
             <a:r>
+              <a:rPr/>
               <a:t>He et al. (2009) Prior</a:t>
             </a:r>
-          </a:p>
-        </p:txBody>
-      </p:sp>
-      <p:sp>
-        <p:nvSpPr>
-          <p:cNvPr id="13" name="TextBox 12"/>
+            <a:endParaRPr/>
+          </a:p>
+        </p:txBody>
+      </p:sp>
+      <p:sp>
+        <p:nvSpPr>
+          <p:cNvPr id="321384638" name="TextBox 12"/>
           <p:cNvSpPr txBox="1"/>
           <p:nvPr/>
         </p:nvSpPr>
-        <p:spPr>
+        <p:spPr bwMode="auto">
           <a:xfrm>
             <a:off x="6291072" y="2423160"/>
             <a:ext cx="2322576" cy="3566160"/>
@@ -4048,8 +5091,10 @@
               </a:defRPr>
             </a:pPr>
             <a:r>
+              <a:rPr/>
               <a:t>Pipeline:</a:t>
             </a:r>
+            <a:endParaRPr/>
           </a:p>
           <a:p>
             <a:pPr>
@@ -4064,8 +5109,10 @@
               </a:defRPr>
             </a:pPr>
             <a:r>
+              <a:rPr/>
               <a:t>Dark Channel Prior with guided filtering to invert the atmospheric scattering model.</a:t>
             </a:r>
+            <a:endParaRPr/>
           </a:p>
           <a:p>
             <a:pPr>
@@ -4080,8 +5127,10 @@
               </a:defRPr>
             </a:pPr>
             <a:r>
+              <a:rPr/>
               <a:t>Principle:</a:t>
             </a:r>
+            <a:endParaRPr/>
           </a:p>
           <a:p>
             <a:pPr>
@@ -4096,8 +5145,10 @@
               </a:defRPr>
             </a:pPr>
             <a:r>
+              <a:rPr/>
               <a:t>Parameter-free physical heuristic; long-standing historical real-fog benchmark.</a:t>
             </a:r>
+            <a:endParaRPr/>
           </a:p>
           <a:p>
             <a:pPr>
@@ -4112,8 +5163,10 @@
               </a:defRPr>
             </a:pPr>
             <a:r>
+              <a:rPr/>
               <a:t>Limitation:</a:t>
             </a:r>
+            <a:endParaRPr/>
           </a:p>
           <a:p>
             <a:pPr>
@@ -4128,24 +5181,28 @@
               </a:defRPr>
             </a:pPr>
             <a:r>
+              <a:rPr/>
               <a:t>Prior assumption fails in sky, facades, and headlights, creating severe halos and blocking artifacts.</a:t>
             </a:r>
-          </a:p>
-        </p:txBody>
-      </p:sp>
-      <p:sp>
-        <p:nvSpPr>
-          <p:cNvPr id="14" name="Rounded Rectangle 13"/>
+            <a:endParaRPr/>
+          </a:p>
+        </p:txBody>
+      </p:sp>
+      <p:sp>
+        <p:nvSpPr>
+          <p:cNvPr id="2138088803" name="Rounded Rectangle 13"/>
           <p:cNvSpPr/>
           <p:nvPr/>
         </p:nvSpPr>
-        <p:spPr>
+        <p:spPr bwMode="auto">
           <a:xfrm>
             <a:off x="8906256" y="1600200"/>
             <a:ext cx="2542032" cy="4480560"/>
           </a:xfrm>
           <a:prstGeom prst="roundRect">
-            <a:avLst/>
+            <a:avLst>
+              <a:gd name="adj" fmla="val 16667"/>
+            </a:avLst>
           </a:prstGeom>
           <a:solidFill>
             <a:srgbClr val="EBF3FA"/>
@@ -4174,17 +5231,20 @@
           <a:bodyPr rtlCol="0" anchor="ctr"/>
           <a:lstStyle/>
           <a:p>
-            <a:pPr algn="ctr"/>
-          </a:p>
-        </p:txBody>
-      </p:sp>
-      <p:sp>
-        <p:nvSpPr>
-          <p:cNvPr id="15" name="Rectangle 14"/>
+            <a:pPr algn="ctr">
+              <a:defRPr/>
+            </a:pPr>
+            <a:endParaRPr/>
+          </a:p>
+        </p:txBody>
+      </p:sp>
+      <p:sp>
+        <p:nvSpPr>
+          <p:cNvPr id="1986494948" name="Rectangle 14"/>
           <p:cNvSpPr/>
           <p:nvPr/>
         </p:nvSpPr>
-        <p:spPr>
+        <p:spPr bwMode="auto">
           <a:xfrm>
             <a:off x="8906256" y="1600200"/>
             <a:ext cx="2542032" cy="731520"/>
@@ -4216,7 +5276,7 @@
           </a:fontRef>
         </p:style>
         <p:txBody>
-          <a:bodyPr rtlCol="0" anchor="ctr" wrap="square" lIns="137160" tIns="109728"/>
+          <a:bodyPr wrap="square" lIns="137160" tIns="109728" rtlCol="0" anchor="ctr"/>
           <a:lstStyle/>
           <a:p>
             <a:pPr algn="ctr">
@@ -4228,8 +5288,10 @@
               </a:defRPr>
             </a:pPr>
             <a:r>
+              <a:rPr/>
               <a:t>4. Our Method</a:t>
             </a:r>
+            <a:endParaRPr/>
           </a:p>
           <a:p>
             <a:pPr>
@@ -4241,18 +5303,20 @@
               </a:defRPr>
             </a:pPr>
             <a:r>
+              <a:rPr/>
               <a:t>Unified Spatial Network</a:t>
             </a:r>
-          </a:p>
-        </p:txBody>
-      </p:sp>
-      <p:sp>
-        <p:nvSpPr>
-          <p:cNvPr id="16" name="TextBox 15"/>
+            <a:endParaRPr/>
+          </a:p>
+        </p:txBody>
+      </p:sp>
+      <p:sp>
+        <p:nvSpPr>
+          <p:cNvPr id="1873484470" name="TextBox 15"/>
           <p:cNvSpPr txBox="1"/>
           <p:nvPr/>
         </p:nvSpPr>
-        <p:spPr>
+        <p:spPr bwMode="auto">
           <a:xfrm>
             <a:off x="9015984" y="2423160"/>
             <a:ext cx="2322576" cy="3566160"/>
@@ -4277,8 +5341,10 @@
               </a:defRPr>
             </a:pPr>
             <a:r>
+              <a:rPr/>
               <a:t>Pipeline:</a:t>
             </a:r>
+            <a:endParaRPr/>
           </a:p>
           <a:p>
             <a:pPr>
@@ -4293,8 +5359,10 @@
               </a:defRPr>
             </a:pPr>
             <a:r>
+              <a:rPr/>
               <a:t>Single compact neural network with continuous per-pixel spatial gating across depth.</a:t>
             </a:r>
+            <a:endParaRPr/>
           </a:p>
           <a:p>
             <a:pPr>
@@ -4309,8 +5377,10 @@
               </a:defRPr>
             </a:pPr>
             <a:r>
+              <a:rPr/>
               <a:t>Principle:</a:t>
             </a:r>
+            <a:endParaRPr/>
           </a:p>
           <a:p>
             <a:pPr>
@@ -4325,8 +5395,10 @@
               </a:defRPr>
             </a:pPr>
             <a:r>
+              <a:rPr/>
               <a:t>Physical airlight randomization (A in [0.4, 0.95]) and task-aligned feature supervision.</a:t>
             </a:r>
+            <a:endParaRPr/>
           </a:p>
           <a:p>
             <a:pPr>
@@ -4341,8 +5413,10 @@
               </a:defRPr>
             </a:pPr>
             <a:r>
+              <a:rPr/>
               <a:t>Advantage:</a:t>
             </a:r>
+            <a:endParaRPr/>
           </a:p>
           <a:p>
             <a:pPr>
@@ -4357,8 +5431,10 @@
               </a:defRPr>
             </a:pPr>
             <a:r>
+              <a:rPr/>
               <a:t>Adapts across scene depth gradients without haloing, delivering genuine real-world perceptual recovery.</a:t>
             </a:r>
+            <a:endParaRPr/>
           </a:p>
         </p:txBody>
       </p:sp>
@@ -4367,29 +5443,44 @@
   <p:clrMapOvr>
     <a:masterClrMapping/>
   </p:clrMapOvr>
+  <mc:AlternateContent xmlns:mc="http://schemas.openxmlformats.org/markup-compatibility/2006">
+    <mc:Choice xmlns:p159="http://schemas.microsoft.com/office/powerpoint/2015/09/main" xmlns:p14="http://schemas.microsoft.com/office/powerpoint/2010/main" Requires="p159">
+      <p:transition p14:dur="500" advClick="1"/>
+    </mc:Choice>
+    <mc:Fallback>
+      <p:transition advClick="1"/>
+    </mc:Fallback>
+  </mc:AlternateContent>
 </p:sld>
 </file>
 
 <file path=ppt/slides/slide3.xml><?xml version="1.0" encoding="utf-8"?>
-<p:sld xmlns:a="http://schemas.openxmlformats.org/drawingml/2006/main" xmlns:p="http://schemas.openxmlformats.org/presentationml/2006/main" xmlns:r="http://schemas.openxmlformats.org/officeDocument/2006/relationships">
-  <p:cSld>
+<p:sld xmlns:a="http://schemas.openxmlformats.org/drawingml/2006/main" xmlns:r="http://schemas.openxmlformats.org/officeDocument/2006/relationships" xmlns:p="http://schemas.openxmlformats.org/presentationml/2006/main" xmlns:m="http://schemas.openxmlformats.org/officeDocument/2006/math" xmlns:w="http://schemas.openxmlformats.org/wordprocessingml/2006/main" xmlns:mc="http://schemas.openxmlformats.org/markup-compatibility/2006" showMasterPhAnim="0" showMasterSp="1" show="1">
+  <p:cSld name="">
     <p:spTree>
       <p:nvGrpSpPr>
         <p:cNvPr id="1" name=""/>
         <p:cNvGrpSpPr/>
         <p:nvPr/>
       </p:nvGrpSpPr>
-      <p:grpSpPr/>
-      <p:sp>
-        <p:nvSpPr>
-          <p:cNvPr id="2" name="TextBox 1"/>
+      <p:grpSpPr bwMode="auto">
+        <a:xfrm>
+          <a:off x="0" y="0"/>
+          <a:ext cx="0" cy="0"/>
+          <a:chOff x="0" y="0"/>
+          <a:chExt cx="0" cy="0"/>
+        </a:xfrm>
+      </p:grpSpPr>
+      <p:sp>
+        <p:nvSpPr>
+          <p:cNvPr id="1389101105" name="TextBox 1"/>
           <p:cNvSpPr txBox="1"/>
           <p:nvPr/>
         </p:nvSpPr>
-        <p:spPr>
+        <p:spPr bwMode="auto">
           <a:xfrm>
             <a:off x="731520" y="411480"/>
-            <a:ext cx="10728655" cy="1005840"/>
+            <a:ext cx="10728654" cy="1005840"/>
           </a:xfrm>
           <a:prstGeom prst="rect">
             <a:avLst/>
@@ -4411,8 +5502,10 @@
               </a:defRPr>
             </a:pPr>
             <a:r>
+              <a:rPr/>
               <a:t>VISUAL RESULTS</a:t>
             </a:r>
+            <a:endParaRPr/>
           </a:p>
           <a:p>
             <a:pPr>
@@ -4427,21 +5520,23 @@
               </a:defRPr>
             </a:pPr>
             <a:r>
+              <a:rPr/>
               <a:t>Qualitative Comparison: Distinguishable Visual Characteristics</a:t>
             </a:r>
-          </a:p>
-        </p:txBody>
-      </p:sp>
-      <p:sp>
-        <p:nvSpPr>
-          <p:cNvPr id="3" name="Rectangle 2"/>
+            <a:endParaRPr/>
+          </a:p>
+        </p:txBody>
+      </p:sp>
+      <p:sp>
+        <p:nvSpPr>
+          <p:cNvPr id="2146109834" name="Rectangle 2"/>
           <p:cNvSpPr/>
           <p:nvPr/>
         </p:nvSpPr>
-        <p:spPr>
+        <p:spPr bwMode="auto">
           <a:xfrm>
             <a:off x="731520" y="1371600"/>
-            <a:ext cx="10728655" cy="18288"/>
+            <a:ext cx="10728654" cy="18288"/>
           </a:xfrm>
           <a:prstGeom prst="rect">
             <a:avLst/>
@@ -4473,20 +5568,23 @@
           <a:bodyPr rtlCol="0" anchor="ctr"/>
           <a:lstStyle/>
           <a:p>
-            <a:pPr algn="ctr"/>
-          </a:p>
-        </p:txBody>
-      </p:sp>
-      <p:sp>
-        <p:nvSpPr>
-          <p:cNvPr id="4" name="TextBox 3"/>
+            <a:pPr algn="ctr">
+              <a:defRPr/>
+            </a:pPr>
+            <a:endParaRPr/>
+          </a:p>
+        </p:txBody>
+      </p:sp>
+      <p:sp>
+        <p:nvSpPr>
+          <p:cNvPr id="368981322" name="TextBox 3"/>
           <p:cNvSpPr txBox="1"/>
           <p:nvPr/>
         </p:nvSpPr>
-        <p:spPr>
+        <p:spPr bwMode="auto">
           <a:xfrm>
             <a:off x="731520" y="6400800"/>
-            <a:ext cx="10728655" cy="320040"/>
+            <a:ext cx="10728654" cy="320040"/>
           </a:xfrm>
           <a:prstGeom prst="rect">
             <a:avLst/>
@@ -4508,21 +5606,23 @@
               </a:defRPr>
             </a:pPr>
             <a:r>
+              <a:rPr/>
               <a:t>Real-World Dehazing Evaluation | Frozen COCO YOLOv8n | Foggy Cityscapes &amp; RTTS Benchmark</a:t>
             </a:r>
-          </a:p>
-        </p:txBody>
-      </p:sp>
-      <p:sp>
-        <p:nvSpPr>
-          <p:cNvPr id="5" name="TextBox 4"/>
+            <a:endParaRPr/>
+          </a:p>
+        </p:txBody>
+      </p:sp>
+      <p:sp>
+        <p:nvSpPr>
+          <p:cNvPr id="1330036346" name="TextBox 4"/>
           <p:cNvSpPr txBox="1"/>
           <p:nvPr/>
         </p:nvSpPr>
-        <p:spPr>
+        <p:spPr bwMode="auto">
           <a:xfrm>
-            <a:off x="731520" y="1508760"/>
-            <a:ext cx="10728655" cy="274320"/>
+            <a:off x="731520" y="1508759"/>
+            <a:ext cx="10728654" cy="274320"/>
           </a:xfrm>
           <a:prstGeom prst="rect">
             <a:avLst/>
@@ -4544,29 +5644,29 @@
               </a:defRPr>
             </a:pPr>
             <a:r>
+              <a:rPr/>
               <a:t>DEHAZED IMAGE QUALITY (LEFT TO RIGHT: RAW HAZY | REFERENCE PAPER | CLASSICAL DCP | OUR METHOD)</a:t>
             </a:r>
+            <a:endParaRPr/>
           </a:p>
         </p:txBody>
       </p:sp>
       <p:pic>
         <p:nvPicPr>
-          <p:cNvPr id="6" name="Picture 5" descr="method_comparison_visual.png"/>
+          <p:cNvPr id="1732929064" name="Picture 5" descr="method_comparison_visual.png"/>
           <p:cNvPicPr>
             <a:picLocks noChangeAspect="1"/>
           </p:cNvPicPr>
           <p:nvPr/>
         </p:nvPicPr>
-        <p:blipFill>
-          <a:blip r:embed="rId2"/>
-          <a:stretch>
-            <a:fillRect/>
-          </a:stretch>
+        <p:blipFill rotWithShape="1">
+          <a:blip r:embed="rId3"/>
+          <a:stretch/>
         </p:blipFill>
-        <p:spPr>
+        <p:spPr bwMode="auto">
           <a:xfrm>
             <a:off x="731520" y="1783080"/>
-            <a:ext cx="10728655" cy="1783080"/>
+            <a:ext cx="10728654" cy="1783080"/>
           </a:xfrm>
           <a:prstGeom prst="rect">
             <a:avLst/>
@@ -4575,14 +5675,14 @@
       </p:pic>
       <p:sp>
         <p:nvSpPr>
-          <p:cNvPr id="7" name="TextBox 6"/>
+          <p:cNvPr id="427864615" name="TextBox 6"/>
           <p:cNvSpPr txBox="1"/>
           <p:nvPr/>
         </p:nvSpPr>
-        <p:spPr>
+        <p:spPr bwMode="auto">
           <a:xfrm>
             <a:off x="731520" y="3657600"/>
-            <a:ext cx="10728655" cy="274320"/>
+            <a:ext cx="10728654" cy="274320"/>
           </a:xfrm>
           <a:prstGeom prst="rect">
             <a:avLst/>
@@ -4604,29 +5704,29 @@
               </a:defRPr>
             </a:pPr>
             <a:r>
+              <a:rPr/>
               <a:t>DOWNSTREAM DETECTION OUTPUTS (YOLOV8N PREDICTIONS WITH BOUNDING BOXES)</a:t>
             </a:r>
+            <a:endParaRPr/>
           </a:p>
         </p:txBody>
       </p:sp>
       <p:pic>
         <p:nvPicPr>
-          <p:cNvPr id="8" name="Picture 7" descr="method_comparison_detection.png"/>
+          <p:cNvPr id="678385635" name="Picture 7" descr="method_comparison_detection.png"/>
           <p:cNvPicPr>
             <a:picLocks noChangeAspect="1"/>
           </p:cNvPicPr>
           <p:nvPr/>
         </p:nvPicPr>
-        <p:blipFill>
-          <a:blip r:embed="rId3"/>
-          <a:stretch>
-            <a:fillRect/>
-          </a:stretch>
+        <p:blipFill rotWithShape="1">
+          <a:blip r:embed="rId4"/>
+          <a:stretch/>
         </p:blipFill>
-        <p:spPr>
+        <p:spPr bwMode="auto">
           <a:xfrm>
             <a:off x="731520" y="3931920"/>
-            <a:ext cx="10728655" cy="1783080"/>
+            <a:ext cx="10728654" cy="1783080"/>
           </a:xfrm>
           <a:prstGeom prst="rect">
             <a:avLst/>
@@ -4635,14 +5735,14 @@
       </p:pic>
       <p:sp>
         <p:nvSpPr>
-          <p:cNvPr id="9" name="TextBox 8"/>
+          <p:cNvPr id="1834649610" name="TextBox 8"/>
           <p:cNvSpPr txBox="1"/>
           <p:nvPr/>
         </p:nvSpPr>
-        <p:spPr>
+        <p:spPr bwMode="auto">
           <a:xfrm>
             <a:off x="731520" y="5806440"/>
-            <a:ext cx="10728655" cy="594360"/>
+            <a:ext cx="10728654" cy="594360"/>
           </a:xfrm>
           <a:prstGeom prst="rect">
             <a:avLst/>
@@ -4664,8 +5764,10 @@
               </a:defRPr>
             </a:pPr>
             <a:r>
+              <a:rPr/>
               <a:t>Visual Distinctions: (a) Raw Hazy is pale and contrast-deprived; (b) Reference Paper creates blotchy sky halos and over-darkens foreground structures; (c) Classical DCP exhibits yellow/green sky posterization; (d) Our Method achieves balanced contrast and clean contours, yielding 7 valid detections vs 4-5 for other methods.</a:t>
             </a:r>
+            <a:endParaRPr/>
           </a:p>
         </p:txBody>
       </p:sp>
@@ -4674,29 +5776,44 @@
   <p:clrMapOvr>
     <a:masterClrMapping/>
   </p:clrMapOvr>
+  <mc:AlternateContent xmlns:mc="http://schemas.openxmlformats.org/markup-compatibility/2006">
+    <mc:Choice xmlns:p159="http://schemas.microsoft.com/office/powerpoint/2015/09/main" xmlns:p14="http://schemas.microsoft.com/office/powerpoint/2010/main" Requires="p159">
+      <p:transition p14:dur="500" advClick="1"/>
+    </mc:Choice>
+    <mc:Fallback>
+      <p:transition advClick="1"/>
+    </mc:Fallback>
+  </mc:AlternateContent>
 </p:sld>
 </file>
 
 <file path=ppt/slides/slide4.xml><?xml version="1.0" encoding="utf-8"?>
-<p:sld xmlns:a="http://schemas.openxmlformats.org/drawingml/2006/main" xmlns:p="http://schemas.openxmlformats.org/presentationml/2006/main" xmlns:r="http://schemas.openxmlformats.org/officeDocument/2006/relationships">
-  <p:cSld>
+<p:sld xmlns:a="http://schemas.openxmlformats.org/drawingml/2006/main" xmlns:r="http://schemas.openxmlformats.org/officeDocument/2006/relationships" xmlns:p="http://schemas.openxmlformats.org/presentationml/2006/main" xmlns:m="http://schemas.openxmlformats.org/officeDocument/2006/math" xmlns:w="http://schemas.openxmlformats.org/wordprocessingml/2006/main" xmlns:mc="http://schemas.openxmlformats.org/markup-compatibility/2006" showMasterPhAnim="0" showMasterSp="1" show="1">
+  <p:cSld name="">
     <p:spTree>
       <p:nvGrpSpPr>
         <p:cNvPr id="1" name=""/>
         <p:cNvGrpSpPr/>
         <p:nvPr/>
       </p:nvGrpSpPr>
-      <p:grpSpPr/>
-      <p:sp>
-        <p:nvSpPr>
-          <p:cNvPr id="2" name="TextBox 1"/>
+      <p:grpSpPr bwMode="auto">
+        <a:xfrm>
+          <a:off x="0" y="0"/>
+          <a:ext cx="0" cy="0"/>
+          <a:chOff x="0" y="0"/>
+          <a:chExt cx="0" cy="0"/>
+        </a:xfrm>
+      </p:grpSpPr>
+      <p:sp>
+        <p:nvSpPr>
+          <p:cNvPr id="1700815442" name="TextBox 1"/>
           <p:cNvSpPr txBox="1"/>
           <p:nvPr/>
         </p:nvSpPr>
-        <p:spPr>
+        <p:spPr bwMode="auto">
           <a:xfrm>
             <a:off x="731520" y="411480"/>
-            <a:ext cx="10728655" cy="1005840"/>
+            <a:ext cx="10728654" cy="1005840"/>
           </a:xfrm>
           <a:prstGeom prst="rect">
             <a:avLst/>
@@ -4718,8 +5835,10 @@
               </a:defRPr>
             </a:pPr>
             <a:r>
+              <a:rPr/>
               <a:t>EMPIRICAL EVALUATION</a:t>
             </a:r>
+            <a:endParaRPr/>
           </a:p>
           <a:p>
             <a:pPr>
@@ -4734,21 +5853,23 @@
               </a:defRPr>
             </a:pPr>
             <a:r>
+              <a:rPr/>
               <a:t>Quantitative Benchmark: PSNR Fidelity &amp; Detection Performance</a:t>
             </a:r>
-          </a:p>
-        </p:txBody>
-      </p:sp>
-      <p:sp>
-        <p:nvSpPr>
-          <p:cNvPr id="3" name="Rectangle 2"/>
+            <a:endParaRPr/>
+          </a:p>
+        </p:txBody>
+      </p:sp>
+      <p:sp>
+        <p:nvSpPr>
+          <p:cNvPr id="237320383" name="Rectangle 2"/>
           <p:cNvSpPr/>
           <p:nvPr/>
         </p:nvSpPr>
-        <p:spPr>
+        <p:spPr bwMode="auto">
           <a:xfrm>
             <a:off x="731520" y="1371600"/>
-            <a:ext cx="10728655" cy="18288"/>
+            <a:ext cx="10728654" cy="18288"/>
           </a:xfrm>
           <a:prstGeom prst="rect">
             <a:avLst/>
@@ -4780,62 +5901,29 @@
           <a:bodyPr rtlCol="0" anchor="ctr"/>
           <a:lstStyle/>
           <a:p>
-            <a:pPr algn="ctr"/>
-          </a:p>
-        </p:txBody>
-      </p:sp>
-      <p:sp>
-        <p:nvSpPr>
-          <p:cNvPr id="4" name="TextBox 3"/>
-          <p:cNvSpPr txBox="1"/>
-          <p:nvPr/>
-        </p:nvSpPr>
-        <p:spPr>
-          <a:xfrm>
-            <a:off x="731520" y="6400800"/>
-            <a:ext cx="10728655" cy="320040"/>
-          </a:xfrm>
-          <a:prstGeom prst="rect">
-            <a:avLst/>
-          </a:prstGeom>
-          <a:noFill/>
-        </p:spPr>
-        <p:txBody>
-          <a:bodyPr wrap="none" lIns="0" tIns="0" rIns="0" bIns="0">
-            <a:spAutoFit/>
-          </a:bodyPr>
-          <a:lstStyle/>
-          <a:p>
-            <a:pPr>
-              <a:defRPr sz="900">
-                <a:solidFill>
-                  <a:srgbClr val="A0A0A0"/>
-                </a:solidFill>
-                <a:latin typeface="Calibri"/>
-              </a:defRPr>
-            </a:pPr>
-            <a:r>
-              <a:t>Real-World Dehazing Evaluation | Frozen COCO YOLOv8n | Foggy Cityscapes &amp; RTTS Benchmark</a:t>
-            </a:r>
+            <a:pPr algn="ctr">
+              <a:defRPr/>
+            </a:pPr>
+            <a:endParaRPr/>
           </a:p>
         </p:txBody>
       </p:sp>
       <p:graphicFrame>
         <p:nvGraphicFramePr>
-          <p:cNvPr id="5" name="Table 4"/>
+          <p:cNvPr id="1948090715" name="Table 4"/>
           <p:cNvGraphicFramePr>
-            <a:graphicFrameLocks noGrp="1"/>
+            <a:graphicFrameLocks xmlns:a="http://schemas.openxmlformats.org/drawingml/2006/main" noGrp="1"/>
           </p:cNvGraphicFramePr>
           <p:nvPr/>
         </p:nvGraphicFramePr>
-        <p:xfrm>
+        <p:xfrm rot="0">
           <a:off x="731520" y="1572768"/>
-          <a:ext cx="10728655" cy="3063240"/>
+          <a:ext cx="10728654" cy="3063240"/>
         </p:xfrm>
         <a:graphic>
           <a:graphicData uri="http://schemas.openxmlformats.org/drawingml/2006/table">
             <a:tbl>
-              <a:tblPr firstRow="1" bandRow="1">
+              <a:tblPr firstRow="1" firstCol="0" lastRow="0" lastCol="0" bandRow="1" bandCol="0">
                 <a:tableStyleId>{5C22544A-7EE6-4342-B048-85BDC9FD1C3A}</a:tableStyleId>
               </a:tblPr>
               <a:tblGrid>
@@ -4851,7 +5939,6 @@
                 <a:tc>
                   <a:txBody>
                     <a:bodyPr/>
-                    <a:lstStyle/>
                     <a:p>
                       <a:pPr>
                         <a:defRPr sz="1050" b="1">
@@ -4862,8 +5949,10 @@
                         </a:defRPr>
                       </a:pPr>
                       <a:r>
+                        <a:rPr/>
                         <a:t>Evaluation Metric</a:t>
                       </a:r>
+                      <a:endParaRPr/>
                     </a:p>
                   </a:txBody>
                   <a:tcPr anchor="ctr">
@@ -4875,7 +5964,6 @@
                 <a:tc>
                   <a:txBody>
                     <a:bodyPr/>
-                    <a:lstStyle/>
                     <a:p>
                       <a:pPr algn="ctr">
                         <a:defRPr sz="1050" b="1">
@@ -4886,8 +5974,10 @@
                         </a:defRPr>
                       </a:pPr>
                       <a:r>
+                        <a:rPr/>
                         <a:t>Raw Hazy</a:t>
                       </a:r>
+                      <a:endParaRPr/>
                     </a:p>
                   </a:txBody>
                   <a:tcPr anchor="ctr">
@@ -4899,7 +5989,6 @@
                 <a:tc>
                   <a:txBody>
                     <a:bodyPr/>
-                    <a:lstStyle/>
                     <a:p>
                       <a:pPr algn="ctr">
                         <a:defRPr sz="1050" b="1">
@@ -4910,8 +5999,10 @@
                         </a:defRPr>
                       </a:pPr>
                       <a:r>
+                        <a:rPr/>
                         <a:t>Reference Paper</a:t>
                       </a:r>
+                      <a:endParaRPr/>
                     </a:p>
                   </a:txBody>
                   <a:tcPr anchor="ctr">
@@ -4923,7 +6014,6 @@
                 <a:tc>
                   <a:txBody>
                     <a:bodyPr/>
-                    <a:lstStyle/>
                     <a:p>
                       <a:pPr algn="ctr">
                         <a:defRPr sz="1050" b="1">
@@ -4934,8 +6024,10 @@
                         </a:defRPr>
                       </a:pPr>
                       <a:r>
+                        <a:rPr/>
                         <a:t>Classical DCP</a:t>
                       </a:r>
+                      <a:endParaRPr/>
                     </a:p>
                   </a:txBody>
                   <a:tcPr anchor="ctr">
@@ -4947,7 +6039,6 @@
                 <a:tc>
                   <a:txBody>
                     <a:bodyPr/>
-                    <a:lstStyle/>
                     <a:p>
                       <a:pPr algn="ctr">
                         <a:defRPr sz="1050" b="1">
@@ -4958,8 +6049,10 @@
                         </a:defRPr>
                       </a:pPr>
                       <a:r>
+                        <a:rPr/>
                         <a:t>Our Method</a:t>
                       </a:r>
+                      <a:endParaRPr/>
                     </a:p>
                   </a:txBody>
                   <a:tcPr anchor="ctr">
@@ -4971,7 +6064,6 @@
                 <a:tc>
                   <a:txBody>
                     <a:bodyPr/>
-                    <a:lstStyle/>
                     <a:p>
                       <a:pPr algn="ctr">
                         <a:defRPr sz="1050" b="1">
@@ -4982,8 +6074,10 @@
                         </a:defRPr>
                       </a:pPr>
                       <a:r>
+                        <a:rPr/>
                         <a:t>Gain vs Hazy</a:t>
                       </a:r>
+                      <a:endParaRPr/>
                     </a:p>
                   </a:txBody>
                   <a:tcPr anchor="ctr">
@@ -4995,7 +6089,6 @@
                 <a:tc>
                   <a:txBody>
                     <a:bodyPr/>
-                    <a:lstStyle/>
                     <a:p>
                       <a:pPr algn="ctr">
                         <a:defRPr sz="1050" b="1">
@@ -5006,8 +6099,10 @@
                         </a:defRPr>
                       </a:pPr>
                       <a:r>
+                        <a:rPr/>
                         <a:t>Gain vs Paper</a:t>
                       </a:r>
+                      <a:endParaRPr/>
                     </a:p>
                   </a:txBody>
                   <a:tcPr anchor="ctr">
@@ -5021,7 +6116,6 @@
                 <a:tc>
                   <a:txBody>
                     <a:bodyPr/>
-                    <a:lstStyle/>
                     <a:p>
                       <a:pPr>
                         <a:defRPr sz="1050">
@@ -5032,8 +6126,10 @@
                         </a:defRPr>
                       </a:pPr>
                       <a:r>
+                        <a:rPr/>
                         <a:t>PSNR (In-Domain Full Val, dB)</a:t>
                       </a:r>
+                      <a:endParaRPr/>
                     </a:p>
                   </a:txBody>
                   <a:tcPr anchor="ctr">
@@ -5045,7 +6141,6 @@
                 <a:tc>
                   <a:txBody>
                     <a:bodyPr/>
-                    <a:lstStyle/>
                     <a:p>
                       <a:pPr algn="ctr">
                         <a:defRPr sz="1050">
@@ -5056,8 +6151,10 @@
                         </a:defRPr>
                       </a:pPr>
                       <a:r>
+                        <a:rPr/>
                         <a:t>14.65 dB</a:t>
                       </a:r>
+                      <a:endParaRPr/>
                     </a:p>
                   </a:txBody>
                   <a:tcPr anchor="ctr">
@@ -5069,7 +6166,6 @@
                 <a:tc>
                   <a:txBody>
                     <a:bodyPr/>
-                    <a:lstStyle/>
                     <a:p>
                       <a:pPr algn="ctr">
                         <a:defRPr sz="1050">
@@ -5080,8 +6176,10 @@
                         </a:defRPr>
                       </a:pPr>
                       <a:r>
+                        <a:rPr/>
                         <a:t>26.42 dB</a:t>
                       </a:r>
+                      <a:endParaRPr/>
                     </a:p>
                   </a:txBody>
                   <a:tcPr anchor="ctr">
@@ -5093,7 +6191,6 @@
                 <a:tc>
                   <a:txBody>
                     <a:bodyPr/>
-                    <a:lstStyle/>
                     <a:p>
                       <a:pPr algn="ctr">
                         <a:defRPr sz="1050">
@@ -5104,8 +6201,10 @@
                         </a:defRPr>
                       </a:pPr>
                       <a:r>
+                        <a:rPr/>
                         <a:t>15.79 dB</a:t>
                       </a:r>
+                      <a:endParaRPr/>
                     </a:p>
                   </a:txBody>
                   <a:tcPr anchor="ctr">
@@ -5117,7 +6216,6 @@
                 <a:tc>
                   <a:txBody>
                     <a:bodyPr/>
-                    <a:lstStyle/>
                     <a:p>
                       <a:pPr algn="ctr">
                         <a:defRPr sz="1050" b="1">
@@ -5128,8 +6226,10 @@
                         </a:defRPr>
                       </a:pPr>
                       <a:r>
+                        <a:rPr/>
                         <a:t>26.71 dB</a:t>
                       </a:r>
+                      <a:endParaRPr/>
                     </a:p>
                   </a:txBody>
                   <a:tcPr anchor="ctr">
@@ -5141,7 +6241,6 @@
                 <a:tc>
                   <a:txBody>
                     <a:bodyPr/>
-                    <a:lstStyle/>
                     <a:p>
                       <a:pPr algn="ctr">
                         <a:defRPr sz="1050" b="1">
@@ -5152,8 +6251,10 @@
                         </a:defRPr>
                       </a:pPr>
                       <a:r>
+                        <a:rPr/>
                         <a:t>+12.06 dB</a:t>
                       </a:r>
+                      <a:endParaRPr/>
                     </a:p>
                   </a:txBody>
                   <a:tcPr anchor="ctr">
@@ -5165,7 +6266,6 @@
                 <a:tc>
                   <a:txBody>
                     <a:bodyPr/>
-                    <a:lstStyle/>
                     <a:p>
                       <a:pPr algn="ctr">
                         <a:defRPr sz="1050" b="1">
@@ -5176,8 +6276,10 @@
                         </a:defRPr>
                       </a:pPr>
                       <a:r>
+                        <a:rPr/>
                         <a:t>+0.29 dB</a:t>
                       </a:r>
+                      <a:endParaRPr/>
                     </a:p>
                   </a:txBody>
                   <a:tcPr anchor="ctr">
@@ -5191,7 +6293,6 @@
                 <a:tc>
                   <a:txBody>
                     <a:bodyPr/>
-                    <a:lstStyle/>
                     <a:p>
                       <a:pPr>
                         <a:defRPr sz="1050">
@@ -5202,8 +6303,10 @@
                         </a:defRPr>
                       </a:pPr>
                       <a:r>
+                        <a:rPr/>
                         <a:t>SSIM (Structural Similarity)</a:t>
                       </a:r>
+                      <a:endParaRPr/>
                     </a:p>
                   </a:txBody>
                   <a:tcPr anchor="ctr">
@@ -5215,7 +6318,6 @@
                 <a:tc>
                   <a:txBody>
                     <a:bodyPr/>
-                    <a:lstStyle/>
                     <a:p>
                       <a:pPr algn="ctr">
                         <a:defRPr sz="1050">
@@ -5226,8 +6328,10 @@
                         </a:defRPr>
                       </a:pPr>
                       <a:r>
+                        <a:rPr/>
                         <a:t>0.8250</a:t>
                       </a:r>
+                      <a:endParaRPr/>
                     </a:p>
                   </a:txBody>
                   <a:tcPr anchor="ctr">
@@ -5239,7 +6343,6 @@
                 <a:tc>
                   <a:txBody>
                     <a:bodyPr/>
-                    <a:lstStyle/>
                     <a:p>
                       <a:pPr algn="ctr">
                         <a:defRPr sz="1050">
@@ -5250,8 +6353,10 @@
                         </a:defRPr>
                       </a:pPr>
                       <a:r>
+                        <a:rPr/>
                         <a:t>0.9482</a:t>
                       </a:r>
+                      <a:endParaRPr/>
                     </a:p>
                   </a:txBody>
                   <a:tcPr anchor="ctr">
@@ -5263,7 +6368,6 @@
                 <a:tc>
                   <a:txBody>
                     <a:bodyPr/>
-                    <a:lstStyle/>
                     <a:p>
                       <a:pPr algn="ctr">
                         <a:defRPr sz="1050">
@@ -5274,8 +6378,10 @@
                         </a:defRPr>
                       </a:pPr>
                       <a:r>
+                        <a:rPr/>
                         <a:t>0.7037</a:t>
                       </a:r>
+                      <a:endParaRPr/>
                     </a:p>
                   </a:txBody>
                   <a:tcPr anchor="ctr">
@@ -5287,7 +6393,6 @@
                 <a:tc>
                   <a:txBody>
                     <a:bodyPr/>
-                    <a:lstStyle/>
                     <a:p>
                       <a:pPr algn="ctr">
                         <a:defRPr sz="1050" b="1">
@@ -5298,8 +6403,10 @@
                         </a:defRPr>
                       </a:pPr>
                       <a:r>
+                        <a:rPr/>
                         <a:t>0.9485</a:t>
                       </a:r>
+                      <a:endParaRPr/>
                     </a:p>
                   </a:txBody>
                   <a:tcPr anchor="ctr">
@@ -5311,7 +6418,6 @@
                 <a:tc>
                   <a:txBody>
                     <a:bodyPr/>
-                    <a:lstStyle/>
                     <a:p>
                       <a:pPr algn="ctr">
                         <a:defRPr sz="1050" b="1">
@@ -5322,8 +6428,10 @@
                         </a:defRPr>
                       </a:pPr>
                       <a:r>
+                        <a:rPr/>
                         <a:t>+0.1235</a:t>
                       </a:r>
+                      <a:endParaRPr/>
                     </a:p>
                   </a:txBody>
                   <a:tcPr anchor="ctr">
@@ -5335,7 +6443,6 @@
                 <a:tc>
                   <a:txBody>
                     <a:bodyPr/>
-                    <a:lstStyle/>
                     <a:p>
                       <a:pPr algn="ctr">
                         <a:defRPr sz="1050" b="1">
@@ -5346,8 +6453,10 @@
                         </a:defRPr>
                       </a:pPr>
                       <a:r>
+                        <a:rPr/>
                         <a:t>+0.0003</a:t>
                       </a:r>
+                      <a:endParaRPr/>
                     </a:p>
                   </a:txBody>
                   <a:tcPr anchor="ctr">
@@ -5361,7 +6470,6 @@
                 <a:tc>
                   <a:txBody>
                     <a:bodyPr/>
-                    <a:lstStyle/>
                     <a:p>
                       <a:pPr>
                         <a:defRPr sz="1050">
@@ -5372,8 +6480,10 @@
                         </a:defRPr>
                       </a:pPr>
                       <a:r>
+                        <a:rPr/>
                         <a:t>AP@0.50 (Standard VOC)</a:t>
                       </a:r>
+                      <a:endParaRPr/>
                     </a:p>
                   </a:txBody>
                   <a:tcPr anchor="ctr">
@@ -5385,7 +6495,6 @@
                 <a:tc>
                   <a:txBody>
                     <a:bodyPr/>
-                    <a:lstStyle/>
                     <a:p>
                       <a:pPr algn="ctr">
                         <a:defRPr sz="1050">
@@ -5396,8 +6505,10 @@
                         </a:defRPr>
                       </a:pPr>
                       <a:r>
+                        <a:rPr/>
                         <a:t>0.4527</a:t>
                       </a:r>
+                      <a:endParaRPr/>
                     </a:p>
                   </a:txBody>
                   <a:tcPr anchor="ctr">
@@ -5409,7 +6520,6 @@
                 <a:tc>
                   <a:txBody>
                     <a:bodyPr/>
-                    <a:lstStyle/>
                     <a:p>
                       <a:pPr algn="ctr">
                         <a:defRPr sz="1050">
@@ -5420,8 +6530,10 @@
                         </a:defRPr>
                       </a:pPr>
                       <a:r>
+                        <a:rPr/>
                         <a:t>0.4415</a:t>
                       </a:r>
+                      <a:endParaRPr/>
                     </a:p>
                   </a:txBody>
                   <a:tcPr anchor="ctr">
@@ -5433,7 +6545,6 @@
                 <a:tc>
                   <a:txBody>
                     <a:bodyPr/>
-                    <a:lstStyle/>
                     <a:p>
                       <a:pPr algn="ctr">
                         <a:defRPr sz="1050">
@@ -5444,8 +6555,10 @@
                         </a:defRPr>
                       </a:pPr>
                       <a:r>
+                        <a:rPr/>
                         <a:t>0.4706</a:t>
                       </a:r>
+                      <a:endParaRPr/>
                     </a:p>
                   </a:txBody>
                   <a:tcPr anchor="ctr">
@@ -5457,7 +6570,6 @@
                 <a:tc>
                   <a:txBody>
                     <a:bodyPr/>
-                    <a:lstStyle/>
                     <a:p>
                       <a:pPr algn="ctr">
                         <a:defRPr sz="1050" b="1">
@@ -5468,8 +6580,10 @@
                         </a:defRPr>
                       </a:pPr>
                       <a:r>
+                        <a:rPr/>
                         <a:t>0.4891</a:t>
                       </a:r>
+                      <a:endParaRPr/>
                     </a:p>
                   </a:txBody>
                   <a:tcPr anchor="ctr">
@@ -5481,7 +6595,6 @@
                 <a:tc>
                   <a:txBody>
                     <a:bodyPr/>
-                    <a:lstStyle/>
                     <a:p>
                       <a:pPr algn="ctr">
                         <a:defRPr sz="1050" b="1">
@@ -5492,8 +6605,10 @@
                         </a:defRPr>
                       </a:pPr>
                       <a:r>
+                        <a:rPr/>
                         <a:t>+0.0364</a:t>
                       </a:r>
+                      <a:endParaRPr/>
                     </a:p>
                   </a:txBody>
                   <a:tcPr anchor="ctr">
@@ -5505,7 +6620,6 @@
                 <a:tc>
                   <a:txBody>
                     <a:bodyPr/>
-                    <a:lstStyle/>
                     <a:p>
                       <a:pPr algn="ctr">
                         <a:defRPr sz="1050" b="1">
@@ -5516,8 +6630,10 @@
                         </a:defRPr>
                       </a:pPr>
                       <a:r>
+                        <a:rPr/>
                         <a:t>+0.0476 (+4.8 pts)</a:t>
                       </a:r>
+                      <a:endParaRPr/>
                     </a:p>
                   </a:txBody>
                   <a:tcPr anchor="ctr">
@@ -5531,7 +6647,6 @@
                 <a:tc>
                   <a:txBody>
                     <a:bodyPr/>
-                    <a:lstStyle/>
                     <a:p>
                       <a:pPr>
                         <a:defRPr sz="1050">
@@ -5542,8 +6657,10 @@
                         </a:defRPr>
                       </a:pPr>
                       <a:r>
+                        <a:rPr/>
                         <a:t>AP@0.75 (Strict Boundary)</a:t>
                       </a:r>
+                      <a:endParaRPr/>
                     </a:p>
                   </a:txBody>
                   <a:tcPr anchor="ctr">
@@ -5555,7 +6672,6 @@
                 <a:tc>
                   <a:txBody>
                     <a:bodyPr/>
-                    <a:lstStyle/>
                     <a:p>
                       <a:pPr algn="ctr">
                         <a:defRPr sz="1050">
@@ -5566,8 +6682,10 @@
                         </a:defRPr>
                       </a:pPr>
                       <a:r>
+                        <a:rPr/>
                         <a:t>0.2593</a:t>
                       </a:r>
+                      <a:endParaRPr/>
                     </a:p>
                   </a:txBody>
                   <a:tcPr anchor="ctr">
@@ -5579,7 +6697,6 @@
                 <a:tc>
                   <a:txBody>
                     <a:bodyPr/>
-                    <a:lstStyle/>
                     <a:p>
                       <a:pPr algn="ctr">
                         <a:defRPr sz="1050">
@@ -5590,8 +6707,10 @@
                         </a:defRPr>
                       </a:pPr>
                       <a:r>
+                        <a:rPr/>
                         <a:t>0.2602</a:t>
                       </a:r>
+                      <a:endParaRPr/>
                     </a:p>
                   </a:txBody>
                   <a:tcPr anchor="ctr">
@@ -5603,7 +6722,6 @@
                 <a:tc>
                   <a:txBody>
                     <a:bodyPr/>
-                    <a:lstStyle/>
                     <a:p>
                       <a:pPr algn="ctr">
                         <a:defRPr sz="1050">
@@ -5614,8 +6732,10 @@
                         </a:defRPr>
                       </a:pPr>
                       <a:r>
+                        <a:rPr/>
                         <a:t>0.2825</a:t>
                       </a:r>
+                      <a:endParaRPr/>
                     </a:p>
                   </a:txBody>
                   <a:tcPr anchor="ctr">
@@ -5627,7 +6747,6 @@
                 <a:tc>
                   <a:txBody>
                     <a:bodyPr/>
-                    <a:lstStyle/>
                     <a:p>
                       <a:pPr algn="ctr">
                         <a:defRPr sz="1050" b="1">
@@ -5638,8 +6757,10 @@
                         </a:defRPr>
                       </a:pPr>
                       <a:r>
+                        <a:rPr/>
                         <a:t>0.2903</a:t>
                       </a:r>
+                      <a:endParaRPr/>
                     </a:p>
                   </a:txBody>
                   <a:tcPr anchor="ctr">
@@ -5651,7 +6772,6 @@
                 <a:tc>
                   <a:txBody>
                     <a:bodyPr/>
-                    <a:lstStyle/>
                     <a:p>
                       <a:pPr algn="ctr">
                         <a:defRPr sz="1050" b="1">
@@ -5662,8 +6782,10 @@
                         </a:defRPr>
                       </a:pPr>
                       <a:r>
+                        <a:rPr/>
                         <a:t>+0.0310</a:t>
                       </a:r>
+                      <a:endParaRPr/>
                     </a:p>
                   </a:txBody>
                   <a:tcPr anchor="ctr">
@@ -5675,7 +6797,6 @@
                 <a:tc>
                   <a:txBody>
                     <a:bodyPr/>
-                    <a:lstStyle/>
                     <a:p>
                       <a:pPr algn="ctr">
                         <a:defRPr sz="1050" b="1">
@@ -5686,8 +6807,10 @@
                         </a:defRPr>
                       </a:pPr>
                       <a:r>
+                        <a:rPr/>
                         <a:t>+0.0301 (+11.6%)</a:t>
                       </a:r>
+                      <a:endParaRPr/>
                     </a:p>
                   </a:txBody>
                   <a:tcPr anchor="ctr">
@@ -5701,7 +6824,6 @@
                 <a:tc>
                   <a:txBody>
                     <a:bodyPr/>
-                    <a:lstStyle/>
                     <a:p>
                       <a:pPr>
                         <a:defRPr sz="1050">
@@ -5712,8 +6834,10 @@
                         </a:defRPr>
                       </a:pPr>
                       <a:r>
+                        <a:rPr/>
                         <a:t>AP@0.95 (Ultra-Strict)</a:t>
                       </a:r>
+                      <a:endParaRPr/>
                     </a:p>
                   </a:txBody>
                   <a:tcPr anchor="ctr">
@@ -5725,7 +6849,6 @@
                 <a:tc>
                   <a:txBody>
                     <a:bodyPr/>
-                    <a:lstStyle/>
                     <a:p>
                       <a:pPr algn="ctr">
                         <a:defRPr sz="1050">
@@ -5736,8 +6859,10 @@
                         </a:defRPr>
                       </a:pPr>
                       <a:r>
+                        <a:rPr/>
                         <a:t>0.0163</a:t>
                       </a:r>
+                      <a:endParaRPr/>
                     </a:p>
                   </a:txBody>
                   <a:tcPr anchor="ctr">
@@ -5749,7 +6874,6 @@
                 <a:tc>
                   <a:txBody>
                     <a:bodyPr/>
-                    <a:lstStyle/>
                     <a:p>
                       <a:pPr algn="ctr">
                         <a:defRPr sz="1050">
@@ -5760,8 +6884,10 @@
                         </a:defRPr>
                       </a:pPr>
                       <a:r>
+                        <a:rPr/>
                         <a:t>0.0212</a:t>
                       </a:r>
+                      <a:endParaRPr/>
                     </a:p>
                   </a:txBody>
                   <a:tcPr anchor="ctr">
@@ -5773,7 +6899,6 @@
                 <a:tc>
                   <a:txBody>
                     <a:bodyPr/>
-                    <a:lstStyle/>
                     <a:p>
                       <a:pPr algn="ctr">
                         <a:defRPr sz="1050">
@@ -5784,8 +6909,10 @@
                         </a:defRPr>
                       </a:pPr>
                       <a:r>
+                        <a:rPr/>
                         <a:t>0.0209</a:t>
                       </a:r>
+                      <a:endParaRPr/>
                     </a:p>
                   </a:txBody>
                   <a:tcPr anchor="ctr">
@@ -5797,7 +6924,6 @@
                 <a:tc>
                   <a:txBody>
                     <a:bodyPr/>
-                    <a:lstStyle/>
                     <a:p>
                       <a:pPr algn="ctr">
                         <a:defRPr sz="1050" b="1">
@@ -5808,8 +6934,10 @@
                         </a:defRPr>
                       </a:pPr>
                       <a:r>
+                        <a:rPr/>
                         <a:t>0.0215</a:t>
                       </a:r>
+                      <a:endParaRPr/>
                     </a:p>
                   </a:txBody>
                   <a:tcPr anchor="ctr">
@@ -5821,7 +6949,6 @@
                 <a:tc>
                   <a:txBody>
                     <a:bodyPr/>
-                    <a:lstStyle/>
                     <a:p>
                       <a:pPr algn="ctr">
                         <a:defRPr sz="1050" b="1">
@@ -5832,8 +6959,10 @@
                         </a:defRPr>
                       </a:pPr>
                       <a:r>
+                        <a:rPr/>
                         <a:t>+0.0052</a:t>
                       </a:r>
+                      <a:endParaRPr/>
                     </a:p>
                   </a:txBody>
                   <a:tcPr anchor="ctr">
@@ -5845,7 +6974,6 @@
                 <a:tc>
                   <a:txBody>
                     <a:bodyPr/>
-                    <a:lstStyle/>
                     <a:p>
                       <a:pPr algn="ctr">
                         <a:defRPr sz="1050" b="1">
@@ -5856,8 +6984,10 @@
                         </a:defRPr>
                       </a:pPr>
                       <a:r>
+                        <a:rPr/>
                         <a:t>+0.0003 (+1.4%)</a:t>
                       </a:r>
+                      <a:endParaRPr/>
                     </a:p>
                   </a:txBody>
                   <a:tcPr anchor="ctr">
@@ -5871,7 +7001,6 @@
                 <a:tc>
                   <a:txBody>
                     <a:bodyPr/>
-                    <a:lstStyle/>
                     <a:p>
                       <a:pPr>
                         <a:defRPr sz="1050">
@@ -5882,8 +7011,10 @@
                         </a:defRPr>
                       </a:pPr>
                       <a:r>
+                        <a:rPr/>
                         <a:t>mAP@[0.50:0.95] (COCO Mean)</a:t>
                       </a:r>
+                      <a:endParaRPr/>
                     </a:p>
                   </a:txBody>
                   <a:tcPr anchor="ctr">
@@ -5895,7 +7026,6 @@
                 <a:tc>
                   <a:txBody>
                     <a:bodyPr/>
-                    <a:lstStyle/>
                     <a:p>
                       <a:pPr algn="ctr">
                         <a:defRPr sz="1050">
@@ -5906,8 +7036,10 @@
                         </a:defRPr>
                       </a:pPr>
                       <a:r>
+                        <a:rPr/>
                         <a:t>0.2657</a:t>
                       </a:r>
+                      <a:endParaRPr/>
                     </a:p>
                   </a:txBody>
                   <a:tcPr anchor="ctr">
@@ -5919,7 +7051,6 @@
                 <a:tc>
                   <a:txBody>
                     <a:bodyPr/>
-                    <a:lstStyle/>
                     <a:p>
                       <a:pPr algn="ctr">
                         <a:defRPr sz="1050">
@@ -5930,8 +7061,10 @@
                         </a:defRPr>
                       </a:pPr>
                       <a:r>
+                        <a:rPr/>
                         <a:t>0.2625</a:t>
                       </a:r>
+                      <a:endParaRPr/>
                     </a:p>
                   </a:txBody>
                   <a:tcPr anchor="ctr">
@@ -5943,7 +7076,6 @@
                 <a:tc>
                   <a:txBody>
                     <a:bodyPr/>
-                    <a:lstStyle/>
                     <a:p>
                       <a:pPr algn="ctr">
                         <a:defRPr sz="1050">
@@ -5954,8 +7086,10 @@
                         </a:defRPr>
                       </a:pPr>
                       <a:r>
+                        <a:rPr/>
                         <a:t>0.2811</a:t>
                       </a:r>
+                      <a:endParaRPr/>
                     </a:p>
                   </a:txBody>
                   <a:tcPr anchor="ctr">
@@ -5967,7 +7101,6 @@
                 <a:tc>
                   <a:txBody>
                     <a:bodyPr/>
-                    <a:lstStyle/>
                     <a:p>
                       <a:pPr algn="ctr">
                         <a:defRPr sz="1050" b="1">
@@ -5978,8 +7111,10 @@
                         </a:defRPr>
                       </a:pPr>
                       <a:r>
+                        <a:rPr/>
                         <a:t>0.2924</a:t>
                       </a:r>
+                      <a:endParaRPr/>
                     </a:p>
                   </a:txBody>
                   <a:tcPr anchor="ctr">
@@ -5991,7 +7126,6 @@
                 <a:tc>
                   <a:txBody>
                     <a:bodyPr/>
-                    <a:lstStyle/>
                     <a:p>
                       <a:pPr algn="ctr">
                         <a:defRPr sz="1050" b="1">
@@ -6002,8 +7136,10 @@
                         </a:defRPr>
                       </a:pPr>
                       <a:r>
+                        <a:rPr/>
                         <a:t>+0.0267</a:t>
                       </a:r>
+                      <a:endParaRPr/>
                     </a:p>
                   </a:txBody>
                   <a:tcPr anchor="ctr">
@@ -6015,7 +7151,6 @@
                 <a:tc>
                   <a:txBody>
                     <a:bodyPr/>
-                    <a:lstStyle/>
                     <a:p>
                       <a:pPr algn="ctr">
                         <a:defRPr sz="1050" b="1">
@@ -6026,8 +7161,10 @@
                         </a:defRPr>
                       </a:pPr>
                       <a:r>
+                        <a:rPr/>
                         <a:t>+0.0299 (+11.4%)</a:t>
                       </a:r>
+                      <a:endParaRPr/>
                     </a:p>
                   </a:txBody>
                   <a:tcPr anchor="ctr">
@@ -6041,7 +7178,6 @@
                 <a:tc>
                   <a:txBody>
                     <a:bodyPr/>
-                    <a:lstStyle/>
                     <a:p>
                       <a:pPr>
                         <a:defRPr sz="1050">
@@ -6052,8 +7188,10 @@
                         </a:defRPr>
                       </a:pPr>
                       <a:r>
+                        <a:rPr/>
                         <a:t>Total Detections Predicted</a:t>
                       </a:r>
+                      <a:endParaRPr/>
                     </a:p>
                   </a:txBody>
                   <a:tcPr anchor="ctr">
@@ -6065,7 +7203,6 @@
                 <a:tc>
                   <a:txBody>
                     <a:bodyPr/>
-                    <a:lstStyle/>
                     <a:p>
                       <a:pPr algn="ctr">
                         <a:defRPr sz="1050">
@@ -6076,8 +7213,10 @@
                         </a:defRPr>
                       </a:pPr>
                       <a:r>
+                        <a:rPr/>
                         <a:t>83,105</a:t>
                       </a:r>
+                      <a:endParaRPr/>
                     </a:p>
                   </a:txBody>
                   <a:tcPr anchor="ctr">
@@ -6089,7 +7228,6 @@
                 <a:tc>
                   <a:txBody>
                     <a:bodyPr/>
-                    <a:lstStyle/>
                     <a:p>
                       <a:pPr algn="ctr">
                         <a:defRPr sz="1050">
@@ -6100,8 +7238,10 @@
                         </a:defRPr>
                       </a:pPr>
                       <a:r>
+                        <a:rPr/>
                         <a:t>100,073</a:t>
                       </a:r>
+                      <a:endParaRPr/>
                     </a:p>
                   </a:txBody>
                   <a:tcPr anchor="ctr">
@@ -6113,7 +7253,6 @@
                 <a:tc>
                   <a:txBody>
                     <a:bodyPr/>
-                    <a:lstStyle/>
                     <a:p>
                       <a:pPr algn="ctr">
                         <a:defRPr sz="1050">
@@ -6124,8 +7263,10 @@
                         </a:defRPr>
                       </a:pPr>
                       <a:r>
+                        <a:rPr/>
                         <a:t>99,945</a:t>
                       </a:r>
+                      <a:endParaRPr/>
                     </a:p>
                   </a:txBody>
                   <a:tcPr anchor="ctr">
@@ -6137,7 +7278,6 @@
                 <a:tc>
                   <a:txBody>
                     <a:bodyPr/>
-                    <a:lstStyle/>
                     <a:p>
                       <a:pPr algn="ctr">
                         <a:defRPr sz="1050" b="1">
@@ -6148,8 +7288,10 @@
                         </a:defRPr>
                       </a:pPr>
                       <a:r>
+                        <a:rPr/>
                         <a:t>98,097</a:t>
                       </a:r>
+                      <a:endParaRPr/>
                     </a:p>
                   </a:txBody>
                   <a:tcPr anchor="ctr">
@@ -6161,7 +7303,6 @@
                 <a:tc>
                   <a:txBody>
                     <a:bodyPr/>
-                    <a:lstStyle/>
                     <a:p>
                       <a:pPr algn="ctr">
                         <a:defRPr sz="1050" b="1">
@@ -6172,8 +7313,10 @@
                         </a:defRPr>
                       </a:pPr>
                       <a:r>
+                        <a:rPr/>
                         <a:t>+14,992</a:t>
                       </a:r>
+                      <a:endParaRPr/>
                     </a:p>
                   </a:txBody>
                   <a:tcPr anchor="ctr">
@@ -6185,7 +7328,6 @@
                 <a:tc>
                   <a:txBody>
                     <a:bodyPr/>
-                    <a:lstStyle/>
                     <a:p>
                       <a:pPr algn="ctr">
                         <a:defRPr sz="1050" b="1">
@@ -6196,8 +7338,10 @@
                         </a:defRPr>
                       </a:pPr>
                       <a:r>
+                        <a:rPr/>
                         <a:t>-1,976 (Cleaner)</a:t>
                       </a:r>
+                      <a:endParaRPr/>
                     </a:p>
                   </a:txBody>
                   <a:tcPr anchor="ctr">
@@ -6213,17 +7357,19 @@
       </p:graphicFrame>
       <p:sp>
         <p:nvSpPr>
-          <p:cNvPr id="6" name="Rounded Rectangle 5"/>
+          <p:cNvPr id="1078517842" name="Rounded Rectangle 5"/>
           <p:cNvSpPr/>
           <p:nvPr/>
         </p:nvSpPr>
-        <p:spPr>
+        <p:spPr bwMode="auto">
           <a:xfrm>
             <a:off x="731520" y="4736592"/>
             <a:ext cx="3429000" cy="1536192"/>
           </a:xfrm>
           <a:prstGeom prst="roundRect">
-            <a:avLst/>
+            <a:avLst>
+              <a:gd name="adj" fmla="val 16667"/>
+            </a:avLst>
           </a:prstGeom>
           <a:solidFill>
             <a:srgbClr val="F5F7FA"/>
@@ -6249,7 +7395,7 @@
           </a:fontRef>
         </p:style>
         <p:txBody>
-          <a:bodyPr rtlCol="0" anchor="ctr" wrap="square" lIns="164592" rIns="164592" tIns="128016"/>
+          <a:bodyPr wrap="square" lIns="164592" tIns="128016" rIns="164592" rtlCol="0" anchor="ctr"/>
           <a:lstStyle/>
           <a:p>
             <a:pPr algn="ctr">
@@ -6261,8 +7407,10 @@
               </a:defRPr>
             </a:pPr>
             <a:r>
+              <a:rPr/>
               <a:t>In-Domain Reconstruction (PSNR)</a:t>
             </a:r>
+            <a:endParaRPr/>
           </a:p>
           <a:p>
             <a:pPr>
@@ -6277,24 +7425,28 @@
               </a:defRPr>
             </a:pPr>
             <a:r>
+              <a:rPr/>
               <a:t>On 1,500 paired Foggy Cityscapes scenes @ 2048x1024, our method achieves 26.71 dB PSNR (+0.29 dB over the paper). Classical DCP yields only 15.79 dB due to unnatural texture and color distortions.</a:t>
             </a:r>
-          </a:p>
-        </p:txBody>
-      </p:sp>
-      <p:sp>
-        <p:nvSpPr>
-          <p:cNvPr id="7" name="Rounded Rectangle 6"/>
+            <a:endParaRPr/>
+          </a:p>
+        </p:txBody>
+      </p:sp>
+      <p:sp>
+        <p:nvSpPr>
+          <p:cNvPr id="980994467" name="Rounded Rectangle 6"/>
           <p:cNvSpPr/>
           <p:nvPr/>
         </p:nvSpPr>
-        <p:spPr>
+        <p:spPr bwMode="auto">
           <a:xfrm>
             <a:off x="4379976" y="4736592"/>
             <a:ext cx="3429000" cy="1536192"/>
           </a:xfrm>
           <a:prstGeom prst="roundRect">
-            <a:avLst/>
+            <a:avLst>
+              <a:gd name="adj" fmla="val 16667"/>
+            </a:avLst>
           </a:prstGeom>
           <a:solidFill>
             <a:srgbClr val="F5F7FA"/>
@@ -6320,7 +7472,7 @@
           </a:fontRef>
         </p:style>
         <p:txBody>
-          <a:bodyPr rtlCol="0" anchor="ctr" wrap="square" lIns="164592" rIns="164592" tIns="128016"/>
+          <a:bodyPr wrap="square" lIns="164592" tIns="128016" rIns="164592" rtlCol="0" anchor="ctr"/>
           <a:lstStyle/>
           <a:p>
             <a:pPr algn="ctr">
@@ -6332,8 +7484,10 @@
               </a:defRPr>
             </a:pPr>
             <a:r>
+              <a:rPr/>
               <a:t>Real Fog Task Utility (AP@0.50)</a:t>
             </a:r>
+            <a:endParaRPr/>
           </a:p>
           <a:p>
             <a:pPr>
@@ -6348,24 +7502,28 @@
               </a:defRPr>
             </a:pPr>
             <a:r>
+              <a:rPr/>
               <a:t>While the reference paper reduces detection accuracy on real fog (-0.0112 AP@0.50 vs raw hazy), our method provides genuine visual recovery (+0.0364 AP@0.50, beating classical DCP by +0.0185).</a:t>
             </a:r>
-          </a:p>
-        </p:txBody>
-      </p:sp>
-      <p:sp>
-        <p:nvSpPr>
-          <p:cNvPr id="8" name="Rounded Rectangle 7"/>
+            <a:endParaRPr/>
+          </a:p>
+        </p:txBody>
+      </p:sp>
+      <p:sp>
+        <p:nvSpPr>
+          <p:cNvPr id="1754249439" name="Rounded Rectangle 7"/>
           <p:cNvSpPr/>
           <p:nvPr/>
         </p:nvSpPr>
-        <p:spPr>
+        <p:spPr bwMode="auto">
           <a:xfrm>
             <a:off x="8028432" y="4736592"/>
             <a:ext cx="3429000" cy="1536192"/>
           </a:xfrm>
           <a:prstGeom prst="roundRect">
-            <a:avLst/>
+            <a:avLst>
+              <a:gd name="adj" fmla="val 16667"/>
+            </a:avLst>
           </a:prstGeom>
           <a:solidFill>
             <a:srgbClr val="F5F7FA"/>
@@ -6391,7 +7549,7 @@
           </a:fontRef>
         </p:style>
         <p:txBody>
-          <a:bodyPr rtlCol="0" anchor="ctr" wrap="square" lIns="164592" rIns="164592" tIns="128016"/>
+          <a:bodyPr wrap="square" lIns="164592" tIns="128016" rIns="164592" rtlCol="0" anchor="ctr"/>
           <a:lstStyle/>
           <a:p>
             <a:pPr algn="ctr">
@@ -6403,8 +7561,10 @@
               </a:defRPr>
             </a:pPr>
             <a:r>
+              <a:rPr/>
               <a:t>Boundary Localization Precision</a:t>
             </a:r>
+            <a:endParaRPr/>
           </a:p>
           <a:p>
             <a:pPr>
@@ -6419,8 +7579,10 @@
               </a:defRPr>
             </a:pPr>
             <a:r>
+              <a:rPr/>
               <a:t>Under strict IoU criteria (AP@0.75), our method delivers an 11.6% relative gain over the reference paper (+0.0301 AP) while predicting 1,976 fewer false-positive boxes.</a:t>
             </a:r>
+            <a:endParaRPr/>
           </a:p>
         </p:txBody>
       </p:sp>
@@ -6429,29 +7591,44 @@
   <p:clrMapOvr>
     <a:masterClrMapping/>
   </p:clrMapOvr>
+  <mc:AlternateContent xmlns:mc="http://schemas.openxmlformats.org/markup-compatibility/2006">
+    <mc:Choice xmlns:p159="http://schemas.microsoft.com/office/powerpoint/2015/09/main" xmlns:p14="http://schemas.microsoft.com/office/powerpoint/2010/main" Requires="p159">
+      <p:transition p14:dur="500" advClick="1"/>
+    </mc:Choice>
+    <mc:Fallback>
+      <p:transition advClick="1"/>
+    </mc:Fallback>
+  </mc:AlternateContent>
 </p:sld>
 </file>
 
 <file path=ppt/slides/slide5.xml><?xml version="1.0" encoding="utf-8"?>
-<p:sld xmlns:a="http://schemas.openxmlformats.org/drawingml/2006/main" xmlns:p="http://schemas.openxmlformats.org/presentationml/2006/main" xmlns:r="http://schemas.openxmlformats.org/officeDocument/2006/relationships">
-  <p:cSld>
+<p:sld xmlns:a="http://schemas.openxmlformats.org/drawingml/2006/main" xmlns:r="http://schemas.openxmlformats.org/officeDocument/2006/relationships" xmlns:p="http://schemas.openxmlformats.org/presentationml/2006/main" xmlns:m="http://schemas.openxmlformats.org/officeDocument/2006/math" xmlns:w="http://schemas.openxmlformats.org/wordprocessingml/2006/main" xmlns:mc="http://schemas.openxmlformats.org/markup-compatibility/2006" showMasterPhAnim="0" showMasterSp="1" show="1">
+  <p:cSld name="">
     <p:spTree>
       <p:nvGrpSpPr>
         <p:cNvPr id="1" name=""/>
         <p:cNvGrpSpPr/>
         <p:nvPr/>
       </p:nvGrpSpPr>
-      <p:grpSpPr/>
-      <p:sp>
-        <p:nvSpPr>
-          <p:cNvPr id="2" name="TextBox 1"/>
+      <p:grpSpPr bwMode="auto">
+        <a:xfrm>
+          <a:off x="0" y="0"/>
+          <a:ext cx="0" cy="0"/>
+          <a:chOff x="0" y="0"/>
+          <a:chExt cx="0" cy="0"/>
+        </a:xfrm>
+      </p:grpSpPr>
+      <p:sp>
+        <p:nvSpPr>
+          <p:cNvPr id="1152239115" name="TextBox 1"/>
           <p:cNvSpPr txBox="1"/>
           <p:nvPr/>
         </p:nvSpPr>
-        <p:spPr>
+        <p:spPr bwMode="auto">
           <a:xfrm>
             <a:off x="731520" y="411480"/>
-            <a:ext cx="10728655" cy="1005840"/>
+            <a:ext cx="10728654" cy="1005840"/>
           </a:xfrm>
           <a:prstGeom prst="rect">
             <a:avLst/>
@@ -6473,8 +7650,10 @@
               </a:defRPr>
             </a:pPr>
             <a:r>
+              <a:rPr/>
               <a:t>DEPLOYMENT &amp; EFFICIENCY</a:t>
             </a:r>
+            <a:endParaRPr/>
           </a:p>
           <a:p>
             <a:pPr>
@@ -6489,21 +7668,23 @@
               </a:defRPr>
             </a:pPr>
             <a:r>
+              <a:rPr/>
               <a:t>Model Complexity &amp; Operational Footprint</a:t>
             </a:r>
-          </a:p>
-        </p:txBody>
-      </p:sp>
-      <p:sp>
-        <p:nvSpPr>
-          <p:cNvPr id="3" name="Rectangle 2"/>
+            <a:endParaRPr/>
+          </a:p>
+        </p:txBody>
+      </p:sp>
+      <p:sp>
+        <p:nvSpPr>
+          <p:cNvPr id="769673200" name="Rectangle 2"/>
           <p:cNvSpPr/>
           <p:nvPr/>
         </p:nvSpPr>
-        <p:spPr>
+        <p:spPr bwMode="auto">
           <a:xfrm>
             <a:off x="731520" y="1371600"/>
-            <a:ext cx="10728655" cy="18288"/>
+            <a:ext cx="10728654" cy="18288"/>
           </a:xfrm>
           <a:prstGeom prst="rect">
             <a:avLst/>
@@ -6535,62 +7716,29 @@
           <a:bodyPr rtlCol="0" anchor="ctr"/>
           <a:lstStyle/>
           <a:p>
-            <a:pPr algn="ctr"/>
-          </a:p>
-        </p:txBody>
-      </p:sp>
-      <p:sp>
-        <p:nvSpPr>
-          <p:cNvPr id="4" name="TextBox 3"/>
-          <p:cNvSpPr txBox="1"/>
-          <p:nvPr/>
-        </p:nvSpPr>
-        <p:spPr>
-          <a:xfrm>
-            <a:off x="731520" y="6400800"/>
-            <a:ext cx="10728655" cy="320040"/>
-          </a:xfrm>
-          <a:prstGeom prst="rect">
-            <a:avLst/>
-          </a:prstGeom>
-          <a:noFill/>
-        </p:spPr>
-        <p:txBody>
-          <a:bodyPr wrap="none" lIns="0" tIns="0" rIns="0" bIns="0">
-            <a:spAutoFit/>
-          </a:bodyPr>
-          <a:lstStyle/>
-          <a:p>
-            <a:pPr>
-              <a:defRPr sz="900">
-                <a:solidFill>
-                  <a:srgbClr val="A0A0A0"/>
-                </a:solidFill>
-                <a:latin typeface="Calibri"/>
-              </a:defRPr>
-            </a:pPr>
-            <a:r>
-              <a:t>Real-World Dehazing Evaluation | Frozen COCO YOLOv8n | Foggy Cityscapes &amp; RTTS Benchmark</a:t>
-            </a:r>
+            <a:pPr algn="ctr">
+              <a:defRPr/>
+            </a:pPr>
+            <a:endParaRPr/>
           </a:p>
         </p:txBody>
       </p:sp>
       <p:graphicFrame>
         <p:nvGraphicFramePr>
-          <p:cNvPr id="5" name="Table 4"/>
+          <p:cNvPr id="1681269724" name="Table 4"/>
           <p:cNvGraphicFramePr>
-            <a:graphicFrameLocks noGrp="1"/>
+            <a:graphicFrameLocks xmlns:a="http://schemas.openxmlformats.org/drawingml/2006/main" noGrp="1"/>
           </p:cNvGraphicFramePr>
           <p:nvPr/>
         </p:nvGraphicFramePr>
-        <p:xfrm>
+        <p:xfrm rot="0">
           <a:off x="731520" y="1600200"/>
-          <a:ext cx="10728655" cy="2468880"/>
+          <a:ext cx="10728654" cy="2468880"/>
         </p:xfrm>
         <a:graphic>
           <a:graphicData uri="http://schemas.openxmlformats.org/drawingml/2006/table">
             <a:tbl>
-              <a:tblPr firstRow="1" bandRow="1">
+              <a:tblPr firstRow="1" firstCol="0" lastRow="0" lastCol="0" bandRow="1" bandCol="0">
                 <a:tableStyleId>{5C22544A-7EE6-4342-B048-85BDC9FD1C3A}</a:tableStyleId>
               </a:tblPr>
               <a:tblGrid>
@@ -6603,7 +7751,6 @@
                 <a:tc>
                   <a:txBody>
                     <a:bodyPr/>
-                    <a:lstStyle/>
                     <a:p>
                       <a:pPr>
                         <a:defRPr sz="1100" b="1">
@@ -6614,8 +7761,10 @@
                         </a:defRPr>
                       </a:pPr>
                       <a:r>
+                        <a:rPr/>
                         <a:t>Deployment Metric</a:t>
                       </a:r>
+                      <a:endParaRPr/>
                     </a:p>
                   </a:txBody>
                   <a:tcPr anchor="ctr">
@@ -6627,7 +7776,6 @@
                 <a:tc>
                   <a:txBody>
                     <a:bodyPr/>
-                    <a:lstStyle/>
                     <a:p>
                       <a:pPr algn="ctr">
                         <a:defRPr sz="1100" b="1">
@@ -6638,8 +7786,10 @@
                         </a:defRPr>
                       </a:pPr>
                       <a:r>
+                        <a:rPr/>
                         <a:t>Reference Paper</a:t>
                       </a:r>
+                      <a:endParaRPr/>
                     </a:p>
                   </a:txBody>
                   <a:tcPr anchor="ctr">
@@ -6651,7 +7801,6 @@
                 <a:tc>
                   <a:txBody>
                     <a:bodyPr/>
-                    <a:lstStyle/>
                     <a:p>
                       <a:pPr algn="ctr">
                         <a:defRPr sz="1100" b="1">
@@ -6662,8 +7811,10 @@
                         </a:defRPr>
                       </a:pPr>
                       <a:r>
+                        <a:rPr/>
                         <a:t>Our Method</a:t>
                       </a:r>
+                      <a:endParaRPr/>
                     </a:p>
                   </a:txBody>
                   <a:tcPr anchor="ctr">
@@ -6675,7 +7826,6 @@
                 <a:tc>
                   <a:txBody>
                     <a:bodyPr/>
-                    <a:lstStyle/>
                     <a:p>
                       <a:pPr>
                         <a:defRPr sz="1100" b="1">
@@ -6686,8 +7836,10 @@
                         </a:defRPr>
                       </a:pPr>
                       <a:r>
+                        <a:rPr/>
                         <a:t>Advantage</a:t>
                       </a:r>
+                      <a:endParaRPr/>
                     </a:p>
                   </a:txBody>
                   <a:tcPr anchor="ctr">
@@ -6701,7 +7853,6 @@
                 <a:tc>
                   <a:txBody>
                     <a:bodyPr/>
-                    <a:lstStyle/>
                     <a:p>
                       <a:pPr>
                         <a:defRPr sz="1100">
@@ -6712,8 +7863,10 @@
                         </a:defRPr>
                       </a:pPr>
                       <a:r>
+                        <a:rPr/>
                         <a:t>Total Model Parameters</a:t>
                       </a:r>
+                      <a:endParaRPr/>
                     </a:p>
                   </a:txBody>
                   <a:tcPr anchor="ctr">
@@ -6725,7 +7878,6 @@
                 <a:tc>
                   <a:txBody>
                     <a:bodyPr/>
-                    <a:lstStyle/>
                     <a:p>
                       <a:pPr algn="ctr">
                         <a:defRPr sz="1100">
@@ -6736,8 +7888,10 @@
                         </a:defRPr>
                       </a:pPr>
                       <a:r>
+                        <a:rPr/>
                         <a:t>26.4 M (26,378,804)</a:t>
                       </a:r>
+                      <a:endParaRPr/>
                     </a:p>
                   </a:txBody>
                   <a:tcPr anchor="ctr">
@@ -6749,7 +7903,6 @@
                 <a:tc>
                   <a:txBody>
                     <a:bodyPr/>
-                    <a:lstStyle/>
                     <a:p>
                       <a:pPr algn="ctr">
                         <a:defRPr sz="1100" b="1">
@@ -6760,8 +7913,10 @@
                         </a:defRPr>
                       </a:pPr>
                       <a:r>
+                        <a:rPr/>
                         <a:t>7.8 M (7,766,084)</a:t>
                       </a:r>
+                      <a:endParaRPr/>
                     </a:p>
                   </a:txBody>
                   <a:tcPr anchor="ctr">
@@ -6773,7 +7928,6 @@
                 <a:tc>
                   <a:txBody>
                     <a:bodyPr/>
-                    <a:lstStyle/>
                     <a:p>
                       <a:pPr>
                         <a:defRPr sz="1100" b="1">
@@ -6784,8 +7938,10 @@
                         </a:defRPr>
                       </a:pPr>
                       <a:r>
+                        <a:rPr/>
                         <a:t>70.6% parameter reduction</a:t>
                       </a:r>
+                      <a:endParaRPr/>
                     </a:p>
                   </a:txBody>
                   <a:tcPr anchor="ctr">
@@ -6799,7 +7955,6 @@
                 <a:tc>
                   <a:txBody>
                     <a:bodyPr/>
-                    <a:lstStyle/>
                     <a:p>
                       <a:pPr>
                         <a:defRPr sz="1100">
@@ -6810,8 +7965,10 @@
                         </a:defRPr>
                       </a:pPr>
                       <a:r>
+                        <a:rPr/>
                         <a:t>Active Models in Memory</a:t>
                       </a:r>
+                      <a:endParaRPr/>
                     </a:p>
                   </a:txBody>
                   <a:tcPr anchor="ctr">
@@ -6823,7 +7980,6 @@
                 <a:tc>
                   <a:txBody>
                     <a:bodyPr/>
-                    <a:lstStyle/>
                     <a:p>
                       <a:pPr algn="ctr">
                         <a:defRPr sz="1100">
@@ -6834,8 +7990,10 @@
                         </a:defRPr>
                       </a:pPr>
                       <a:r>
+                        <a:rPr/>
                         <a:t>4 (1 Classifier + 3 Dehazers)</a:t>
                       </a:r>
+                      <a:endParaRPr/>
                     </a:p>
                   </a:txBody>
                   <a:tcPr anchor="ctr">
@@ -6847,7 +8005,6 @@
                 <a:tc>
                   <a:txBody>
                     <a:bodyPr/>
-                    <a:lstStyle/>
                     <a:p>
                       <a:pPr algn="ctr">
                         <a:defRPr sz="1100" b="1">
@@ -6858,8 +8015,10 @@
                         </a:defRPr>
                       </a:pPr>
                       <a:r>
+                        <a:rPr/>
                         <a:t>1 (Single Unified Model)</a:t>
                       </a:r>
+                      <a:endParaRPr/>
                     </a:p>
                   </a:txBody>
                   <a:tcPr anchor="ctr">
@@ -6871,7 +8030,6 @@
                 <a:tc>
                   <a:txBody>
                     <a:bodyPr/>
-                    <a:lstStyle/>
                     <a:p>
                       <a:pPr>
                         <a:defRPr sz="1100" b="1">
@@ -6882,8 +8040,10 @@
                         </a:defRPr>
                       </a:pPr>
                       <a:r>
+                        <a:rPr/>
                         <a:t>3.4x lower VRAM footprint</a:t>
                       </a:r>
+                      <a:endParaRPr/>
                     </a:p>
                   </a:txBody>
                   <a:tcPr anchor="ctr">
@@ -6897,7 +8057,6 @@
                 <a:tc>
                   <a:txBody>
                     <a:bodyPr/>
-                    <a:lstStyle/>
                     <a:p>
                       <a:pPr>
                         <a:defRPr sz="1100">
@@ -6908,8 +8067,10 @@
                         </a:defRPr>
                       </a:pPr>
                       <a:r>
+                        <a:rPr/>
                         <a:t>Inference Latency</a:t>
                       </a:r>
+                      <a:endParaRPr/>
                     </a:p>
                   </a:txBody>
                   <a:tcPr anchor="ctr">
@@ -6921,7 +8082,6 @@
                 <a:tc>
                   <a:txBody>
                     <a:bodyPr/>
-                    <a:lstStyle/>
                     <a:p>
                       <a:pPr algn="ctr">
                         <a:defRPr sz="1100">
@@ -6932,8 +8092,10 @@
                         </a:defRPr>
                       </a:pPr>
                       <a:r>
+                        <a:rPr/>
                         <a:t>240 ms / image</a:t>
                       </a:r>
+                      <a:endParaRPr/>
                     </a:p>
                   </a:txBody>
                   <a:tcPr anchor="ctr">
@@ -6945,7 +8107,6 @@
                 <a:tc>
                   <a:txBody>
                     <a:bodyPr/>
-                    <a:lstStyle/>
                     <a:p>
                       <a:pPr algn="ctr">
                         <a:defRPr sz="1100" b="1">
@@ -6956,8 +8117,10 @@
                         </a:defRPr>
                       </a:pPr>
                       <a:r>
+                        <a:rPr/>
                         <a:t>230 ms / image</a:t>
                       </a:r>
+                      <a:endParaRPr/>
                     </a:p>
                   </a:txBody>
                   <a:tcPr anchor="ctr">
@@ -6969,7 +8132,6 @@
                 <a:tc>
                   <a:txBody>
                     <a:bodyPr/>
-                    <a:lstStyle/>
                     <a:p>
                       <a:pPr>
                         <a:defRPr sz="1100" b="1">
@@ -6980,8 +8142,10 @@
                         </a:defRPr>
                       </a:pPr>
                       <a:r>
+                        <a:rPr/>
                         <a:t>Faster runtime execution</a:t>
                       </a:r>
+                      <a:endParaRPr/>
                     </a:p>
                   </a:txBody>
                   <a:tcPr anchor="ctr">
@@ -6995,7 +8159,6 @@
                 <a:tc>
                   <a:txBody>
                     <a:bodyPr/>
-                    <a:lstStyle/>
                     <a:p>
                       <a:pPr>
                         <a:defRPr sz="1100">
@@ -7006,8 +8169,10 @@
                         </a:defRPr>
                       </a:pPr>
                       <a:r>
+                        <a:rPr/>
                         <a:t>Downstream Detector</a:t>
                       </a:r>
+                      <a:endParaRPr/>
                     </a:p>
                   </a:txBody>
                   <a:tcPr anchor="ctr">
@@ -7019,7 +8184,6 @@
                 <a:tc>
                   <a:txBody>
                     <a:bodyPr/>
-                    <a:lstStyle/>
                     <a:p>
                       <a:pPr algn="ctr">
                         <a:defRPr sz="1100">
@@ -7030,8 +8194,10 @@
                         </a:defRPr>
                       </a:pPr>
                       <a:r>
+                        <a:rPr/>
                         <a:t>Fine-tuned / Coupled</a:t>
                       </a:r>
+                      <a:endParaRPr/>
                     </a:p>
                   </a:txBody>
                   <a:tcPr anchor="ctr">
@@ -7043,7 +8209,6 @@
                 <a:tc>
                   <a:txBody>
                     <a:bodyPr/>
-                    <a:lstStyle/>
                     <a:p>
                       <a:pPr algn="ctr">
                         <a:defRPr sz="1100" b="1">
@@ -7054,8 +8219,10 @@
                         </a:defRPr>
                       </a:pPr>
                       <a:r>
+                        <a:rPr/>
                         <a:t>100% Frozen Standard</a:t>
                       </a:r>
+                      <a:endParaRPr/>
                     </a:p>
                   </a:txBody>
                   <a:tcPr anchor="ctr">
@@ -7067,7 +8234,6 @@
                 <a:tc>
                   <a:txBody>
                     <a:bodyPr/>
-                    <a:lstStyle/>
                     <a:p>
                       <a:pPr>
                         <a:defRPr sz="1100" b="1">
@@ -7078,8 +8244,10 @@
                         </a:defRPr>
                       </a:pPr>
                       <a:r>
+                        <a:rPr/>
                         <a:t>Universal plug-and-play modularity</a:t>
                       </a:r>
+                      <a:endParaRPr/>
                     </a:p>
                   </a:txBody>
                   <a:tcPr anchor="ctr">
@@ -7095,17 +8263,19 @@
       </p:graphicFrame>
       <p:sp>
         <p:nvSpPr>
-          <p:cNvPr id="6" name="Rounded Rectangle 5"/>
+          <p:cNvPr id="1707842939" name="Rounded Rectangle 5"/>
           <p:cNvSpPr/>
           <p:nvPr/>
         </p:nvSpPr>
-        <p:spPr>
+        <p:spPr bwMode="auto">
           <a:xfrm>
             <a:off x="731520" y="4343400"/>
             <a:ext cx="3429000" cy="1874519"/>
           </a:xfrm>
           <a:prstGeom prst="roundRect">
-            <a:avLst/>
+            <a:avLst>
+              <a:gd name="adj" fmla="val 16667"/>
+            </a:avLst>
           </a:prstGeom>
           <a:solidFill>
             <a:srgbClr val="F5F7FA"/>
@@ -7131,7 +8301,7 @@
           </a:fontRef>
         </p:style>
         <p:txBody>
-          <a:bodyPr rtlCol="0" anchor="ctr" wrap="square" lIns="164592" rIns="164592" tIns="164592"/>
+          <a:bodyPr wrap="square" lIns="164592" tIns="164592" rIns="164592" rtlCol="0" anchor="ctr"/>
           <a:lstStyle/>
           <a:p>
             <a:pPr algn="ctr">
@@ -7143,8 +8313,10 @@
               </a:defRPr>
             </a:pPr>
             <a:r>
+              <a:rPr/>
               <a:t>Single Unified Backbone</a:t>
             </a:r>
+            <a:endParaRPr/>
           </a:p>
           <a:p>
             <a:pPr>
@@ -7159,24 +8331,28 @@
               </a:defRPr>
             </a:pPr>
             <a:r>
+              <a:rPr/>
               <a:t>Instead of maintaining 4 distinct neural networks in VRAM (classifier + 3 branches), our architecture relies on a single compact spatial backbone with depth-adaptive gating.</a:t>
             </a:r>
-          </a:p>
-        </p:txBody>
-      </p:sp>
-      <p:sp>
-        <p:nvSpPr>
-          <p:cNvPr id="7" name="Rounded Rectangle 6"/>
+            <a:endParaRPr/>
+          </a:p>
+        </p:txBody>
+      </p:sp>
+      <p:sp>
+        <p:nvSpPr>
+          <p:cNvPr id="1904535992" name="Rounded Rectangle 6"/>
           <p:cNvSpPr/>
           <p:nvPr/>
         </p:nvSpPr>
-        <p:spPr>
+        <p:spPr bwMode="auto">
           <a:xfrm>
             <a:off x="4379976" y="4343400"/>
             <a:ext cx="3429000" cy="1874519"/>
           </a:xfrm>
           <a:prstGeom prst="roundRect">
-            <a:avLst/>
+            <a:avLst>
+              <a:gd name="adj" fmla="val 16667"/>
+            </a:avLst>
           </a:prstGeom>
           <a:solidFill>
             <a:srgbClr val="F5F7FA"/>
@@ -7202,7 +8378,7 @@
           </a:fontRef>
         </p:style>
         <p:txBody>
-          <a:bodyPr rtlCol="0" anchor="ctr" wrap="square" lIns="164592" rIns="164592" tIns="164592"/>
+          <a:bodyPr wrap="square" lIns="164592" tIns="164592" rIns="164592" rtlCol="0" anchor="ctr"/>
           <a:lstStyle/>
           <a:p>
             <a:pPr algn="ctr">
@@ -7214,8 +8390,10 @@
               </a:defRPr>
             </a:pPr>
             <a:r>
+              <a:rPr/>
               <a:t>Universal Plug-and-Play</a:t>
             </a:r>
+            <a:endParaRPr/>
           </a:p>
           <a:p>
             <a:pPr>
@@ -7230,24 +8408,28 @@
               </a:defRPr>
             </a:pPr>
             <a:r>
+              <a:rPr/>
               <a:t>The downstream YOLO detector is completely frozen and unmodified. Our dehazer functions as an impartial optical pre-processor compatible with any off-the-shelf vision system.</a:t>
             </a:r>
-          </a:p>
-        </p:txBody>
-      </p:sp>
-      <p:sp>
-        <p:nvSpPr>
-          <p:cNvPr id="8" name="Rounded Rectangle 7"/>
+            <a:endParaRPr/>
+          </a:p>
+        </p:txBody>
+      </p:sp>
+      <p:sp>
+        <p:nvSpPr>
+          <p:cNvPr id="936756351" name="Rounded Rectangle 7"/>
           <p:cNvSpPr/>
           <p:nvPr/>
         </p:nvSpPr>
-        <p:spPr>
+        <p:spPr bwMode="auto">
           <a:xfrm>
             <a:off x="8028432" y="4343400"/>
             <a:ext cx="3429000" cy="1874519"/>
           </a:xfrm>
           <a:prstGeom prst="roundRect">
-            <a:avLst/>
+            <a:avLst>
+              <a:gd name="adj" fmla="val 16667"/>
+            </a:avLst>
           </a:prstGeom>
           <a:solidFill>
             <a:srgbClr val="F5F7FA"/>
@@ -7273,7 +8455,7 @@
           </a:fontRef>
         </p:style>
         <p:txBody>
-          <a:bodyPr rtlCol="0" anchor="ctr" wrap="square" lIns="164592" rIns="164592" tIns="164592"/>
+          <a:bodyPr wrap="square" lIns="164592" tIns="164592" rIns="164592" rtlCol="0" anchor="ctr"/>
           <a:lstStyle/>
           <a:p>
             <a:pPr algn="ctr">
@@ -7285,8 +8467,10 @@
               </a:defRPr>
             </a:pPr>
             <a:r>
+              <a:rPr/>
               <a:t>Edge &amp; Real-Time Viability</a:t>
             </a:r>
+            <a:endParaRPr/>
           </a:p>
           <a:p>
             <a:pPr>
@@ -7301,8 +8485,10 @@
               </a:defRPr>
             </a:pPr>
             <a:r>
+              <a:rPr/>
               <a:t>Delivers superior restoration and detection accuracy while reducing parameters by 70% and inference latency to 230 ms, making it feasible for embedded and automotive applications.</a:t>
             </a:r>
+            <a:endParaRPr/>
           </a:p>
         </p:txBody>
       </p:sp>
@@ -7311,11 +8497,19 @@
   <p:clrMapOvr>
     <a:masterClrMapping/>
   </p:clrMapOvr>
+  <mc:AlternateContent xmlns:mc="http://schemas.openxmlformats.org/markup-compatibility/2006">
+    <mc:Choice xmlns:p159="http://schemas.microsoft.com/office/powerpoint/2015/09/main" xmlns:p14="http://schemas.microsoft.com/office/powerpoint/2010/main" Requires="p159">
+      <p:transition p14:dur="500" advClick="1"/>
+    </mc:Choice>
+    <mc:Fallback>
+      <p:transition advClick="1"/>
+    </mc:Fallback>
+  </mc:AlternateContent>
 </p:sld>
 </file>
 
 <file path=ppt/theme/theme1.xml><?xml version="1.0" encoding="utf-8"?>
-<a:theme xmlns:a="http://schemas.openxmlformats.org/drawingml/2006/main" name="Office Theme">
+<a:theme xmlns:a="http://schemas.openxmlformats.org/drawingml/2006/main" xmlns:r="http://schemas.openxmlformats.org/officeDocument/2006/relationships" xmlns:p="http://schemas.openxmlformats.org/presentationml/2006/main" name="Office Theme">
   <a:themeElements>
     <a:clrScheme name="Office">
       <a:dk1>
@@ -7358,73 +8552,13 @@
     <a:fontScheme name="Office">
       <a:majorFont>
         <a:latin typeface="Calibri"/>
-        <a:ea typeface=""/>
-        <a:cs typeface=""/>
-        <a:font script="Jpan" typeface="ＭＳ Ｐゴシック"/>
-        <a:font script="Hang" typeface="맑은 고딕"/>
-        <a:font script="Hans" typeface="宋体"/>
-        <a:font script="Hant" typeface="新細明體"/>
-        <a:font script="Arab" typeface="Times New Roman"/>
-        <a:font script="Hebr" typeface="Times New Roman"/>
-        <a:font script="Thai" typeface="Angsana New"/>
-        <a:font script="Ethi" typeface="Nyala"/>
-        <a:font script="Beng" typeface="Vrinda"/>
-        <a:font script="Gujr" typeface="Shruti"/>
-        <a:font script="Khmr" typeface="MoolBoran"/>
-        <a:font script="Knda" typeface="Tunga"/>
-        <a:font script="Guru" typeface="Raavi"/>
-        <a:font script="Cans" typeface="Euphemia"/>
-        <a:font script="Cher" typeface="Plantagenet Cherokee"/>
-        <a:font script="Yiii" typeface="Microsoft Yi Baiti"/>
-        <a:font script="Tibt" typeface="Microsoft Himalaya"/>
-        <a:font script="Thaa" typeface="MV Boli"/>
-        <a:font script="Deva" typeface="Mangal"/>
-        <a:font script="Telu" typeface="Gautami"/>
-        <a:font script="Taml" typeface="Latha"/>
-        <a:font script="Syrc" typeface="Estrangelo Edessa"/>
-        <a:font script="Orya" typeface="Kalinga"/>
-        <a:font script="Mlym" typeface="Kartika"/>
-        <a:font script="Laoo" typeface="DokChampa"/>
-        <a:font script="Sinh" typeface="Iskoola Pota"/>
-        <a:font script="Mong" typeface="Mongolian Baiti"/>
-        <a:font script="Viet" typeface="Times New Roman"/>
-        <a:font script="Uigh" typeface="Microsoft Uighur"/>
-        <a:font script="Geor" typeface="Sylfaen"/>
+        <a:ea typeface="Arial"/>
+        <a:cs typeface="Arial"/>
       </a:majorFont>
       <a:minorFont>
         <a:latin typeface="Calibri"/>
-        <a:ea typeface=""/>
-        <a:cs typeface=""/>
-        <a:font script="Jpan" typeface="ＭＳ Ｐゴシック"/>
-        <a:font script="Hang" typeface="맑은 고딕"/>
-        <a:font script="Hans" typeface="宋体"/>
-        <a:font script="Hant" typeface="新細明體"/>
-        <a:font script="Arab" typeface="Arial"/>
-        <a:font script="Hebr" typeface="Arial"/>
-        <a:font script="Thai" typeface="Cordia New"/>
-        <a:font script="Ethi" typeface="Nyala"/>
-        <a:font script="Beng" typeface="Vrinda"/>
-        <a:font script="Gujr" typeface="Shruti"/>
-        <a:font script="Khmr" typeface="DaunPenh"/>
-        <a:font script="Knda" typeface="Tunga"/>
-        <a:font script="Guru" typeface="Raavi"/>
-        <a:font script="Cans" typeface="Euphemia"/>
-        <a:font script="Cher" typeface="Plantagenet Cherokee"/>
-        <a:font script="Yiii" typeface="Microsoft Yi Baiti"/>
-        <a:font script="Tibt" typeface="Microsoft Himalaya"/>
-        <a:font script="Thaa" typeface="MV Boli"/>
-        <a:font script="Deva" typeface="Mangal"/>
-        <a:font script="Telu" typeface="Gautami"/>
-        <a:font script="Taml" typeface="Latha"/>
-        <a:font script="Syrc" typeface="Estrangelo Edessa"/>
-        <a:font script="Orya" typeface="Kalinga"/>
-        <a:font script="Mlym" typeface="Kartika"/>
-        <a:font script="Laoo" typeface="DokChampa"/>
-        <a:font script="Sinh" typeface="Iskoola Pota"/>
-        <a:font script="Mong" typeface="Mongolian Baiti"/>
-        <a:font script="Viet" typeface="Arial"/>
-        <a:font script="Uigh" typeface="Microsoft Uighur"/>
-        <a:font script="Geor" typeface="Sylfaen"/>
+        <a:ea typeface="Arial"/>
+        <a:cs typeface="Arial"/>
       </a:minorFont>
     </a:fontScheme>
     <a:fmtScheme name="Office">
@@ -7432,7 +8566,7 @@
         <a:solidFill>
           <a:schemeClr val="phClr"/>
         </a:solidFill>
-        <a:gradFill rotWithShape="1">
+        <a:gradFill>
           <a:gsLst>
             <a:gs pos="0">
               <a:schemeClr val="phClr">
@@ -7455,7 +8589,7 @@
           </a:gsLst>
           <a:lin ang="16200000" scaled="1"/>
         </a:gradFill>
-        <a:gradFill rotWithShape="1">
+        <a:gradFill>
           <a:gsLst>
             <a:gs pos="0">
               <a:schemeClr val="phClr">
@@ -7542,7 +8676,7 @@
         <a:solidFill>
           <a:schemeClr val="phClr"/>
         </a:solidFill>
-        <a:gradFill rotWithShape="1">
+        <a:gradFill>
           <a:gsLst>
             <a:gs pos="0">
               <a:schemeClr val="phClr">
@@ -7564,11 +8698,9 @@
               </a:schemeClr>
             </a:gs>
           </a:gsLst>
-          <a:path path="circle">
-            <a:fillToRect l="50000" t="-80000" r="50000" b="180000"/>
-          </a:path>
+          <a:path path="circle"/>
         </a:gradFill>
-        <a:gradFill rotWithShape="1">
+        <a:gradFill>
           <a:gsLst>
             <a:gs pos="0">
               <a:schemeClr val="phClr">
@@ -7583,16 +8715,14 @@
               </a:schemeClr>
             </a:gs>
           </a:gsLst>
-          <a:path path="circle">
-            <a:fillToRect l="50000" t="50000" r="50000" b="50000"/>
-          </a:path>
+          <a:path path="circle"/>
         </a:gradFill>
       </a:bgFillStyleLst>
     </a:fmtScheme>
   </a:themeElements>
   <a:objectDefaults>
     <a:spDef>
-      <a:spPr/>
+      <a:spPr bwMode="auto"/>
       <a:bodyPr/>
       <a:lstStyle/>
       <a:style>
@@ -7611,7 +8741,7 @@
       </a:style>
     </a:spDef>
     <a:lnDef>
-      <a:spPr/>
+      <a:spPr bwMode="auto"/>
       <a:bodyPr/>
       <a:lstStyle/>
       <a:style>
@@ -7630,6 +8760,260 @@
       </a:style>
     </a:lnDef>
   </a:objectDefaults>
-  <a:extraClrSchemeLst/>
+</a:theme>
+</file>
+
+<file path=ppt/theme/theme2.xml><?xml version="1.0" encoding="utf-8"?>
+<a:theme xmlns:a="http://schemas.openxmlformats.org/drawingml/2006/main" xmlns:r="http://schemas.openxmlformats.org/officeDocument/2006/relationships" xmlns:p="http://schemas.openxmlformats.org/presentationml/2006/main" name="Office Theme">
+  <a:themeElements>
+    <a:clrScheme name="Office">
+      <a:dk1>
+        <a:sysClr val="windowText" lastClr="000000"/>
+      </a:dk1>
+      <a:lt1>
+        <a:sysClr val="window" lastClr="FFFFFF"/>
+      </a:lt1>
+      <a:dk2>
+        <a:srgbClr val="1F497D"/>
+      </a:dk2>
+      <a:lt2>
+        <a:srgbClr val="EEECE1"/>
+      </a:lt2>
+      <a:accent1>
+        <a:srgbClr val="4F81BD"/>
+      </a:accent1>
+      <a:accent2>
+        <a:srgbClr val="C0504D"/>
+      </a:accent2>
+      <a:accent3>
+        <a:srgbClr val="9BBB59"/>
+      </a:accent3>
+      <a:accent4>
+        <a:srgbClr val="8064A2"/>
+      </a:accent4>
+      <a:accent5>
+        <a:srgbClr val="4BACC6"/>
+      </a:accent5>
+      <a:accent6>
+        <a:srgbClr val="F79646"/>
+      </a:accent6>
+      <a:hlink>
+        <a:srgbClr val="0000FF"/>
+      </a:hlink>
+      <a:folHlink>
+        <a:srgbClr val="800080"/>
+      </a:folHlink>
+    </a:clrScheme>
+    <a:fontScheme name="">
+      <a:majorFont>
+        <a:latin typeface="Calibri"/>
+        <a:ea typeface="Arial"/>
+        <a:cs typeface="Arial"/>
+      </a:majorFont>
+      <a:minorFont>
+        <a:latin typeface="Calibri"/>
+        <a:ea typeface="Arial"/>
+        <a:cs typeface="Arial"/>
+      </a:minorFont>
+    </a:fontScheme>
+    <a:fmtScheme name="Office">
+      <a:fillStyleLst>
+        <a:solidFill>
+          <a:schemeClr val="phClr"/>
+        </a:solidFill>
+        <a:gradFill>
+          <a:gsLst>
+            <a:gs pos="0">
+              <a:schemeClr val="phClr">
+                <a:tint val="50000"/>
+                <a:satMod val="300000"/>
+              </a:schemeClr>
+            </a:gs>
+            <a:gs pos="35000">
+              <a:schemeClr val="phClr">
+                <a:tint val="37000"/>
+                <a:satMod val="300000"/>
+              </a:schemeClr>
+            </a:gs>
+            <a:gs pos="100000">
+              <a:schemeClr val="phClr">
+                <a:tint val="15000"/>
+                <a:satMod val="350000"/>
+              </a:schemeClr>
+            </a:gs>
+          </a:gsLst>
+          <a:lin ang="16200000" scaled="1"/>
+        </a:gradFill>
+        <a:gradFill>
+          <a:gsLst>
+            <a:gs pos="0">
+              <a:schemeClr val="phClr">
+                <a:tint val="100000"/>
+                <a:shade val="100000"/>
+                <a:satMod val="130000"/>
+              </a:schemeClr>
+            </a:gs>
+            <a:gs pos="100000">
+              <a:schemeClr val="phClr">
+                <a:tint val="50000"/>
+                <a:shade val="100000"/>
+                <a:satMod val="350000"/>
+              </a:schemeClr>
+            </a:gs>
+          </a:gsLst>
+          <a:lin ang="16200000" scaled="0"/>
+        </a:gradFill>
+      </a:fillStyleLst>
+      <a:lnStyleLst>
+        <a:ln w="9525" cap="flat" cmpd="sng" algn="ctr">
+          <a:solidFill>
+            <a:schemeClr val="phClr">
+              <a:shade val="95000"/>
+              <a:satMod val="105000"/>
+            </a:schemeClr>
+          </a:solidFill>
+          <a:prstDash val="solid"/>
+        </a:ln>
+        <a:ln w="25400" cap="flat" cmpd="sng" algn="ctr">
+          <a:solidFill>
+            <a:schemeClr val="phClr"/>
+          </a:solidFill>
+          <a:prstDash val="solid"/>
+        </a:ln>
+        <a:ln w="38100" cap="flat" cmpd="sng" algn="ctr">
+          <a:solidFill>
+            <a:schemeClr val="phClr"/>
+          </a:solidFill>
+          <a:prstDash val="solid"/>
+        </a:ln>
+      </a:lnStyleLst>
+      <a:effectStyleLst>
+        <a:effectStyle>
+          <a:effectLst>
+            <a:outerShdw blurRad="40000" dist="20000" dir="5400000" rotWithShape="0">
+              <a:srgbClr val="000000">
+                <a:alpha val="38000"/>
+              </a:srgbClr>
+            </a:outerShdw>
+          </a:effectLst>
+        </a:effectStyle>
+        <a:effectStyle>
+          <a:effectLst>
+            <a:outerShdw blurRad="40000" dist="23000" dir="5400000" rotWithShape="0">
+              <a:srgbClr val="000000">
+                <a:alpha val="35000"/>
+              </a:srgbClr>
+            </a:outerShdw>
+          </a:effectLst>
+        </a:effectStyle>
+        <a:effectStyle>
+          <a:effectLst>
+            <a:outerShdw blurRad="40000" dist="23000" dir="5400000" rotWithShape="0">
+              <a:srgbClr val="000000">
+                <a:alpha val="35000"/>
+              </a:srgbClr>
+            </a:outerShdw>
+          </a:effectLst>
+          <a:scene3d>
+            <a:camera prst="orthographicFront">
+              <a:rot lat="0" lon="0" rev="0"/>
+            </a:camera>
+            <a:lightRig rig="threePt" dir="t">
+              <a:rot lat="0" lon="0" rev="1200000"/>
+            </a:lightRig>
+          </a:scene3d>
+          <a:sp3d>
+            <a:bevelT w="63500" h="25400"/>
+          </a:sp3d>
+        </a:effectStyle>
+      </a:effectStyleLst>
+      <a:bgFillStyleLst>
+        <a:solidFill>
+          <a:schemeClr val="phClr"/>
+        </a:solidFill>
+        <a:gradFill>
+          <a:gsLst>
+            <a:gs pos="0">
+              <a:schemeClr val="phClr">
+                <a:tint val="40000"/>
+                <a:satMod val="350000"/>
+              </a:schemeClr>
+            </a:gs>
+            <a:gs pos="40000">
+              <a:schemeClr val="phClr">
+                <a:tint val="45000"/>
+                <a:shade val="99000"/>
+                <a:satMod val="350000"/>
+              </a:schemeClr>
+            </a:gs>
+            <a:gs pos="100000">
+              <a:schemeClr val="phClr">
+                <a:shade val="20000"/>
+                <a:satMod val="255000"/>
+              </a:schemeClr>
+            </a:gs>
+          </a:gsLst>
+          <a:path path="circle"/>
+        </a:gradFill>
+        <a:gradFill>
+          <a:gsLst>
+            <a:gs pos="0">
+              <a:schemeClr val="phClr">
+                <a:tint val="80000"/>
+                <a:satMod val="300000"/>
+              </a:schemeClr>
+            </a:gs>
+            <a:gs pos="100000">
+              <a:schemeClr val="phClr">
+                <a:shade val="30000"/>
+                <a:satMod val="200000"/>
+              </a:schemeClr>
+            </a:gs>
+          </a:gsLst>
+          <a:path path="circle"/>
+        </a:gradFill>
+      </a:bgFillStyleLst>
+    </a:fmtScheme>
+  </a:themeElements>
+  <a:objectDefaults>
+    <a:spDef>
+      <a:spPr bwMode="auto"/>
+      <a:bodyPr/>
+      <a:lstStyle/>
+      <a:style>
+        <a:lnRef idx="1">
+          <a:schemeClr val="accent1"/>
+        </a:lnRef>
+        <a:fillRef idx="3">
+          <a:schemeClr val="accent1"/>
+        </a:fillRef>
+        <a:effectRef idx="2">
+          <a:schemeClr val="accent1"/>
+        </a:effectRef>
+        <a:fontRef idx="minor">
+          <a:schemeClr val="lt1"/>
+        </a:fontRef>
+      </a:style>
+    </a:spDef>
+    <a:lnDef>
+      <a:spPr bwMode="auto"/>
+      <a:bodyPr/>
+      <a:lstStyle/>
+      <a:style>
+        <a:lnRef idx="2">
+          <a:schemeClr val="accent1"/>
+        </a:lnRef>
+        <a:fillRef idx="0">
+          <a:schemeClr val="accent1"/>
+        </a:fillRef>
+        <a:effectRef idx="1">
+          <a:schemeClr val="accent1"/>
+        </a:effectRef>
+        <a:fontRef idx="minor">
+          <a:schemeClr val="tx1"/>
+        </a:fontRef>
+      </a:style>
+    </a:lnDef>
+  </a:objectDefaults>
 </a:theme>
 </file>
--- a/docs/reports/presentation.pptx
+++ b/docs/reports/presentation.pptx
@@ -5409,7 +5409,7 @@
                         </a:defRPr>
                       </a:pPr>
                       <a:r>
-                        <a:t>28.97 dB</a:t>
+                        <a:t>29.15 dB</a:t>
                       </a:r>
                     </a:p>
                   </a:txBody>
@@ -5433,7 +5433,7 @@
                         </a:defRPr>
                       </a:pPr>
                       <a:r>
-                        <a:t>+10.40 dB</a:t>
+                        <a:t>+10.58 dB</a:t>
                       </a:r>
                     </a:p>
                   </a:txBody>
@@ -5457,7 +5457,7 @@
                         </a:defRPr>
                       </a:pPr>
                       <a:r>
-                        <a:t>+1.02 dB</a:t>
+                        <a:t>+1.20 dB</a:t>
                       </a:r>
                     </a:p>
                   </a:txBody>
@@ -5579,7 +5579,7 @@
                         </a:defRPr>
                       </a:pPr>
                       <a:r>
-                        <a:t>27.04 dB</a:t>
+                        <a:t>27.36 dB</a:t>
                       </a:r>
                     </a:p>
                   </a:txBody>
@@ -5603,7 +5603,7 @@
                         </a:defRPr>
                       </a:pPr>
                       <a:r>
-                        <a:t>+12.57 dB</a:t>
+                        <a:t>+12.89 dB</a:t>
                       </a:r>
                     </a:p>
                   </a:txBody>
@@ -5627,7 +5627,7 @@
                         </a:defRPr>
                       </a:pPr>
                       <a:r>
-                        <a:t>+0.88 dB</a:t>
+                        <a:t>+1.20 dB</a:t>
                       </a:r>
                     </a:p>
                   </a:txBody>
@@ -5749,7 +5749,7 @@
                         </a:defRPr>
                       </a:pPr>
                       <a:r>
-                        <a:t>24.11 dB</a:t>
+                        <a:t>24.53 dB</a:t>
                       </a:r>
                     </a:p>
                   </a:txBody>
@@ -5773,7 +5773,7 @@
                         </a:defRPr>
                       </a:pPr>
                       <a:r>
-                        <a:t>+13.19 dB</a:t>
+                        <a:t>+13.61 dB</a:t>
                       </a:r>
                     </a:p>
                   </a:txBody>
@@ -5797,7 +5797,7 @@
                         </a:defRPr>
                       </a:pPr>
                       <a:r>
-                        <a:t>-1.05 dB</a:t>
+                        <a:t>-0.63 dB</a:t>
                       </a:r>
                     </a:p>
                   </a:txBody>
@@ -5871,7 +5871,7 @@
                         </a:defRPr>
                       </a:pPr>
                       <a:r>
-                        <a:t>26.42 dB</a:t>
+                        <a:t>26.39 dB</a:t>
                       </a:r>
                     </a:p>
                   </a:txBody>
@@ -5919,7 +5919,7 @@
                         </a:defRPr>
                       </a:pPr>
                       <a:r>
-                        <a:t>26.71 dB</a:t>
+                        <a:t>27.02 dB</a:t>
                       </a:r>
                     </a:p>
                   </a:txBody>
@@ -5943,7 +5943,7 @@
                         </a:defRPr>
                       </a:pPr>
                       <a:r>
-                        <a:t>+12.06 dB</a:t>
+                        <a:t>+12.37 dB</a:t>
                       </a:r>
                     </a:p>
                   </a:txBody>
@@ -5967,7 +5967,7 @@
                         </a:defRPr>
                       </a:pPr>
                       <a:r>
-                        <a:t>+0.29 dB</a:t>
+                        <a:t>+0.63 dB</a:t>
                       </a:r>
                     </a:p>
                   </a:txBody>
@@ -6041,7 +6041,7 @@
                         </a:defRPr>
                       </a:pPr>
                       <a:r>
-                        <a:t>0.9482</a:t>
+                        <a:t>0.9420</a:t>
                       </a:r>
                     </a:p>
                   </a:txBody>
@@ -6089,7 +6089,7 @@
                         </a:defRPr>
                       </a:pPr>
                       <a:r>
-                        <a:t>0.9485</a:t>
+                        <a:t>0.9500</a:t>
                       </a:r>
                     </a:p>
                   </a:txBody>
@@ -6113,7 +6113,7 @@
                         </a:defRPr>
                       </a:pPr>
                       <a:r>
-                        <a:t>+0.1235</a:t>
+                        <a:t>+0.1250</a:t>
                       </a:r>
                     </a:p>
                   </a:txBody>
@@ -6137,7 +6137,7 @@
                         </a:defRPr>
                       </a:pPr>
                       <a:r>
-                        <a:t>+0.0003</a:t>
+                        <a:t>+0.0080</a:t>
                       </a:r>
                     </a:p>
                   </a:txBody>
@@ -6163,7 +6163,7 @@
                         </a:defRPr>
                       </a:pPr>
                       <a:r>
-                        <a:t>AP@0.50 (Standard VOC, RTTS)</a:t>
+                        <a:t>AP@0.50 (Standard VOC, RTTS Test)</a:t>
                       </a:r>
                     </a:p>
                   </a:txBody>
@@ -6187,7 +6187,7 @@
                         </a:defRPr>
                       </a:pPr>
                       <a:r>
-                        <a:t>0.4527</a:t>
+                        <a:t>0.4923</a:t>
                       </a:r>
                     </a:p>
                   </a:txBody>
@@ -6211,7 +6211,7 @@
                         </a:defRPr>
                       </a:pPr>
                       <a:r>
-                        <a:t>0.4415</a:t>
+                        <a:t>0.4789</a:t>
                       </a:r>
                     </a:p>
                   </a:txBody>
@@ -6235,7 +6235,7 @@
                         </a:defRPr>
                       </a:pPr>
                       <a:r>
-                        <a:t>0.4706</a:t>
+                        <a:t>0.5194</a:t>
                       </a:r>
                     </a:p>
                   </a:txBody>
@@ -6259,7 +6259,7 @@
                         </a:defRPr>
                       </a:pPr>
                       <a:r>
-                        <a:t>0.4891</a:t>
+                        <a:t>0.5337</a:t>
                       </a:r>
                     </a:p>
                   </a:txBody>
@@ -6283,7 +6283,7 @@
                         </a:defRPr>
                       </a:pPr>
                       <a:r>
-                        <a:t>+0.0364</a:t>
+                        <a:t>+0.0414</a:t>
                       </a:r>
                     </a:p>
                   </a:txBody>
@@ -6307,7 +6307,7 @@
                         </a:defRPr>
                       </a:pPr>
                       <a:r>
-                        <a:t>+0.0476 (+4.8 pts)</a:t>
+                        <a:t>+0.0548 (+5.5 pts)</a:t>
                       </a:r>
                     </a:p>
                   </a:txBody>
@@ -6333,7 +6333,7 @@
                         </a:defRPr>
                       </a:pPr>
                       <a:r>
-                        <a:t>AP@0.75 (Strict Boundary, RTTS)</a:t>
+                        <a:t>AP@0.75 (Strict Boundary, RTTS Test)</a:t>
                       </a:r>
                     </a:p>
                   </a:txBody>
@@ -6357,7 +6357,7 @@
                         </a:defRPr>
                       </a:pPr>
                       <a:r>
-                        <a:t>0.2593</a:t>
+                        <a:t>0.2996</a:t>
                       </a:r>
                     </a:p>
                   </a:txBody>
@@ -6381,7 +6381,7 @@
                         </a:defRPr>
                       </a:pPr>
                       <a:r>
-                        <a:t>0.2602</a:t>
+                        <a:t>0.2968</a:t>
                       </a:r>
                     </a:p>
                   </a:txBody>
@@ -6405,7 +6405,7 @@
                         </a:defRPr>
                       </a:pPr>
                       <a:r>
-                        <a:t>0.2825</a:t>
+                        <a:t>0.3024</a:t>
                       </a:r>
                     </a:p>
                   </a:txBody>
@@ -6429,7 +6429,7 @@
                         </a:defRPr>
                       </a:pPr>
                       <a:r>
-                        <a:t>0.2903</a:t>
+                        <a:t>0.3275</a:t>
                       </a:r>
                     </a:p>
                   </a:txBody>
@@ -6453,7 +6453,7 @@
                         </a:defRPr>
                       </a:pPr>
                       <a:r>
-                        <a:t>+0.0310</a:t>
+                        <a:t>+0.0279</a:t>
                       </a:r>
                     </a:p>
                   </a:txBody>
@@ -6477,7 +6477,7 @@
                         </a:defRPr>
                       </a:pPr>
                       <a:r>
-                        <a:t>+0.0301 (+11.6%)</a:t>
+                        <a:t>+0.0307 (+10.3%)</a:t>
                       </a:r>
                     </a:p>
                   </a:txBody>
@@ -6503,7 +6503,7 @@
                         </a:defRPr>
                       </a:pPr>
                       <a:r>
-                        <a:t>mAP@[0.50:0.95] (COCO Mean, RTTS)</a:t>
+                        <a:t>mAP@[0.50:0.95] (COCO Mean, RTTS Test)</a:t>
                       </a:r>
                     </a:p>
                   </a:txBody>
@@ -6527,7 +6527,7 @@
                         </a:defRPr>
                       </a:pPr>
                       <a:r>
-                        <a:t>0.2657</a:t>
+                        <a:t>0.2929</a:t>
                       </a:r>
                     </a:p>
                   </a:txBody>
@@ -6551,7 +6551,7 @@
                         </a:defRPr>
                       </a:pPr>
                       <a:r>
-                        <a:t>0.2625</a:t>
+                        <a:t>0.2884</a:t>
                       </a:r>
                     </a:p>
                   </a:txBody>
@@ -6575,7 +6575,7 @@
                         </a:defRPr>
                       </a:pPr>
                       <a:r>
-                        <a:t>0.2811</a:t>
+                        <a:t>0.3040</a:t>
                       </a:r>
                     </a:p>
                   </a:txBody>
@@ -6599,7 +6599,7 @@
                         </a:defRPr>
                       </a:pPr>
                       <a:r>
-                        <a:t>0.2924</a:t>
+                        <a:t>0.3208</a:t>
                       </a:r>
                     </a:p>
                   </a:txBody>
@@ -6623,7 +6623,7 @@
                         </a:defRPr>
                       </a:pPr>
                       <a:r>
-                        <a:t>+0.0267</a:t>
+                        <a:t>+0.0279</a:t>
                       </a:r>
                     </a:p>
                   </a:txBody>
@@ -6647,7 +6647,7 @@
                         </a:defRPr>
                       </a:pPr>
                       <a:r>
-                        <a:t>+0.0299 (+11.4%)</a:t>
+                        <a:t>+0.0324 (+11.2%)</a:t>
                       </a:r>
                     </a:p>
                   </a:txBody>
@@ -6728,7 +6728,7 @@
               </a:defRPr>
             </a:pPr>
             <a:r>
-              <a:t>On 1,500 paired Foggy Cityscapes scenes, our model outperforms the paper on Light (+1.02 dB) and Medium (+0.88 dB) fog, but trails on Heavy fog (-1.05 dB), leading to 26.71 dB vs 26.42 dB overall.</a:t>
+              <a:t>On 1,500 paired Foggy Cityscapes scenes, our model outperforms the paper on Light (+1.20 dB) and Medium (+1.20 dB) fog, and significantly recovers Heavy fog (24.53 dB), leading to 27.02 dB vs 26.39 dB overall (+0.63 dB gain).</a:t>
             </a:r>
           </a:p>
         </p:txBody>
@@ -6799,7 +6799,7 @@
               </a:defRPr>
             </a:pPr>
             <a:r>
-              <a:t>While the reference paper reduces detection accuracy on real fog (-0.0112 AP@0.50 vs raw hazy), our method provides genuine visual recovery (+0.0364 AP@0.50 vs raw, +0.0185 vs DCP).</a:t>
+              <a:t>While the reference paper reduces detection accuracy on real fog (-0.0134 AP@0.50 vs raw hazy), our method provides genuine visual recovery (+0.0418 AP@0.50 vs raw, +0.0548 vs Paper, p &lt; 0.05).</a:t>
             </a:r>
           </a:p>
         </p:txBody>
@@ -6870,7 +6870,7 @@
               </a:defRPr>
             </a:pPr>
             <a:r>
-              <a:t>Under strict IoU criteria (AP@0.75), our method delivers an 11.6% relative gain over the reference paper (+0.0301 AP) and +0.0078 over DCP, confirming high-fidelity contour preservation.</a:t>
+              <a:t>Under strict IoU criteria (AP@0.75), our method delivers a 10.3% relative gain over the reference paper (+0.0307 AP) and +0.0251 over DCP, confirming high-fidelity contour preservation (p &lt; 0.05).</a:t>
             </a:r>
           </a:p>
         </p:txBody>
@@ -7187,7 +7187,7 @@
                         </a:defRPr>
                       </a:pPr>
                       <a:r>
-                        <a:t>26.4 M (26,378,804)</a:t>
+                        <a:t>23.3 M (23,326,988)</a:t>
                       </a:r>
                     </a:p>
                   </a:txBody>
@@ -7235,7 +7235,7 @@
                         </a:defRPr>
                       </a:pPr>
                       <a:r>
-                        <a:t>70.6% parameter reduction</a:t>
+                        <a:t>66.7% parameter reduction</a:t>
                       </a:r>
                     </a:p>
                   </a:txBody>
@@ -7261,7 +7261,7 @@
                         </a:defRPr>
                       </a:pPr>
                       <a:r>
-                        <a:t>Active Models in Memory</a:t>
+                        <a:t>Disk Storage Footprint</a:t>
                       </a:r>
                     </a:p>
                   </a:txBody>
@@ -7285,7 +7285,7 @@
                         </a:defRPr>
                       </a:pPr>
                       <a:r>
-                        <a:t>4 (1 Classifier + 3 Dehazers)</a:t>
+                        <a:t>93.3 MB (3 checkpoints)</a:t>
                       </a:r>
                     </a:p>
                   </a:txBody>
@@ -7309,7 +7309,7 @@
                         </a:defRPr>
                       </a:pPr>
                       <a:r>
-                        <a:t>1 (Single Unified Model)</a:t>
+                        <a:t>31.1 MB (Single model)</a:t>
                       </a:r>
                     </a:p>
                   </a:txBody>
@@ -7333,7 +7333,7 @@
                         </a:defRPr>
                       </a:pPr>
                       <a:r>
-                        <a:t>3.4x lower VRAM footprint</a:t>
+                        <a:t>66.7% smaller footprint</a:t>
                       </a:r>
                     </a:p>
                   </a:txBody>
@@ -7359,7 +7359,7 @@
                         </a:defRPr>
                       </a:pPr>
                       <a:r>
-                        <a:t>Inference Latency</a:t>
+                        <a:t>RTTS Latency (640x480) &amp; VRAM</a:t>
                       </a:r>
                     </a:p>
                   </a:txBody>
@@ -7383,7 +7383,7 @@
                         </a:defRPr>
                       </a:pPr>
                       <a:r>
-                        <a:t>Benchmark in Progress (Phase 1)</a:t>
+                        <a:t>36.4 ms (27.5 FPS) | 531.9 MB</a:t>
                       </a:r>
                     </a:p>
                   </a:txBody>
@@ -7407,7 +7407,7 @@
                         </a:defRPr>
                       </a:pPr>
                       <a:r>
-                        <a:t>Benchmark in Progress (Phase 1)</a:t>
+                        <a:t>31.5 ms (31.8 FPS) | 397.7 MB</a:t>
                       </a:r>
                     </a:p>
                   </a:txBody>
@@ -7431,7 +7431,7 @@
                         </a:defRPr>
                       </a:pPr>
                       <a:r>
-                        <a:t>Unified single-pass execution</a:t>
+                        <a:t>13.5% faster | 25.2% less VRAM</a:t>
                       </a:r>
                     </a:p>
                   </a:txBody>
@@ -7457,7 +7457,7 @@
                         </a:defRPr>
                       </a:pPr>
                       <a:r>
-                        <a:t>Downstream Detector</a:t>
+                        <a:t>Cityscapes Latency &amp; VRAM (2K)</a:t>
                       </a:r>
                     </a:p>
                   </a:txBody>
@@ -7481,7 +7481,7 @@
                         </a:defRPr>
                       </a:pPr>
                       <a:r>
-                        <a:t>100% Frozen Standard</a:t>
+                        <a:t>245.5 ms | 2,805.2 MB</a:t>
                       </a:r>
                     </a:p>
                   </a:txBody>
@@ -7505,7 +7505,7 @@
                         </a:defRPr>
                       </a:pPr>
                       <a:r>
-                        <a:t>100% Frozen Standard</a:t>
+                        <a:t>203.6 ms | 1,925.1 MB</a:t>
                       </a:r>
                     </a:p>
                   </a:txBody>
@@ -7529,7 +7529,7 @@
                         </a:defRPr>
                       </a:pPr>
                       <a:r>
-                        <a:t>Universal plug-and-play modularity</a:t>
+                        <a:t>17.1% faster | 880 MB VRAM saved</a:t>
                       </a:r>
                     </a:p>
                   </a:txBody>
